--- a/docs/Responsa.pptx
+++ b/docs/Responsa.pptx
@@ -17,9 +17,14 @@
     <p:sldId id="265" r:id="rId11"/>
     <p:sldId id="266" r:id="rId12"/>
     <p:sldId id="267" r:id="rId13"/>
+    <p:sldId id="268" r:id="rId14"/>
+    <p:sldId id="269" r:id="rId15"/>
+    <p:sldId id="270" r:id="rId16"/>
+    <p:sldId id="271" r:id="rId17"/>
+    <p:sldId id="272" r:id="rId18"/>
   </p:sldIdLst>
   <p:notesMasterIdLst>
-    <p:notesMasterId r:id="rId14"/>
+    <p:notesMasterId r:id="rId19"/>
   </p:notesMasterIdLst>
   <p:sldSz cx="12192000" cy="6858000"/>
   <p:notesSz cx="6858000" cy="12192000"/>
@@ -801,6 +806,446 @@
             <a:fld id="{F7021451-1387-4CA6-816F-3879F97B5CBC}" type="slidenum">
               <a:rPr lang="en-US"/>
               <a:t>12</a:t>
+            </a:fld>
+            <a:endParaRPr lang="en-US"/>
+          </a:p>
+        </p:txBody>
+      </p:sp>
+    </p:spTree>
+    <p:extLst>
+      <p:ext uri="{BB962C8B-B14F-4D97-AF65-F5344CB8AC3E}">
+        <p14:creationId xmlns:p14="http://schemas.microsoft.com/office/powerpoint/2010/main" val="1024086991"/>
+      </p:ext>
+    </p:extLst>
+  </p:cSld>
+  <p:clrMapOvr>
+    <a:masterClrMapping/>
+  </p:clrMapOvr>
+</p:notes>
+</file>
+
+<file path=ppt/notesSlides/notesSlide13.xml><?xml version="1.0" encoding="utf-8"?>
+<p:notes xmlns:a="http://schemas.openxmlformats.org/drawingml/2006/main" xmlns:r="http://schemas.openxmlformats.org/officeDocument/2006/relationships" xmlns:p="http://schemas.openxmlformats.org/presentationml/2006/main">
+  <p:cSld>
+    <p:spTree>
+      <p:nvGrpSpPr>
+        <p:cNvPr id="1" name=""/>
+        <p:cNvGrpSpPr/>
+        <p:nvPr/>
+      </p:nvGrpSpPr>
+      <p:grpSpPr>
+        <a:xfrm>
+          <a:off x="0" y="0"/>
+          <a:ext cx="0" cy="0"/>
+          <a:chOff x="0" y="0"/>
+          <a:chExt cx="0" cy="0"/>
+        </a:xfrm>
+      </p:grpSpPr>
+      <p:sp>
+        <p:nvSpPr>
+          <p:cNvPr id="2" name="Slide Image Placeholder 1"/>
+          <p:cNvSpPr>
+            <a:spLocks noGrp="1" noRot="1" noChangeAspect="1"/>
+          </p:cNvSpPr>
+          <p:nvPr>
+            <p:ph type="sldImg"/>
+          </p:nvPr>
+        </p:nvSpPr>
+        <p:spPr/>
+      </p:sp>
+      <p:sp>
+        <p:nvSpPr>
+          <p:cNvPr id="3" name="Notes Placeholder 2"/>
+          <p:cNvSpPr>
+            <a:spLocks noGrp="1"/>
+          </p:cNvSpPr>
+          <p:nvPr>
+            <p:ph type="body" idx="1"/>
+          </p:nvPr>
+        </p:nvSpPr>
+        <p:spPr/>
+        <p:txBody>
+          <a:bodyPr/>
+          <a:lstStyle/>
+          <a:p>
+            <a:r>
+              <a:rPr lang="en-US" dirty="0"/>
+              <a:t/>
+            </a:r>
+            <a:endParaRPr lang="en-US" dirty="0"/>
+          </a:p>
+        </p:txBody>
+      </p:sp>
+      <p:sp>
+        <p:nvSpPr>
+          <p:cNvPr id="4" name="Slide Number Placeholder 3"/>
+          <p:cNvSpPr>
+            <a:spLocks noGrp="1"/>
+          </p:cNvSpPr>
+          <p:nvPr>
+            <p:ph type="sldNum" sz="quarter" idx="10"/>
+          </p:nvPr>
+        </p:nvSpPr>
+        <p:spPr/>
+        <p:txBody>
+          <a:bodyPr/>
+          <a:lstStyle/>
+          <a:p>
+            <a:fld id="{F7021451-1387-4CA6-816F-3879F97B5CBC}" type="slidenum">
+              <a:rPr lang="en-US"/>
+              <a:t>13</a:t>
+            </a:fld>
+            <a:endParaRPr lang="en-US"/>
+          </a:p>
+        </p:txBody>
+      </p:sp>
+    </p:spTree>
+    <p:extLst>
+      <p:ext uri="{BB962C8B-B14F-4D97-AF65-F5344CB8AC3E}">
+        <p14:creationId xmlns:p14="http://schemas.microsoft.com/office/powerpoint/2010/main" val="1024086991"/>
+      </p:ext>
+    </p:extLst>
+  </p:cSld>
+  <p:clrMapOvr>
+    <a:masterClrMapping/>
+  </p:clrMapOvr>
+</p:notes>
+</file>
+
+<file path=ppt/notesSlides/notesSlide14.xml><?xml version="1.0" encoding="utf-8"?>
+<p:notes xmlns:a="http://schemas.openxmlformats.org/drawingml/2006/main" xmlns:r="http://schemas.openxmlformats.org/officeDocument/2006/relationships" xmlns:p="http://schemas.openxmlformats.org/presentationml/2006/main">
+  <p:cSld>
+    <p:spTree>
+      <p:nvGrpSpPr>
+        <p:cNvPr id="1" name=""/>
+        <p:cNvGrpSpPr/>
+        <p:nvPr/>
+      </p:nvGrpSpPr>
+      <p:grpSpPr>
+        <a:xfrm>
+          <a:off x="0" y="0"/>
+          <a:ext cx="0" cy="0"/>
+          <a:chOff x="0" y="0"/>
+          <a:chExt cx="0" cy="0"/>
+        </a:xfrm>
+      </p:grpSpPr>
+      <p:sp>
+        <p:nvSpPr>
+          <p:cNvPr id="2" name="Slide Image Placeholder 1"/>
+          <p:cNvSpPr>
+            <a:spLocks noGrp="1" noRot="1" noChangeAspect="1"/>
+          </p:cNvSpPr>
+          <p:nvPr>
+            <p:ph type="sldImg"/>
+          </p:nvPr>
+        </p:nvSpPr>
+        <p:spPr/>
+      </p:sp>
+      <p:sp>
+        <p:nvSpPr>
+          <p:cNvPr id="3" name="Notes Placeholder 2"/>
+          <p:cNvSpPr>
+            <a:spLocks noGrp="1"/>
+          </p:cNvSpPr>
+          <p:nvPr>
+            <p:ph type="body" idx="1"/>
+          </p:nvPr>
+        </p:nvSpPr>
+        <p:spPr/>
+        <p:txBody>
+          <a:bodyPr/>
+          <a:lstStyle/>
+          <a:p>
+            <a:r>
+              <a:rPr lang="en-US" dirty="0"/>
+              <a:t/>
+            </a:r>
+            <a:endParaRPr lang="en-US" dirty="0"/>
+          </a:p>
+        </p:txBody>
+      </p:sp>
+      <p:sp>
+        <p:nvSpPr>
+          <p:cNvPr id="4" name="Slide Number Placeholder 3"/>
+          <p:cNvSpPr>
+            <a:spLocks noGrp="1"/>
+          </p:cNvSpPr>
+          <p:nvPr>
+            <p:ph type="sldNum" sz="quarter" idx="10"/>
+          </p:nvPr>
+        </p:nvSpPr>
+        <p:spPr/>
+        <p:txBody>
+          <a:bodyPr/>
+          <a:lstStyle/>
+          <a:p>
+            <a:fld id="{F7021451-1387-4CA6-816F-3879F97B5CBC}" type="slidenum">
+              <a:rPr lang="en-US"/>
+              <a:t>14</a:t>
+            </a:fld>
+            <a:endParaRPr lang="en-US"/>
+          </a:p>
+        </p:txBody>
+      </p:sp>
+    </p:spTree>
+    <p:extLst>
+      <p:ext uri="{BB962C8B-B14F-4D97-AF65-F5344CB8AC3E}">
+        <p14:creationId xmlns:p14="http://schemas.microsoft.com/office/powerpoint/2010/main" val="1024086991"/>
+      </p:ext>
+    </p:extLst>
+  </p:cSld>
+  <p:clrMapOvr>
+    <a:masterClrMapping/>
+  </p:clrMapOvr>
+</p:notes>
+</file>
+
+<file path=ppt/notesSlides/notesSlide15.xml><?xml version="1.0" encoding="utf-8"?>
+<p:notes xmlns:a="http://schemas.openxmlformats.org/drawingml/2006/main" xmlns:r="http://schemas.openxmlformats.org/officeDocument/2006/relationships" xmlns:p="http://schemas.openxmlformats.org/presentationml/2006/main">
+  <p:cSld>
+    <p:spTree>
+      <p:nvGrpSpPr>
+        <p:cNvPr id="1" name=""/>
+        <p:cNvGrpSpPr/>
+        <p:nvPr/>
+      </p:nvGrpSpPr>
+      <p:grpSpPr>
+        <a:xfrm>
+          <a:off x="0" y="0"/>
+          <a:ext cx="0" cy="0"/>
+          <a:chOff x="0" y="0"/>
+          <a:chExt cx="0" cy="0"/>
+        </a:xfrm>
+      </p:grpSpPr>
+      <p:sp>
+        <p:nvSpPr>
+          <p:cNvPr id="2" name="Slide Image Placeholder 1"/>
+          <p:cNvSpPr>
+            <a:spLocks noGrp="1" noRot="1" noChangeAspect="1"/>
+          </p:cNvSpPr>
+          <p:nvPr>
+            <p:ph type="sldImg"/>
+          </p:nvPr>
+        </p:nvSpPr>
+        <p:spPr/>
+      </p:sp>
+      <p:sp>
+        <p:nvSpPr>
+          <p:cNvPr id="3" name="Notes Placeholder 2"/>
+          <p:cNvSpPr>
+            <a:spLocks noGrp="1"/>
+          </p:cNvSpPr>
+          <p:nvPr>
+            <p:ph type="body" idx="1"/>
+          </p:nvPr>
+        </p:nvSpPr>
+        <p:spPr/>
+        <p:txBody>
+          <a:bodyPr/>
+          <a:lstStyle/>
+          <a:p>
+            <a:r>
+              <a:rPr lang="en-US" dirty="0"/>
+              <a:t/>
+            </a:r>
+            <a:endParaRPr lang="en-US" dirty="0"/>
+          </a:p>
+        </p:txBody>
+      </p:sp>
+      <p:sp>
+        <p:nvSpPr>
+          <p:cNvPr id="4" name="Slide Number Placeholder 3"/>
+          <p:cNvSpPr>
+            <a:spLocks noGrp="1"/>
+          </p:cNvSpPr>
+          <p:nvPr>
+            <p:ph type="sldNum" sz="quarter" idx="10"/>
+          </p:nvPr>
+        </p:nvSpPr>
+        <p:spPr/>
+        <p:txBody>
+          <a:bodyPr/>
+          <a:lstStyle/>
+          <a:p>
+            <a:fld id="{F7021451-1387-4CA6-816F-3879F97B5CBC}" type="slidenum">
+              <a:rPr lang="en-US"/>
+              <a:t>15</a:t>
+            </a:fld>
+            <a:endParaRPr lang="en-US"/>
+          </a:p>
+        </p:txBody>
+      </p:sp>
+    </p:spTree>
+    <p:extLst>
+      <p:ext uri="{BB962C8B-B14F-4D97-AF65-F5344CB8AC3E}">
+        <p14:creationId xmlns:p14="http://schemas.microsoft.com/office/powerpoint/2010/main" val="1024086991"/>
+      </p:ext>
+    </p:extLst>
+  </p:cSld>
+  <p:clrMapOvr>
+    <a:masterClrMapping/>
+  </p:clrMapOvr>
+</p:notes>
+</file>
+
+<file path=ppt/notesSlides/notesSlide16.xml><?xml version="1.0" encoding="utf-8"?>
+<p:notes xmlns:a="http://schemas.openxmlformats.org/drawingml/2006/main" xmlns:r="http://schemas.openxmlformats.org/officeDocument/2006/relationships" xmlns:p="http://schemas.openxmlformats.org/presentationml/2006/main">
+  <p:cSld>
+    <p:spTree>
+      <p:nvGrpSpPr>
+        <p:cNvPr id="1" name=""/>
+        <p:cNvGrpSpPr/>
+        <p:nvPr/>
+      </p:nvGrpSpPr>
+      <p:grpSpPr>
+        <a:xfrm>
+          <a:off x="0" y="0"/>
+          <a:ext cx="0" cy="0"/>
+          <a:chOff x="0" y="0"/>
+          <a:chExt cx="0" cy="0"/>
+        </a:xfrm>
+      </p:grpSpPr>
+      <p:sp>
+        <p:nvSpPr>
+          <p:cNvPr id="2" name="Slide Image Placeholder 1"/>
+          <p:cNvSpPr>
+            <a:spLocks noGrp="1" noRot="1" noChangeAspect="1"/>
+          </p:cNvSpPr>
+          <p:nvPr>
+            <p:ph type="sldImg"/>
+          </p:nvPr>
+        </p:nvSpPr>
+        <p:spPr/>
+      </p:sp>
+      <p:sp>
+        <p:nvSpPr>
+          <p:cNvPr id="3" name="Notes Placeholder 2"/>
+          <p:cNvSpPr>
+            <a:spLocks noGrp="1"/>
+          </p:cNvSpPr>
+          <p:nvPr>
+            <p:ph type="body" idx="1"/>
+          </p:nvPr>
+        </p:nvSpPr>
+        <p:spPr/>
+        <p:txBody>
+          <a:bodyPr/>
+          <a:lstStyle/>
+          <a:p>
+            <a:r>
+              <a:rPr lang="en-US" dirty="0"/>
+              <a:t/>
+            </a:r>
+            <a:endParaRPr lang="en-US" dirty="0"/>
+          </a:p>
+        </p:txBody>
+      </p:sp>
+      <p:sp>
+        <p:nvSpPr>
+          <p:cNvPr id="4" name="Slide Number Placeholder 3"/>
+          <p:cNvSpPr>
+            <a:spLocks noGrp="1"/>
+          </p:cNvSpPr>
+          <p:nvPr>
+            <p:ph type="sldNum" sz="quarter" idx="10"/>
+          </p:nvPr>
+        </p:nvSpPr>
+        <p:spPr/>
+        <p:txBody>
+          <a:bodyPr/>
+          <a:lstStyle/>
+          <a:p>
+            <a:fld id="{F7021451-1387-4CA6-816F-3879F97B5CBC}" type="slidenum">
+              <a:rPr lang="en-US"/>
+              <a:t>16</a:t>
+            </a:fld>
+            <a:endParaRPr lang="en-US"/>
+          </a:p>
+        </p:txBody>
+      </p:sp>
+    </p:spTree>
+    <p:extLst>
+      <p:ext uri="{BB962C8B-B14F-4D97-AF65-F5344CB8AC3E}">
+        <p14:creationId xmlns:p14="http://schemas.microsoft.com/office/powerpoint/2010/main" val="1024086991"/>
+      </p:ext>
+    </p:extLst>
+  </p:cSld>
+  <p:clrMapOvr>
+    <a:masterClrMapping/>
+  </p:clrMapOvr>
+</p:notes>
+</file>
+
+<file path=ppt/notesSlides/notesSlide17.xml><?xml version="1.0" encoding="utf-8"?>
+<p:notes xmlns:a="http://schemas.openxmlformats.org/drawingml/2006/main" xmlns:r="http://schemas.openxmlformats.org/officeDocument/2006/relationships" xmlns:p="http://schemas.openxmlformats.org/presentationml/2006/main">
+  <p:cSld>
+    <p:spTree>
+      <p:nvGrpSpPr>
+        <p:cNvPr id="1" name=""/>
+        <p:cNvGrpSpPr/>
+        <p:nvPr/>
+      </p:nvGrpSpPr>
+      <p:grpSpPr>
+        <a:xfrm>
+          <a:off x="0" y="0"/>
+          <a:ext cx="0" cy="0"/>
+          <a:chOff x="0" y="0"/>
+          <a:chExt cx="0" cy="0"/>
+        </a:xfrm>
+      </p:grpSpPr>
+      <p:sp>
+        <p:nvSpPr>
+          <p:cNvPr id="2" name="Slide Image Placeholder 1"/>
+          <p:cNvSpPr>
+            <a:spLocks noGrp="1" noRot="1" noChangeAspect="1"/>
+          </p:cNvSpPr>
+          <p:nvPr>
+            <p:ph type="sldImg"/>
+          </p:nvPr>
+        </p:nvSpPr>
+        <p:spPr/>
+      </p:sp>
+      <p:sp>
+        <p:nvSpPr>
+          <p:cNvPr id="3" name="Notes Placeholder 2"/>
+          <p:cNvSpPr>
+            <a:spLocks noGrp="1"/>
+          </p:cNvSpPr>
+          <p:nvPr>
+            <p:ph type="body" idx="1"/>
+          </p:nvPr>
+        </p:nvSpPr>
+        <p:spPr/>
+        <p:txBody>
+          <a:bodyPr/>
+          <a:lstStyle/>
+          <a:p>
+            <a:r>
+              <a:rPr lang="en-US" dirty="0"/>
+              <a:t/>
+            </a:r>
+            <a:endParaRPr lang="en-US" dirty="0"/>
+          </a:p>
+        </p:txBody>
+      </p:sp>
+      <p:sp>
+        <p:nvSpPr>
+          <p:cNvPr id="4" name="Slide Number Placeholder 3"/>
+          <p:cNvSpPr>
+            <a:spLocks noGrp="1"/>
+          </p:cNvSpPr>
+          <p:nvPr>
+            <p:ph type="sldNum" sz="quarter" idx="10"/>
+          </p:nvPr>
+        </p:nvSpPr>
+        <p:spPr/>
+        <p:txBody>
+          <a:bodyPr/>
+          <a:lstStyle/>
+          <a:p>
+            <a:fld id="{F7021451-1387-4CA6-816F-3879F97B5CBC}" type="slidenum">
+              <a:rPr lang="en-US"/>
+              <a:t>17</a:t>
             </a:fld>
             <a:endParaRPr lang="en-US"/>
           </a:p>
@@ -2161,6 +2606,991 @@
     <p:bg>
       <p:bgPr>
         <a:solidFill>
+          <a:srgbClr val="1B2230"/>
+        </a:solidFill>
+      </p:bgPr>
+    </p:bg>
+    <p:spTree>
+      <p:nvGrpSpPr>
+        <p:cNvPr id="1" name=""/>
+        <p:cNvGrpSpPr/>
+        <p:nvPr/>
+      </p:nvGrpSpPr>
+      <p:grpSpPr>
+        <a:xfrm>
+          <a:off x="0" y="0"/>
+          <a:ext cx="0" cy="0"/>
+          <a:chOff x="0" y="0"/>
+          <a:chExt cx="0" cy="0"/>
+        </a:xfrm>
+      </p:grpSpPr>
+      <p:sp>
+        <p:nvSpPr>
+          <p:cNvPr id="2" name="Text 0"/>
+          <p:cNvSpPr/>
+          <p:nvPr/>
+        </p:nvSpPr>
+        <p:spPr>
+          <a:xfrm>
+            <a:off x="777240" y="2286000"/>
+            <a:ext cx="6766560" cy="777240"/>
+          </a:xfrm>
+          <a:prstGeom prst="rect">
+            <a:avLst/>
+          </a:prstGeom>
+          <a:noFill/>
+          <a:ln/>
+        </p:spPr>
+        <p:txBody>
+          <a:bodyPr wrap="square" lIns="0" tIns="0" rIns="0" bIns="0" rtlCol="0" anchor="ctr"/>
+          <a:lstStyle/>
+          <a:p>
+            <a:pPr indent="0" marL="0">
+              <a:buNone/>
+            </a:pPr>
+            <a:r>
+              <a:rPr lang="en-US" sz="4400" b="1" dirty="0">
+                <a:solidFill>
+                  <a:srgbClr val="FFFFFF"/>
+                </a:solidFill>
+                <a:latin typeface="Cambria" pitchFamily="34" charset="0"/>
+                <a:ea typeface="Cambria" pitchFamily="34" charset="-122"/>
+                <a:cs typeface="Cambria" pitchFamily="34" charset="-120"/>
+              </a:rPr>
+              <a:t>Manual de instalación</a:t>
+            </a:r>
+            <a:endParaRPr lang="en-US" sz="4400" dirty="0"/>
+          </a:p>
+        </p:txBody>
+      </p:sp>
+      <p:sp>
+        <p:nvSpPr>
+          <p:cNvPr id="3" name="Text 1"/>
+          <p:cNvSpPr/>
+          <p:nvPr/>
+        </p:nvSpPr>
+        <p:spPr>
+          <a:xfrm>
+            <a:off x="777240" y="3127248"/>
+            <a:ext cx="6766560" cy="365760"/>
+          </a:xfrm>
+          <a:prstGeom prst="rect">
+            <a:avLst/>
+          </a:prstGeom>
+          <a:noFill/>
+          <a:ln/>
+        </p:spPr>
+        <p:txBody>
+          <a:bodyPr wrap="square" lIns="0" tIns="0" rIns="0" bIns="0" rtlCol="0" anchor="t"/>
+          <a:lstStyle/>
+          <a:p>
+            <a:pPr indent="0" marL="0">
+              <a:buNone/>
+            </a:pPr>
+            <a:r>
+              <a:rPr lang="en-US" sz="1400" dirty="0">
+                <a:solidFill>
+                  <a:srgbClr val="C9A574"/>
+                </a:solidFill>
+                <a:latin typeface="Calibri" pitchFamily="34" charset="0"/>
+                <a:ea typeface="Calibri" pitchFamily="34" charset="-122"/>
+                <a:cs typeface="Calibri" pitchFamily="34" charset="-120"/>
+              </a:rPr>
+              <a:t>Windows y macOS · unos quince minutos, casi todo esperando descargas</a:t>
+            </a:r>
+            <a:endParaRPr lang="en-US" sz="1400" dirty="0"/>
+          </a:p>
+        </p:txBody>
+      </p:sp>
+      <p:sp>
+        <p:nvSpPr>
+          <p:cNvPr id="4" name="Text 2"/>
+          <p:cNvSpPr/>
+          <p:nvPr/>
+        </p:nvSpPr>
+        <p:spPr>
+          <a:xfrm>
+            <a:off x="777240" y="3611880"/>
+            <a:ext cx="6583680" cy="548640"/>
+          </a:xfrm>
+          <a:prstGeom prst="rect">
+            <a:avLst/>
+          </a:prstGeom>
+          <a:noFill/>
+          <a:ln/>
+        </p:spPr>
+        <p:txBody>
+          <a:bodyPr wrap="square" lIns="0" tIns="0" rIns="0" bIns="0" rtlCol="0" anchor="t"/>
+          <a:lstStyle/>
+          <a:p>
+            <a:pPr indent="0" marL="0">
+              <a:buNone/>
+            </a:pPr>
+            <a:r>
+              <a:rPr lang="en-US" sz="1200" i="1" dirty="0">
+                <a:solidFill>
+                  <a:srgbClr val="8A93A5"/>
+                </a:solidFill>
+                <a:latin typeface="Calibri" pitchFamily="34" charset="0"/>
+                <a:ea typeface="Calibri" pitchFamily="34" charset="-122"/>
+                <a:cs typeface="Calibri" pitchFamily="34" charset="-120"/>
+              </a:rPr>
+              <a:t>Escrito para quien no programa. Si algún paso da por sabido algo, es un error de esta guía y conviene avisarlo.</a:t>
+            </a:r>
+            <a:endParaRPr lang="en-US" sz="1200" dirty="0"/>
+          </a:p>
+        </p:txBody>
+      </p:sp>
+      <p:sp>
+        <p:nvSpPr>
+          <p:cNvPr id="5" name="Shape 3"/>
+          <p:cNvSpPr/>
+          <p:nvPr/>
+        </p:nvSpPr>
+        <p:spPr>
+          <a:xfrm>
+            <a:off x="777240" y="4617720"/>
+            <a:ext cx="310896" cy="310896"/>
+          </a:xfrm>
+          <a:prstGeom prst="ellipse">
+            <a:avLst/>
+          </a:prstGeom>
+          <a:solidFill>
+            <a:srgbClr val="A87C4F"/>
+          </a:solidFill>
+          <a:ln/>
+        </p:spPr>
+      </p:sp>
+      <p:sp>
+        <p:nvSpPr>
+          <p:cNvPr id="6" name="Text 4"/>
+          <p:cNvSpPr/>
+          <p:nvPr/>
+        </p:nvSpPr>
+        <p:spPr>
+          <a:xfrm>
+            <a:off x="777240" y="4617720"/>
+            <a:ext cx="310896" cy="310896"/>
+          </a:xfrm>
+          <a:prstGeom prst="rect">
+            <a:avLst/>
+          </a:prstGeom>
+          <a:noFill/>
+          <a:ln/>
+        </p:spPr>
+        <p:txBody>
+          <a:bodyPr wrap="square" lIns="0" tIns="0" rIns="0" bIns="0" rtlCol="0" anchor="ctr"/>
+          <a:lstStyle/>
+          <a:p>
+            <a:pPr algn="ctr" indent="0" marL="0">
+              <a:buNone/>
+            </a:pPr>
+            <a:r>
+              <a:rPr lang="en-US" sz="1200" b="1" dirty="0">
+                <a:solidFill>
+                  <a:srgbClr val="FFFFFF"/>
+                </a:solidFill>
+                <a:latin typeface="Calibri" pitchFamily="34" charset="0"/>
+                <a:ea typeface="Calibri" pitchFamily="34" charset="-122"/>
+                <a:cs typeface="Calibri" pitchFamily="34" charset="-120"/>
+              </a:rPr>
+              <a:t>1</a:t>
+            </a:r>
+            <a:endParaRPr lang="en-US" sz="1200" dirty="0"/>
+          </a:p>
+        </p:txBody>
+      </p:sp>
+      <p:sp>
+        <p:nvSpPr>
+          <p:cNvPr id="7" name="Text 5"/>
+          <p:cNvSpPr/>
+          <p:nvPr/>
+        </p:nvSpPr>
+        <p:spPr>
+          <a:xfrm>
+            <a:off x="1197864" y="4636008"/>
+            <a:ext cx="1874520" cy="274320"/>
+          </a:xfrm>
+          <a:prstGeom prst="rect">
+            <a:avLst/>
+          </a:prstGeom>
+          <a:noFill/>
+          <a:ln/>
+        </p:spPr>
+        <p:txBody>
+          <a:bodyPr wrap="square" lIns="0" tIns="0" rIns="0" bIns="0" rtlCol="0" anchor="t"/>
+          <a:lstStyle/>
+          <a:p>
+            <a:pPr indent="0" marL="0">
+              <a:buNone/>
+            </a:pPr>
+            <a:r>
+              <a:rPr lang="en-US" sz="1150" dirty="0">
+                <a:solidFill>
+                  <a:srgbClr val="FFFFFF"/>
+                </a:solidFill>
+                <a:latin typeface="Calibri" pitchFamily="34" charset="0"/>
+                <a:ea typeface="Calibri" pitchFamily="34" charset="-122"/>
+                <a:cs typeface="Calibri" pitchFamily="34" charset="-120"/>
+              </a:rPr>
+              <a:t>Instalar Node.js</a:t>
+            </a:r>
+            <a:endParaRPr lang="en-US" sz="1150" dirty="0"/>
+          </a:p>
+        </p:txBody>
+      </p:sp>
+      <p:sp>
+        <p:nvSpPr>
+          <p:cNvPr id="8" name="Shape 6"/>
+          <p:cNvSpPr/>
+          <p:nvPr/>
+        </p:nvSpPr>
+        <p:spPr>
+          <a:xfrm>
+            <a:off x="3108960" y="4617720"/>
+            <a:ext cx="310896" cy="310896"/>
+          </a:xfrm>
+          <a:prstGeom prst="ellipse">
+            <a:avLst/>
+          </a:prstGeom>
+          <a:solidFill>
+            <a:srgbClr val="A87C4F"/>
+          </a:solidFill>
+          <a:ln/>
+        </p:spPr>
+      </p:sp>
+      <p:sp>
+        <p:nvSpPr>
+          <p:cNvPr id="9" name="Text 7"/>
+          <p:cNvSpPr/>
+          <p:nvPr/>
+        </p:nvSpPr>
+        <p:spPr>
+          <a:xfrm>
+            <a:off x="3108960" y="4617720"/>
+            <a:ext cx="310896" cy="310896"/>
+          </a:xfrm>
+          <a:prstGeom prst="rect">
+            <a:avLst/>
+          </a:prstGeom>
+          <a:noFill/>
+          <a:ln/>
+        </p:spPr>
+        <p:txBody>
+          <a:bodyPr wrap="square" lIns="0" tIns="0" rIns="0" bIns="0" rtlCol="0" anchor="ctr"/>
+          <a:lstStyle/>
+          <a:p>
+            <a:pPr algn="ctr" indent="0" marL="0">
+              <a:buNone/>
+            </a:pPr>
+            <a:r>
+              <a:rPr lang="en-US" sz="1200" b="1" dirty="0">
+                <a:solidFill>
+                  <a:srgbClr val="FFFFFF"/>
+                </a:solidFill>
+                <a:latin typeface="Calibri" pitchFamily="34" charset="0"/>
+                <a:ea typeface="Calibri" pitchFamily="34" charset="-122"/>
+                <a:cs typeface="Calibri" pitchFamily="34" charset="-120"/>
+              </a:rPr>
+              <a:t>2</a:t>
+            </a:r>
+            <a:endParaRPr lang="en-US" sz="1200" dirty="0"/>
+          </a:p>
+        </p:txBody>
+      </p:sp>
+      <p:sp>
+        <p:nvSpPr>
+          <p:cNvPr id="10" name="Text 8"/>
+          <p:cNvSpPr/>
+          <p:nvPr/>
+        </p:nvSpPr>
+        <p:spPr>
+          <a:xfrm>
+            <a:off x="3529584" y="4636008"/>
+            <a:ext cx="1874520" cy="274320"/>
+          </a:xfrm>
+          <a:prstGeom prst="rect">
+            <a:avLst/>
+          </a:prstGeom>
+          <a:noFill/>
+          <a:ln/>
+        </p:spPr>
+        <p:txBody>
+          <a:bodyPr wrap="square" lIns="0" tIns="0" rIns="0" bIns="0" rtlCol="0" anchor="t"/>
+          <a:lstStyle/>
+          <a:p>
+            <a:pPr indent="0" marL="0">
+              <a:buNone/>
+            </a:pPr>
+            <a:r>
+              <a:rPr lang="en-US" sz="1150" dirty="0">
+                <a:solidFill>
+                  <a:srgbClr val="FFFFFF"/>
+                </a:solidFill>
+                <a:latin typeface="Calibri" pitchFamily="34" charset="0"/>
+                <a:ea typeface="Calibri" pitchFamily="34" charset="-122"/>
+                <a:cs typeface="Calibri" pitchFamily="34" charset="-120"/>
+              </a:rPr>
+              <a:t>Descargar Responsa</a:t>
+            </a:r>
+            <a:endParaRPr lang="en-US" sz="1150" dirty="0"/>
+          </a:p>
+        </p:txBody>
+      </p:sp>
+      <p:sp>
+        <p:nvSpPr>
+          <p:cNvPr id="11" name="Shape 9"/>
+          <p:cNvSpPr/>
+          <p:nvPr/>
+        </p:nvSpPr>
+        <p:spPr>
+          <a:xfrm>
+            <a:off x="5440680" y="4617720"/>
+            <a:ext cx="310896" cy="310896"/>
+          </a:xfrm>
+          <a:prstGeom prst="ellipse">
+            <a:avLst/>
+          </a:prstGeom>
+          <a:solidFill>
+            <a:srgbClr val="A87C4F"/>
+          </a:solidFill>
+          <a:ln/>
+        </p:spPr>
+      </p:sp>
+      <p:sp>
+        <p:nvSpPr>
+          <p:cNvPr id="12" name="Text 10"/>
+          <p:cNvSpPr/>
+          <p:nvPr/>
+        </p:nvSpPr>
+        <p:spPr>
+          <a:xfrm>
+            <a:off x="5440680" y="4617720"/>
+            <a:ext cx="310896" cy="310896"/>
+          </a:xfrm>
+          <a:prstGeom prst="rect">
+            <a:avLst/>
+          </a:prstGeom>
+          <a:noFill/>
+          <a:ln/>
+        </p:spPr>
+        <p:txBody>
+          <a:bodyPr wrap="square" lIns="0" tIns="0" rIns="0" bIns="0" rtlCol="0" anchor="ctr"/>
+          <a:lstStyle/>
+          <a:p>
+            <a:pPr algn="ctr" indent="0" marL="0">
+              <a:buNone/>
+            </a:pPr>
+            <a:r>
+              <a:rPr lang="en-US" sz="1200" b="1" dirty="0">
+                <a:solidFill>
+                  <a:srgbClr val="FFFFFF"/>
+                </a:solidFill>
+                <a:latin typeface="Calibri" pitchFamily="34" charset="0"/>
+                <a:ea typeface="Calibri" pitchFamily="34" charset="-122"/>
+                <a:cs typeface="Calibri" pitchFamily="34" charset="-120"/>
+              </a:rPr>
+              <a:t>3</a:t>
+            </a:r>
+            <a:endParaRPr lang="en-US" sz="1200" dirty="0"/>
+          </a:p>
+        </p:txBody>
+      </p:sp>
+      <p:sp>
+        <p:nvSpPr>
+          <p:cNvPr id="13" name="Text 11"/>
+          <p:cNvSpPr/>
+          <p:nvPr/>
+        </p:nvSpPr>
+        <p:spPr>
+          <a:xfrm>
+            <a:off x="5861304" y="4636008"/>
+            <a:ext cx="1874520" cy="274320"/>
+          </a:xfrm>
+          <a:prstGeom prst="rect">
+            <a:avLst/>
+          </a:prstGeom>
+          <a:noFill/>
+          <a:ln/>
+        </p:spPr>
+        <p:txBody>
+          <a:bodyPr wrap="square" lIns="0" tIns="0" rIns="0" bIns="0" rtlCol="0" anchor="t"/>
+          <a:lstStyle/>
+          <a:p>
+            <a:pPr indent="0" marL="0">
+              <a:buNone/>
+            </a:pPr>
+            <a:r>
+              <a:rPr lang="en-US" sz="1150" dirty="0">
+                <a:solidFill>
+                  <a:srgbClr val="FFFFFF"/>
+                </a:solidFill>
+                <a:latin typeface="Calibri" pitchFamily="34" charset="0"/>
+                <a:ea typeface="Calibri" pitchFamily="34" charset="-122"/>
+                <a:cs typeface="Calibri" pitchFamily="34" charset="-120"/>
+              </a:rPr>
+              <a:t>Ejecutar el instalador</a:t>
+            </a:r>
+            <a:endParaRPr lang="en-US" sz="1150" dirty="0"/>
+          </a:p>
+        </p:txBody>
+      </p:sp>
+      <p:sp>
+        <p:nvSpPr>
+          <p:cNvPr id="14" name="Shape 12"/>
+          <p:cNvSpPr/>
+          <p:nvPr/>
+        </p:nvSpPr>
+        <p:spPr>
+          <a:xfrm>
+            <a:off x="777240" y="5184648"/>
+            <a:ext cx="310896" cy="310896"/>
+          </a:xfrm>
+          <a:prstGeom prst="ellipse">
+            <a:avLst/>
+          </a:prstGeom>
+          <a:solidFill>
+            <a:srgbClr val="A87C4F"/>
+          </a:solidFill>
+          <a:ln/>
+        </p:spPr>
+      </p:sp>
+      <p:sp>
+        <p:nvSpPr>
+          <p:cNvPr id="15" name="Text 13"/>
+          <p:cNvSpPr/>
+          <p:nvPr/>
+        </p:nvSpPr>
+        <p:spPr>
+          <a:xfrm>
+            <a:off x="777240" y="5184648"/>
+            <a:ext cx="310896" cy="310896"/>
+          </a:xfrm>
+          <a:prstGeom prst="rect">
+            <a:avLst/>
+          </a:prstGeom>
+          <a:noFill/>
+          <a:ln/>
+        </p:spPr>
+        <p:txBody>
+          <a:bodyPr wrap="square" lIns="0" tIns="0" rIns="0" bIns="0" rtlCol="0" anchor="ctr"/>
+          <a:lstStyle/>
+          <a:p>
+            <a:pPr algn="ctr" indent="0" marL="0">
+              <a:buNone/>
+            </a:pPr>
+            <a:r>
+              <a:rPr lang="en-US" sz="1200" b="1" dirty="0">
+                <a:solidFill>
+                  <a:srgbClr val="FFFFFF"/>
+                </a:solidFill>
+                <a:latin typeface="Calibri" pitchFamily="34" charset="0"/>
+                <a:ea typeface="Calibri" pitchFamily="34" charset="-122"/>
+                <a:cs typeface="Calibri" pitchFamily="34" charset="-120"/>
+              </a:rPr>
+              <a:t>4</a:t>
+            </a:r>
+            <a:endParaRPr lang="en-US" sz="1200" dirty="0"/>
+          </a:p>
+        </p:txBody>
+      </p:sp>
+      <p:sp>
+        <p:nvSpPr>
+          <p:cNvPr id="16" name="Text 14"/>
+          <p:cNvSpPr/>
+          <p:nvPr/>
+        </p:nvSpPr>
+        <p:spPr>
+          <a:xfrm>
+            <a:off x="1197864" y="5202936"/>
+            <a:ext cx="1874520" cy="274320"/>
+          </a:xfrm>
+          <a:prstGeom prst="rect">
+            <a:avLst/>
+          </a:prstGeom>
+          <a:noFill/>
+          <a:ln/>
+        </p:spPr>
+        <p:txBody>
+          <a:bodyPr wrap="square" lIns="0" tIns="0" rIns="0" bIns="0" rtlCol="0" anchor="t"/>
+          <a:lstStyle/>
+          <a:p>
+            <a:pPr indent="0" marL="0">
+              <a:buNone/>
+            </a:pPr>
+            <a:r>
+              <a:rPr lang="en-US" sz="1150" dirty="0">
+                <a:solidFill>
+                  <a:srgbClr val="FFFFFF"/>
+                </a:solidFill>
+                <a:latin typeface="Calibri" pitchFamily="34" charset="0"/>
+                <a:ea typeface="Calibri" pitchFamily="34" charset="-122"/>
+                <a:cs typeface="Calibri" pitchFamily="34" charset="-120"/>
+              </a:rPr>
+              <a:t>Reiniciar Claude</a:t>
+            </a:r>
+            <a:endParaRPr lang="en-US" sz="1150" dirty="0"/>
+          </a:p>
+        </p:txBody>
+      </p:sp>
+      <p:sp>
+        <p:nvSpPr>
+          <p:cNvPr id="17" name="Shape 15"/>
+          <p:cNvSpPr/>
+          <p:nvPr/>
+        </p:nvSpPr>
+        <p:spPr>
+          <a:xfrm>
+            <a:off x="3108960" y="5184648"/>
+            <a:ext cx="310896" cy="310896"/>
+          </a:xfrm>
+          <a:prstGeom prst="ellipse">
+            <a:avLst/>
+          </a:prstGeom>
+          <a:solidFill>
+            <a:srgbClr val="A87C4F"/>
+          </a:solidFill>
+          <a:ln/>
+        </p:spPr>
+      </p:sp>
+      <p:sp>
+        <p:nvSpPr>
+          <p:cNvPr id="18" name="Text 16"/>
+          <p:cNvSpPr/>
+          <p:nvPr/>
+        </p:nvSpPr>
+        <p:spPr>
+          <a:xfrm>
+            <a:off x="3108960" y="5184648"/>
+            <a:ext cx="310896" cy="310896"/>
+          </a:xfrm>
+          <a:prstGeom prst="rect">
+            <a:avLst/>
+          </a:prstGeom>
+          <a:noFill/>
+          <a:ln/>
+        </p:spPr>
+        <p:txBody>
+          <a:bodyPr wrap="square" lIns="0" tIns="0" rIns="0" bIns="0" rtlCol="0" anchor="ctr"/>
+          <a:lstStyle/>
+          <a:p>
+            <a:pPr algn="ctr" indent="0" marL="0">
+              <a:buNone/>
+            </a:pPr>
+            <a:r>
+              <a:rPr lang="en-US" sz="1200" b="1" dirty="0">
+                <a:solidFill>
+                  <a:srgbClr val="FFFFFF"/>
+                </a:solidFill>
+                <a:latin typeface="Calibri" pitchFamily="34" charset="0"/>
+                <a:ea typeface="Calibri" pitchFamily="34" charset="-122"/>
+                <a:cs typeface="Calibri" pitchFamily="34" charset="-120"/>
+              </a:rPr>
+              <a:t>5</a:t>
+            </a:r>
+            <a:endParaRPr lang="en-US" sz="1200" dirty="0"/>
+          </a:p>
+        </p:txBody>
+      </p:sp>
+      <p:sp>
+        <p:nvSpPr>
+          <p:cNvPr id="19" name="Text 17"/>
+          <p:cNvSpPr/>
+          <p:nvPr/>
+        </p:nvSpPr>
+        <p:spPr>
+          <a:xfrm>
+            <a:off x="3529584" y="5202936"/>
+            <a:ext cx="1874520" cy="274320"/>
+          </a:xfrm>
+          <a:prstGeom prst="rect">
+            <a:avLst/>
+          </a:prstGeom>
+          <a:noFill/>
+          <a:ln/>
+        </p:spPr>
+        <p:txBody>
+          <a:bodyPr wrap="square" lIns="0" tIns="0" rIns="0" bIns="0" rtlCol="0" anchor="t"/>
+          <a:lstStyle/>
+          <a:p>
+            <a:pPr indent="0" marL="0">
+              <a:buNone/>
+            </a:pPr>
+            <a:r>
+              <a:rPr lang="en-US" sz="1150" dirty="0">
+                <a:solidFill>
+                  <a:srgbClr val="FFFFFF"/>
+                </a:solidFill>
+                <a:latin typeface="Calibri" pitchFamily="34" charset="0"/>
+                <a:ea typeface="Calibri" pitchFamily="34" charset="-122"/>
+                <a:cs typeface="Calibri" pitchFamily="34" charset="-120"/>
+              </a:rPr>
+              <a:t>Comprobar que funciona</a:t>
+            </a:r>
+            <a:endParaRPr lang="en-US" sz="1150" dirty="0"/>
+          </a:p>
+        </p:txBody>
+      </p:sp>
+      <p:sp>
+        <p:nvSpPr>
+          <p:cNvPr id="20" name="Shape 18"/>
+          <p:cNvSpPr/>
+          <p:nvPr/>
+        </p:nvSpPr>
+        <p:spPr>
+          <a:xfrm>
+            <a:off x="7818120" y="2194560"/>
+            <a:ext cx="3593592" cy="3675888"/>
+          </a:xfrm>
+          <a:prstGeom prst="roundRect">
+            <a:avLst>
+              <a:gd name="adj" fmla="val 1527"/>
+            </a:avLst>
+          </a:prstGeom>
+          <a:solidFill>
+            <a:srgbClr val="2A3446"/>
+          </a:solidFill>
+          <a:ln/>
+        </p:spPr>
+      </p:sp>
+      <p:sp>
+        <p:nvSpPr>
+          <p:cNvPr id="21" name="Text 19"/>
+          <p:cNvSpPr/>
+          <p:nvPr/>
+        </p:nvSpPr>
+        <p:spPr>
+          <a:xfrm>
+            <a:off x="8183880" y="2487168"/>
+            <a:ext cx="2926080" cy="256032"/>
+          </a:xfrm>
+          <a:prstGeom prst="rect">
+            <a:avLst/>
+          </a:prstGeom>
+          <a:noFill/>
+          <a:ln/>
+        </p:spPr>
+        <p:txBody>
+          <a:bodyPr wrap="square" lIns="0" tIns="0" rIns="0" bIns="0" rtlCol="0" anchor="t"/>
+          <a:lstStyle/>
+          <a:p>
+            <a:pPr indent="0" marL="0">
+              <a:buNone/>
+            </a:pPr>
+            <a:r>
+              <a:rPr lang="en-US" sz="1050" spc="150" kern="0" dirty="0">
+                <a:solidFill>
+                  <a:srgbClr val="C9A574"/>
+                </a:solidFill>
+                <a:latin typeface="Calibri" pitchFamily="34" charset="0"/>
+                <a:ea typeface="Calibri" pitchFamily="34" charset="-122"/>
+                <a:cs typeface="Calibri" pitchFamily="34" charset="-120"/>
+              </a:rPr>
+              <a:t>Qué queda instalado</a:t>
+            </a:r>
+            <a:endParaRPr lang="en-US" sz="1050" dirty="0"/>
+          </a:p>
+        </p:txBody>
+      </p:sp>
+      <p:sp>
+        <p:nvSpPr>
+          <p:cNvPr id="22" name="Text 20"/>
+          <p:cNvSpPr/>
+          <p:nvPr/>
+        </p:nvSpPr>
+        <p:spPr>
+          <a:xfrm>
+            <a:off x="8183880" y="2834640"/>
+            <a:ext cx="2926080" cy="237744"/>
+          </a:xfrm>
+          <a:prstGeom prst="rect">
+            <a:avLst/>
+          </a:prstGeom>
+          <a:noFill/>
+          <a:ln/>
+        </p:spPr>
+        <p:txBody>
+          <a:bodyPr wrap="square" lIns="0" tIns="0" rIns="0" bIns="0" rtlCol="0" anchor="t"/>
+          <a:lstStyle/>
+          <a:p>
+            <a:pPr indent="0" marL="0">
+              <a:buNone/>
+            </a:pPr>
+            <a:r>
+              <a:rPr lang="en-US" sz="1150" b="1" dirty="0">
+                <a:solidFill>
+                  <a:srgbClr val="FFFFFF"/>
+                </a:solidFill>
+                <a:latin typeface="Calibri" pitchFamily="34" charset="0"/>
+                <a:ea typeface="Calibri" pitchFamily="34" charset="-122"/>
+                <a:cs typeface="Calibri" pitchFamily="34" charset="-120"/>
+              </a:rPr>
+              <a:t>El servidor</a:t>
+            </a:r>
+            <a:endParaRPr lang="en-US" sz="1150" dirty="0"/>
+          </a:p>
+        </p:txBody>
+      </p:sp>
+      <p:sp>
+        <p:nvSpPr>
+          <p:cNvPr id="23" name="Text 21"/>
+          <p:cNvSpPr/>
+          <p:nvPr/>
+        </p:nvSpPr>
+        <p:spPr>
+          <a:xfrm>
+            <a:off x="8183880" y="3081528"/>
+            <a:ext cx="2926080" cy="548640"/>
+          </a:xfrm>
+          <a:prstGeom prst="rect">
+            <a:avLst/>
+          </a:prstGeom>
+          <a:noFill/>
+          <a:ln/>
+        </p:spPr>
+        <p:txBody>
+          <a:bodyPr wrap="square" lIns="0" tIns="0" rIns="0" bIns="0" rtlCol="0" anchor="t"/>
+          <a:lstStyle/>
+          <a:p>
+            <a:pPr indent="0" marL="0">
+              <a:lnSpc>
+                <a:spcPct val="100000"/>
+              </a:lnSpc>
+              <a:buNone/>
+            </a:pPr>
+            <a:r>
+              <a:rPr lang="en-US" sz="950" dirty="0">
+                <a:solidFill>
+                  <a:srgbClr val="8A93A5"/>
+                </a:solidFill>
+                <a:latin typeface="Calibri" pitchFamily="34" charset="0"/>
+                <a:ea typeface="Calibri" pitchFamily="34" charset="-122"/>
+                <a:cs typeface="Calibri" pitchFamily="34" charset="-120"/>
+              </a:rPr>
+              <a:t>Corre en tu computador, no en la nube. Sólo se activa cuando Claude le pregunta.</a:t>
+            </a:r>
+            <a:endParaRPr lang="en-US" sz="950" dirty="0"/>
+          </a:p>
+        </p:txBody>
+      </p:sp>
+      <p:sp>
+        <p:nvSpPr>
+          <p:cNvPr id="24" name="Text 22"/>
+          <p:cNvSpPr/>
+          <p:nvPr/>
+        </p:nvSpPr>
+        <p:spPr>
+          <a:xfrm>
+            <a:off x="8183880" y="3675888"/>
+            <a:ext cx="2926080" cy="237744"/>
+          </a:xfrm>
+          <a:prstGeom prst="rect">
+            <a:avLst/>
+          </a:prstGeom>
+          <a:noFill/>
+          <a:ln/>
+        </p:spPr>
+        <p:txBody>
+          <a:bodyPr wrap="square" lIns="0" tIns="0" rIns="0" bIns="0" rtlCol="0" anchor="t"/>
+          <a:lstStyle/>
+          <a:p>
+            <a:pPr indent="0" marL="0">
+              <a:buNone/>
+            </a:pPr>
+            <a:r>
+              <a:rPr lang="en-US" sz="1150" b="1" dirty="0">
+                <a:solidFill>
+                  <a:srgbClr val="FFFFFF"/>
+                </a:solidFill>
+                <a:latin typeface="Calibri" pitchFamily="34" charset="0"/>
+                <a:ea typeface="Calibri" pitchFamily="34" charset="-122"/>
+                <a:cs typeface="Calibri" pitchFamily="34" charset="-120"/>
+              </a:rPr>
+              <a:t>El registro en Claude</a:t>
+            </a:r>
+            <a:endParaRPr lang="en-US" sz="1150" dirty="0"/>
+          </a:p>
+        </p:txBody>
+      </p:sp>
+      <p:sp>
+        <p:nvSpPr>
+          <p:cNvPr id="25" name="Text 23"/>
+          <p:cNvSpPr/>
+          <p:nvPr/>
+        </p:nvSpPr>
+        <p:spPr>
+          <a:xfrm>
+            <a:off x="8183880" y="3922776"/>
+            <a:ext cx="2926080" cy="548640"/>
+          </a:xfrm>
+          <a:prstGeom prst="rect">
+            <a:avLst/>
+          </a:prstGeom>
+          <a:noFill/>
+          <a:ln/>
+        </p:spPr>
+        <p:txBody>
+          <a:bodyPr wrap="square" lIns="0" tIns="0" rIns="0" bIns="0" rtlCol="0" anchor="t"/>
+          <a:lstStyle/>
+          <a:p>
+            <a:pPr indent="0" marL="0">
+              <a:lnSpc>
+                <a:spcPct val="100000"/>
+              </a:lnSpc>
+              <a:buNone/>
+            </a:pPr>
+            <a:r>
+              <a:rPr lang="en-US" sz="950" dirty="0">
+                <a:solidFill>
+                  <a:srgbClr val="8A93A5"/>
+                </a:solidFill>
+                <a:latin typeface="Calibri" pitchFamily="34" charset="0"/>
+                <a:ea typeface="Calibri" pitchFamily="34" charset="-122"/>
+                <a:cs typeface="Calibri" pitchFamily="34" charset="-120"/>
+              </a:rPr>
+              <a:t>Una línea de configuración para que Claude sepa que Responsa existe.</a:t>
+            </a:r>
+            <a:endParaRPr lang="en-US" sz="950" dirty="0"/>
+          </a:p>
+        </p:txBody>
+      </p:sp>
+      <p:sp>
+        <p:nvSpPr>
+          <p:cNvPr id="26" name="Text 24"/>
+          <p:cNvSpPr/>
+          <p:nvPr/>
+        </p:nvSpPr>
+        <p:spPr>
+          <a:xfrm>
+            <a:off x="8183880" y="4517136"/>
+            <a:ext cx="2926080" cy="237744"/>
+          </a:xfrm>
+          <a:prstGeom prst="rect">
+            <a:avLst/>
+          </a:prstGeom>
+          <a:noFill/>
+          <a:ln/>
+        </p:spPr>
+        <p:txBody>
+          <a:bodyPr wrap="square" lIns="0" tIns="0" rIns="0" bIns="0" rtlCol="0" anchor="t"/>
+          <a:lstStyle/>
+          <a:p>
+            <a:pPr indent="0" marL="0">
+              <a:buNone/>
+            </a:pPr>
+            <a:r>
+              <a:rPr lang="en-US" sz="1150" b="1" dirty="0">
+                <a:solidFill>
+                  <a:srgbClr val="FFFFFF"/>
+                </a:solidFill>
+                <a:latin typeface="Calibri" pitchFamily="34" charset="0"/>
+                <a:ea typeface="Calibri" pitchFamily="34" charset="-122"/>
+                <a:cs typeface="Calibri" pitchFamily="34" charset="-120"/>
+              </a:rPr>
+              <a:t>La skill de método</a:t>
+            </a:r>
+            <a:endParaRPr lang="en-US" sz="1150" dirty="0"/>
+          </a:p>
+        </p:txBody>
+      </p:sp>
+      <p:sp>
+        <p:nvSpPr>
+          <p:cNvPr id="27" name="Text 25"/>
+          <p:cNvSpPr/>
+          <p:nvPr/>
+        </p:nvSpPr>
+        <p:spPr>
+          <a:xfrm>
+            <a:off x="8183880" y="4764024"/>
+            <a:ext cx="2926080" cy="548640"/>
+          </a:xfrm>
+          <a:prstGeom prst="rect">
+            <a:avLst/>
+          </a:prstGeom>
+          <a:noFill/>
+          <a:ln/>
+        </p:spPr>
+        <p:txBody>
+          <a:bodyPr wrap="square" lIns="0" tIns="0" rIns="0" bIns="0" rtlCol="0" anchor="t"/>
+          <a:lstStyle/>
+          <a:p>
+            <a:pPr indent="0" marL="0">
+              <a:lnSpc>
+                <a:spcPct val="100000"/>
+              </a:lnSpc>
+              <a:buNone/>
+            </a:pPr>
+            <a:r>
+              <a:rPr lang="en-US" sz="950" dirty="0">
+                <a:solidFill>
+                  <a:srgbClr val="8A93A5"/>
+                </a:solidFill>
+                <a:latin typeface="Calibri" pitchFamily="34" charset="0"/>
+                <a:ea typeface="Calibri" pitchFamily="34" charset="-122"/>
+                <a:cs typeface="Calibri" pitchFamily="34" charset="-120"/>
+              </a:rPr>
+              <a:t>Le indica a Claude cómo citar y qué no puede afirmar sin respaldo.</a:t>
+            </a:r>
+            <a:endParaRPr lang="en-US" sz="950" dirty="0"/>
+          </a:p>
+        </p:txBody>
+      </p:sp>
+      <p:sp>
+        <p:nvSpPr>
+          <p:cNvPr id="28" name="Text 26"/>
+          <p:cNvSpPr/>
+          <p:nvPr/>
+        </p:nvSpPr>
+        <p:spPr>
+          <a:xfrm>
+            <a:off x="8183880" y="5394960"/>
+            <a:ext cx="3017520" cy="402336"/>
+          </a:xfrm>
+          <a:prstGeom prst="rect">
+            <a:avLst/>
+          </a:prstGeom>
+          <a:noFill/>
+          <a:ln/>
+        </p:spPr>
+        <p:txBody>
+          <a:bodyPr wrap="square" lIns="0" tIns="0" rIns="0" bIns="0" rtlCol="0" anchor="t"/>
+          <a:lstStyle/>
+          <a:p>
+            <a:pPr indent="0" marL="0">
+              <a:lnSpc>
+                <a:spcPct val="105000"/>
+              </a:lnSpc>
+              <a:buNone/>
+            </a:pPr>
+            <a:r>
+              <a:rPr lang="en-US" sz="950" i="1" dirty="0">
+                <a:solidFill>
+                  <a:srgbClr val="C9A574"/>
+                </a:solidFill>
+                <a:latin typeface="Calibri" pitchFamily="34" charset="0"/>
+                <a:ea typeface="Calibri" pitchFamily="34" charset="-122"/>
+                <a:cs typeface="Calibri" pitchFamily="34" charset="-120"/>
+              </a:rPr>
+              <a:t>Nada se envía a terceros: las consultas van directo a los sitios oficiales.</a:t>
+            </a:r>
+            <a:endParaRPr lang="en-US" sz="950" dirty="0"/>
+          </a:p>
+        </p:txBody>
+      </p:sp>
+    </p:spTree>
+  </p:cSld>
+  <p:clrMapOvr>
+    <a:masterClrMapping/>
+  </p:clrMapOvr>
+</p:sld>
+</file>
+
+<file path=ppt/slides/slide11.xml><?xml version="1.0" encoding="utf-8"?>
+<p:sld xmlns:a="http://schemas.openxmlformats.org/drawingml/2006/main" xmlns:r="http://schemas.openxmlformats.org/officeDocument/2006/relationships" xmlns:p="http://schemas.openxmlformats.org/presentationml/2006/main">
+  <p:cSld name="Slide 11">
+    <p:bg>
+      <p:bgPr>
+        <a:solidFill>
           <a:srgbClr val="F4F1EA"/>
         </a:solidFill>
       </p:bgPr>
@@ -2212,7 +3642,7 @@
                 <a:ea typeface="Cambria" pitchFamily="34" charset="-122"/>
                 <a:cs typeface="Cambria" pitchFamily="34" charset="-120"/>
               </a:rPr>
-              <a:t>Instalación en macOS</a:t>
+              <a:t>Paso 1 · Instalar Node.js</a:t>
             </a:r>
             <a:endParaRPr lang="en-US" sz="3200" dirty="0"/>
           </a:p>
@@ -2251,7 +3681,7 @@
                 <a:ea typeface="Calibri" pitchFamily="34" charset="-122"/>
                 <a:cs typeface="Calibri" pitchFamily="34" charset="-120"/>
               </a:rPr>
-              <a:t>Un solo comando hace todo: dependencias, registro, skill, precarga y verificación</a:t>
+              <a:t>Es el motor que ejecuta Responsa. Software estándar y gratuito</a:t>
             </a:r>
             <a:endParaRPr lang="en-US" sz="1350" dirty="0"/>
           </a:p>
@@ -2259,17 +3689,302 @@
       </p:sp>
       <p:sp>
         <p:nvSpPr>
-          <p:cNvPr id="4" name="Shape 2"/>
-          <p:cNvSpPr/>
-          <p:nvPr/>
-        </p:nvSpPr>
-        <p:spPr>
-          <a:xfrm>
-            <a:off x="777240" y="1901952"/>
-            <a:ext cx="347472" cy="347472"/>
-          </a:xfrm>
-          <a:prstGeom prst="ellipse">
-            <a:avLst/>
+          <p:cNvPr id="4" name="Text 2"/>
+          <p:cNvSpPr/>
+          <p:nvPr/>
+        </p:nvSpPr>
+        <p:spPr>
+          <a:xfrm>
+            <a:off x="777240" y="1828800"/>
+            <a:ext cx="5669280" cy="274320"/>
+          </a:xfrm>
+          <a:prstGeom prst="rect">
+            <a:avLst/>
+          </a:prstGeom>
+          <a:noFill/>
+          <a:ln/>
+        </p:spPr>
+        <p:txBody>
+          <a:bodyPr wrap="square" lIns="0" tIns="0" rIns="0" bIns="0" rtlCol="0" anchor="t"/>
+          <a:lstStyle/>
+          <a:p>
+            <a:pPr indent="0" marL="0">
+              <a:buNone/>
+            </a:pPr>
+            <a:r>
+              <a:rPr lang="en-US" sz="1200" dirty="0">
+                <a:solidFill>
+                  <a:srgbClr val="1B2230"/>
+                </a:solidFill>
+                <a:latin typeface="Calibri" pitchFamily="34" charset="0"/>
+                <a:ea typeface="Calibri" pitchFamily="34" charset="-122"/>
+                <a:cs typeface="Calibri" pitchFamily="34" charset="-120"/>
+              </a:rPr>
+              <a:t>Primero, comprobar si ya está. Abre la terminal y escribe:</a:t>
+            </a:r>
+            <a:endParaRPr lang="en-US" sz="1200" dirty="0"/>
+          </a:p>
+        </p:txBody>
+      </p:sp>
+      <p:sp>
+        <p:nvSpPr>
+          <p:cNvPr id="5" name="Shape 3"/>
+          <p:cNvSpPr/>
+          <p:nvPr/>
+        </p:nvSpPr>
+        <p:spPr>
+          <a:xfrm>
+            <a:off x="777240" y="2157984"/>
+            <a:ext cx="4572000" cy="457200"/>
+          </a:xfrm>
+          <a:prstGeom prst="roundRect">
+            <a:avLst>
+              <a:gd name="adj" fmla="val 10000"/>
+            </a:avLst>
+          </a:prstGeom>
+          <a:solidFill>
+            <a:srgbClr val="1B2230"/>
+          </a:solidFill>
+          <a:ln/>
+        </p:spPr>
+      </p:sp>
+      <p:sp>
+        <p:nvSpPr>
+          <p:cNvPr id="6" name="Text 4"/>
+          <p:cNvSpPr/>
+          <p:nvPr/>
+        </p:nvSpPr>
+        <p:spPr>
+          <a:xfrm>
+            <a:off x="978408" y="2157984"/>
+            <a:ext cx="4169664" cy="457200"/>
+          </a:xfrm>
+          <a:prstGeom prst="rect">
+            <a:avLst/>
+          </a:prstGeom>
+          <a:noFill/>
+          <a:ln/>
+        </p:spPr>
+        <p:txBody>
+          <a:bodyPr wrap="square" lIns="0" tIns="0" rIns="0" bIns="0" rtlCol="0" anchor="ctr"/>
+          <a:lstStyle/>
+          <a:p>
+            <a:pPr indent="0" marL="0">
+              <a:buNone/>
+            </a:pPr>
+            <a:r>
+              <a:rPr lang="en-US" sz="1150" b="1" dirty="0">
+                <a:solidFill>
+                  <a:srgbClr val="C9A574"/>
+                </a:solidFill>
+                <a:latin typeface="Courier New" pitchFamily="34" charset="0"/>
+                <a:ea typeface="Courier New" pitchFamily="34" charset="-122"/>
+                <a:cs typeface="Courier New" pitchFamily="34" charset="-120"/>
+              </a:rPr>
+              <a:t>node --version</a:t>
+            </a:r>
+            <a:endParaRPr lang="en-US" sz="1150" dirty="0"/>
+          </a:p>
+        </p:txBody>
+      </p:sp>
+      <p:sp>
+        <p:nvSpPr>
+          <p:cNvPr id="7" name="Text 5"/>
+          <p:cNvSpPr/>
+          <p:nvPr/>
+        </p:nvSpPr>
+        <p:spPr>
+          <a:xfrm>
+            <a:off x="777240" y="2724912"/>
+            <a:ext cx="4572000" cy="457200"/>
+          </a:xfrm>
+          <a:prstGeom prst="rect">
+            <a:avLst/>
+          </a:prstGeom>
+          <a:noFill/>
+          <a:ln/>
+        </p:spPr>
+        <p:txBody>
+          <a:bodyPr wrap="square" lIns="0" tIns="0" rIns="0" bIns="0" rtlCol="0" anchor="t"/>
+          <a:lstStyle/>
+          <a:p>
+            <a:pPr indent="0" marL="0">
+              <a:buNone/>
+            </a:pPr>
+            <a:r>
+              <a:rPr lang="en-US" sz="1100" dirty="0">
+                <a:solidFill>
+                  <a:srgbClr val="5A6478"/>
+                </a:solidFill>
+                <a:latin typeface="Calibri" pitchFamily="34" charset="0"/>
+                <a:ea typeface="Calibri" pitchFamily="34" charset="-122"/>
+                <a:cs typeface="Calibri" pitchFamily="34" charset="-120"/>
+              </a:rPr>
+              <a:t>Si responde v20 o superior, ya está: salta al paso 2. Si dice que no reconoce el comando, sigue aquí.</a:t>
+            </a:r>
+            <a:endParaRPr lang="en-US" sz="1100" dirty="0"/>
+          </a:p>
+        </p:txBody>
+      </p:sp>
+      <p:sp>
+        <p:nvSpPr>
+          <p:cNvPr id="8" name="Shape 6"/>
+          <p:cNvSpPr/>
+          <p:nvPr/>
+        </p:nvSpPr>
+        <p:spPr>
+          <a:xfrm>
+            <a:off x="777240" y="3364992"/>
+            <a:ext cx="4572000" cy="1371600"/>
+          </a:xfrm>
+          <a:prstGeom prst="roundRect">
+            <a:avLst>
+              <a:gd name="adj" fmla="val 4000"/>
+            </a:avLst>
+          </a:prstGeom>
+          <a:solidFill>
+            <a:srgbClr val="FFFFFF"/>
+          </a:solidFill>
+          <a:ln w="9525">
+            <a:solidFill>
+              <a:srgbClr val="E3DED3"/>
+            </a:solidFill>
+            <a:prstDash val="solid"/>
+          </a:ln>
+        </p:spPr>
+      </p:sp>
+      <p:sp>
+        <p:nvSpPr>
+          <p:cNvPr id="9" name="Text 7"/>
+          <p:cNvSpPr/>
+          <p:nvPr/>
+        </p:nvSpPr>
+        <p:spPr>
+          <a:xfrm>
+            <a:off x="1051560" y="3566160"/>
+            <a:ext cx="4023360" cy="256032"/>
+          </a:xfrm>
+          <a:prstGeom prst="rect">
+            <a:avLst/>
+          </a:prstGeom>
+          <a:noFill/>
+          <a:ln/>
+        </p:spPr>
+        <p:txBody>
+          <a:bodyPr wrap="square" lIns="0" tIns="0" rIns="0" bIns="0" rtlCol="0" anchor="t"/>
+          <a:lstStyle/>
+          <a:p>
+            <a:pPr indent="0" marL="0">
+              <a:buNone/>
+            </a:pPr>
+            <a:r>
+              <a:rPr lang="en-US" sz="1150" b="1" dirty="0">
+                <a:solidFill>
+                  <a:srgbClr val="1B2230"/>
+                </a:solidFill>
+                <a:latin typeface="Calibri" pitchFamily="34" charset="0"/>
+                <a:ea typeface="Calibri" pitchFamily="34" charset="-122"/>
+                <a:cs typeface="Calibri" pitchFamily="34" charset="-120"/>
+              </a:rPr>
+              <a:t>Cómo se abre la terminal</a:t>
+            </a:r>
+            <a:endParaRPr lang="en-US" sz="1150" dirty="0"/>
+          </a:p>
+        </p:txBody>
+      </p:sp>
+      <p:sp>
+        <p:nvSpPr>
+          <p:cNvPr id="10" name="Text 8"/>
+          <p:cNvSpPr/>
+          <p:nvPr/>
+        </p:nvSpPr>
+        <p:spPr>
+          <a:xfrm>
+            <a:off x="1051560" y="3877056"/>
+            <a:ext cx="4023360" cy="274320"/>
+          </a:xfrm>
+          <a:prstGeom prst="rect">
+            <a:avLst/>
+          </a:prstGeom>
+          <a:noFill/>
+          <a:ln/>
+        </p:spPr>
+        <p:txBody>
+          <a:bodyPr wrap="square" lIns="0" tIns="0" rIns="0" bIns="0" rtlCol="0" anchor="t"/>
+          <a:lstStyle/>
+          <a:p>
+            <a:pPr indent="0" marL="0">
+              <a:buNone/>
+            </a:pPr>
+            <a:r>
+              <a:rPr lang="en-US" sz="1050" dirty="0">
+                <a:solidFill>
+                  <a:srgbClr val="5A6478"/>
+                </a:solidFill>
+                <a:latin typeface="Calibri" pitchFamily="34" charset="0"/>
+                <a:ea typeface="Calibri" pitchFamily="34" charset="-122"/>
+                <a:cs typeface="Calibri" pitchFamily="34" charset="-120"/>
+              </a:rPr>
+              <a:t>Windows:  menú Inicio → escribir «PowerShell» → abrirlo.</a:t>
+            </a:r>
+            <a:endParaRPr lang="en-US" sz="1050" dirty="0"/>
+          </a:p>
+        </p:txBody>
+      </p:sp>
+      <p:sp>
+        <p:nvSpPr>
+          <p:cNvPr id="11" name="Text 9"/>
+          <p:cNvSpPr/>
+          <p:nvPr/>
+        </p:nvSpPr>
+        <p:spPr>
+          <a:xfrm>
+            <a:off x="1051560" y="4206240"/>
+            <a:ext cx="4023360" cy="274320"/>
+          </a:xfrm>
+          <a:prstGeom prst="rect">
+            <a:avLst/>
+          </a:prstGeom>
+          <a:noFill/>
+          <a:ln/>
+        </p:spPr>
+        <p:txBody>
+          <a:bodyPr wrap="square" lIns="0" tIns="0" rIns="0" bIns="0" rtlCol="0" anchor="t"/>
+          <a:lstStyle/>
+          <a:p>
+            <a:pPr indent="0" marL="0">
+              <a:buNone/>
+            </a:pPr>
+            <a:r>
+              <a:rPr lang="en-US" sz="1050" dirty="0">
+                <a:solidFill>
+                  <a:srgbClr val="5A6478"/>
+                </a:solidFill>
+                <a:latin typeface="Calibri" pitchFamily="34" charset="0"/>
+                <a:ea typeface="Calibri" pitchFamily="34" charset="-122"/>
+                <a:cs typeface="Calibri" pitchFamily="34" charset="-120"/>
+              </a:rPr>
+              <a:t>macOS:  Command + Espacio → escribir «Terminal» → Enter.</a:t>
+            </a:r>
+            <a:endParaRPr lang="en-US" sz="1050" dirty="0"/>
+          </a:p>
+        </p:txBody>
+      </p:sp>
+      <p:sp>
+        <p:nvSpPr>
+          <p:cNvPr id="12" name="Shape 10"/>
+          <p:cNvSpPr/>
+          <p:nvPr/>
+        </p:nvSpPr>
+        <p:spPr>
+          <a:xfrm>
+            <a:off x="5989320" y="1828800"/>
+            <a:ext cx="1051560" cy="274320"/>
+          </a:xfrm>
+          <a:prstGeom prst="roundRect">
+            <a:avLst>
+              <a:gd name="adj" fmla="val 13333"/>
+            </a:avLst>
           </a:prstGeom>
           <a:solidFill>
             <a:srgbClr val="A87C4F"/>
@@ -2279,14 +3994,14 @@
       </p:sp>
       <p:sp>
         <p:nvSpPr>
-          <p:cNvPr id="5" name="Text 3"/>
-          <p:cNvSpPr/>
-          <p:nvPr/>
-        </p:nvSpPr>
-        <p:spPr>
-          <a:xfrm>
-            <a:off x="777240" y="1901952"/>
-            <a:ext cx="347472" cy="347472"/>
+          <p:cNvPr id="13" name="Text 11"/>
+          <p:cNvSpPr/>
+          <p:nvPr/>
+        </p:nvSpPr>
+        <p:spPr>
+          <a:xfrm>
+            <a:off x="5989320" y="1828800"/>
+            <a:ext cx="1051560" cy="274320"/>
           </a:xfrm>
           <a:prstGeom prst="rect">
             <a:avLst/>
@@ -2302,7 +4017,7 @@
               <a:buNone/>
             </a:pPr>
             <a:r>
-              <a:rPr lang="en-US" sz="1200" b="1" dirty="0">
+              <a:rPr lang="en-US" sz="1000" b="1" dirty="0">
                 <a:solidFill>
                   <a:srgbClr val="FFFFFF"/>
                 </a:solidFill>
@@ -2310,38 +4025,38 @@
                 <a:ea typeface="Calibri" pitchFamily="34" charset="-122"/>
                 <a:cs typeface="Calibri" pitchFamily="34" charset="-120"/>
               </a:rPr>
-              <a:t>1</a:t>
-            </a:r>
-            <a:endParaRPr lang="en-US" sz="1200" dirty="0"/>
-          </a:p>
-        </p:txBody>
-      </p:sp>
-      <p:sp>
-        <p:nvSpPr>
-          <p:cNvPr id="6" name="Text 4"/>
-          <p:cNvSpPr/>
-          <p:nvPr/>
-        </p:nvSpPr>
-        <p:spPr>
-          <a:xfrm>
-            <a:off x="1289304" y="1847088"/>
-            <a:ext cx="3200400" cy="274320"/>
-          </a:xfrm>
-          <a:prstGeom prst="rect">
-            <a:avLst/>
-          </a:prstGeom>
-          <a:noFill/>
-          <a:ln/>
-        </p:spPr>
-        <p:txBody>
-          <a:bodyPr wrap="square" lIns="0" tIns="0" rIns="0" bIns="0" rtlCol="0" anchor="ctr"/>
-          <a:lstStyle/>
-          <a:p>
-            <a:pPr indent="0" marL="0">
-              <a:buNone/>
-            </a:pPr>
-            <a:r>
-              <a:rPr lang="en-US" sz="1300" b="1" dirty="0">
+              <a:t>Windows</a:t>
+            </a:r>
+            <a:endParaRPr lang="en-US" sz="1000" dirty="0"/>
+          </a:p>
+        </p:txBody>
+      </p:sp>
+      <p:sp>
+        <p:nvSpPr>
+          <p:cNvPr id="14" name="Text 12"/>
+          <p:cNvSpPr/>
+          <p:nvPr/>
+        </p:nvSpPr>
+        <p:spPr>
+          <a:xfrm>
+            <a:off x="5989320" y="2212848"/>
+            <a:ext cx="4937760" cy="347472"/>
+          </a:xfrm>
+          <a:prstGeom prst="rect">
+            <a:avLst/>
+          </a:prstGeom>
+          <a:noFill/>
+          <a:ln/>
+        </p:spPr>
+        <p:txBody>
+          <a:bodyPr wrap="square" lIns="0" tIns="0" rIns="0" bIns="0" rtlCol="0" anchor="t"/>
+          <a:lstStyle/>
+          <a:p>
+            <a:pPr indent="0" marL="0">
+              <a:buNone/>
+            </a:pPr>
+            <a:r>
+              <a:rPr lang="en-US" sz="1100" dirty="0">
                 <a:solidFill>
                   <a:srgbClr val="1B2230"/>
                 </a:solidFill>
@@ -2349,128 +4064,144 @@
                 <a:ea typeface="Calibri" pitchFamily="34" charset="-122"/>
                 <a:cs typeface="Calibri" pitchFamily="34" charset="-120"/>
               </a:rPr>
-              <a:t>Instalar Node.js</a:t>
-            </a:r>
-            <a:endParaRPr lang="en-US" sz="1300" dirty="0"/>
-          </a:p>
-        </p:txBody>
-      </p:sp>
-      <p:sp>
-        <p:nvSpPr>
-          <p:cNvPr id="7" name="Text 5"/>
-          <p:cNvSpPr/>
-          <p:nvPr/>
-        </p:nvSpPr>
-        <p:spPr>
-          <a:xfrm>
-            <a:off x="1289304" y="2121408"/>
-            <a:ext cx="3200400" cy="566928"/>
-          </a:xfrm>
-          <a:prstGeom prst="rect">
-            <a:avLst/>
-          </a:prstGeom>
-          <a:noFill/>
-          <a:ln/>
-        </p:spPr>
-        <p:txBody>
-          <a:bodyPr wrap="square" lIns="0" tIns="0" rIns="0" bIns="0" rtlCol="0" anchor="ctr"/>
-          <a:lstStyle/>
-          <a:p>
-            <a:pPr indent="0" marL="0">
-              <a:lnSpc>
-                <a:spcPct val="100000"/>
-              </a:lnSpc>
-              <a:buNone/>
-            </a:pPr>
-            <a:r>
-              <a:rPr lang="en-US" sz="1000" dirty="0">
-                <a:solidFill>
-                  <a:srgbClr val="5A6478"/>
-                </a:solidFill>
-                <a:latin typeface="Calibri" pitchFamily="34" charset="0"/>
-                <a:ea typeface="Calibri" pitchFamily="34" charset="-122"/>
-                <a:cs typeface="Calibri" pitchFamily="34" charset="-120"/>
-              </a:rPr>
-              <a:t>Descargar la versión LTS desde nodejs.org y abrir el paquete .pkg. Aceptar las opciones por defecto.</a:t>
-            </a:r>
-            <a:endParaRPr lang="en-US" sz="1000" dirty="0"/>
-          </a:p>
-        </p:txBody>
-      </p:sp>
-      <p:sp>
-        <p:nvSpPr>
-          <p:cNvPr id="8" name="Shape 6"/>
-          <p:cNvSpPr/>
-          <p:nvPr/>
-        </p:nvSpPr>
-        <p:spPr>
-          <a:xfrm>
-            <a:off x="4709160" y="1865376"/>
-            <a:ext cx="6675120" cy="658368"/>
+              <a:t>1.  Entrar a nodejs.org</a:t>
+            </a:r>
+            <a:endParaRPr lang="en-US" sz="1100" dirty="0"/>
+          </a:p>
+        </p:txBody>
+      </p:sp>
+      <p:sp>
+        <p:nvSpPr>
+          <p:cNvPr id="15" name="Text 13"/>
+          <p:cNvSpPr/>
+          <p:nvPr/>
+        </p:nvSpPr>
+        <p:spPr>
+          <a:xfrm>
+            <a:off x="5989320" y="2596896"/>
+            <a:ext cx="4937760" cy="347472"/>
+          </a:xfrm>
+          <a:prstGeom prst="rect">
+            <a:avLst/>
+          </a:prstGeom>
+          <a:noFill/>
+          <a:ln/>
+        </p:spPr>
+        <p:txBody>
+          <a:bodyPr wrap="square" lIns="0" tIns="0" rIns="0" bIns="0" rtlCol="0" anchor="t"/>
+          <a:lstStyle/>
+          <a:p>
+            <a:pPr indent="0" marL="0">
+              <a:buNone/>
+            </a:pPr>
+            <a:r>
+              <a:rPr lang="en-US" sz="1100" dirty="0">
+                <a:solidFill>
+                  <a:srgbClr val="1B2230"/>
+                </a:solidFill>
+                <a:latin typeface="Calibri" pitchFamily="34" charset="0"/>
+                <a:ea typeface="Calibri" pitchFamily="34" charset="-122"/>
+                <a:cs typeface="Calibri" pitchFamily="34" charset="-120"/>
+              </a:rPr>
+              <a:t>2.  Descargar la versión que dice LTS (la otra es para desarrolladores)</a:t>
+            </a:r>
+            <a:endParaRPr lang="en-US" sz="1100" dirty="0"/>
+          </a:p>
+        </p:txBody>
+      </p:sp>
+      <p:sp>
+        <p:nvSpPr>
+          <p:cNvPr id="16" name="Text 14"/>
+          <p:cNvSpPr/>
+          <p:nvPr/>
+        </p:nvSpPr>
+        <p:spPr>
+          <a:xfrm>
+            <a:off x="5989320" y="2980944"/>
+            <a:ext cx="4937760" cy="347472"/>
+          </a:xfrm>
+          <a:prstGeom prst="rect">
+            <a:avLst/>
+          </a:prstGeom>
+          <a:noFill/>
+          <a:ln/>
+        </p:spPr>
+        <p:txBody>
+          <a:bodyPr wrap="square" lIns="0" tIns="0" rIns="0" bIns="0" rtlCol="0" anchor="t"/>
+          <a:lstStyle/>
+          <a:p>
+            <a:pPr indent="0" marL="0">
+              <a:buNone/>
+            </a:pPr>
+            <a:r>
+              <a:rPr lang="en-US" sz="1100" dirty="0">
+                <a:solidFill>
+                  <a:srgbClr val="1B2230"/>
+                </a:solidFill>
+                <a:latin typeface="Calibri" pitchFamily="34" charset="0"/>
+                <a:ea typeface="Calibri" pitchFamily="34" charset="-122"/>
+                <a:cs typeface="Calibri" pitchFamily="34" charset="-120"/>
+              </a:rPr>
+              <a:t>3.  Abrir el archivo .msi y aceptar todo por defecto</a:t>
+            </a:r>
+            <a:endParaRPr lang="en-US" sz="1100" dirty="0"/>
+          </a:p>
+        </p:txBody>
+      </p:sp>
+      <p:sp>
+        <p:nvSpPr>
+          <p:cNvPr id="17" name="Text 15"/>
+          <p:cNvSpPr/>
+          <p:nvPr/>
+        </p:nvSpPr>
+        <p:spPr>
+          <a:xfrm>
+            <a:off x="5989320" y="3364992"/>
+            <a:ext cx="4937760" cy="347472"/>
+          </a:xfrm>
+          <a:prstGeom prst="rect">
+            <a:avLst/>
+          </a:prstGeom>
+          <a:noFill/>
+          <a:ln/>
+        </p:spPr>
+        <p:txBody>
+          <a:bodyPr wrap="square" lIns="0" tIns="0" rIns="0" bIns="0" rtlCol="0" anchor="t"/>
+          <a:lstStyle/>
+          <a:p>
+            <a:pPr indent="0" marL="0">
+              <a:buNone/>
+            </a:pPr>
+            <a:r>
+              <a:rPr lang="en-US" sz="1100" dirty="0">
+                <a:solidFill>
+                  <a:srgbClr val="1B2230"/>
+                </a:solidFill>
+                <a:latin typeface="Calibri" pitchFamily="34" charset="0"/>
+                <a:ea typeface="Calibri" pitchFamily="34" charset="-122"/>
+                <a:cs typeface="Calibri" pitchFamily="34" charset="-120"/>
+              </a:rPr>
+              <a:t>4.  Cerrar y volver a abrir la terminal</a:t>
+            </a:r>
+            <a:endParaRPr lang="en-US" sz="1100" dirty="0"/>
+          </a:p>
+        </p:txBody>
+      </p:sp>
+      <p:sp>
+        <p:nvSpPr>
+          <p:cNvPr id="18" name="Shape 16"/>
+          <p:cNvSpPr/>
+          <p:nvPr/>
+        </p:nvSpPr>
+        <p:spPr>
+          <a:xfrm>
+            <a:off x="5989320" y="3931920"/>
+            <a:ext cx="1051560" cy="274320"/>
           </a:xfrm>
           <a:prstGeom prst="roundRect">
             <a:avLst>
-              <a:gd name="adj" fmla="val 6944"/>
+              <a:gd name="adj" fmla="val 13333"/>
             </a:avLst>
-          </a:prstGeom>
-          <a:solidFill>
-            <a:srgbClr val="1B2230"/>
-          </a:solidFill>
-          <a:ln/>
-        </p:spPr>
-      </p:sp>
-      <p:sp>
-        <p:nvSpPr>
-          <p:cNvPr id="9" name="Text 7"/>
-          <p:cNvSpPr/>
-          <p:nvPr/>
-        </p:nvSpPr>
-        <p:spPr>
-          <a:xfrm>
-            <a:off x="4937760" y="1865376"/>
-            <a:ext cx="6217920" cy="658368"/>
-          </a:xfrm>
-          <a:prstGeom prst="rect">
-            <a:avLst/>
-          </a:prstGeom>
-          <a:noFill/>
-          <a:ln/>
-        </p:spPr>
-        <p:txBody>
-          <a:bodyPr wrap="square" lIns="0" tIns="0" rIns="0" bIns="0" rtlCol="0" anchor="ctr"/>
-          <a:lstStyle/>
-          <a:p>
-            <a:pPr indent="0" marL="0">
-              <a:buNone/>
-            </a:pPr>
-            <a:r>
-              <a:rPr lang="en-US" sz="1150" b="1" dirty="0">
-                <a:solidFill>
-                  <a:srgbClr val="C9A574"/>
-                </a:solidFill>
-                <a:latin typeface="Courier New" pitchFamily="34" charset="0"/>
-                <a:ea typeface="Courier New" pitchFamily="34" charset="-122"/>
-                <a:cs typeface="Courier New" pitchFamily="34" charset="-120"/>
-              </a:rPr>
-              <a:t>nodejs.org  →  descargar LTS</a:t>
-            </a:r>
-            <a:endParaRPr lang="en-US" sz="1150" dirty="0"/>
-          </a:p>
-        </p:txBody>
-      </p:sp>
-      <p:sp>
-        <p:nvSpPr>
-          <p:cNvPr id="10" name="Shape 8"/>
-          <p:cNvSpPr/>
-          <p:nvPr/>
-        </p:nvSpPr>
-        <p:spPr>
-          <a:xfrm>
-            <a:off x="777240" y="2871216"/>
-            <a:ext cx="347472" cy="347472"/>
-          </a:xfrm>
-          <a:prstGeom prst="ellipse">
-            <a:avLst/>
           </a:prstGeom>
           <a:solidFill>
             <a:srgbClr val="A87C4F"/>
@@ -2480,14 +4211,14 @@
       </p:sp>
       <p:sp>
         <p:nvSpPr>
-          <p:cNvPr id="11" name="Text 9"/>
-          <p:cNvSpPr/>
-          <p:nvPr/>
-        </p:nvSpPr>
-        <p:spPr>
-          <a:xfrm>
-            <a:off x="777240" y="2871216"/>
-            <a:ext cx="347472" cy="347472"/>
+          <p:cNvPr id="19" name="Text 17"/>
+          <p:cNvSpPr/>
+          <p:nvPr/>
+        </p:nvSpPr>
+        <p:spPr>
+          <a:xfrm>
+            <a:off x="5989320" y="3931920"/>
+            <a:ext cx="1051560" cy="274320"/>
           </a:xfrm>
           <a:prstGeom prst="rect">
             <a:avLst/>
@@ -2503,7 +4234,7 @@
               <a:buNone/>
             </a:pPr>
             <a:r>
-              <a:rPr lang="en-US" sz="1200" b="1" dirty="0">
+              <a:rPr lang="en-US" sz="1000" b="1" dirty="0">
                 <a:solidFill>
                   <a:srgbClr val="FFFFFF"/>
                 </a:solidFill>
@@ -2511,38 +4242,38 @@
                 <a:ea typeface="Calibri" pitchFamily="34" charset="-122"/>
                 <a:cs typeface="Calibri" pitchFamily="34" charset="-120"/>
               </a:rPr>
-              <a:t>2</a:t>
-            </a:r>
-            <a:endParaRPr lang="en-US" sz="1200" dirty="0"/>
-          </a:p>
-        </p:txBody>
-      </p:sp>
-      <p:sp>
-        <p:nvSpPr>
-          <p:cNvPr id="12" name="Text 10"/>
-          <p:cNvSpPr/>
-          <p:nvPr/>
-        </p:nvSpPr>
-        <p:spPr>
-          <a:xfrm>
-            <a:off x="1289304" y="2816352"/>
-            <a:ext cx="3200400" cy="274320"/>
-          </a:xfrm>
-          <a:prstGeom prst="rect">
-            <a:avLst/>
-          </a:prstGeom>
-          <a:noFill/>
-          <a:ln/>
-        </p:spPr>
-        <p:txBody>
-          <a:bodyPr wrap="square" lIns="0" tIns="0" rIns="0" bIns="0" rtlCol="0" anchor="ctr"/>
-          <a:lstStyle/>
-          <a:p>
-            <a:pPr indent="0" marL="0">
-              <a:buNone/>
-            </a:pPr>
-            <a:r>
-              <a:rPr lang="en-US" sz="1300" b="1" dirty="0">
+              <a:t>macOS</a:t>
+            </a:r>
+            <a:endParaRPr lang="en-US" sz="1000" dirty="0"/>
+          </a:p>
+        </p:txBody>
+      </p:sp>
+      <p:sp>
+        <p:nvSpPr>
+          <p:cNvPr id="20" name="Text 18"/>
+          <p:cNvSpPr/>
+          <p:nvPr/>
+        </p:nvSpPr>
+        <p:spPr>
+          <a:xfrm>
+            <a:off x="5989320" y="4315968"/>
+            <a:ext cx="4937760" cy="347472"/>
+          </a:xfrm>
+          <a:prstGeom prst="rect">
+            <a:avLst/>
+          </a:prstGeom>
+          <a:noFill/>
+          <a:ln/>
+        </p:spPr>
+        <p:txBody>
+          <a:bodyPr wrap="square" lIns="0" tIns="0" rIns="0" bIns="0" rtlCol="0" anchor="t"/>
+          <a:lstStyle/>
+          <a:p>
+            <a:pPr indent="0" marL="0">
+              <a:buNone/>
+            </a:pPr>
+            <a:r>
+              <a:rPr lang="en-US" sz="1100" dirty="0">
                 <a:solidFill>
                   <a:srgbClr val="1B2230"/>
                 </a:solidFill>
@@ -2550,1187 +4281,126 @@
                 <a:ea typeface="Calibri" pitchFamily="34" charset="-122"/>
                 <a:cs typeface="Calibri" pitchFamily="34" charset="-120"/>
               </a:rPr>
-              <a:t>Abrir Terminal</a:t>
-            </a:r>
-            <a:endParaRPr lang="en-US" sz="1300" dirty="0"/>
-          </a:p>
-        </p:txBody>
-      </p:sp>
-      <p:sp>
-        <p:nvSpPr>
-          <p:cNvPr id="13" name="Text 11"/>
-          <p:cNvSpPr/>
-          <p:nvPr/>
-        </p:nvSpPr>
-        <p:spPr>
-          <a:xfrm>
-            <a:off x="1289304" y="3090672"/>
-            <a:ext cx="3200400" cy="566928"/>
-          </a:xfrm>
-          <a:prstGeom prst="rect">
-            <a:avLst/>
-          </a:prstGeom>
-          <a:noFill/>
-          <a:ln/>
-        </p:spPr>
-        <p:txBody>
-          <a:bodyPr wrap="square" lIns="0" tIns="0" rIns="0" bIns="0" rtlCol="0" anchor="ctr"/>
-          <a:lstStyle/>
-          <a:p>
-            <a:pPr indent="0" marL="0">
-              <a:lnSpc>
-                <a:spcPct val="100000"/>
-              </a:lnSpc>
-              <a:buNone/>
-            </a:pPr>
-            <a:r>
-              <a:rPr lang="en-US" sz="1000" dirty="0">
-                <a:solidFill>
-                  <a:srgbClr val="5A6478"/>
-                </a:solidFill>
-                <a:latin typeface="Calibri" pitchFamily="34" charset="0"/>
-                <a:ea typeface="Calibri" pitchFamily="34" charset="-122"/>
-                <a:cs typeface="Calibri" pitchFamily="34" charset="-120"/>
-              </a:rPr>
-              <a:t>Command + Espacio, escribir «Terminal». Situarse en la carpeta de Responsa.</a:t>
+              <a:t>1.  Entrar a nodejs.org</a:t>
+            </a:r>
+            <a:endParaRPr lang="en-US" sz="1100" dirty="0"/>
+          </a:p>
+        </p:txBody>
+      </p:sp>
+      <p:sp>
+        <p:nvSpPr>
+          <p:cNvPr id="21" name="Text 19"/>
+          <p:cNvSpPr/>
+          <p:nvPr/>
+        </p:nvSpPr>
+        <p:spPr>
+          <a:xfrm>
+            <a:off x="5989320" y="4700016"/>
+            <a:ext cx="4937760" cy="347472"/>
+          </a:xfrm>
+          <a:prstGeom prst="rect">
+            <a:avLst/>
+          </a:prstGeom>
+          <a:noFill/>
+          <a:ln/>
+        </p:spPr>
+        <p:txBody>
+          <a:bodyPr wrap="square" lIns="0" tIns="0" rIns="0" bIns="0" rtlCol="0" anchor="t"/>
+          <a:lstStyle/>
+          <a:p>
+            <a:pPr indent="0" marL="0">
+              <a:buNone/>
+            </a:pPr>
+            <a:r>
+              <a:rPr lang="en-US" sz="1100" dirty="0">
+                <a:solidFill>
+                  <a:srgbClr val="1B2230"/>
+                </a:solidFill>
+                <a:latin typeface="Calibri" pitchFamily="34" charset="0"/>
+                <a:ea typeface="Calibri" pitchFamily="34" charset="-122"/>
+                <a:cs typeface="Calibri" pitchFamily="34" charset="-120"/>
+              </a:rPr>
+              <a:t>2.  Descargar la versión LTS para macOS</a:t>
+            </a:r>
+            <a:endParaRPr lang="en-US" sz="1100" dirty="0"/>
+          </a:p>
+        </p:txBody>
+      </p:sp>
+      <p:sp>
+        <p:nvSpPr>
+          <p:cNvPr id="22" name="Text 20"/>
+          <p:cNvSpPr/>
+          <p:nvPr/>
+        </p:nvSpPr>
+        <p:spPr>
+          <a:xfrm>
+            <a:off x="5989320" y="5084064"/>
+            <a:ext cx="4937760" cy="347472"/>
+          </a:xfrm>
+          <a:prstGeom prst="rect">
+            <a:avLst/>
+          </a:prstGeom>
+          <a:noFill/>
+          <a:ln/>
+        </p:spPr>
+        <p:txBody>
+          <a:bodyPr wrap="square" lIns="0" tIns="0" rIns="0" bIns="0" rtlCol="0" anchor="t"/>
+          <a:lstStyle/>
+          <a:p>
+            <a:pPr indent="0" marL="0">
+              <a:buNone/>
+            </a:pPr>
+            <a:r>
+              <a:rPr lang="en-US" sz="1100" dirty="0">
+                <a:solidFill>
+                  <a:srgbClr val="1B2230"/>
+                </a:solidFill>
+                <a:latin typeface="Calibri" pitchFamily="34" charset="0"/>
+                <a:ea typeface="Calibri" pitchFamily="34" charset="-122"/>
+                <a:cs typeface="Calibri" pitchFamily="34" charset="-120"/>
+              </a:rPr>
+              <a:t>3.  Abrir el archivo .pkg y aceptar todo por defecto</a:t>
+            </a:r>
+            <a:endParaRPr lang="en-US" sz="1100" dirty="0"/>
+          </a:p>
+        </p:txBody>
+      </p:sp>
+      <p:sp>
+        <p:nvSpPr>
+          <p:cNvPr id="23" name="Text 21"/>
+          <p:cNvSpPr/>
+          <p:nvPr/>
+        </p:nvSpPr>
+        <p:spPr>
+          <a:xfrm>
+            <a:off x="5989320" y="5486400"/>
+            <a:ext cx="4937760" cy="457200"/>
+          </a:xfrm>
+          <a:prstGeom prst="rect">
+            <a:avLst/>
+          </a:prstGeom>
+          <a:noFill/>
+          <a:ln/>
+        </p:spPr>
+        <p:txBody>
+          <a:bodyPr wrap="square" lIns="0" tIns="0" rIns="0" bIns="0" rtlCol="0" anchor="t"/>
+          <a:lstStyle/>
+          <a:p>
+            <a:pPr indent="0" marL="0">
+              <a:buNone/>
+            </a:pPr>
+            <a:r>
+              <a:rPr lang="en-US" sz="1000" i="1" dirty="0">
+                <a:solidFill>
+                  <a:srgbClr val="6B2C33"/>
+                </a:solidFill>
+                <a:latin typeface="Calibri" pitchFamily="34" charset="0"/>
+                <a:ea typeface="Calibri" pitchFamily="34" charset="-122"/>
+                <a:cs typeface="Calibri" pitchFamily="34" charset="-120"/>
+              </a:rPr>
+              <a:t>Si macOS advierte sobre «un desarrollador no identificado»: Ajustes del Sistema → Privacidad y seguridad → Abrir de todas formas.</a:t>
             </a:r>
             <a:endParaRPr lang="en-US" sz="1000" dirty="0"/>
-          </a:p>
-        </p:txBody>
-      </p:sp>
-      <p:sp>
-        <p:nvSpPr>
-          <p:cNvPr id="14" name="Shape 12"/>
-          <p:cNvSpPr/>
-          <p:nvPr/>
-        </p:nvSpPr>
-        <p:spPr>
-          <a:xfrm>
-            <a:off x="4709160" y="2834640"/>
-            <a:ext cx="6675120" cy="658368"/>
-          </a:xfrm>
-          <a:prstGeom prst="roundRect">
-            <a:avLst>
-              <a:gd name="adj" fmla="val 6944"/>
-            </a:avLst>
-          </a:prstGeom>
-          <a:solidFill>
-            <a:srgbClr val="1B2230"/>
-          </a:solidFill>
-          <a:ln/>
-        </p:spPr>
-      </p:sp>
-      <p:sp>
-        <p:nvSpPr>
-          <p:cNvPr id="15" name="Text 13"/>
-          <p:cNvSpPr/>
-          <p:nvPr/>
-        </p:nvSpPr>
-        <p:spPr>
-          <a:xfrm>
-            <a:off x="4937760" y="2834640"/>
-            <a:ext cx="6217920" cy="658368"/>
-          </a:xfrm>
-          <a:prstGeom prst="rect">
-            <a:avLst/>
-          </a:prstGeom>
-          <a:noFill/>
-          <a:ln/>
-        </p:spPr>
-        <p:txBody>
-          <a:bodyPr wrap="square" lIns="0" tIns="0" rIns="0" bIns="0" rtlCol="0" anchor="ctr"/>
-          <a:lstStyle/>
-          <a:p>
-            <a:pPr indent="0" marL="0">
-              <a:buNone/>
-            </a:pPr>
-            <a:r>
-              <a:rPr lang="en-US" sz="1150" b="1" dirty="0">
-                <a:solidFill>
-                  <a:srgbClr val="C9A574"/>
-                </a:solidFill>
-                <a:latin typeface="Courier New" pitchFamily="34" charset="0"/>
-                <a:ea typeface="Courier New" pitchFamily="34" charset="-122"/>
-                <a:cs typeface="Courier New" pitchFamily="34" charset="-120"/>
-              </a:rPr>
-              <a:t>cd ~/Responsa</a:t>
-            </a:r>
-            <a:endParaRPr lang="en-US" sz="1150" dirty="0"/>
-          </a:p>
-        </p:txBody>
-      </p:sp>
-      <p:sp>
-        <p:nvSpPr>
-          <p:cNvPr id="16" name="Shape 14"/>
-          <p:cNvSpPr/>
-          <p:nvPr/>
-        </p:nvSpPr>
-        <p:spPr>
-          <a:xfrm>
-            <a:off x="777240" y="3840480"/>
-            <a:ext cx="347472" cy="347472"/>
-          </a:xfrm>
-          <a:prstGeom prst="ellipse">
-            <a:avLst/>
-          </a:prstGeom>
-          <a:solidFill>
-            <a:srgbClr val="A87C4F"/>
-          </a:solidFill>
-          <a:ln/>
-        </p:spPr>
-      </p:sp>
-      <p:sp>
-        <p:nvSpPr>
-          <p:cNvPr id="17" name="Text 15"/>
-          <p:cNvSpPr/>
-          <p:nvPr/>
-        </p:nvSpPr>
-        <p:spPr>
-          <a:xfrm>
-            <a:off x="777240" y="3840480"/>
-            <a:ext cx="347472" cy="347472"/>
-          </a:xfrm>
-          <a:prstGeom prst="rect">
-            <a:avLst/>
-          </a:prstGeom>
-          <a:noFill/>
-          <a:ln/>
-        </p:spPr>
-        <p:txBody>
-          <a:bodyPr wrap="square" lIns="0" tIns="0" rIns="0" bIns="0" rtlCol="0" anchor="ctr"/>
-          <a:lstStyle/>
-          <a:p>
-            <a:pPr algn="ctr" indent="0" marL="0">
-              <a:buNone/>
-            </a:pPr>
-            <a:r>
-              <a:rPr lang="en-US" sz="1200" b="1" dirty="0">
-                <a:solidFill>
-                  <a:srgbClr val="FFFFFF"/>
-                </a:solidFill>
-                <a:latin typeface="Calibri" pitchFamily="34" charset="0"/>
-                <a:ea typeface="Calibri" pitchFamily="34" charset="-122"/>
-                <a:cs typeface="Calibri" pitchFamily="34" charset="-120"/>
-              </a:rPr>
-              <a:t>3</a:t>
-            </a:r>
-            <a:endParaRPr lang="en-US" sz="1200" dirty="0"/>
-          </a:p>
-        </p:txBody>
-      </p:sp>
-      <p:sp>
-        <p:nvSpPr>
-          <p:cNvPr id="18" name="Text 16"/>
-          <p:cNvSpPr/>
-          <p:nvPr/>
-        </p:nvSpPr>
-        <p:spPr>
-          <a:xfrm>
-            <a:off x="1289304" y="3785616"/>
-            <a:ext cx="3200400" cy="274320"/>
-          </a:xfrm>
-          <a:prstGeom prst="rect">
-            <a:avLst/>
-          </a:prstGeom>
-          <a:noFill/>
-          <a:ln/>
-        </p:spPr>
-        <p:txBody>
-          <a:bodyPr wrap="square" lIns="0" tIns="0" rIns="0" bIns="0" rtlCol="0" anchor="ctr"/>
-          <a:lstStyle/>
-          <a:p>
-            <a:pPr indent="0" marL="0">
-              <a:buNone/>
-            </a:pPr>
-            <a:r>
-              <a:rPr lang="en-US" sz="1300" b="1" dirty="0">
-                <a:solidFill>
-                  <a:srgbClr val="1B2230"/>
-                </a:solidFill>
-                <a:latin typeface="Calibri" pitchFamily="34" charset="0"/>
-                <a:ea typeface="Calibri" pitchFamily="34" charset="-122"/>
-                <a:cs typeface="Calibri" pitchFamily="34" charset="-120"/>
-              </a:rPr>
-              <a:t>Ejecutar el instalador</a:t>
-            </a:r>
-            <a:endParaRPr lang="en-US" sz="1300" dirty="0"/>
-          </a:p>
-        </p:txBody>
-      </p:sp>
-      <p:sp>
-        <p:nvSpPr>
-          <p:cNvPr id="19" name="Text 17"/>
-          <p:cNvSpPr/>
-          <p:nvPr/>
-        </p:nvSpPr>
-        <p:spPr>
-          <a:xfrm>
-            <a:off x="1289304" y="4059936"/>
-            <a:ext cx="3200400" cy="566928"/>
-          </a:xfrm>
-          <a:prstGeom prst="rect">
-            <a:avLst/>
-          </a:prstGeom>
-          <a:noFill/>
-          <a:ln/>
-        </p:spPr>
-        <p:txBody>
-          <a:bodyPr wrap="square" lIns="0" tIns="0" rIns="0" bIns="0" rtlCol="0" anchor="ctr"/>
-          <a:lstStyle/>
-          <a:p>
-            <a:pPr indent="0" marL="0">
-              <a:lnSpc>
-                <a:spcPct val="100000"/>
-              </a:lnSpc>
-              <a:buNone/>
-            </a:pPr>
-            <a:r>
-              <a:rPr lang="en-US" sz="1000" dirty="0">
-                <a:solidFill>
-                  <a:srgbClr val="5A6478"/>
-                </a:solidFill>
-                <a:latin typeface="Calibri" pitchFamily="34" charset="0"/>
-                <a:ea typeface="Calibri" pitchFamily="34" charset="-122"/>
-                <a:cs typeface="Calibri" pitchFamily="34" charset="-120"/>
-              </a:rPr>
-              <a:t>El mismo comando que en Windows: el instalador detecta el sistema y escribe la configuración donde corresponde en macOS.</a:t>
-            </a:r>
-            <a:endParaRPr lang="en-US" sz="1000" dirty="0"/>
-          </a:p>
-        </p:txBody>
-      </p:sp>
-      <p:sp>
-        <p:nvSpPr>
-          <p:cNvPr id="20" name="Shape 18"/>
-          <p:cNvSpPr/>
-          <p:nvPr/>
-        </p:nvSpPr>
-        <p:spPr>
-          <a:xfrm>
-            <a:off x="4709160" y="3803904"/>
-            <a:ext cx="6675120" cy="658368"/>
-          </a:xfrm>
-          <a:prstGeom prst="roundRect">
-            <a:avLst>
-              <a:gd name="adj" fmla="val 6944"/>
-            </a:avLst>
-          </a:prstGeom>
-          <a:solidFill>
-            <a:srgbClr val="1B2230"/>
-          </a:solidFill>
-          <a:ln/>
-        </p:spPr>
-      </p:sp>
-      <p:sp>
-        <p:nvSpPr>
-          <p:cNvPr id="21" name="Text 19"/>
-          <p:cNvSpPr/>
-          <p:nvPr/>
-        </p:nvSpPr>
-        <p:spPr>
-          <a:xfrm>
-            <a:off x="4937760" y="3803904"/>
-            <a:ext cx="6217920" cy="658368"/>
-          </a:xfrm>
-          <a:prstGeom prst="rect">
-            <a:avLst/>
-          </a:prstGeom>
-          <a:noFill/>
-          <a:ln/>
-        </p:spPr>
-        <p:txBody>
-          <a:bodyPr wrap="square" lIns="0" tIns="0" rIns="0" bIns="0" rtlCol="0" anchor="ctr"/>
-          <a:lstStyle/>
-          <a:p>
-            <a:pPr indent="0" marL="0">
-              <a:buNone/>
-            </a:pPr>
-            <a:r>
-              <a:rPr lang="en-US" sz="1150" b="1" dirty="0">
-                <a:solidFill>
-                  <a:srgbClr val="C9A574"/>
-                </a:solidFill>
-                <a:latin typeface="Courier New" pitchFamily="34" charset="0"/>
-                <a:ea typeface="Courier New" pitchFamily="34" charset="-122"/>
-                <a:cs typeface="Courier New" pitchFamily="34" charset="-120"/>
-              </a:rPr>
-              <a:t>node instalar.mjs</a:t>
-            </a:r>
-            <a:endParaRPr lang="en-US" sz="1150" dirty="0"/>
-          </a:p>
-        </p:txBody>
-      </p:sp>
-      <p:sp>
-        <p:nvSpPr>
-          <p:cNvPr id="22" name="Shape 20"/>
-          <p:cNvSpPr/>
-          <p:nvPr/>
-        </p:nvSpPr>
-        <p:spPr>
-          <a:xfrm>
-            <a:off x="777240" y="4809744"/>
-            <a:ext cx="347472" cy="347472"/>
-          </a:xfrm>
-          <a:prstGeom prst="ellipse">
-            <a:avLst/>
-          </a:prstGeom>
-          <a:solidFill>
-            <a:srgbClr val="A87C4F"/>
-          </a:solidFill>
-          <a:ln/>
-        </p:spPr>
-      </p:sp>
-      <p:sp>
-        <p:nvSpPr>
-          <p:cNvPr id="23" name="Text 21"/>
-          <p:cNvSpPr/>
-          <p:nvPr/>
-        </p:nvSpPr>
-        <p:spPr>
-          <a:xfrm>
-            <a:off x="777240" y="4809744"/>
-            <a:ext cx="347472" cy="347472"/>
-          </a:xfrm>
-          <a:prstGeom prst="rect">
-            <a:avLst/>
-          </a:prstGeom>
-          <a:noFill/>
-          <a:ln/>
-        </p:spPr>
-        <p:txBody>
-          <a:bodyPr wrap="square" lIns="0" tIns="0" rIns="0" bIns="0" rtlCol="0" anchor="ctr"/>
-          <a:lstStyle/>
-          <a:p>
-            <a:pPr algn="ctr" indent="0" marL="0">
-              <a:buNone/>
-            </a:pPr>
-            <a:r>
-              <a:rPr lang="en-US" sz="1200" b="1" dirty="0">
-                <a:solidFill>
-                  <a:srgbClr val="FFFFFF"/>
-                </a:solidFill>
-                <a:latin typeface="Calibri" pitchFamily="34" charset="0"/>
-                <a:ea typeface="Calibri" pitchFamily="34" charset="-122"/>
-                <a:cs typeface="Calibri" pitchFamily="34" charset="-120"/>
-              </a:rPr>
-              <a:t>4</a:t>
-            </a:r>
-            <a:endParaRPr lang="en-US" sz="1200" dirty="0"/>
-          </a:p>
-        </p:txBody>
-      </p:sp>
-      <p:sp>
-        <p:nvSpPr>
-          <p:cNvPr id="24" name="Text 22"/>
-          <p:cNvSpPr/>
-          <p:nvPr/>
-        </p:nvSpPr>
-        <p:spPr>
-          <a:xfrm>
-            <a:off x="1289304" y="4754880"/>
-            <a:ext cx="3200400" cy="274320"/>
-          </a:xfrm>
-          <a:prstGeom prst="rect">
-            <a:avLst/>
-          </a:prstGeom>
-          <a:noFill/>
-          <a:ln/>
-        </p:spPr>
-        <p:txBody>
-          <a:bodyPr wrap="square" lIns="0" tIns="0" rIns="0" bIns="0" rtlCol="0" anchor="ctr"/>
-          <a:lstStyle/>
-          <a:p>
-            <a:pPr indent="0" marL="0">
-              <a:buNone/>
-            </a:pPr>
-            <a:r>
-              <a:rPr lang="en-US" sz="1300" b="1" dirty="0">
-                <a:solidFill>
-                  <a:srgbClr val="1B2230"/>
-                </a:solidFill>
-                <a:latin typeface="Calibri" pitchFamily="34" charset="0"/>
-                <a:ea typeface="Calibri" pitchFamily="34" charset="-122"/>
-                <a:cs typeface="Calibri" pitchFamily="34" charset="-120"/>
-              </a:rPr>
-              <a:t>Reiniciar Claude Desktop</a:t>
-            </a:r>
-            <a:endParaRPr lang="en-US" sz="1300" dirty="0"/>
-          </a:p>
-        </p:txBody>
-      </p:sp>
-      <p:sp>
-        <p:nvSpPr>
-          <p:cNvPr id="25" name="Text 23"/>
-          <p:cNvSpPr/>
-          <p:nvPr/>
-        </p:nvSpPr>
-        <p:spPr>
-          <a:xfrm>
-            <a:off x="1289304" y="5029200"/>
-            <a:ext cx="3200400" cy="566928"/>
-          </a:xfrm>
-          <a:prstGeom prst="rect">
-            <a:avLst/>
-          </a:prstGeom>
-          <a:noFill/>
-          <a:ln/>
-        </p:spPr>
-        <p:txBody>
-          <a:bodyPr wrap="square" lIns="0" tIns="0" rIns="0" bIns="0" rtlCol="0" anchor="ctr"/>
-          <a:lstStyle/>
-          <a:p>
-            <a:pPr indent="0" marL="0">
-              <a:lnSpc>
-                <a:spcPct val="100000"/>
-              </a:lnSpc>
-              <a:buNone/>
-            </a:pPr>
-            <a:r>
-              <a:rPr lang="en-US" sz="1000" dirty="0">
-                <a:solidFill>
-                  <a:srgbClr val="5A6478"/>
-                </a:solidFill>
-                <a:latin typeface="Calibri" pitchFamily="34" charset="0"/>
-                <a:ea typeface="Calibri" pitchFamily="34" charset="-122"/>
-                <a:cs typeface="Calibri" pitchFamily="34" charset="-120"/>
-              </a:rPr>
-              <a:t>Cerrarlo con Command + Q, no sólo la ventana. Los servidores se cargan al arrancar.</a:t>
-            </a:r>
-            <a:endParaRPr lang="en-US" sz="1000" dirty="0"/>
-          </a:p>
-        </p:txBody>
-      </p:sp>
-      <p:sp>
-        <p:nvSpPr>
-          <p:cNvPr id="26" name="Text 24"/>
-          <p:cNvSpPr/>
-          <p:nvPr/>
-        </p:nvSpPr>
-        <p:spPr>
-          <a:xfrm>
-            <a:off x="777240" y="5870448"/>
-            <a:ext cx="10607040" cy="457200"/>
-          </a:xfrm>
-          <a:prstGeom prst="rect">
-            <a:avLst/>
-          </a:prstGeom>
-          <a:noFill/>
-          <a:ln/>
-        </p:spPr>
-        <p:txBody>
-          <a:bodyPr wrap="square" lIns="0" tIns="0" rIns="0" bIns="0" rtlCol="0" anchor="ctr"/>
-          <a:lstStyle/>
-          <a:p>
-            <a:pPr indent="0" marL="0">
-              <a:buNone/>
-            </a:pPr>
-            <a:r>
-              <a:rPr lang="en-US" sz="1150" i="1" dirty="0">
-                <a:solidFill>
-                  <a:srgbClr val="1B2230"/>
-                </a:solidFill>
-                <a:latin typeface="Calibri" pitchFamily="34" charset="0"/>
-                <a:ea typeface="Calibri" pitchFamily="34" charset="-122"/>
-                <a:cs typeface="Calibri" pitchFamily="34" charset="-120"/>
-              </a:rPr>
-              <a:t>Si macOS advierte sobre un desarrollador no identificado al abrir el instalador de Node, autorizarlo en Ajustes del Sistema → Privacidad y seguridad.</a:t>
-            </a:r>
-            <a:endParaRPr lang="en-US" sz="1150" dirty="0"/>
-          </a:p>
-        </p:txBody>
-      </p:sp>
-    </p:spTree>
-  </p:cSld>
-  <p:clrMapOvr>
-    <a:masterClrMapping/>
-  </p:clrMapOvr>
-</p:sld>
-</file>
-
-<file path=ppt/slides/slide11.xml><?xml version="1.0" encoding="utf-8"?>
-<p:sld xmlns:a="http://schemas.openxmlformats.org/drawingml/2006/main" xmlns:r="http://schemas.openxmlformats.org/officeDocument/2006/relationships" xmlns:p="http://schemas.openxmlformats.org/presentationml/2006/main">
-  <p:cSld name="Slide 11">
-    <p:bg>
-      <p:bgPr>
-        <a:solidFill>
-          <a:srgbClr val="1B2230"/>
-        </a:solidFill>
-      </p:bgPr>
-    </p:bg>
-    <p:spTree>
-      <p:nvGrpSpPr>
-        <p:cNvPr id="1" name=""/>
-        <p:cNvGrpSpPr/>
-        <p:nvPr/>
-      </p:nvGrpSpPr>
-      <p:grpSpPr>
-        <a:xfrm>
-          <a:off x="0" y="0"/>
-          <a:ext cx="0" cy="0"/>
-          <a:chOff x="0" y="0"/>
-          <a:chExt cx="0" cy="0"/>
-        </a:xfrm>
-      </p:grpSpPr>
-      <p:sp>
-        <p:nvSpPr>
-          <p:cNvPr id="2" name="Text 0"/>
-          <p:cNvSpPr/>
-          <p:nvPr/>
-        </p:nvSpPr>
-        <p:spPr>
-          <a:xfrm>
-            <a:off x="777240" y="566928"/>
-            <a:ext cx="7315200" cy="548640"/>
-          </a:xfrm>
-          <a:prstGeom prst="rect">
-            <a:avLst/>
-          </a:prstGeom>
-          <a:noFill/>
-          <a:ln/>
-        </p:spPr>
-        <p:txBody>
-          <a:bodyPr wrap="square" lIns="0" tIns="0" rIns="0" bIns="0" rtlCol="0" anchor="ctr"/>
-          <a:lstStyle/>
-          <a:p>
-            <a:pPr indent="0" marL="0">
-              <a:buNone/>
-            </a:pPr>
-            <a:r>
-              <a:rPr lang="en-US" sz="3200" b="1" dirty="0">
-                <a:solidFill>
-                  <a:srgbClr val="FFFFFF"/>
-                </a:solidFill>
-                <a:latin typeface="Cambria" pitchFamily="34" charset="0"/>
-                <a:ea typeface="Cambria" pitchFamily="34" charset="-122"/>
-                <a:cs typeface="Cambria" pitchFamily="34" charset="-120"/>
-              </a:rPr>
-              <a:t>Qué preguntarle</a:t>
-            </a:r>
-            <a:endParaRPr lang="en-US" sz="3200" dirty="0"/>
-          </a:p>
-        </p:txBody>
-      </p:sp>
-      <p:sp>
-        <p:nvSpPr>
-          <p:cNvPr id="3" name="Text 1"/>
-          <p:cNvSpPr/>
-          <p:nvPr/>
-        </p:nvSpPr>
-        <p:spPr>
-          <a:xfrm>
-            <a:off x="777240" y="1133856"/>
-            <a:ext cx="8229600" cy="365760"/>
-          </a:xfrm>
-          <a:prstGeom prst="rect">
-            <a:avLst/>
-          </a:prstGeom>
-          <a:noFill/>
-          <a:ln/>
-        </p:spPr>
-        <p:txBody>
-          <a:bodyPr wrap="square" lIns="0" tIns="0" rIns="0" bIns="0" rtlCol="0" anchor="ctr"/>
-          <a:lstStyle/>
-          <a:p>
-            <a:pPr indent="0" marL="0">
-              <a:buNone/>
-            </a:pPr>
-            <a:r>
-              <a:rPr lang="en-US" sz="1350" i="1" dirty="0">
-                <a:solidFill>
-                  <a:srgbClr val="8A93A5"/>
-                </a:solidFill>
-                <a:latin typeface="Calibri" pitchFamily="34" charset="0"/>
-                <a:ea typeface="Calibri" pitchFamily="34" charset="-122"/>
-                <a:cs typeface="Calibri" pitchFamily="34" charset="-120"/>
-              </a:rPr>
-              <a:t>En lenguaje natural. Responsa decide a qué fuente ir.</a:t>
-            </a:r>
-            <a:endParaRPr lang="en-US" sz="1350" dirty="0"/>
-          </a:p>
-        </p:txBody>
-      </p:sp>
-      <p:sp>
-        <p:nvSpPr>
-          <p:cNvPr id="4" name="Text 2"/>
-          <p:cNvSpPr/>
-          <p:nvPr/>
-        </p:nvSpPr>
-        <p:spPr>
-          <a:xfrm>
-            <a:off x="777240" y="1755648"/>
-            <a:ext cx="6309360" cy="310896"/>
-          </a:xfrm>
-          <a:prstGeom prst="rect">
-            <a:avLst/>
-          </a:prstGeom>
-          <a:noFill/>
-          <a:ln/>
-        </p:spPr>
-        <p:txBody>
-          <a:bodyPr wrap="square" lIns="0" tIns="0" rIns="0" bIns="0" rtlCol="0" anchor="ctr"/>
-          <a:lstStyle/>
-          <a:p>
-            <a:pPr indent="0" marL="0">
-              <a:buNone/>
-            </a:pPr>
-            <a:r>
-              <a:rPr lang="en-US" sz="1450" dirty="0">
-                <a:solidFill>
-                  <a:srgbClr val="FFFFFF"/>
-                </a:solidFill>
-                <a:latin typeface="Cambria" pitchFamily="34" charset="0"/>
-                <a:ea typeface="Cambria" pitchFamily="34" charset="-122"/>
-                <a:cs typeface="Cambria" pitchFamily="34" charset="-120"/>
-              </a:rPr>
-              <a:t>«Fallos que apliquen el artículo 16 de la Ley 19.496»</a:t>
-            </a:r>
-            <a:endParaRPr lang="en-US" sz="1450" dirty="0"/>
-          </a:p>
-        </p:txBody>
-      </p:sp>
-      <p:sp>
-        <p:nvSpPr>
-          <p:cNvPr id="5" name="Text 3"/>
-          <p:cNvSpPr/>
-          <p:nvPr/>
-        </p:nvSpPr>
-        <p:spPr>
-          <a:xfrm>
-            <a:off x="7269480" y="1792224"/>
-            <a:ext cx="4114800" cy="274320"/>
-          </a:xfrm>
-          <a:prstGeom prst="rect">
-            <a:avLst/>
-          </a:prstGeom>
-          <a:noFill/>
-          <a:ln/>
-        </p:spPr>
-        <p:txBody>
-          <a:bodyPr wrap="square" lIns="0" tIns="0" rIns="0" bIns="0" rtlCol="0" anchor="ctr"/>
-          <a:lstStyle/>
-          <a:p>
-            <a:pPr indent="0" marL="0">
-              <a:buNone/>
-            </a:pPr>
-            <a:r>
-              <a:rPr lang="en-US" sz="1050" dirty="0">
-                <a:solidFill>
-                  <a:srgbClr val="C9A574"/>
-                </a:solidFill>
-                <a:latin typeface="Calibri" pitchFamily="34" charset="0"/>
-                <a:ea typeface="Calibri" pitchFamily="34" charset="-122"/>
-                <a:cs typeface="Calibri" pitchFamily="34" charset="-120"/>
-              </a:rPr>
-              <a:t>Ley Chile + Poder Judicial, filtrando por norma aplicada</a:t>
-            </a:r>
-            <a:endParaRPr lang="en-US" sz="1050" dirty="0"/>
-          </a:p>
-        </p:txBody>
-      </p:sp>
-      <p:sp>
-        <p:nvSpPr>
-          <p:cNvPr id="6" name="Text 4"/>
-          <p:cNvSpPr/>
-          <p:nvPr/>
-        </p:nvSpPr>
-        <p:spPr>
-          <a:xfrm>
-            <a:off x="777240" y="2377440"/>
-            <a:ext cx="6309360" cy="310896"/>
-          </a:xfrm>
-          <a:prstGeom prst="rect">
-            <a:avLst/>
-          </a:prstGeom>
-          <a:noFill/>
-          <a:ln/>
-        </p:spPr>
-        <p:txBody>
-          <a:bodyPr wrap="square" lIns="0" tIns="0" rIns="0" bIns="0" rtlCol="0" anchor="ctr"/>
-          <a:lstStyle/>
-          <a:p>
-            <a:pPr indent="0" marL="0">
-              <a:buNone/>
-            </a:pPr>
-            <a:r>
-              <a:rPr lang="en-US" sz="1450" dirty="0">
-                <a:solidFill>
-                  <a:srgbClr val="FFFFFF"/>
-                </a:solidFill>
-                <a:latin typeface="Cambria" pitchFamily="34" charset="0"/>
-                <a:ea typeface="Cambria" pitchFamily="34" charset="-122"/>
-                <a:cs typeface="Cambria" pitchFamily="34" charset="-120"/>
-              </a:rPr>
-              <a:t>«¿Qué han resuelto los tribunales sobre tutela laboral?»</a:t>
-            </a:r>
-            <a:endParaRPr lang="en-US" sz="1450" dirty="0"/>
-          </a:p>
-        </p:txBody>
-      </p:sp>
-      <p:sp>
-        <p:nvSpPr>
-          <p:cNvPr id="7" name="Text 5"/>
-          <p:cNvSpPr/>
-          <p:nvPr/>
-        </p:nvSpPr>
-        <p:spPr>
-          <a:xfrm>
-            <a:off x="7269480" y="2414016"/>
-            <a:ext cx="4114800" cy="274320"/>
-          </a:xfrm>
-          <a:prstGeom prst="rect">
-            <a:avLst/>
-          </a:prstGeom>
-          <a:noFill/>
-          <a:ln/>
-        </p:spPr>
-        <p:txBody>
-          <a:bodyPr wrap="square" lIns="0" tIns="0" rIns="0" bIns="0" rtlCol="0" anchor="ctr"/>
-          <a:lstStyle/>
-          <a:p>
-            <a:pPr indent="0" marL="0">
-              <a:buNone/>
-            </a:pPr>
-            <a:r>
-              <a:rPr lang="en-US" sz="1050" dirty="0">
-                <a:solidFill>
-                  <a:srgbClr val="C9A574"/>
-                </a:solidFill>
-                <a:latin typeface="Calibri" pitchFamily="34" charset="0"/>
-                <a:ea typeface="Calibri" pitchFamily="34" charset="-122"/>
-                <a:cs typeface="Calibri" pitchFamily="34" charset="-120"/>
-              </a:rPr>
-              <a:t>Los siete buscadores del Poder Judicial a la vez</a:t>
-            </a:r>
-            <a:endParaRPr lang="en-US" sz="1050" dirty="0"/>
-          </a:p>
-        </p:txBody>
-      </p:sp>
-      <p:sp>
-        <p:nvSpPr>
-          <p:cNvPr id="8" name="Text 6"/>
-          <p:cNvSpPr/>
-          <p:nvPr/>
-        </p:nvSpPr>
-        <p:spPr>
-          <a:xfrm>
-            <a:off x="777240" y="2999232"/>
-            <a:ext cx="6309360" cy="310896"/>
-          </a:xfrm>
-          <a:prstGeom prst="rect">
-            <a:avLst/>
-          </a:prstGeom>
-          <a:noFill/>
-          <a:ln/>
-        </p:spPr>
-        <p:txBody>
-          <a:bodyPr wrap="square" lIns="0" tIns="0" rIns="0" bIns="0" rtlCol="0" anchor="ctr"/>
-          <a:lstStyle/>
-          <a:p>
-            <a:pPr indent="0" marL="0">
-              <a:buNone/>
-            </a:pPr>
-            <a:r>
-              <a:rPr lang="en-US" sz="1450" dirty="0">
-                <a:solidFill>
-                  <a:srgbClr val="FFFFFF"/>
-                </a:solidFill>
-                <a:latin typeface="Cambria" pitchFamily="34" charset="0"/>
-                <a:ea typeface="Cambria" pitchFamily="34" charset="-122"/>
-                <a:cs typeface="Cambria" pitchFamily="34" charset="-120"/>
-              </a:rPr>
-              <a:t>«¿Es constitucional esta norma?»</a:t>
-            </a:r>
-            <a:endParaRPr lang="en-US" sz="1450" dirty="0"/>
-          </a:p>
-        </p:txBody>
-      </p:sp>
-      <p:sp>
-        <p:nvSpPr>
-          <p:cNvPr id="9" name="Text 7"/>
-          <p:cNvSpPr/>
-          <p:nvPr/>
-        </p:nvSpPr>
-        <p:spPr>
-          <a:xfrm>
-            <a:off x="7269480" y="3035808"/>
-            <a:ext cx="4114800" cy="274320"/>
-          </a:xfrm>
-          <a:prstGeom prst="rect">
-            <a:avLst/>
-          </a:prstGeom>
-          <a:noFill/>
-          <a:ln/>
-        </p:spPr>
-        <p:txBody>
-          <a:bodyPr wrap="square" lIns="0" tIns="0" rIns="0" bIns="0" rtlCol="0" anchor="ctr"/>
-          <a:lstStyle/>
-          <a:p>
-            <a:pPr indent="0" marL="0">
-              <a:buNone/>
-            </a:pPr>
-            <a:r>
-              <a:rPr lang="en-US" sz="1050" dirty="0">
-                <a:solidFill>
-                  <a:srgbClr val="C9A574"/>
-                </a:solidFill>
-                <a:latin typeface="Calibri" pitchFamily="34" charset="0"/>
-                <a:ea typeface="Calibri" pitchFamily="34" charset="-122"/>
-                <a:cs typeface="Calibri" pitchFamily="34" charset="-120"/>
-              </a:rPr>
-              <a:t>Tribunal Constitucional, con los párrafos pertinentes y el PDF</a:t>
-            </a:r>
-            <a:endParaRPr lang="en-US" sz="1050" dirty="0"/>
-          </a:p>
-        </p:txBody>
-      </p:sp>
-      <p:sp>
-        <p:nvSpPr>
-          <p:cNvPr id="10" name="Text 8"/>
-          <p:cNvSpPr/>
-          <p:nvPr/>
-        </p:nvSpPr>
-        <p:spPr>
-          <a:xfrm>
-            <a:off x="777240" y="3621024"/>
-            <a:ext cx="6309360" cy="310896"/>
-          </a:xfrm>
-          <a:prstGeom prst="rect">
-            <a:avLst/>
-          </a:prstGeom>
-          <a:noFill/>
-          <a:ln/>
-        </p:spPr>
-        <p:txBody>
-          <a:bodyPr wrap="square" lIns="0" tIns="0" rIns="0" bIns="0" rtlCol="0" anchor="ctr"/>
-          <a:lstStyle/>
-          <a:p>
-            <a:pPr indent="0" marL="0">
-              <a:buNone/>
-            </a:pPr>
-            <a:r>
-              <a:rPr lang="en-US" sz="1450" dirty="0">
-                <a:solidFill>
-                  <a:srgbClr val="FFFFFF"/>
-                </a:solidFill>
-                <a:latin typeface="Cambria" pitchFamily="34" charset="0"/>
-                <a:ea typeface="Cambria" pitchFamily="34" charset="-122"/>
-                <a:cs typeface="Cambria" pitchFamily="34" charset="-120"/>
-              </a:rPr>
-              <a:t>«Dictámenes sobre sala cuna»</a:t>
-            </a:r>
-            <a:endParaRPr lang="en-US" sz="1450" dirty="0"/>
-          </a:p>
-        </p:txBody>
-      </p:sp>
-      <p:sp>
-        <p:nvSpPr>
-          <p:cNvPr id="11" name="Text 9"/>
-          <p:cNvSpPr/>
-          <p:nvPr/>
-        </p:nvSpPr>
-        <p:spPr>
-          <a:xfrm>
-            <a:off x="7269480" y="3657600"/>
-            <a:ext cx="4114800" cy="274320"/>
-          </a:xfrm>
-          <a:prstGeom prst="rect">
-            <a:avLst/>
-          </a:prstGeom>
-          <a:noFill/>
-          <a:ln/>
-        </p:spPr>
-        <p:txBody>
-          <a:bodyPr wrap="square" lIns="0" tIns="0" rIns="0" bIns="0" rtlCol="0" anchor="ctr"/>
-          <a:lstStyle/>
-          <a:p>
-            <a:pPr indent="0" marL="0">
-              <a:buNone/>
-            </a:pPr>
-            <a:r>
-              <a:rPr lang="en-US" sz="1050" dirty="0">
-                <a:solidFill>
-                  <a:srgbClr val="C9A574"/>
-                </a:solidFill>
-                <a:latin typeface="Calibri" pitchFamily="34" charset="0"/>
-                <a:ea typeface="Calibri" pitchFamily="34" charset="-122"/>
-                <a:cs typeface="Calibri" pitchFamily="34" charset="-120"/>
-              </a:rPr>
-              <a:t>Dirección del Trabajo, o Contraloría si es función pública</a:t>
-            </a:r>
-            <a:endParaRPr lang="en-US" sz="1050" dirty="0"/>
-          </a:p>
-        </p:txBody>
-      </p:sp>
-      <p:sp>
-        <p:nvSpPr>
-          <p:cNvPr id="12" name="Text 10"/>
-          <p:cNvSpPr/>
-          <p:nvPr/>
-        </p:nvSpPr>
-        <p:spPr>
-          <a:xfrm>
-            <a:off x="777240" y="4242816"/>
-            <a:ext cx="6309360" cy="310896"/>
-          </a:xfrm>
-          <a:prstGeom prst="rect">
-            <a:avLst/>
-          </a:prstGeom>
-          <a:noFill/>
-          <a:ln/>
-        </p:spPr>
-        <p:txBody>
-          <a:bodyPr wrap="square" lIns="0" tIns="0" rIns="0" bIns="0" rtlCol="0" anchor="ctr"/>
-          <a:lstStyle/>
-          <a:p>
-            <a:pPr indent="0" marL="0">
-              <a:buNone/>
-            </a:pPr>
-            <a:r>
-              <a:rPr lang="en-US" sz="1450" dirty="0">
-                <a:solidFill>
-                  <a:srgbClr val="FFFFFF"/>
-                </a:solidFill>
-                <a:latin typeface="Cambria" pitchFamily="34" charset="0"/>
-                <a:ea typeface="Cambria" pitchFamily="34" charset="-122"/>
-                <a:cs typeface="Cambria" pitchFamily="34" charset="-120"/>
-              </a:rPr>
-              <a:t>«Arbitrajes sobre contratos de construcción»</a:t>
-            </a:r>
-            <a:endParaRPr lang="en-US" sz="1450" dirty="0"/>
-          </a:p>
-        </p:txBody>
-      </p:sp>
-      <p:sp>
-        <p:nvSpPr>
-          <p:cNvPr id="13" name="Text 11"/>
-          <p:cNvSpPr/>
-          <p:nvPr/>
-        </p:nvSpPr>
-        <p:spPr>
-          <a:xfrm>
-            <a:off x="7269480" y="4279392"/>
-            <a:ext cx="4114800" cy="274320"/>
-          </a:xfrm>
-          <a:prstGeom prst="rect">
-            <a:avLst/>
-          </a:prstGeom>
-          <a:noFill/>
-          <a:ln/>
-        </p:spPr>
-        <p:txBody>
-          <a:bodyPr wrap="square" lIns="0" tIns="0" rIns="0" bIns="0" rtlCol="0" anchor="ctr"/>
-          <a:lstStyle/>
-          <a:p>
-            <a:pPr indent="0" marL="0">
-              <a:buNone/>
-            </a:pPr>
-            <a:r>
-              <a:rPr lang="en-US" sz="1050" dirty="0">
-                <a:solidFill>
-                  <a:srgbClr val="C9A574"/>
-                </a:solidFill>
-                <a:latin typeface="Calibri" pitchFamily="34" charset="0"/>
-                <a:ea typeface="Calibri" pitchFamily="34" charset="-122"/>
-                <a:cs typeface="Calibri" pitchFamily="34" charset="-120"/>
-              </a:rPr>
-              <a:t>Laudos del CAM Santiago, con enlace al PDF</a:t>
-            </a:r>
-            <a:endParaRPr lang="en-US" sz="1050" dirty="0"/>
-          </a:p>
-        </p:txBody>
-      </p:sp>
-      <p:sp>
-        <p:nvSpPr>
-          <p:cNvPr id="14" name="Text 12"/>
-          <p:cNvSpPr/>
-          <p:nvPr/>
-        </p:nvSpPr>
-        <p:spPr>
-          <a:xfrm>
-            <a:off x="777240" y="4864608"/>
-            <a:ext cx="6309360" cy="310896"/>
-          </a:xfrm>
-          <a:prstGeom prst="rect">
-            <a:avLst/>
-          </a:prstGeom>
-          <a:noFill/>
-          <a:ln/>
-        </p:spPr>
-        <p:txBody>
-          <a:bodyPr wrap="square" lIns="0" tIns="0" rIns="0" bIns="0" rtlCol="0" anchor="ctr"/>
-          <a:lstStyle/>
-          <a:p>
-            <a:pPr indent="0" marL="0">
-              <a:buNone/>
-            </a:pPr>
-            <a:r>
-              <a:rPr lang="en-US" sz="1450" dirty="0">
-                <a:solidFill>
-                  <a:srgbClr val="FFFFFF"/>
-                </a:solidFill>
-                <a:latin typeface="Cambria" pitchFamily="34" charset="0"/>
-                <a:ea typeface="Cambria" pitchFamily="34" charset="-122"/>
-                <a:cs typeface="Cambria" pitchFamily="34" charset="-120"/>
-              </a:rPr>
-              <a:t>«¿Cuánto demora un juicio laboral en Valparaíso?»</a:t>
-            </a:r>
-            <a:endParaRPr lang="en-US" sz="1450" dirty="0"/>
-          </a:p>
-        </p:txBody>
-      </p:sp>
-      <p:sp>
-        <p:nvSpPr>
-          <p:cNvPr id="15" name="Text 13"/>
-          <p:cNvSpPr/>
-          <p:nvPr/>
-        </p:nvSpPr>
-        <p:spPr>
-          <a:xfrm>
-            <a:off x="7269480" y="4901184"/>
-            <a:ext cx="4114800" cy="274320"/>
-          </a:xfrm>
-          <a:prstGeom prst="rect">
-            <a:avLst/>
-          </a:prstGeom>
-          <a:noFill/>
-          <a:ln/>
-        </p:spPr>
-        <p:txBody>
-          <a:bodyPr wrap="square" lIns="0" tIns="0" rIns="0" bIns="0" rtlCol="0" anchor="ctr"/>
-          <a:lstStyle/>
-          <a:p>
-            <a:pPr indent="0" marL="0">
-              <a:buNone/>
-            </a:pPr>
-            <a:r>
-              <a:rPr lang="en-US" sz="1050" dirty="0">
-                <a:solidFill>
-                  <a:srgbClr val="C9A574"/>
-                </a:solidFill>
-                <a:latin typeface="Calibri" pitchFamily="34" charset="0"/>
-                <a:ea typeface="Calibri" pitchFamily="34" charset="-122"/>
-                <a:cs typeface="Calibri" pitchFamily="34" charset="-120"/>
-              </a:rPr>
-              <a:t>Estadísticas oficiales del Poder Judicial</a:t>
-            </a:r>
-            <a:endParaRPr lang="en-US" sz="1050" dirty="0"/>
-          </a:p>
-        </p:txBody>
-      </p:sp>
-      <p:sp>
-        <p:nvSpPr>
-          <p:cNvPr id="16" name="Text 14"/>
-          <p:cNvSpPr/>
-          <p:nvPr/>
-        </p:nvSpPr>
-        <p:spPr>
-          <a:xfrm>
-            <a:off x="777240" y="5486400"/>
-            <a:ext cx="6309360" cy="310896"/>
-          </a:xfrm>
-          <a:prstGeom prst="rect">
-            <a:avLst/>
-          </a:prstGeom>
-          <a:noFill/>
-          <a:ln/>
-        </p:spPr>
-        <p:txBody>
-          <a:bodyPr wrap="square" lIns="0" tIns="0" rIns="0" bIns="0" rtlCol="0" anchor="ctr"/>
-          <a:lstStyle/>
-          <a:p>
-            <a:pPr indent="0" marL="0">
-              <a:buNone/>
-            </a:pPr>
-            <a:r>
-              <a:rPr lang="en-US" sz="1450" dirty="0">
-                <a:solidFill>
-                  <a:srgbClr val="FFFFFF"/>
-                </a:solidFill>
-                <a:latin typeface="Cambria" pitchFamily="34" charset="0"/>
-                <a:ea typeface="Cambria" pitchFamily="34" charset="-122"/>
-                <a:cs typeface="Cambria" pitchFamily="34" charset="-120"/>
-              </a:rPr>
-              <a:t>«¿A cuánto equivalen 50 UTM hoy?»</a:t>
-            </a:r>
-            <a:endParaRPr lang="en-US" sz="1450" dirty="0"/>
-          </a:p>
-        </p:txBody>
-      </p:sp>
-      <p:sp>
-        <p:nvSpPr>
-          <p:cNvPr id="17" name="Text 15"/>
-          <p:cNvSpPr/>
-          <p:nvPr/>
-        </p:nvSpPr>
-        <p:spPr>
-          <a:xfrm>
-            <a:off x="7269480" y="5522976"/>
-            <a:ext cx="4114800" cy="274320"/>
-          </a:xfrm>
-          <a:prstGeom prst="rect">
-            <a:avLst/>
-          </a:prstGeom>
-          <a:noFill/>
-          <a:ln/>
-        </p:spPr>
-        <p:txBody>
-          <a:bodyPr wrap="square" lIns="0" tIns="0" rIns="0" bIns="0" rtlCol="0" anchor="ctr"/>
-          <a:lstStyle/>
-          <a:p>
-            <a:pPr indent="0" marL="0">
-              <a:buNone/>
-            </a:pPr>
-            <a:r>
-              <a:rPr lang="en-US" sz="1050" dirty="0">
-                <a:solidFill>
-                  <a:srgbClr val="C9A574"/>
-                </a:solidFill>
-                <a:latin typeface="Calibri" pitchFamily="34" charset="0"/>
-                <a:ea typeface="Calibri" pitchFamily="34" charset="-122"/>
-                <a:cs typeface="Calibri" pitchFamily="34" charset="-120"/>
-              </a:rPr>
-              <a:t>Valores del Banco Central y del SII</a:t>
-            </a:r>
-            <a:endParaRPr lang="en-US" sz="1050" dirty="0"/>
-          </a:p>
-        </p:txBody>
-      </p:sp>
-      <p:sp>
-        <p:nvSpPr>
-          <p:cNvPr id="18" name="Text 16"/>
-          <p:cNvSpPr/>
-          <p:nvPr/>
-        </p:nvSpPr>
-        <p:spPr>
-          <a:xfrm>
-            <a:off x="777240" y="6035040"/>
-            <a:ext cx="10607040" cy="411480"/>
-          </a:xfrm>
-          <a:prstGeom prst="rect">
-            <a:avLst/>
-          </a:prstGeom>
-          <a:noFill/>
-          <a:ln/>
-        </p:spPr>
-        <p:txBody>
-          <a:bodyPr wrap="square" lIns="0" tIns="0" rIns="0" bIns="0" rtlCol="0" anchor="t"/>
-          <a:lstStyle/>
-          <a:p>
-            <a:pPr indent="0" marL="0">
-              <a:buNone/>
-            </a:pPr>
-            <a:r>
-              <a:rPr lang="en-US" sz="1100" i="1" dirty="0">
-                <a:solidFill>
-                  <a:srgbClr val="8A93A5"/>
-                </a:solidFill>
-                <a:latin typeface="Calibri" pitchFamily="34" charset="0"/>
-                <a:ea typeface="Calibri" pitchFamily="34" charset="-122"/>
-                <a:cs typeface="Calibri" pitchFamily="34" charset="-120"/>
-              </a:rPr>
-              <a:t>Una sola pregunta puede combinar varias fuentes: ubicar la norma, leer su texto vigente, traer los fallos que la aplican y sumar el criterio administrativo.</a:t>
-            </a:r>
-            <a:endParaRPr lang="en-US" sz="1100" dirty="0"/>
           </a:p>
         </p:txBody>
       </p:sp>
@@ -3774,6 +4444,4799 @@
         </p:nvSpPr>
         <p:spPr>
           <a:xfrm>
+            <a:off x="777240" y="566928"/>
+            <a:ext cx="10634472" cy="566928"/>
+          </a:xfrm>
+          <a:prstGeom prst="rect">
+            <a:avLst/>
+          </a:prstGeom>
+          <a:noFill/>
+          <a:ln/>
+        </p:spPr>
+        <p:txBody>
+          <a:bodyPr wrap="square" lIns="0" tIns="0" rIns="0" bIns="0" rtlCol="0" anchor="ctr"/>
+          <a:lstStyle/>
+          <a:p>
+            <a:pPr indent="0" marL="0">
+              <a:buNone/>
+            </a:pPr>
+            <a:r>
+              <a:rPr lang="en-US" sz="3200" b="1" dirty="0">
+                <a:solidFill>
+                  <a:srgbClr val="1B2230"/>
+                </a:solidFill>
+                <a:latin typeface="Cambria" pitchFamily="34" charset="0"/>
+                <a:ea typeface="Cambria" pitchFamily="34" charset="-122"/>
+                <a:cs typeface="Cambria" pitchFamily="34" charset="-120"/>
+              </a:rPr>
+              <a:t>Paso 2 · Descargar Responsa</a:t>
+            </a:r>
+            <a:endParaRPr lang="en-US" sz="3200" dirty="0"/>
+          </a:p>
+        </p:txBody>
+      </p:sp>
+      <p:sp>
+        <p:nvSpPr>
+          <p:cNvPr id="3" name="Text 1"/>
+          <p:cNvSpPr/>
+          <p:nvPr/>
+        </p:nvSpPr>
+        <p:spPr>
+          <a:xfrm>
+            <a:off x="777240" y="1152144"/>
+            <a:ext cx="9537192" cy="384048"/>
+          </a:xfrm>
+          <a:prstGeom prst="rect">
+            <a:avLst/>
+          </a:prstGeom>
+          <a:noFill/>
+          <a:ln/>
+        </p:spPr>
+        <p:txBody>
+          <a:bodyPr wrap="square" lIns="0" tIns="0" rIns="0" bIns="0" rtlCol="0" anchor="ctr"/>
+          <a:lstStyle/>
+          <a:p>
+            <a:pPr indent="0" marL="0">
+              <a:buNone/>
+            </a:pPr>
+            <a:r>
+              <a:rPr lang="en-US" sz="1350" i="1" dirty="0">
+                <a:solidFill>
+                  <a:srgbClr val="5A6478"/>
+                </a:solidFill>
+                <a:latin typeface="Calibri" pitchFamily="34" charset="0"/>
+                <a:ea typeface="Calibri" pitchFamily="34" charset="-122"/>
+                <a:cs typeface="Calibri" pitchFamily="34" charset="-120"/>
+              </a:rPr>
+              <a:t>Y dejarlo en un lugar donde no se vaya a borrar por error</a:t>
+            </a:r>
+            <a:endParaRPr lang="en-US" sz="1350" dirty="0"/>
+          </a:p>
+        </p:txBody>
+      </p:sp>
+      <p:sp>
+        <p:nvSpPr>
+          <p:cNvPr id="4" name="Shape 2"/>
+          <p:cNvSpPr/>
+          <p:nvPr/>
+        </p:nvSpPr>
+        <p:spPr>
+          <a:xfrm>
+            <a:off x="777240" y="1828800"/>
+            <a:ext cx="5120640" cy="2468880"/>
+          </a:xfrm>
+          <a:prstGeom prst="roundRect">
+            <a:avLst>
+              <a:gd name="adj" fmla="val 2222"/>
+            </a:avLst>
+          </a:prstGeom>
+          <a:solidFill>
+            <a:srgbClr val="FFFFFF"/>
+          </a:solidFill>
+          <a:ln w="9525">
+            <a:solidFill>
+              <a:srgbClr val="E3DED3"/>
+            </a:solidFill>
+            <a:prstDash val="solid"/>
+          </a:ln>
+        </p:spPr>
+      </p:sp>
+      <p:sp>
+        <p:nvSpPr>
+          <p:cNvPr id="5" name="Text 3"/>
+          <p:cNvSpPr/>
+          <p:nvPr/>
+        </p:nvSpPr>
+        <p:spPr>
+          <a:xfrm>
+            <a:off x="1069848" y="2066544"/>
+            <a:ext cx="4480560" cy="274320"/>
+          </a:xfrm>
+          <a:prstGeom prst="rect">
+            <a:avLst/>
+          </a:prstGeom>
+          <a:noFill/>
+          <a:ln/>
+        </p:spPr>
+        <p:txBody>
+          <a:bodyPr wrap="square" lIns="0" tIns="0" rIns="0" bIns="0" rtlCol="0" anchor="t"/>
+          <a:lstStyle/>
+          <a:p>
+            <a:pPr indent="0" marL="0">
+              <a:buNone/>
+            </a:pPr>
+            <a:r>
+              <a:rPr lang="en-US" sz="1250" b="1" dirty="0">
+                <a:solidFill>
+                  <a:srgbClr val="1B2230"/>
+                </a:solidFill>
+                <a:latin typeface="Calibri" pitchFamily="34" charset="0"/>
+                <a:ea typeface="Calibri" pitchFamily="34" charset="-122"/>
+                <a:cs typeface="Calibri" pitchFamily="34" charset="-120"/>
+              </a:rPr>
+              <a:t>Opción A · descarga directa</a:t>
+            </a:r>
+            <a:endParaRPr lang="en-US" sz="1250" dirty="0"/>
+          </a:p>
+        </p:txBody>
+      </p:sp>
+      <p:sp>
+        <p:nvSpPr>
+          <p:cNvPr id="6" name="Text 4"/>
+          <p:cNvSpPr/>
+          <p:nvPr/>
+        </p:nvSpPr>
+        <p:spPr>
+          <a:xfrm>
+            <a:off x="1069848" y="2432304"/>
+            <a:ext cx="4480560" cy="329184"/>
+          </a:xfrm>
+          <a:prstGeom prst="rect">
+            <a:avLst/>
+          </a:prstGeom>
+          <a:noFill/>
+          <a:ln/>
+        </p:spPr>
+        <p:txBody>
+          <a:bodyPr wrap="square" lIns="0" tIns="0" rIns="0" bIns="0" rtlCol="0" anchor="t"/>
+          <a:lstStyle/>
+          <a:p>
+            <a:pPr indent="0" marL="0">
+              <a:buNone/>
+            </a:pPr>
+            <a:r>
+              <a:rPr lang="en-US" sz="1100" dirty="0">
+                <a:solidFill>
+                  <a:srgbClr val="5A6478"/>
+                </a:solidFill>
+                <a:latin typeface="Calibri" pitchFamily="34" charset="0"/>
+                <a:ea typeface="Calibri" pitchFamily="34" charset="-122"/>
+                <a:cs typeface="Calibri" pitchFamily="34" charset="-120"/>
+              </a:rPr>
+              <a:t>1.  Entrar a la página del proyecto en GitHub</a:t>
+            </a:r>
+            <a:endParaRPr lang="en-US" sz="1100" dirty="0"/>
+          </a:p>
+        </p:txBody>
+      </p:sp>
+      <p:sp>
+        <p:nvSpPr>
+          <p:cNvPr id="7" name="Text 5"/>
+          <p:cNvSpPr/>
+          <p:nvPr/>
+        </p:nvSpPr>
+        <p:spPr>
+          <a:xfrm>
+            <a:off x="1069848" y="2798064"/>
+            <a:ext cx="4480560" cy="329184"/>
+          </a:xfrm>
+          <a:prstGeom prst="rect">
+            <a:avLst/>
+          </a:prstGeom>
+          <a:noFill/>
+          <a:ln/>
+        </p:spPr>
+        <p:txBody>
+          <a:bodyPr wrap="square" lIns="0" tIns="0" rIns="0" bIns="0" rtlCol="0" anchor="t"/>
+          <a:lstStyle/>
+          <a:p>
+            <a:pPr indent="0" marL="0">
+              <a:buNone/>
+            </a:pPr>
+            <a:r>
+              <a:rPr lang="en-US" sz="1100" dirty="0">
+                <a:solidFill>
+                  <a:srgbClr val="5A6478"/>
+                </a:solidFill>
+                <a:latin typeface="Calibri" pitchFamily="34" charset="0"/>
+                <a:ea typeface="Calibri" pitchFamily="34" charset="-122"/>
+                <a:cs typeface="Calibri" pitchFamily="34" charset="-120"/>
+              </a:rPr>
+              <a:t>2.  Pulsar el botón verde Code → Download ZIP</a:t>
+            </a:r>
+            <a:endParaRPr lang="en-US" sz="1100" dirty="0"/>
+          </a:p>
+        </p:txBody>
+      </p:sp>
+      <p:sp>
+        <p:nvSpPr>
+          <p:cNvPr id="8" name="Text 6"/>
+          <p:cNvSpPr/>
+          <p:nvPr/>
+        </p:nvSpPr>
+        <p:spPr>
+          <a:xfrm>
+            <a:off x="1069848" y="3163824"/>
+            <a:ext cx="4480560" cy="329184"/>
+          </a:xfrm>
+          <a:prstGeom prst="rect">
+            <a:avLst/>
+          </a:prstGeom>
+          <a:noFill/>
+          <a:ln/>
+        </p:spPr>
+        <p:txBody>
+          <a:bodyPr wrap="square" lIns="0" tIns="0" rIns="0" bIns="0" rtlCol="0" anchor="t"/>
+          <a:lstStyle/>
+          <a:p>
+            <a:pPr indent="0" marL="0">
+              <a:buNone/>
+            </a:pPr>
+            <a:r>
+              <a:rPr lang="en-US" sz="1100" dirty="0">
+                <a:solidFill>
+                  <a:srgbClr val="5A6478"/>
+                </a:solidFill>
+                <a:latin typeface="Calibri" pitchFamily="34" charset="0"/>
+                <a:ea typeface="Calibri" pitchFamily="34" charset="-122"/>
+                <a:cs typeface="Calibri" pitchFamily="34" charset="-120"/>
+              </a:rPr>
+              <a:t>3.  Descomprimir el archivo</a:t>
+            </a:r>
+            <a:endParaRPr lang="en-US" sz="1100" dirty="0"/>
+          </a:p>
+        </p:txBody>
+      </p:sp>
+      <p:sp>
+        <p:nvSpPr>
+          <p:cNvPr id="9" name="Text 7"/>
+          <p:cNvSpPr/>
+          <p:nvPr/>
+        </p:nvSpPr>
+        <p:spPr>
+          <a:xfrm>
+            <a:off x="1069848" y="3529584"/>
+            <a:ext cx="4480560" cy="329184"/>
+          </a:xfrm>
+          <a:prstGeom prst="rect">
+            <a:avLst/>
+          </a:prstGeom>
+          <a:noFill/>
+          <a:ln/>
+        </p:spPr>
+        <p:txBody>
+          <a:bodyPr wrap="square" lIns="0" tIns="0" rIns="0" bIns="0" rtlCol="0" anchor="t"/>
+          <a:lstStyle/>
+          <a:p>
+            <a:pPr indent="0" marL="0">
+              <a:buNone/>
+            </a:pPr>
+            <a:r>
+              <a:rPr lang="en-US" sz="1100" dirty="0">
+                <a:solidFill>
+                  <a:srgbClr val="5A6478"/>
+                </a:solidFill>
+                <a:latin typeface="Calibri" pitchFamily="34" charset="0"/>
+                <a:ea typeface="Calibri" pitchFamily="34" charset="-122"/>
+                <a:cs typeface="Calibri" pitchFamily="34" charset="-120"/>
+              </a:rPr>
+              <a:t>4.  Mover la carpeta a tu carpeta de usuario</a:t>
+            </a:r>
+            <a:endParaRPr lang="en-US" sz="1100" dirty="0"/>
+          </a:p>
+        </p:txBody>
+      </p:sp>
+      <p:sp>
+        <p:nvSpPr>
+          <p:cNvPr id="10" name="Text 8"/>
+          <p:cNvSpPr/>
+          <p:nvPr/>
+        </p:nvSpPr>
+        <p:spPr>
+          <a:xfrm>
+            <a:off x="1069848" y="3840480"/>
+            <a:ext cx="4572000" cy="274320"/>
+          </a:xfrm>
+          <a:prstGeom prst="rect">
+            <a:avLst/>
+          </a:prstGeom>
+          <a:noFill/>
+          <a:ln/>
+        </p:spPr>
+        <p:txBody>
+          <a:bodyPr wrap="square" lIns="0" tIns="0" rIns="0" bIns="0" rtlCol="0" anchor="t"/>
+          <a:lstStyle/>
+          <a:p>
+            <a:pPr indent="0" marL="0">
+              <a:buNone/>
+            </a:pPr>
+            <a:r>
+              <a:rPr lang="en-US" sz="950" dirty="0">
+                <a:solidFill>
+                  <a:srgbClr val="1B2230"/>
+                </a:solidFill>
+                <a:latin typeface="Courier New" pitchFamily="34" charset="0"/>
+                <a:ea typeface="Courier New" pitchFamily="34" charset="-122"/>
+                <a:cs typeface="Courier New" pitchFamily="34" charset="-120"/>
+              </a:rPr>
+              <a:t>Windows:  C:\Users\TU_USUARIO\Responsa          macOS:  ~/Responsa</a:t>
+            </a:r>
+            <a:endParaRPr lang="en-US" sz="950" dirty="0"/>
+          </a:p>
+        </p:txBody>
+      </p:sp>
+      <p:sp>
+        <p:nvSpPr>
+          <p:cNvPr id="11" name="Shape 9"/>
+          <p:cNvSpPr/>
+          <p:nvPr/>
+        </p:nvSpPr>
+        <p:spPr>
+          <a:xfrm>
+            <a:off x="777240" y="4526280"/>
+            <a:ext cx="5120640" cy="1234440"/>
+          </a:xfrm>
+          <a:prstGeom prst="roundRect">
+            <a:avLst>
+              <a:gd name="adj" fmla="val 4444"/>
+            </a:avLst>
+          </a:prstGeom>
+          <a:solidFill>
+            <a:srgbClr val="FFFFFF"/>
+          </a:solidFill>
+          <a:ln w="9525">
+            <a:solidFill>
+              <a:srgbClr val="E3DED3"/>
+            </a:solidFill>
+            <a:prstDash val="solid"/>
+          </a:ln>
+        </p:spPr>
+      </p:sp>
+      <p:sp>
+        <p:nvSpPr>
+          <p:cNvPr id="12" name="Text 10"/>
+          <p:cNvSpPr/>
+          <p:nvPr/>
+        </p:nvSpPr>
+        <p:spPr>
+          <a:xfrm>
+            <a:off x="1069848" y="4736592"/>
+            <a:ext cx="4480560" cy="274320"/>
+          </a:xfrm>
+          <a:prstGeom prst="rect">
+            <a:avLst/>
+          </a:prstGeom>
+          <a:noFill/>
+          <a:ln/>
+        </p:spPr>
+        <p:txBody>
+          <a:bodyPr wrap="square" lIns="0" tIns="0" rIns="0" bIns="0" rtlCol="0" anchor="t"/>
+          <a:lstStyle/>
+          <a:p>
+            <a:pPr indent="0" marL="0">
+              <a:buNone/>
+            </a:pPr>
+            <a:r>
+              <a:rPr lang="en-US" sz="1250" b="1" dirty="0">
+                <a:solidFill>
+                  <a:srgbClr val="1B2230"/>
+                </a:solidFill>
+                <a:latin typeface="Calibri" pitchFamily="34" charset="0"/>
+                <a:ea typeface="Calibri" pitchFamily="34" charset="-122"/>
+                <a:cs typeface="Calibri" pitchFamily="34" charset="-120"/>
+              </a:rPr>
+              <a:t>Opción B · con git</a:t>
+            </a:r>
+            <a:endParaRPr lang="en-US" sz="1250" dirty="0"/>
+          </a:p>
+        </p:txBody>
+      </p:sp>
+      <p:sp>
+        <p:nvSpPr>
+          <p:cNvPr id="13" name="Shape 11"/>
+          <p:cNvSpPr/>
+          <p:nvPr/>
+        </p:nvSpPr>
+        <p:spPr>
+          <a:xfrm>
+            <a:off x="1069848" y="5084064"/>
+            <a:ext cx="4480560" cy="411480"/>
+          </a:xfrm>
+          <a:prstGeom prst="roundRect">
+            <a:avLst>
+              <a:gd name="adj" fmla="val 11111"/>
+            </a:avLst>
+          </a:prstGeom>
+          <a:solidFill>
+            <a:srgbClr val="1B2230"/>
+          </a:solidFill>
+          <a:ln/>
+        </p:spPr>
+      </p:sp>
+      <p:sp>
+        <p:nvSpPr>
+          <p:cNvPr id="14" name="Text 12"/>
+          <p:cNvSpPr/>
+          <p:nvPr/>
+        </p:nvSpPr>
+        <p:spPr>
+          <a:xfrm>
+            <a:off x="1271016" y="5084064"/>
+            <a:ext cx="4078224" cy="411480"/>
+          </a:xfrm>
+          <a:prstGeom prst="rect">
+            <a:avLst/>
+          </a:prstGeom>
+          <a:noFill/>
+          <a:ln/>
+        </p:spPr>
+        <p:txBody>
+          <a:bodyPr wrap="square" lIns="0" tIns="0" rIns="0" bIns="0" rtlCol="0" anchor="ctr"/>
+          <a:lstStyle/>
+          <a:p>
+            <a:pPr indent="0" marL="0">
+              <a:buNone/>
+            </a:pPr>
+            <a:r>
+              <a:rPr lang="en-US" sz="1150" b="1" dirty="0">
+                <a:solidFill>
+                  <a:srgbClr val="C9A574"/>
+                </a:solidFill>
+                <a:latin typeface="Courier New" pitchFamily="34" charset="0"/>
+                <a:ea typeface="Courier New" pitchFamily="34" charset="-122"/>
+                <a:cs typeface="Courier New" pitchFamily="34" charset="-120"/>
+              </a:rPr>
+              <a:t>git clone &lt;URL&gt; Responsa</a:t>
+            </a:r>
+            <a:endParaRPr lang="en-US" sz="1150" dirty="0"/>
+          </a:p>
+        </p:txBody>
+      </p:sp>
+      <p:sp>
+        <p:nvSpPr>
+          <p:cNvPr id="15" name="Shape 13"/>
+          <p:cNvSpPr/>
+          <p:nvPr/>
+        </p:nvSpPr>
+        <p:spPr>
+          <a:xfrm>
+            <a:off x="6400800" y="1828800"/>
+            <a:ext cx="5010912" cy="2194560"/>
+          </a:xfrm>
+          <a:prstGeom prst="roundRect">
+            <a:avLst>
+              <a:gd name="adj" fmla="val 2500"/>
+            </a:avLst>
+          </a:prstGeom>
+          <a:solidFill>
+            <a:srgbClr val="1B2230"/>
+          </a:solidFill>
+          <a:ln/>
+        </p:spPr>
+      </p:sp>
+      <p:sp>
+        <p:nvSpPr>
+          <p:cNvPr id="16" name="Text 14"/>
+          <p:cNvSpPr/>
+          <p:nvPr/>
+        </p:nvSpPr>
+        <p:spPr>
+          <a:xfrm>
+            <a:off x="6766560" y="2103120"/>
+            <a:ext cx="4297680" cy="292608"/>
+          </a:xfrm>
+          <a:prstGeom prst="rect">
+            <a:avLst/>
+          </a:prstGeom>
+          <a:noFill/>
+          <a:ln/>
+        </p:spPr>
+        <p:txBody>
+          <a:bodyPr wrap="square" lIns="0" tIns="0" rIns="0" bIns="0" rtlCol="0" anchor="t"/>
+          <a:lstStyle/>
+          <a:p>
+            <a:pPr indent="0" marL="0">
+              <a:buNone/>
+            </a:pPr>
+            <a:r>
+              <a:rPr lang="en-US" sz="1700" b="1" dirty="0">
+                <a:solidFill>
+                  <a:srgbClr val="C9A574"/>
+                </a:solidFill>
+                <a:latin typeface="Cambria" pitchFamily="34" charset="0"/>
+                <a:ea typeface="Cambria" pitchFamily="34" charset="-122"/>
+                <a:cs typeface="Cambria" pitchFamily="34" charset="-120"/>
+              </a:rPr>
+              <a:t>La carpeta se queda donde la dejes</a:t>
+            </a:r>
+            <a:endParaRPr lang="en-US" sz="1700" dirty="0"/>
+          </a:p>
+        </p:txBody>
+      </p:sp>
+      <p:sp>
+        <p:nvSpPr>
+          <p:cNvPr id="17" name="Text 15"/>
+          <p:cNvSpPr/>
+          <p:nvPr/>
+        </p:nvSpPr>
+        <p:spPr>
+          <a:xfrm>
+            <a:off x="6766560" y="2542032"/>
+            <a:ext cx="4297680" cy="731520"/>
+          </a:xfrm>
+          <a:prstGeom prst="rect">
+            <a:avLst/>
+          </a:prstGeom>
+          <a:noFill/>
+          <a:ln/>
+        </p:spPr>
+        <p:txBody>
+          <a:bodyPr wrap="square" lIns="0" tIns="0" rIns="0" bIns="0" rtlCol="0" anchor="t"/>
+          <a:lstStyle/>
+          <a:p>
+            <a:pPr indent="0" marL="0">
+              <a:lnSpc>
+                <a:spcPct val="115000"/>
+              </a:lnSpc>
+              <a:buNone/>
+            </a:pPr>
+            <a:r>
+              <a:rPr lang="en-US" sz="1150" dirty="0">
+                <a:solidFill>
+                  <a:srgbClr val="FFFFFF"/>
+                </a:solidFill>
+                <a:latin typeface="Calibri" pitchFamily="34" charset="0"/>
+                <a:ea typeface="Calibri" pitchFamily="34" charset="-122"/>
+                <a:cs typeface="Calibri" pitchFamily="34" charset="-120"/>
+              </a:rPr>
+              <a:t>Claude va a apuntar a esa ruta cada vez que arranque. Si después mueves la carpeta o la renombras, deja de encontrarla.</a:t>
+            </a:r>
+            <a:endParaRPr lang="en-US" sz="1150" dirty="0"/>
+          </a:p>
+        </p:txBody>
+      </p:sp>
+      <p:sp>
+        <p:nvSpPr>
+          <p:cNvPr id="18" name="Text 16"/>
+          <p:cNvSpPr/>
+          <p:nvPr/>
+        </p:nvSpPr>
+        <p:spPr>
+          <a:xfrm>
+            <a:off x="6766560" y="3310128"/>
+            <a:ext cx="4297680" cy="548640"/>
+          </a:xfrm>
+          <a:prstGeom prst="rect">
+            <a:avLst/>
+          </a:prstGeom>
+          <a:noFill/>
+          <a:ln/>
+        </p:spPr>
+        <p:txBody>
+          <a:bodyPr wrap="square" lIns="0" tIns="0" rIns="0" bIns="0" rtlCol="0" anchor="t"/>
+          <a:lstStyle/>
+          <a:p>
+            <a:pPr indent="0" marL="0">
+              <a:buNone/>
+            </a:pPr>
+            <a:r>
+              <a:rPr lang="en-US" sz="1050" i="1" dirty="0">
+                <a:solidFill>
+                  <a:srgbClr val="8A93A5"/>
+                </a:solidFill>
+                <a:latin typeface="Calibri" pitchFamily="34" charset="0"/>
+                <a:ea typeface="Calibri" pitchFamily="34" charset="-122"/>
+                <a:cs typeface="Calibri" pitchFamily="34" charset="-120"/>
+              </a:rPr>
+              <a:t>No es grave si pasa: basta con volver a ejecutar el instalador desde la ubicación nueva.</a:t>
+            </a:r>
+            <a:endParaRPr lang="en-US" sz="1050" dirty="0"/>
+          </a:p>
+        </p:txBody>
+      </p:sp>
+      <p:sp>
+        <p:nvSpPr>
+          <p:cNvPr id="19" name="Text 17"/>
+          <p:cNvSpPr/>
+          <p:nvPr/>
+        </p:nvSpPr>
+        <p:spPr>
+          <a:xfrm>
+            <a:off x="6400800" y="4315968"/>
+            <a:ext cx="5010912" cy="457200"/>
+          </a:xfrm>
+          <a:prstGeom prst="rect">
+            <a:avLst/>
+          </a:prstGeom>
+          <a:noFill/>
+          <a:ln/>
+        </p:spPr>
+        <p:txBody>
+          <a:bodyPr wrap="square" lIns="0" tIns="0" rIns="0" bIns="0" rtlCol="0" anchor="t"/>
+          <a:lstStyle/>
+          <a:p>
+            <a:pPr indent="0" marL="0">
+              <a:buNone/>
+            </a:pPr>
+            <a:r>
+              <a:rPr lang="en-US" sz="1100" i="1" dirty="0">
+                <a:solidFill>
+                  <a:srgbClr val="5A6478"/>
+                </a:solidFill>
+                <a:latin typeface="Calibri" pitchFamily="34" charset="0"/>
+                <a:ea typeface="Calibri" pitchFamily="34" charset="-122"/>
+                <a:cs typeface="Calibri" pitchFamily="34" charset="-120"/>
+              </a:rPr>
+              <a:t>No hace falta cuenta en ningún servicio, ni claves, ni suscripciones. Todas las fuentes son públicas y gratuitas.</a:t>
+            </a:r>
+            <a:endParaRPr lang="en-US" sz="1100" dirty="0"/>
+          </a:p>
+        </p:txBody>
+      </p:sp>
+    </p:spTree>
+  </p:cSld>
+  <p:clrMapOvr>
+    <a:masterClrMapping/>
+  </p:clrMapOvr>
+</p:sld>
+</file>
+
+<file path=ppt/slides/slide13.xml><?xml version="1.0" encoding="utf-8"?>
+<p:sld xmlns:a="http://schemas.openxmlformats.org/drawingml/2006/main" xmlns:r="http://schemas.openxmlformats.org/officeDocument/2006/relationships" xmlns:p="http://schemas.openxmlformats.org/presentationml/2006/main">
+  <p:cSld name="Slide 13">
+    <p:bg>
+      <p:bgPr>
+        <a:solidFill>
+          <a:srgbClr val="F4F1EA"/>
+        </a:solidFill>
+      </p:bgPr>
+    </p:bg>
+    <p:spTree>
+      <p:nvGrpSpPr>
+        <p:cNvPr id="1" name=""/>
+        <p:cNvGrpSpPr/>
+        <p:nvPr/>
+      </p:nvGrpSpPr>
+      <p:grpSpPr>
+        <a:xfrm>
+          <a:off x="0" y="0"/>
+          <a:ext cx="0" cy="0"/>
+          <a:chOff x="0" y="0"/>
+          <a:chExt cx="0" cy="0"/>
+        </a:xfrm>
+      </p:grpSpPr>
+      <p:sp>
+        <p:nvSpPr>
+          <p:cNvPr id="2" name="Text 0"/>
+          <p:cNvSpPr/>
+          <p:nvPr/>
+        </p:nvSpPr>
+        <p:spPr>
+          <a:xfrm>
+            <a:off x="777240" y="566928"/>
+            <a:ext cx="10634472" cy="566928"/>
+          </a:xfrm>
+          <a:prstGeom prst="rect">
+            <a:avLst/>
+          </a:prstGeom>
+          <a:noFill/>
+          <a:ln/>
+        </p:spPr>
+        <p:txBody>
+          <a:bodyPr wrap="square" lIns="0" tIns="0" rIns="0" bIns="0" rtlCol="0" anchor="ctr"/>
+          <a:lstStyle/>
+          <a:p>
+            <a:pPr indent="0" marL="0">
+              <a:buNone/>
+            </a:pPr>
+            <a:r>
+              <a:rPr lang="en-US" sz="3200" b="1" dirty="0">
+                <a:solidFill>
+                  <a:srgbClr val="1B2230"/>
+                </a:solidFill>
+                <a:latin typeface="Cambria" pitchFamily="34" charset="0"/>
+                <a:ea typeface="Cambria" pitchFamily="34" charset="-122"/>
+                <a:cs typeface="Cambria" pitchFamily="34" charset="-120"/>
+              </a:rPr>
+              <a:t>Paso 3 · Ejecutar el instalador</a:t>
+            </a:r>
+            <a:endParaRPr lang="en-US" sz="3200" dirty="0"/>
+          </a:p>
+        </p:txBody>
+      </p:sp>
+      <p:sp>
+        <p:nvSpPr>
+          <p:cNvPr id="3" name="Text 1"/>
+          <p:cNvSpPr/>
+          <p:nvPr/>
+        </p:nvSpPr>
+        <p:spPr>
+          <a:xfrm>
+            <a:off x="777240" y="1152144"/>
+            <a:ext cx="9537192" cy="384048"/>
+          </a:xfrm>
+          <a:prstGeom prst="rect">
+            <a:avLst/>
+          </a:prstGeom>
+          <a:noFill/>
+          <a:ln/>
+        </p:spPr>
+        <p:txBody>
+          <a:bodyPr wrap="square" lIns="0" tIns="0" rIns="0" bIns="0" rtlCol="0" anchor="ctr"/>
+          <a:lstStyle/>
+          <a:p>
+            <a:pPr indent="0" marL="0">
+              <a:buNone/>
+            </a:pPr>
+            <a:r>
+              <a:rPr lang="en-US" sz="1350" i="1" dirty="0">
+                <a:solidFill>
+                  <a:srgbClr val="5A6478"/>
+                </a:solidFill>
+                <a:latin typeface="Calibri" pitchFamily="34" charset="0"/>
+                <a:ea typeface="Calibri" pitchFamily="34" charset="-122"/>
+                <a:cs typeface="Calibri" pitchFamily="34" charset="-120"/>
+              </a:rPr>
+              <a:t>Un solo comando hace todo, y se puede repetir sin riesgo</a:t>
+            </a:r>
+            <a:endParaRPr lang="en-US" sz="1350" dirty="0"/>
+          </a:p>
+        </p:txBody>
+      </p:sp>
+      <p:sp>
+        <p:nvSpPr>
+          <p:cNvPr id="4" name="Text 2"/>
+          <p:cNvSpPr/>
+          <p:nvPr/>
+        </p:nvSpPr>
+        <p:spPr>
+          <a:xfrm>
+            <a:off x="777240" y="1810512"/>
+            <a:ext cx="4846320" cy="256032"/>
+          </a:xfrm>
+          <a:prstGeom prst="rect">
+            <a:avLst/>
+          </a:prstGeom>
+          <a:noFill/>
+          <a:ln/>
+        </p:spPr>
+        <p:txBody>
+          <a:bodyPr wrap="square" lIns="0" tIns="0" rIns="0" bIns="0" rtlCol="0" anchor="t"/>
+          <a:lstStyle/>
+          <a:p>
+            <a:pPr indent="0" marL="0">
+              <a:buNone/>
+            </a:pPr>
+            <a:r>
+              <a:rPr lang="en-US" sz="1200" dirty="0">
+                <a:solidFill>
+                  <a:srgbClr val="1B2230"/>
+                </a:solidFill>
+                <a:latin typeface="Calibri" pitchFamily="34" charset="0"/>
+                <a:ea typeface="Calibri" pitchFamily="34" charset="-122"/>
+                <a:cs typeface="Calibri" pitchFamily="34" charset="-120"/>
+              </a:rPr>
+              <a:t>Situarse en la carpeta:</a:t>
+            </a:r>
+            <a:endParaRPr lang="en-US" sz="1200" dirty="0"/>
+          </a:p>
+        </p:txBody>
+      </p:sp>
+      <p:sp>
+        <p:nvSpPr>
+          <p:cNvPr id="5" name="Shape 3"/>
+          <p:cNvSpPr/>
+          <p:nvPr/>
+        </p:nvSpPr>
+        <p:spPr>
+          <a:xfrm>
+            <a:off x="777240" y="2103120"/>
+            <a:ext cx="1051560" cy="274320"/>
+          </a:xfrm>
+          <a:prstGeom prst="roundRect">
+            <a:avLst>
+              <a:gd name="adj" fmla="val 13333"/>
+            </a:avLst>
+          </a:prstGeom>
+          <a:solidFill>
+            <a:srgbClr val="A87C4F"/>
+          </a:solidFill>
+          <a:ln/>
+        </p:spPr>
+      </p:sp>
+      <p:sp>
+        <p:nvSpPr>
+          <p:cNvPr id="6" name="Text 4"/>
+          <p:cNvSpPr/>
+          <p:nvPr/>
+        </p:nvSpPr>
+        <p:spPr>
+          <a:xfrm>
+            <a:off x="777240" y="2103120"/>
+            <a:ext cx="1051560" cy="274320"/>
+          </a:xfrm>
+          <a:prstGeom prst="rect">
+            <a:avLst/>
+          </a:prstGeom>
+          <a:noFill/>
+          <a:ln/>
+        </p:spPr>
+        <p:txBody>
+          <a:bodyPr wrap="square" lIns="0" tIns="0" rIns="0" bIns="0" rtlCol="0" anchor="ctr"/>
+          <a:lstStyle/>
+          <a:p>
+            <a:pPr algn="ctr" indent="0" marL="0">
+              <a:buNone/>
+            </a:pPr>
+            <a:r>
+              <a:rPr lang="en-US" sz="1000" b="1" dirty="0">
+                <a:solidFill>
+                  <a:srgbClr val="FFFFFF"/>
+                </a:solidFill>
+                <a:latin typeface="Calibri" pitchFamily="34" charset="0"/>
+                <a:ea typeface="Calibri" pitchFamily="34" charset="-122"/>
+                <a:cs typeface="Calibri" pitchFamily="34" charset="-120"/>
+              </a:rPr>
+              <a:t>Windows</a:t>
+            </a:r>
+            <a:endParaRPr lang="en-US" sz="1000" dirty="0"/>
+          </a:p>
+        </p:txBody>
+      </p:sp>
+      <p:sp>
+        <p:nvSpPr>
+          <p:cNvPr id="7" name="Shape 5"/>
+          <p:cNvSpPr/>
+          <p:nvPr/>
+        </p:nvSpPr>
+        <p:spPr>
+          <a:xfrm>
+            <a:off x="1965960" y="2066544"/>
+            <a:ext cx="3657600" cy="384048"/>
+          </a:xfrm>
+          <a:prstGeom prst="roundRect">
+            <a:avLst>
+              <a:gd name="adj" fmla="val 11905"/>
+            </a:avLst>
+          </a:prstGeom>
+          <a:solidFill>
+            <a:srgbClr val="1B2230"/>
+          </a:solidFill>
+          <a:ln/>
+        </p:spPr>
+      </p:sp>
+      <p:sp>
+        <p:nvSpPr>
+          <p:cNvPr id="8" name="Text 6"/>
+          <p:cNvSpPr/>
+          <p:nvPr/>
+        </p:nvSpPr>
+        <p:spPr>
+          <a:xfrm>
+            <a:off x="2167128" y="2066544"/>
+            <a:ext cx="3255264" cy="384048"/>
+          </a:xfrm>
+          <a:prstGeom prst="rect">
+            <a:avLst/>
+          </a:prstGeom>
+          <a:noFill/>
+          <a:ln/>
+        </p:spPr>
+        <p:txBody>
+          <a:bodyPr wrap="square" lIns="0" tIns="0" rIns="0" bIns="0" rtlCol="0" anchor="ctr"/>
+          <a:lstStyle/>
+          <a:p>
+            <a:pPr indent="0" marL="0">
+              <a:buNone/>
+            </a:pPr>
+            <a:r>
+              <a:rPr lang="en-US" sz="1150" b="1" dirty="0">
+                <a:solidFill>
+                  <a:srgbClr val="C9A574"/>
+                </a:solidFill>
+                <a:latin typeface="Courier New" pitchFamily="34" charset="0"/>
+                <a:ea typeface="Courier New" pitchFamily="34" charset="-122"/>
+                <a:cs typeface="Courier New" pitchFamily="34" charset="-120"/>
+              </a:rPr>
+              <a:t>cd C:\Users\TU_USUARIO\Responsa</a:t>
+            </a:r>
+            <a:endParaRPr lang="en-US" sz="1150" dirty="0"/>
+          </a:p>
+        </p:txBody>
+      </p:sp>
+      <p:sp>
+        <p:nvSpPr>
+          <p:cNvPr id="9" name="Shape 7"/>
+          <p:cNvSpPr/>
+          <p:nvPr/>
+        </p:nvSpPr>
+        <p:spPr>
+          <a:xfrm>
+            <a:off x="777240" y="2578608"/>
+            <a:ext cx="1051560" cy="274320"/>
+          </a:xfrm>
+          <a:prstGeom prst="roundRect">
+            <a:avLst>
+              <a:gd name="adj" fmla="val 13333"/>
+            </a:avLst>
+          </a:prstGeom>
+          <a:solidFill>
+            <a:srgbClr val="A87C4F"/>
+          </a:solidFill>
+          <a:ln/>
+        </p:spPr>
+      </p:sp>
+      <p:sp>
+        <p:nvSpPr>
+          <p:cNvPr id="10" name="Text 8"/>
+          <p:cNvSpPr/>
+          <p:nvPr/>
+        </p:nvSpPr>
+        <p:spPr>
+          <a:xfrm>
+            <a:off x="777240" y="2578608"/>
+            <a:ext cx="1051560" cy="274320"/>
+          </a:xfrm>
+          <a:prstGeom prst="rect">
+            <a:avLst/>
+          </a:prstGeom>
+          <a:noFill/>
+          <a:ln/>
+        </p:spPr>
+        <p:txBody>
+          <a:bodyPr wrap="square" lIns="0" tIns="0" rIns="0" bIns="0" rtlCol="0" anchor="ctr"/>
+          <a:lstStyle/>
+          <a:p>
+            <a:pPr algn="ctr" indent="0" marL="0">
+              <a:buNone/>
+            </a:pPr>
+            <a:r>
+              <a:rPr lang="en-US" sz="1000" b="1" dirty="0">
+                <a:solidFill>
+                  <a:srgbClr val="FFFFFF"/>
+                </a:solidFill>
+                <a:latin typeface="Calibri" pitchFamily="34" charset="0"/>
+                <a:ea typeface="Calibri" pitchFamily="34" charset="-122"/>
+                <a:cs typeface="Calibri" pitchFamily="34" charset="-120"/>
+              </a:rPr>
+              <a:t>macOS</a:t>
+            </a:r>
+            <a:endParaRPr lang="en-US" sz="1000" dirty="0"/>
+          </a:p>
+        </p:txBody>
+      </p:sp>
+      <p:sp>
+        <p:nvSpPr>
+          <p:cNvPr id="11" name="Shape 9"/>
+          <p:cNvSpPr/>
+          <p:nvPr/>
+        </p:nvSpPr>
+        <p:spPr>
+          <a:xfrm>
+            <a:off x="1965960" y="2542032"/>
+            <a:ext cx="3657600" cy="384048"/>
+          </a:xfrm>
+          <a:prstGeom prst="roundRect">
+            <a:avLst>
+              <a:gd name="adj" fmla="val 11905"/>
+            </a:avLst>
+          </a:prstGeom>
+          <a:solidFill>
+            <a:srgbClr val="1B2230"/>
+          </a:solidFill>
+          <a:ln/>
+        </p:spPr>
+      </p:sp>
+      <p:sp>
+        <p:nvSpPr>
+          <p:cNvPr id="12" name="Text 10"/>
+          <p:cNvSpPr/>
+          <p:nvPr/>
+        </p:nvSpPr>
+        <p:spPr>
+          <a:xfrm>
+            <a:off x="2167128" y="2542032"/>
+            <a:ext cx="3255264" cy="384048"/>
+          </a:xfrm>
+          <a:prstGeom prst="rect">
+            <a:avLst/>
+          </a:prstGeom>
+          <a:noFill/>
+          <a:ln/>
+        </p:spPr>
+        <p:txBody>
+          <a:bodyPr wrap="square" lIns="0" tIns="0" rIns="0" bIns="0" rtlCol="0" anchor="ctr"/>
+          <a:lstStyle/>
+          <a:p>
+            <a:pPr indent="0" marL="0">
+              <a:buNone/>
+            </a:pPr>
+            <a:r>
+              <a:rPr lang="en-US" sz="1150" b="1" dirty="0">
+                <a:solidFill>
+                  <a:srgbClr val="C9A574"/>
+                </a:solidFill>
+                <a:latin typeface="Courier New" pitchFamily="34" charset="0"/>
+                <a:ea typeface="Courier New" pitchFamily="34" charset="-122"/>
+                <a:cs typeface="Courier New" pitchFamily="34" charset="-120"/>
+              </a:rPr>
+              <a:t>cd ~/Responsa</a:t>
+            </a:r>
+            <a:endParaRPr lang="en-US" sz="1150" dirty="0"/>
+          </a:p>
+        </p:txBody>
+      </p:sp>
+      <p:sp>
+        <p:nvSpPr>
+          <p:cNvPr id="13" name="Text 11"/>
+          <p:cNvSpPr/>
+          <p:nvPr/>
+        </p:nvSpPr>
+        <p:spPr>
+          <a:xfrm>
+            <a:off x="777240" y="3035808"/>
+            <a:ext cx="4846320" cy="365760"/>
+          </a:xfrm>
+          <a:prstGeom prst="rect">
+            <a:avLst/>
+          </a:prstGeom>
+          <a:noFill/>
+          <a:ln/>
+        </p:spPr>
+        <p:txBody>
+          <a:bodyPr wrap="square" lIns="0" tIns="0" rIns="0" bIns="0" rtlCol="0" anchor="t"/>
+          <a:lstStyle/>
+          <a:p>
+            <a:pPr indent="0" marL="0">
+              <a:buNone/>
+            </a:pPr>
+            <a:r>
+              <a:rPr lang="en-US" sz="1000" i="1" dirty="0">
+                <a:solidFill>
+                  <a:srgbClr val="5A6478"/>
+                </a:solidFill>
+                <a:latin typeface="Calibri" pitchFamily="34" charset="0"/>
+                <a:ea typeface="Calibri" pitchFamily="34" charset="-122"/>
+                <a:cs typeface="Calibri" pitchFamily="34" charset="-120"/>
+              </a:rPr>
+              <a:t>Truco: escribe «cd » y arrastra la carpeta a la ventana; la ruta se escribe sola.</a:t>
+            </a:r>
+            <a:endParaRPr lang="en-US" sz="1000" dirty="0"/>
+          </a:p>
+        </p:txBody>
+      </p:sp>
+      <p:sp>
+        <p:nvSpPr>
+          <p:cNvPr id="14" name="Text 12"/>
+          <p:cNvSpPr/>
+          <p:nvPr/>
+        </p:nvSpPr>
+        <p:spPr>
+          <a:xfrm>
+            <a:off x="777240" y="3529584"/>
+            <a:ext cx="4846320" cy="256032"/>
+          </a:xfrm>
+          <a:prstGeom prst="rect">
+            <a:avLst/>
+          </a:prstGeom>
+          <a:noFill/>
+          <a:ln/>
+        </p:spPr>
+        <p:txBody>
+          <a:bodyPr wrap="square" lIns="0" tIns="0" rIns="0" bIns="0" rtlCol="0" anchor="t"/>
+          <a:lstStyle/>
+          <a:p>
+            <a:pPr indent="0" marL="0">
+              <a:buNone/>
+            </a:pPr>
+            <a:r>
+              <a:rPr lang="en-US" sz="1200" dirty="0">
+                <a:solidFill>
+                  <a:srgbClr val="1B2230"/>
+                </a:solidFill>
+                <a:latin typeface="Calibri" pitchFamily="34" charset="0"/>
+                <a:ea typeface="Calibri" pitchFamily="34" charset="-122"/>
+                <a:cs typeface="Calibri" pitchFamily="34" charset="-120"/>
+              </a:rPr>
+              <a:t>Y ejecutar:</a:t>
+            </a:r>
+            <a:endParaRPr lang="en-US" sz="1200" dirty="0"/>
+          </a:p>
+        </p:txBody>
+      </p:sp>
+      <p:sp>
+        <p:nvSpPr>
+          <p:cNvPr id="15" name="Shape 13"/>
+          <p:cNvSpPr/>
+          <p:nvPr/>
+        </p:nvSpPr>
+        <p:spPr>
+          <a:xfrm>
+            <a:off x="777240" y="3822192"/>
+            <a:ext cx="4846320" cy="566928"/>
+          </a:xfrm>
+          <a:prstGeom prst="roundRect">
+            <a:avLst>
+              <a:gd name="adj" fmla="val 8065"/>
+            </a:avLst>
+          </a:prstGeom>
+          <a:solidFill>
+            <a:srgbClr val="1B2230"/>
+          </a:solidFill>
+          <a:ln/>
+        </p:spPr>
+      </p:sp>
+      <p:sp>
+        <p:nvSpPr>
+          <p:cNvPr id="16" name="Text 14"/>
+          <p:cNvSpPr/>
+          <p:nvPr/>
+        </p:nvSpPr>
+        <p:spPr>
+          <a:xfrm>
+            <a:off x="978408" y="3822192"/>
+            <a:ext cx="4443984" cy="566928"/>
+          </a:xfrm>
+          <a:prstGeom prst="rect">
+            <a:avLst/>
+          </a:prstGeom>
+          <a:noFill/>
+          <a:ln/>
+        </p:spPr>
+        <p:txBody>
+          <a:bodyPr wrap="square" lIns="0" tIns="0" rIns="0" bIns="0" rtlCol="0" anchor="ctr"/>
+          <a:lstStyle/>
+          <a:p>
+            <a:pPr indent="0" marL="0">
+              <a:buNone/>
+            </a:pPr>
+            <a:r>
+              <a:rPr lang="en-US" sz="1150" b="1" dirty="0">
+                <a:solidFill>
+                  <a:srgbClr val="C9A574"/>
+                </a:solidFill>
+                <a:latin typeface="Courier New" pitchFamily="34" charset="0"/>
+                <a:ea typeface="Courier New" pitchFamily="34" charset="-122"/>
+                <a:cs typeface="Courier New" pitchFamily="34" charset="-120"/>
+              </a:rPr>
+              <a:t>node instalar.mjs</a:t>
+            </a:r>
+            <a:endParaRPr lang="en-US" sz="1150" dirty="0"/>
+          </a:p>
+        </p:txBody>
+      </p:sp>
+      <p:sp>
+        <p:nvSpPr>
+          <p:cNvPr id="17" name="Text 15"/>
+          <p:cNvSpPr/>
+          <p:nvPr/>
+        </p:nvSpPr>
+        <p:spPr>
+          <a:xfrm>
+            <a:off x="777240" y="4572000"/>
+            <a:ext cx="4846320" cy="822960"/>
+          </a:xfrm>
+          <a:prstGeom prst="rect">
+            <a:avLst/>
+          </a:prstGeom>
+          <a:noFill/>
+          <a:ln/>
+        </p:spPr>
+        <p:txBody>
+          <a:bodyPr wrap="square" lIns="0" tIns="0" rIns="0" bIns="0" rtlCol="0" anchor="t"/>
+          <a:lstStyle/>
+          <a:p>
+            <a:pPr indent="0" marL="0">
+              <a:lnSpc>
+                <a:spcPct val="110000"/>
+              </a:lnSpc>
+              <a:buNone/>
+            </a:pPr>
+            <a:r>
+              <a:rPr lang="en-US" sz="1050" dirty="0">
+                <a:solidFill>
+                  <a:srgbClr val="5A6478"/>
+                </a:solidFill>
+                <a:latin typeface="Calibri" pitchFamily="34" charset="0"/>
+                <a:ea typeface="Calibri" pitchFamily="34" charset="-122"/>
+                <a:cs typeface="Calibri" pitchFamily="34" charset="-120"/>
+              </a:rPr>
+              <a:t>El paso 5 es el más lento, unos minutos. Es a propósito: la Biblioteca del Congreso limita las descargas grandes, y bajar los códigos con calma una vez evita topes durante el uso normal.</a:t>
+            </a:r>
+            <a:endParaRPr lang="en-US" sz="1050" dirty="0"/>
+          </a:p>
+        </p:txBody>
+      </p:sp>
+      <p:sp>
+        <p:nvSpPr>
+          <p:cNvPr id="18" name="Shape 16"/>
+          <p:cNvSpPr/>
+          <p:nvPr/>
+        </p:nvSpPr>
+        <p:spPr>
+          <a:xfrm>
+            <a:off x="6172200" y="1810512"/>
+            <a:ext cx="5239512" cy="3246120"/>
+          </a:xfrm>
+          <a:prstGeom prst="roundRect">
+            <a:avLst>
+              <a:gd name="adj" fmla="val 1690"/>
+            </a:avLst>
+          </a:prstGeom>
+          <a:solidFill>
+            <a:srgbClr val="FFFFFF"/>
+          </a:solidFill>
+          <a:ln w="9525">
+            <a:solidFill>
+              <a:srgbClr val="E3DED3"/>
+            </a:solidFill>
+            <a:prstDash val="solid"/>
+          </a:ln>
+        </p:spPr>
+      </p:sp>
+      <p:sp>
+        <p:nvSpPr>
+          <p:cNvPr id="19" name="Text 17"/>
+          <p:cNvSpPr/>
+          <p:nvPr/>
+        </p:nvSpPr>
+        <p:spPr>
+          <a:xfrm>
+            <a:off x="6492240" y="2029968"/>
+            <a:ext cx="4572000" cy="274320"/>
+          </a:xfrm>
+          <a:prstGeom prst="rect">
+            <a:avLst/>
+          </a:prstGeom>
+          <a:noFill/>
+          <a:ln/>
+        </p:spPr>
+        <p:txBody>
+          <a:bodyPr wrap="square" lIns="0" tIns="0" rIns="0" bIns="0" rtlCol="0" anchor="t"/>
+          <a:lstStyle/>
+          <a:p>
+            <a:pPr indent="0" marL="0">
+              <a:buNone/>
+            </a:pPr>
+            <a:r>
+              <a:rPr lang="en-US" sz="1200" b="1" dirty="0">
+                <a:solidFill>
+                  <a:srgbClr val="1B2230"/>
+                </a:solidFill>
+                <a:latin typeface="Calibri" pitchFamily="34" charset="0"/>
+                <a:ea typeface="Calibri" pitchFamily="34" charset="-122"/>
+                <a:cs typeface="Calibri" pitchFamily="34" charset="-120"/>
+              </a:rPr>
+              <a:t>Qué vas a ver en pantalla</a:t>
+            </a:r>
+            <a:endParaRPr lang="en-US" sz="1200" dirty="0"/>
+          </a:p>
+        </p:txBody>
+      </p:sp>
+      <p:sp>
+        <p:nvSpPr>
+          <p:cNvPr id="20" name="Shape 18"/>
+          <p:cNvSpPr/>
+          <p:nvPr/>
+        </p:nvSpPr>
+        <p:spPr>
+          <a:xfrm>
+            <a:off x="6492240" y="2395728"/>
+            <a:ext cx="274320" cy="274320"/>
+          </a:xfrm>
+          <a:prstGeom prst="ellipse">
+            <a:avLst/>
+          </a:prstGeom>
+          <a:solidFill>
+            <a:srgbClr val="A87C4F"/>
+          </a:solidFill>
+          <a:ln/>
+        </p:spPr>
+      </p:sp>
+      <p:sp>
+        <p:nvSpPr>
+          <p:cNvPr id="21" name="Text 19"/>
+          <p:cNvSpPr/>
+          <p:nvPr/>
+        </p:nvSpPr>
+        <p:spPr>
+          <a:xfrm>
+            <a:off x="6492240" y="2395728"/>
+            <a:ext cx="274320" cy="274320"/>
+          </a:xfrm>
+          <a:prstGeom prst="rect">
+            <a:avLst/>
+          </a:prstGeom>
+          <a:noFill/>
+          <a:ln/>
+        </p:spPr>
+        <p:txBody>
+          <a:bodyPr wrap="square" lIns="0" tIns="0" rIns="0" bIns="0" rtlCol="0" anchor="ctr"/>
+          <a:lstStyle/>
+          <a:p>
+            <a:pPr algn="ctr" indent="0" marL="0">
+              <a:buNone/>
+            </a:pPr>
+            <a:r>
+              <a:rPr lang="en-US" sz="1200" b="1" dirty="0">
+                <a:solidFill>
+                  <a:srgbClr val="FFFFFF"/>
+                </a:solidFill>
+                <a:latin typeface="Calibri" pitchFamily="34" charset="0"/>
+                <a:ea typeface="Calibri" pitchFamily="34" charset="-122"/>
+                <a:cs typeface="Calibri" pitchFamily="34" charset="-120"/>
+              </a:rPr>
+              <a:t>1</a:t>
+            </a:r>
+            <a:endParaRPr lang="en-US" sz="1200" dirty="0"/>
+          </a:p>
+        </p:txBody>
+      </p:sp>
+      <p:sp>
+        <p:nvSpPr>
+          <p:cNvPr id="22" name="Text 20"/>
+          <p:cNvSpPr/>
+          <p:nvPr/>
+        </p:nvSpPr>
+        <p:spPr>
+          <a:xfrm>
+            <a:off x="6876288" y="2414016"/>
+            <a:ext cx="4206240" cy="274320"/>
+          </a:xfrm>
+          <a:prstGeom prst="rect">
+            <a:avLst/>
+          </a:prstGeom>
+          <a:noFill/>
+          <a:ln/>
+        </p:spPr>
+        <p:txBody>
+          <a:bodyPr wrap="square" lIns="0" tIns="0" rIns="0" bIns="0" rtlCol="0" anchor="t"/>
+          <a:lstStyle/>
+          <a:p>
+            <a:pPr indent="0" marL="0">
+              <a:buNone/>
+            </a:pPr>
+            <a:r>
+              <a:rPr lang="en-US" sz="1100" dirty="0">
+                <a:solidFill>
+                  <a:srgbClr val="5A6478"/>
+                </a:solidFill>
+                <a:latin typeface="Calibri" pitchFamily="34" charset="0"/>
+                <a:ea typeface="Calibri" pitchFamily="34" charset="-122"/>
+                <a:cs typeface="Calibri" pitchFamily="34" charset="-120"/>
+              </a:rPr>
+              <a:t>Comprueba Node</a:t>
+            </a:r>
+            <a:endParaRPr lang="en-US" sz="1100" dirty="0"/>
+          </a:p>
+        </p:txBody>
+      </p:sp>
+      <p:sp>
+        <p:nvSpPr>
+          <p:cNvPr id="23" name="Shape 21"/>
+          <p:cNvSpPr/>
+          <p:nvPr/>
+        </p:nvSpPr>
+        <p:spPr>
+          <a:xfrm>
+            <a:off x="6492240" y="2798064"/>
+            <a:ext cx="274320" cy="274320"/>
+          </a:xfrm>
+          <a:prstGeom prst="ellipse">
+            <a:avLst/>
+          </a:prstGeom>
+          <a:solidFill>
+            <a:srgbClr val="A87C4F"/>
+          </a:solidFill>
+          <a:ln/>
+        </p:spPr>
+      </p:sp>
+      <p:sp>
+        <p:nvSpPr>
+          <p:cNvPr id="24" name="Text 22"/>
+          <p:cNvSpPr/>
+          <p:nvPr/>
+        </p:nvSpPr>
+        <p:spPr>
+          <a:xfrm>
+            <a:off x="6492240" y="2798064"/>
+            <a:ext cx="274320" cy="274320"/>
+          </a:xfrm>
+          <a:prstGeom prst="rect">
+            <a:avLst/>
+          </a:prstGeom>
+          <a:noFill/>
+          <a:ln/>
+        </p:spPr>
+        <p:txBody>
+          <a:bodyPr wrap="square" lIns="0" tIns="0" rIns="0" bIns="0" rtlCol="0" anchor="ctr"/>
+          <a:lstStyle/>
+          <a:p>
+            <a:pPr algn="ctr" indent="0" marL="0">
+              <a:buNone/>
+            </a:pPr>
+            <a:r>
+              <a:rPr lang="en-US" sz="1200" b="1" dirty="0">
+                <a:solidFill>
+                  <a:srgbClr val="FFFFFF"/>
+                </a:solidFill>
+                <a:latin typeface="Calibri" pitchFamily="34" charset="0"/>
+                <a:ea typeface="Calibri" pitchFamily="34" charset="-122"/>
+                <a:cs typeface="Calibri" pitchFamily="34" charset="-120"/>
+              </a:rPr>
+              <a:t>2</a:t>
+            </a:r>
+            <a:endParaRPr lang="en-US" sz="1200" dirty="0"/>
+          </a:p>
+        </p:txBody>
+      </p:sp>
+      <p:sp>
+        <p:nvSpPr>
+          <p:cNvPr id="25" name="Text 23"/>
+          <p:cNvSpPr/>
+          <p:nvPr/>
+        </p:nvSpPr>
+        <p:spPr>
+          <a:xfrm>
+            <a:off x="6876288" y="2816352"/>
+            <a:ext cx="4206240" cy="274320"/>
+          </a:xfrm>
+          <a:prstGeom prst="rect">
+            <a:avLst/>
+          </a:prstGeom>
+          <a:noFill/>
+          <a:ln/>
+        </p:spPr>
+        <p:txBody>
+          <a:bodyPr wrap="square" lIns="0" tIns="0" rIns="0" bIns="0" rtlCol="0" anchor="t"/>
+          <a:lstStyle/>
+          <a:p>
+            <a:pPr indent="0" marL="0">
+              <a:buNone/>
+            </a:pPr>
+            <a:r>
+              <a:rPr lang="en-US" sz="1100" dirty="0">
+                <a:solidFill>
+                  <a:srgbClr val="5A6478"/>
+                </a:solidFill>
+                <a:latin typeface="Calibri" pitchFamily="34" charset="0"/>
+                <a:ea typeface="Calibri" pitchFamily="34" charset="-122"/>
+                <a:cs typeface="Calibri" pitchFamily="34" charset="-120"/>
+              </a:rPr>
+              <a:t>Instala dependencias</a:t>
+            </a:r>
+            <a:endParaRPr lang="en-US" sz="1100" dirty="0"/>
+          </a:p>
+        </p:txBody>
+      </p:sp>
+      <p:sp>
+        <p:nvSpPr>
+          <p:cNvPr id="26" name="Shape 24"/>
+          <p:cNvSpPr/>
+          <p:nvPr/>
+        </p:nvSpPr>
+        <p:spPr>
+          <a:xfrm>
+            <a:off x="6492240" y="3200400"/>
+            <a:ext cx="274320" cy="274320"/>
+          </a:xfrm>
+          <a:prstGeom prst="ellipse">
+            <a:avLst/>
+          </a:prstGeom>
+          <a:solidFill>
+            <a:srgbClr val="A87C4F"/>
+          </a:solidFill>
+          <a:ln/>
+        </p:spPr>
+      </p:sp>
+      <p:sp>
+        <p:nvSpPr>
+          <p:cNvPr id="27" name="Text 25"/>
+          <p:cNvSpPr/>
+          <p:nvPr/>
+        </p:nvSpPr>
+        <p:spPr>
+          <a:xfrm>
+            <a:off x="6492240" y="3200400"/>
+            <a:ext cx="274320" cy="274320"/>
+          </a:xfrm>
+          <a:prstGeom prst="rect">
+            <a:avLst/>
+          </a:prstGeom>
+          <a:noFill/>
+          <a:ln/>
+        </p:spPr>
+        <p:txBody>
+          <a:bodyPr wrap="square" lIns="0" tIns="0" rIns="0" bIns="0" rtlCol="0" anchor="ctr"/>
+          <a:lstStyle/>
+          <a:p>
+            <a:pPr algn="ctr" indent="0" marL="0">
+              <a:buNone/>
+            </a:pPr>
+            <a:r>
+              <a:rPr lang="en-US" sz="1200" b="1" dirty="0">
+                <a:solidFill>
+                  <a:srgbClr val="FFFFFF"/>
+                </a:solidFill>
+                <a:latin typeface="Calibri" pitchFamily="34" charset="0"/>
+                <a:ea typeface="Calibri" pitchFamily="34" charset="-122"/>
+                <a:cs typeface="Calibri" pitchFamily="34" charset="-120"/>
+              </a:rPr>
+              <a:t>3</a:t>
+            </a:r>
+            <a:endParaRPr lang="en-US" sz="1200" dirty="0"/>
+          </a:p>
+        </p:txBody>
+      </p:sp>
+      <p:sp>
+        <p:nvSpPr>
+          <p:cNvPr id="28" name="Text 26"/>
+          <p:cNvSpPr/>
+          <p:nvPr/>
+        </p:nvSpPr>
+        <p:spPr>
+          <a:xfrm>
+            <a:off x="6876288" y="3218688"/>
+            <a:ext cx="4206240" cy="274320"/>
+          </a:xfrm>
+          <a:prstGeom prst="rect">
+            <a:avLst/>
+          </a:prstGeom>
+          <a:noFill/>
+          <a:ln/>
+        </p:spPr>
+        <p:txBody>
+          <a:bodyPr wrap="square" lIns="0" tIns="0" rIns="0" bIns="0" rtlCol="0" anchor="t"/>
+          <a:lstStyle/>
+          <a:p>
+            <a:pPr indent="0" marL="0">
+              <a:buNone/>
+            </a:pPr>
+            <a:r>
+              <a:rPr lang="en-US" sz="1100" dirty="0">
+                <a:solidFill>
+                  <a:srgbClr val="5A6478"/>
+                </a:solidFill>
+                <a:latin typeface="Calibri" pitchFamily="34" charset="0"/>
+                <a:ea typeface="Calibri" pitchFamily="34" charset="-122"/>
+                <a:cs typeface="Calibri" pitchFamily="34" charset="-120"/>
+              </a:rPr>
+              <a:t>Registra el servidor en Claude</a:t>
+            </a:r>
+            <a:endParaRPr lang="en-US" sz="1100" dirty="0"/>
+          </a:p>
+        </p:txBody>
+      </p:sp>
+      <p:sp>
+        <p:nvSpPr>
+          <p:cNvPr id="29" name="Shape 27"/>
+          <p:cNvSpPr/>
+          <p:nvPr/>
+        </p:nvSpPr>
+        <p:spPr>
+          <a:xfrm>
+            <a:off x="6492240" y="3602736"/>
+            <a:ext cx="274320" cy="274320"/>
+          </a:xfrm>
+          <a:prstGeom prst="ellipse">
+            <a:avLst/>
+          </a:prstGeom>
+          <a:solidFill>
+            <a:srgbClr val="A87C4F"/>
+          </a:solidFill>
+          <a:ln/>
+        </p:spPr>
+      </p:sp>
+      <p:sp>
+        <p:nvSpPr>
+          <p:cNvPr id="30" name="Text 28"/>
+          <p:cNvSpPr/>
+          <p:nvPr/>
+        </p:nvSpPr>
+        <p:spPr>
+          <a:xfrm>
+            <a:off x="6492240" y="3602736"/>
+            <a:ext cx="274320" cy="274320"/>
+          </a:xfrm>
+          <a:prstGeom prst="rect">
+            <a:avLst/>
+          </a:prstGeom>
+          <a:noFill/>
+          <a:ln/>
+        </p:spPr>
+        <p:txBody>
+          <a:bodyPr wrap="square" lIns="0" tIns="0" rIns="0" bIns="0" rtlCol="0" anchor="ctr"/>
+          <a:lstStyle/>
+          <a:p>
+            <a:pPr algn="ctr" indent="0" marL="0">
+              <a:buNone/>
+            </a:pPr>
+            <a:r>
+              <a:rPr lang="en-US" sz="1200" b="1" dirty="0">
+                <a:solidFill>
+                  <a:srgbClr val="FFFFFF"/>
+                </a:solidFill>
+                <a:latin typeface="Calibri" pitchFamily="34" charset="0"/>
+                <a:ea typeface="Calibri" pitchFamily="34" charset="-122"/>
+                <a:cs typeface="Calibri" pitchFamily="34" charset="-120"/>
+              </a:rPr>
+              <a:t>4</a:t>
+            </a:r>
+            <a:endParaRPr lang="en-US" sz="1200" dirty="0"/>
+          </a:p>
+        </p:txBody>
+      </p:sp>
+      <p:sp>
+        <p:nvSpPr>
+          <p:cNvPr id="31" name="Text 29"/>
+          <p:cNvSpPr/>
+          <p:nvPr/>
+        </p:nvSpPr>
+        <p:spPr>
+          <a:xfrm>
+            <a:off x="6876288" y="3621024"/>
+            <a:ext cx="4206240" cy="274320"/>
+          </a:xfrm>
+          <a:prstGeom prst="rect">
+            <a:avLst/>
+          </a:prstGeom>
+          <a:noFill/>
+          <a:ln/>
+        </p:spPr>
+        <p:txBody>
+          <a:bodyPr wrap="square" lIns="0" tIns="0" rIns="0" bIns="0" rtlCol="0" anchor="t"/>
+          <a:lstStyle/>
+          <a:p>
+            <a:pPr indent="0" marL="0">
+              <a:buNone/>
+            </a:pPr>
+            <a:r>
+              <a:rPr lang="en-US" sz="1100" dirty="0">
+                <a:solidFill>
+                  <a:srgbClr val="5A6478"/>
+                </a:solidFill>
+                <a:latin typeface="Calibri" pitchFamily="34" charset="0"/>
+                <a:ea typeface="Calibri" pitchFamily="34" charset="-122"/>
+                <a:cs typeface="Calibri" pitchFamily="34" charset="-120"/>
+              </a:rPr>
+              <a:t>Instala la skill de método</a:t>
+            </a:r>
+            <a:endParaRPr lang="en-US" sz="1100" dirty="0"/>
+          </a:p>
+        </p:txBody>
+      </p:sp>
+      <p:sp>
+        <p:nvSpPr>
+          <p:cNvPr id="32" name="Shape 30"/>
+          <p:cNvSpPr/>
+          <p:nvPr/>
+        </p:nvSpPr>
+        <p:spPr>
+          <a:xfrm>
+            <a:off x="6492240" y="4005072"/>
+            <a:ext cx="274320" cy="274320"/>
+          </a:xfrm>
+          <a:prstGeom prst="ellipse">
+            <a:avLst/>
+          </a:prstGeom>
+          <a:solidFill>
+            <a:srgbClr val="A87C4F"/>
+          </a:solidFill>
+          <a:ln/>
+        </p:spPr>
+      </p:sp>
+      <p:sp>
+        <p:nvSpPr>
+          <p:cNvPr id="33" name="Text 31"/>
+          <p:cNvSpPr/>
+          <p:nvPr/>
+        </p:nvSpPr>
+        <p:spPr>
+          <a:xfrm>
+            <a:off x="6492240" y="4005072"/>
+            <a:ext cx="274320" cy="274320"/>
+          </a:xfrm>
+          <a:prstGeom prst="rect">
+            <a:avLst/>
+          </a:prstGeom>
+          <a:noFill/>
+          <a:ln/>
+        </p:spPr>
+        <p:txBody>
+          <a:bodyPr wrap="square" lIns="0" tIns="0" rIns="0" bIns="0" rtlCol="0" anchor="ctr"/>
+          <a:lstStyle/>
+          <a:p>
+            <a:pPr algn="ctr" indent="0" marL="0">
+              <a:buNone/>
+            </a:pPr>
+            <a:r>
+              <a:rPr lang="en-US" sz="1200" b="1" dirty="0">
+                <a:solidFill>
+                  <a:srgbClr val="FFFFFF"/>
+                </a:solidFill>
+                <a:latin typeface="Calibri" pitchFamily="34" charset="0"/>
+                <a:ea typeface="Calibri" pitchFamily="34" charset="-122"/>
+                <a:cs typeface="Calibri" pitchFamily="34" charset="-120"/>
+              </a:rPr>
+              <a:t>5</a:t>
+            </a:r>
+            <a:endParaRPr lang="en-US" sz="1200" dirty="0"/>
+          </a:p>
+        </p:txBody>
+      </p:sp>
+      <p:sp>
+        <p:nvSpPr>
+          <p:cNvPr id="34" name="Text 32"/>
+          <p:cNvSpPr/>
+          <p:nvPr/>
+        </p:nvSpPr>
+        <p:spPr>
+          <a:xfrm>
+            <a:off x="6876288" y="4023360"/>
+            <a:ext cx="4206240" cy="274320"/>
+          </a:xfrm>
+          <a:prstGeom prst="rect">
+            <a:avLst/>
+          </a:prstGeom>
+          <a:noFill/>
+          <a:ln/>
+        </p:spPr>
+        <p:txBody>
+          <a:bodyPr wrap="square" lIns="0" tIns="0" rIns="0" bIns="0" rtlCol="0" anchor="t"/>
+          <a:lstStyle/>
+          <a:p>
+            <a:pPr indent="0" marL="0">
+              <a:buNone/>
+            </a:pPr>
+            <a:r>
+              <a:rPr lang="en-US" sz="1100" dirty="0">
+                <a:solidFill>
+                  <a:srgbClr val="5A6478"/>
+                </a:solidFill>
+                <a:latin typeface="Calibri" pitchFamily="34" charset="0"/>
+                <a:ea typeface="Calibri" pitchFamily="34" charset="-122"/>
+                <a:cs typeface="Calibri" pitchFamily="34" charset="-120"/>
+              </a:rPr>
+              <a:t>Precarga los códigos más citados</a:t>
+            </a:r>
+            <a:endParaRPr lang="en-US" sz="1100" dirty="0"/>
+          </a:p>
+        </p:txBody>
+      </p:sp>
+      <p:sp>
+        <p:nvSpPr>
+          <p:cNvPr id="35" name="Shape 33"/>
+          <p:cNvSpPr/>
+          <p:nvPr/>
+        </p:nvSpPr>
+        <p:spPr>
+          <a:xfrm>
+            <a:off x="6492240" y="4407408"/>
+            <a:ext cx="274320" cy="274320"/>
+          </a:xfrm>
+          <a:prstGeom prst="ellipse">
+            <a:avLst/>
+          </a:prstGeom>
+          <a:solidFill>
+            <a:srgbClr val="A87C4F"/>
+          </a:solidFill>
+          <a:ln/>
+        </p:spPr>
+      </p:sp>
+      <p:sp>
+        <p:nvSpPr>
+          <p:cNvPr id="36" name="Text 34"/>
+          <p:cNvSpPr/>
+          <p:nvPr/>
+        </p:nvSpPr>
+        <p:spPr>
+          <a:xfrm>
+            <a:off x="6492240" y="4407408"/>
+            <a:ext cx="274320" cy="274320"/>
+          </a:xfrm>
+          <a:prstGeom prst="rect">
+            <a:avLst/>
+          </a:prstGeom>
+          <a:noFill/>
+          <a:ln/>
+        </p:spPr>
+        <p:txBody>
+          <a:bodyPr wrap="square" lIns="0" tIns="0" rIns="0" bIns="0" rtlCol="0" anchor="ctr"/>
+          <a:lstStyle/>
+          <a:p>
+            <a:pPr algn="ctr" indent="0" marL="0">
+              <a:buNone/>
+            </a:pPr>
+            <a:r>
+              <a:rPr lang="en-US" sz="1200" b="1" dirty="0">
+                <a:solidFill>
+                  <a:srgbClr val="FFFFFF"/>
+                </a:solidFill>
+                <a:latin typeface="Calibri" pitchFamily="34" charset="0"/>
+                <a:ea typeface="Calibri" pitchFamily="34" charset="-122"/>
+                <a:cs typeface="Calibri" pitchFamily="34" charset="-120"/>
+              </a:rPr>
+              <a:t>6</a:t>
+            </a:r>
+            <a:endParaRPr lang="en-US" sz="1200" dirty="0"/>
+          </a:p>
+        </p:txBody>
+      </p:sp>
+      <p:sp>
+        <p:nvSpPr>
+          <p:cNvPr id="37" name="Text 35"/>
+          <p:cNvSpPr/>
+          <p:nvPr/>
+        </p:nvSpPr>
+        <p:spPr>
+          <a:xfrm>
+            <a:off x="6876288" y="4425696"/>
+            <a:ext cx="4206240" cy="274320"/>
+          </a:xfrm>
+          <a:prstGeom prst="rect">
+            <a:avLst/>
+          </a:prstGeom>
+          <a:noFill/>
+          <a:ln/>
+        </p:spPr>
+        <p:txBody>
+          <a:bodyPr wrap="square" lIns="0" tIns="0" rIns="0" bIns="0" rtlCol="0" anchor="t"/>
+          <a:lstStyle/>
+          <a:p>
+            <a:pPr indent="0" marL="0">
+              <a:buNone/>
+            </a:pPr>
+            <a:r>
+              <a:rPr lang="en-US" sz="1100" dirty="0">
+                <a:solidFill>
+                  <a:srgbClr val="5A6478"/>
+                </a:solidFill>
+                <a:latin typeface="Calibri" pitchFamily="34" charset="0"/>
+                <a:ea typeface="Calibri" pitchFamily="34" charset="-122"/>
+                <a:cs typeface="Calibri" pitchFamily="34" charset="-120"/>
+              </a:rPr>
+              <a:t>Verifica las diez fuentes</a:t>
+            </a:r>
+            <a:endParaRPr lang="en-US" sz="1100" dirty="0"/>
+          </a:p>
+        </p:txBody>
+      </p:sp>
+      <p:sp>
+        <p:nvSpPr>
+          <p:cNvPr id="38" name="Shape 36"/>
+          <p:cNvSpPr/>
+          <p:nvPr/>
+        </p:nvSpPr>
+        <p:spPr>
+          <a:xfrm>
+            <a:off x="6172200" y="5230368"/>
+            <a:ext cx="5239512" cy="658368"/>
+          </a:xfrm>
+          <a:prstGeom prst="roundRect">
+            <a:avLst>
+              <a:gd name="adj" fmla="val 6944"/>
+            </a:avLst>
+          </a:prstGeom>
+          <a:solidFill>
+            <a:srgbClr val="1B2230"/>
+          </a:solidFill>
+          <a:ln/>
+        </p:spPr>
+      </p:sp>
+      <p:sp>
+        <p:nvSpPr>
+          <p:cNvPr id="39" name="Text 37"/>
+          <p:cNvSpPr/>
+          <p:nvPr/>
+        </p:nvSpPr>
+        <p:spPr>
+          <a:xfrm>
+            <a:off x="6400800" y="5230368"/>
+            <a:ext cx="4754880" cy="658368"/>
+          </a:xfrm>
+          <a:prstGeom prst="rect">
+            <a:avLst/>
+          </a:prstGeom>
+          <a:noFill/>
+          <a:ln/>
+        </p:spPr>
+        <p:txBody>
+          <a:bodyPr wrap="square" lIns="0" tIns="0" rIns="0" bIns="0" rtlCol="0" anchor="ctr"/>
+          <a:lstStyle/>
+          <a:p>
+            <a:pPr indent="0" marL="0">
+              <a:buNone/>
+            </a:pPr>
+            <a:r>
+              <a:rPr lang="en-US" sz="1200" b="1" dirty="0">
+                <a:solidFill>
+                  <a:srgbClr val="C9A574"/>
+                </a:solidFill>
+                <a:latin typeface="Courier New" pitchFamily="34" charset="0"/>
+                <a:ea typeface="Courier New" pitchFamily="34" charset="-122"/>
+                <a:cs typeface="Courier New" pitchFamily="34" charset="-120"/>
+              </a:rPr>
+              <a:t>Instalado.  10/10 fuentes responden.</a:t>
+            </a:r>
+            <a:endParaRPr lang="en-US" sz="1200" dirty="0"/>
+          </a:p>
+        </p:txBody>
+      </p:sp>
+      <p:sp>
+        <p:nvSpPr>
+          <p:cNvPr id="40" name="Text 38"/>
+          <p:cNvSpPr/>
+          <p:nvPr/>
+        </p:nvSpPr>
+        <p:spPr>
+          <a:xfrm>
+            <a:off x="6172200" y="5943600"/>
+            <a:ext cx="5239512" cy="365760"/>
+          </a:xfrm>
+          <a:prstGeom prst="rect">
+            <a:avLst/>
+          </a:prstGeom>
+          <a:noFill/>
+          <a:ln/>
+        </p:spPr>
+        <p:txBody>
+          <a:bodyPr wrap="square" lIns="0" tIns="0" rIns="0" bIns="0" rtlCol="0" anchor="t"/>
+          <a:lstStyle/>
+          <a:p>
+            <a:pPr indent="0" marL="0">
+              <a:buNone/>
+            </a:pPr>
+            <a:r>
+              <a:rPr lang="en-US" sz="1000" i="1" dirty="0">
+                <a:solidFill>
+                  <a:srgbClr val="5A6478"/>
+                </a:solidFill>
+                <a:latin typeface="Calibri" pitchFamily="34" charset="0"/>
+                <a:ea typeface="Calibri" pitchFamily="34" charset="-122"/>
+                <a:cs typeface="Calibri" pitchFamily="34" charset="-120"/>
+              </a:rPr>
+              <a:t>Si dice menos de 10, algún organismo tenía su sitio caído. Se comprueba después.</a:t>
+            </a:r>
+            <a:endParaRPr lang="en-US" sz="1000" dirty="0"/>
+          </a:p>
+        </p:txBody>
+      </p:sp>
+    </p:spTree>
+  </p:cSld>
+  <p:clrMapOvr>
+    <a:masterClrMapping/>
+  </p:clrMapOvr>
+</p:sld>
+</file>
+
+<file path=ppt/slides/slide14.xml><?xml version="1.0" encoding="utf-8"?>
+<p:sld xmlns:a="http://schemas.openxmlformats.org/drawingml/2006/main" xmlns:r="http://schemas.openxmlformats.org/officeDocument/2006/relationships" xmlns:p="http://schemas.openxmlformats.org/presentationml/2006/main">
+  <p:cSld name="Slide 14">
+    <p:bg>
+      <p:bgPr>
+        <a:solidFill>
+          <a:srgbClr val="F4F1EA"/>
+        </a:solidFill>
+      </p:bgPr>
+    </p:bg>
+    <p:spTree>
+      <p:nvGrpSpPr>
+        <p:cNvPr id="1" name=""/>
+        <p:cNvGrpSpPr/>
+        <p:nvPr/>
+      </p:nvGrpSpPr>
+      <p:grpSpPr>
+        <a:xfrm>
+          <a:off x="0" y="0"/>
+          <a:ext cx="0" cy="0"/>
+          <a:chOff x="0" y="0"/>
+          <a:chExt cx="0" cy="0"/>
+        </a:xfrm>
+      </p:grpSpPr>
+      <p:sp>
+        <p:nvSpPr>
+          <p:cNvPr id="2" name="Text 0"/>
+          <p:cNvSpPr/>
+          <p:nvPr/>
+        </p:nvSpPr>
+        <p:spPr>
+          <a:xfrm>
+            <a:off x="777240" y="566928"/>
+            <a:ext cx="10634472" cy="566928"/>
+          </a:xfrm>
+          <a:prstGeom prst="rect">
+            <a:avLst/>
+          </a:prstGeom>
+          <a:noFill/>
+          <a:ln/>
+        </p:spPr>
+        <p:txBody>
+          <a:bodyPr wrap="square" lIns="0" tIns="0" rIns="0" bIns="0" rtlCol="0" anchor="ctr"/>
+          <a:lstStyle/>
+          <a:p>
+            <a:pPr indent="0" marL="0">
+              <a:buNone/>
+            </a:pPr>
+            <a:r>
+              <a:rPr lang="en-US" sz="3200" b="1" dirty="0">
+                <a:solidFill>
+                  <a:srgbClr val="1B2230"/>
+                </a:solidFill>
+                <a:latin typeface="Cambria" pitchFamily="34" charset="0"/>
+                <a:ea typeface="Cambria" pitchFamily="34" charset="-122"/>
+                <a:cs typeface="Cambria" pitchFamily="34" charset="-120"/>
+              </a:rPr>
+              <a:t>Pasos 4 y 5 · Reiniciar y comprobar</a:t>
+            </a:r>
+            <a:endParaRPr lang="en-US" sz="3200" dirty="0"/>
+          </a:p>
+        </p:txBody>
+      </p:sp>
+      <p:sp>
+        <p:nvSpPr>
+          <p:cNvPr id="3" name="Text 1"/>
+          <p:cNvSpPr/>
+          <p:nvPr/>
+        </p:nvSpPr>
+        <p:spPr>
+          <a:xfrm>
+            <a:off x="777240" y="1152144"/>
+            <a:ext cx="9537192" cy="384048"/>
+          </a:xfrm>
+          <a:prstGeom prst="rect">
+            <a:avLst/>
+          </a:prstGeom>
+          <a:noFill/>
+          <a:ln/>
+        </p:spPr>
+        <p:txBody>
+          <a:bodyPr wrap="square" lIns="0" tIns="0" rIns="0" bIns="0" rtlCol="0" anchor="ctr"/>
+          <a:lstStyle/>
+          <a:p>
+            <a:pPr indent="0" marL="0">
+              <a:buNone/>
+            </a:pPr>
+            <a:r>
+              <a:rPr lang="en-US" sz="1350" i="1" dirty="0">
+                <a:solidFill>
+                  <a:srgbClr val="5A6478"/>
+                </a:solidFill>
+                <a:latin typeface="Calibri" pitchFamily="34" charset="0"/>
+                <a:ea typeface="Calibri" pitchFamily="34" charset="-122"/>
+                <a:cs typeface="Calibri" pitchFamily="34" charset="-120"/>
+              </a:rPr>
+              <a:t>El reinicio es obligatorio: Claude carga los servidores al arrancar</a:t>
+            </a:r>
+            <a:endParaRPr lang="en-US" sz="1350" dirty="0"/>
+          </a:p>
+        </p:txBody>
+      </p:sp>
+      <p:sp>
+        <p:nvSpPr>
+          <p:cNvPr id="4" name="Shape 2"/>
+          <p:cNvSpPr/>
+          <p:nvPr/>
+        </p:nvSpPr>
+        <p:spPr>
+          <a:xfrm>
+            <a:off x="777240" y="1810512"/>
+            <a:ext cx="5029200" cy="2331720"/>
+          </a:xfrm>
+          <a:prstGeom prst="roundRect">
+            <a:avLst>
+              <a:gd name="adj" fmla="val 2353"/>
+            </a:avLst>
+          </a:prstGeom>
+          <a:solidFill>
+            <a:srgbClr val="1B2230"/>
+          </a:solidFill>
+          <a:ln/>
+        </p:spPr>
+      </p:sp>
+      <p:sp>
+        <p:nvSpPr>
+          <p:cNvPr id="5" name="Shape 3"/>
+          <p:cNvSpPr/>
+          <p:nvPr/>
+        </p:nvSpPr>
+        <p:spPr>
+          <a:xfrm>
+            <a:off x="1069848" y="2048256"/>
+            <a:ext cx="365760" cy="365760"/>
+          </a:xfrm>
+          <a:prstGeom prst="ellipse">
+            <a:avLst/>
+          </a:prstGeom>
+          <a:solidFill>
+            <a:srgbClr val="A87C4F"/>
+          </a:solidFill>
+          <a:ln/>
+        </p:spPr>
+      </p:sp>
+      <p:sp>
+        <p:nvSpPr>
+          <p:cNvPr id="6" name="Text 4"/>
+          <p:cNvSpPr/>
+          <p:nvPr/>
+        </p:nvSpPr>
+        <p:spPr>
+          <a:xfrm>
+            <a:off x="1069848" y="2048256"/>
+            <a:ext cx="365760" cy="365760"/>
+          </a:xfrm>
+          <a:prstGeom prst="rect">
+            <a:avLst/>
+          </a:prstGeom>
+          <a:noFill/>
+          <a:ln/>
+        </p:spPr>
+        <p:txBody>
+          <a:bodyPr wrap="square" lIns="0" tIns="0" rIns="0" bIns="0" rtlCol="0" anchor="ctr"/>
+          <a:lstStyle/>
+          <a:p>
+            <a:pPr algn="ctr" indent="0" marL="0">
+              <a:buNone/>
+            </a:pPr>
+            <a:r>
+              <a:rPr lang="en-US" sz="1200" b="1" dirty="0">
+                <a:solidFill>
+                  <a:srgbClr val="FFFFFF"/>
+                </a:solidFill>
+                <a:latin typeface="Calibri" pitchFamily="34" charset="0"/>
+                <a:ea typeface="Calibri" pitchFamily="34" charset="-122"/>
+                <a:cs typeface="Calibri" pitchFamily="34" charset="-120"/>
+              </a:rPr>
+              <a:t>4</a:t>
+            </a:r>
+            <a:endParaRPr lang="en-US" sz="1200" dirty="0"/>
+          </a:p>
+        </p:txBody>
+      </p:sp>
+      <p:sp>
+        <p:nvSpPr>
+          <p:cNvPr id="7" name="Text 5"/>
+          <p:cNvSpPr/>
+          <p:nvPr/>
+        </p:nvSpPr>
+        <p:spPr>
+          <a:xfrm>
+            <a:off x="1581912" y="2048256"/>
+            <a:ext cx="3931920" cy="310896"/>
+          </a:xfrm>
+          <a:prstGeom prst="rect">
+            <a:avLst/>
+          </a:prstGeom>
+          <a:noFill/>
+          <a:ln/>
+        </p:spPr>
+        <p:txBody>
+          <a:bodyPr wrap="square" lIns="0" tIns="0" rIns="0" bIns="0" rtlCol="0" anchor="t"/>
+          <a:lstStyle/>
+          <a:p>
+            <a:pPr indent="0" marL="0">
+              <a:buNone/>
+            </a:pPr>
+            <a:r>
+              <a:rPr lang="en-US" sz="1350" b="1" dirty="0">
+                <a:solidFill>
+                  <a:srgbClr val="C9A574"/>
+                </a:solidFill>
+                <a:latin typeface="Calibri" pitchFamily="34" charset="0"/>
+                <a:ea typeface="Calibri" pitchFamily="34" charset="-122"/>
+                <a:cs typeface="Calibri" pitchFamily="34" charset="-120"/>
+              </a:rPr>
+              <a:t>Reiniciar Claude por completo</a:t>
+            </a:r>
+            <a:endParaRPr lang="en-US" sz="1350" dirty="0"/>
+          </a:p>
+        </p:txBody>
+      </p:sp>
+      <p:sp>
+        <p:nvSpPr>
+          <p:cNvPr id="8" name="Text 6"/>
+          <p:cNvSpPr/>
+          <p:nvPr/>
+        </p:nvSpPr>
+        <p:spPr>
+          <a:xfrm>
+            <a:off x="1069848" y="2596896"/>
+            <a:ext cx="4480560" cy="237744"/>
+          </a:xfrm>
+          <a:prstGeom prst="rect">
+            <a:avLst/>
+          </a:prstGeom>
+          <a:noFill/>
+          <a:ln/>
+        </p:spPr>
+        <p:txBody>
+          <a:bodyPr wrap="square" lIns="0" tIns="0" rIns="0" bIns="0" rtlCol="0" anchor="t"/>
+          <a:lstStyle/>
+          <a:p>
+            <a:pPr indent="0" marL="0">
+              <a:buNone/>
+            </a:pPr>
+            <a:r>
+              <a:rPr lang="en-US" sz="1100" b="1" dirty="0">
+                <a:solidFill>
+                  <a:srgbClr val="FFFFFF"/>
+                </a:solidFill>
+                <a:latin typeface="Calibri" pitchFamily="34" charset="0"/>
+                <a:ea typeface="Calibri" pitchFamily="34" charset="-122"/>
+                <a:cs typeface="Calibri" pitchFamily="34" charset="-120"/>
+              </a:rPr>
+              <a:t>Windows</a:t>
+            </a:r>
+            <a:endParaRPr lang="en-US" sz="1100" dirty="0"/>
+          </a:p>
+        </p:txBody>
+      </p:sp>
+      <p:sp>
+        <p:nvSpPr>
+          <p:cNvPr id="9" name="Text 7"/>
+          <p:cNvSpPr/>
+          <p:nvPr/>
+        </p:nvSpPr>
+        <p:spPr>
+          <a:xfrm>
+            <a:off x="1069848" y="2852928"/>
+            <a:ext cx="4480560" cy="548640"/>
+          </a:xfrm>
+          <a:prstGeom prst="rect">
+            <a:avLst/>
+          </a:prstGeom>
+          <a:noFill/>
+          <a:ln/>
+        </p:spPr>
+        <p:txBody>
+          <a:bodyPr wrap="square" lIns="0" tIns="0" rIns="0" bIns="0" rtlCol="0" anchor="t"/>
+          <a:lstStyle/>
+          <a:p>
+            <a:pPr indent="0" marL="0">
+              <a:lnSpc>
+                <a:spcPct val="105000"/>
+              </a:lnSpc>
+              <a:buNone/>
+            </a:pPr>
+            <a:r>
+              <a:rPr lang="en-US" sz="1050" dirty="0">
+                <a:solidFill>
+                  <a:srgbClr val="8A93A5"/>
+                </a:solidFill>
+                <a:latin typeface="Calibri" pitchFamily="34" charset="0"/>
+                <a:ea typeface="Calibri" pitchFamily="34" charset="-122"/>
+                <a:cs typeface="Calibri" pitchFamily="34" charset="-120"/>
+              </a:rPr>
+              <a:t>No basta con cerrar la ventana. Busca el ícono junto al reloj (puede estar tras la flecha ^), clic derecho → Quit. Después ábrelo de nuevo.</a:t>
+            </a:r>
+            <a:endParaRPr lang="en-US" sz="1050" dirty="0"/>
+          </a:p>
+        </p:txBody>
+      </p:sp>
+      <p:sp>
+        <p:nvSpPr>
+          <p:cNvPr id="10" name="Text 8"/>
+          <p:cNvSpPr/>
+          <p:nvPr/>
+        </p:nvSpPr>
+        <p:spPr>
+          <a:xfrm>
+            <a:off x="1069848" y="3438144"/>
+            <a:ext cx="4480560" cy="237744"/>
+          </a:xfrm>
+          <a:prstGeom prst="rect">
+            <a:avLst/>
+          </a:prstGeom>
+          <a:noFill/>
+          <a:ln/>
+        </p:spPr>
+        <p:txBody>
+          <a:bodyPr wrap="square" lIns="0" tIns="0" rIns="0" bIns="0" rtlCol="0" anchor="t"/>
+          <a:lstStyle/>
+          <a:p>
+            <a:pPr indent="0" marL="0">
+              <a:buNone/>
+            </a:pPr>
+            <a:r>
+              <a:rPr lang="en-US" sz="1100" b="1" dirty="0">
+                <a:solidFill>
+                  <a:srgbClr val="FFFFFF"/>
+                </a:solidFill>
+                <a:latin typeface="Calibri" pitchFamily="34" charset="0"/>
+                <a:ea typeface="Calibri" pitchFamily="34" charset="-122"/>
+                <a:cs typeface="Calibri" pitchFamily="34" charset="-120"/>
+              </a:rPr>
+              <a:t>macOS</a:t>
+            </a:r>
+            <a:endParaRPr lang="en-US" sz="1100" dirty="0"/>
+          </a:p>
+        </p:txBody>
+      </p:sp>
+      <p:sp>
+        <p:nvSpPr>
+          <p:cNvPr id="11" name="Text 9"/>
+          <p:cNvSpPr/>
+          <p:nvPr/>
+        </p:nvSpPr>
+        <p:spPr>
+          <a:xfrm>
+            <a:off x="1069848" y="3694176"/>
+            <a:ext cx="4480560" cy="365760"/>
+          </a:xfrm>
+          <a:prstGeom prst="rect">
+            <a:avLst/>
+          </a:prstGeom>
+          <a:noFill/>
+          <a:ln/>
+        </p:spPr>
+        <p:txBody>
+          <a:bodyPr wrap="square" lIns="0" tIns="0" rIns="0" bIns="0" rtlCol="0" anchor="t"/>
+          <a:lstStyle/>
+          <a:p>
+            <a:pPr indent="0" marL="0">
+              <a:buNone/>
+            </a:pPr>
+            <a:r>
+              <a:rPr lang="en-US" sz="1050" dirty="0">
+                <a:solidFill>
+                  <a:srgbClr val="8A93A5"/>
+                </a:solidFill>
+                <a:latin typeface="Calibri" pitchFamily="34" charset="0"/>
+                <a:ea typeface="Calibri" pitchFamily="34" charset="-122"/>
+                <a:cs typeface="Calibri" pitchFamily="34" charset="-120"/>
+              </a:rPr>
+              <a:t>Command + Q con Claude en primer plano. Cerrar con la bolita roja no basta.</a:t>
+            </a:r>
+            <a:endParaRPr lang="en-US" sz="1050" dirty="0"/>
+          </a:p>
+        </p:txBody>
+      </p:sp>
+      <p:sp>
+        <p:nvSpPr>
+          <p:cNvPr id="12" name="Shape 10"/>
+          <p:cNvSpPr/>
+          <p:nvPr/>
+        </p:nvSpPr>
+        <p:spPr>
+          <a:xfrm>
+            <a:off x="6172200" y="1883664"/>
+            <a:ext cx="365760" cy="365760"/>
+          </a:xfrm>
+          <a:prstGeom prst="ellipse">
+            <a:avLst/>
+          </a:prstGeom>
+          <a:solidFill>
+            <a:srgbClr val="A87C4F"/>
+          </a:solidFill>
+          <a:ln/>
+        </p:spPr>
+      </p:sp>
+      <p:sp>
+        <p:nvSpPr>
+          <p:cNvPr id="13" name="Text 11"/>
+          <p:cNvSpPr/>
+          <p:nvPr/>
+        </p:nvSpPr>
+        <p:spPr>
+          <a:xfrm>
+            <a:off x="6172200" y="1883664"/>
+            <a:ext cx="365760" cy="365760"/>
+          </a:xfrm>
+          <a:prstGeom prst="rect">
+            <a:avLst/>
+          </a:prstGeom>
+          <a:noFill/>
+          <a:ln/>
+        </p:spPr>
+        <p:txBody>
+          <a:bodyPr wrap="square" lIns="0" tIns="0" rIns="0" bIns="0" rtlCol="0" anchor="ctr"/>
+          <a:lstStyle/>
+          <a:p>
+            <a:pPr algn="ctr" indent="0" marL="0">
+              <a:buNone/>
+            </a:pPr>
+            <a:r>
+              <a:rPr lang="en-US" sz="1200" b="1" dirty="0">
+                <a:solidFill>
+                  <a:srgbClr val="FFFFFF"/>
+                </a:solidFill>
+                <a:latin typeface="Calibri" pitchFamily="34" charset="0"/>
+                <a:ea typeface="Calibri" pitchFamily="34" charset="-122"/>
+                <a:cs typeface="Calibri" pitchFamily="34" charset="-120"/>
+              </a:rPr>
+              <a:t>5</a:t>
+            </a:r>
+            <a:endParaRPr lang="en-US" sz="1200" dirty="0"/>
+          </a:p>
+        </p:txBody>
+      </p:sp>
+      <p:sp>
+        <p:nvSpPr>
+          <p:cNvPr id="14" name="Text 12"/>
+          <p:cNvSpPr/>
+          <p:nvPr/>
+        </p:nvSpPr>
+        <p:spPr>
+          <a:xfrm>
+            <a:off x="6684264" y="1883664"/>
+            <a:ext cx="4663440" cy="310896"/>
+          </a:xfrm>
+          <a:prstGeom prst="rect">
+            <a:avLst/>
+          </a:prstGeom>
+          <a:noFill/>
+          <a:ln/>
+        </p:spPr>
+        <p:txBody>
+          <a:bodyPr wrap="square" lIns="0" tIns="0" rIns="0" bIns="0" rtlCol="0" anchor="t"/>
+          <a:lstStyle/>
+          <a:p>
+            <a:pPr indent="0" marL="0">
+              <a:buNone/>
+            </a:pPr>
+            <a:r>
+              <a:rPr lang="en-US" sz="1350" b="1" dirty="0">
+                <a:solidFill>
+                  <a:srgbClr val="1B2230"/>
+                </a:solidFill>
+                <a:latin typeface="Calibri" pitchFamily="34" charset="0"/>
+                <a:ea typeface="Calibri" pitchFamily="34" charset="-122"/>
+                <a:cs typeface="Calibri" pitchFamily="34" charset="-120"/>
+              </a:rPr>
+              <a:t>Comprobar que funciona</a:t>
+            </a:r>
+            <a:endParaRPr lang="en-US" sz="1350" dirty="0"/>
+          </a:p>
+        </p:txBody>
+      </p:sp>
+      <p:sp>
+        <p:nvSpPr>
+          <p:cNvPr id="15" name="Text 13"/>
+          <p:cNvSpPr/>
+          <p:nvPr/>
+        </p:nvSpPr>
+        <p:spPr>
+          <a:xfrm>
+            <a:off x="6172200" y="2340864"/>
+            <a:ext cx="5120640" cy="256032"/>
+          </a:xfrm>
+          <a:prstGeom prst="rect">
+            <a:avLst/>
+          </a:prstGeom>
+          <a:noFill/>
+          <a:ln/>
+        </p:spPr>
+        <p:txBody>
+          <a:bodyPr wrap="square" lIns="0" tIns="0" rIns="0" bIns="0" rtlCol="0" anchor="t"/>
+          <a:lstStyle/>
+          <a:p>
+            <a:pPr indent="0" marL="0">
+              <a:buNone/>
+            </a:pPr>
+            <a:r>
+              <a:rPr lang="en-US" sz="1100" dirty="0">
+                <a:solidFill>
+                  <a:srgbClr val="5A6478"/>
+                </a:solidFill>
+                <a:latin typeface="Calibri" pitchFamily="34" charset="0"/>
+                <a:ea typeface="Calibri" pitchFamily="34" charset="-122"/>
+                <a:cs typeface="Calibri" pitchFamily="34" charset="-120"/>
+              </a:rPr>
+              <a:t>Abre Claude y pregunta:</a:t>
+            </a:r>
+            <a:endParaRPr lang="en-US" sz="1100" dirty="0"/>
+          </a:p>
+        </p:txBody>
+      </p:sp>
+      <p:sp>
+        <p:nvSpPr>
+          <p:cNvPr id="16" name="Text 14"/>
+          <p:cNvSpPr/>
+          <p:nvPr/>
+        </p:nvSpPr>
+        <p:spPr>
+          <a:xfrm>
+            <a:off x="6172200" y="2615184"/>
+            <a:ext cx="5120640" cy="365760"/>
+          </a:xfrm>
+          <a:prstGeom prst="rect">
+            <a:avLst/>
+          </a:prstGeom>
+          <a:noFill/>
+          <a:ln/>
+        </p:spPr>
+        <p:txBody>
+          <a:bodyPr wrap="square" lIns="0" tIns="0" rIns="0" bIns="0" rtlCol="0" anchor="t"/>
+          <a:lstStyle/>
+          <a:p>
+            <a:pPr indent="0" marL="0">
+              <a:buNone/>
+            </a:pPr>
+            <a:r>
+              <a:rPr lang="en-US" sz="1400" dirty="0">
+                <a:solidFill>
+                  <a:srgbClr val="1B2230"/>
+                </a:solidFill>
+                <a:latin typeface="Cambria" pitchFamily="34" charset="0"/>
+                <a:ea typeface="Cambria" pitchFamily="34" charset="-122"/>
+                <a:cs typeface="Cambria" pitchFamily="34" charset="-120"/>
+              </a:rPr>
+              <a:t>«¿Qué ha resuelto la Corte Suprema sobre nulidad del despido?»</a:t>
+            </a:r>
+            <a:endParaRPr lang="en-US" sz="1400" dirty="0"/>
+          </a:p>
+        </p:txBody>
+      </p:sp>
+      <p:sp>
+        <p:nvSpPr>
+          <p:cNvPr id="17" name="Shape 15"/>
+          <p:cNvSpPr/>
+          <p:nvPr/>
+        </p:nvSpPr>
+        <p:spPr>
+          <a:xfrm>
+            <a:off x="6172200" y="3127248"/>
+            <a:ext cx="5239512" cy="1051560"/>
+          </a:xfrm>
+          <a:prstGeom prst="roundRect">
+            <a:avLst>
+              <a:gd name="adj" fmla="val 5217"/>
+            </a:avLst>
+          </a:prstGeom>
+          <a:solidFill>
+            <a:srgbClr val="FFFFFF"/>
+          </a:solidFill>
+          <a:ln w="9525">
+            <a:solidFill>
+              <a:srgbClr val="E3DED3"/>
+            </a:solidFill>
+            <a:prstDash val="solid"/>
+          </a:ln>
+        </p:spPr>
+      </p:sp>
+      <p:sp>
+        <p:nvSpPr>
+          <p:cNvPr id="18" name="Text 16"/>
+          <p:cNvSpPr/>
+          <p:nvPr/>
+        </p:nvSpPr>
+        <p:spPr>
+          <a:xfrm>
+            <a:off x="6446520" y="3291840"/>
+            <a:ext cx="4663440" cy="237744"/>
+          </a:xfrm>
+          <a:prstGeom prst="rect">
+            <a:avLst/>
+          </a:prstGeom>
+          <a:noFill/>
+          <a:ln/>
+        </p:spPr>
+        <p:txBody>
+          <a:bodyPr wrap="square" lIns="0" tIns="0" rIns="0" bIns="0" rtlCol="0" anchor="t"/>
+          <a:lstStyle/>
+          <a:p>
+            <a:pPr indent="0" marL="0">
+              <a:buNone/>
+            </a:pPr>
+            <a:r>
+              <a:rPr lang="en-US" sz="1100" b="1" dirty="0">
+                <a:solidFill>
+                  <a:srgbClr val="A87C4F"/>
+                </a:solidFill>
+                <a:latin typeface="Calibri" pitchFamily="34" charset="0"/>
+                <a:ea typeface="Calibri" pitchFamily="34" charset="-122"/>
+                <a:cs typeface="Calibri" pitchFamily="34" charset="-120"/>
+              </a:rPr>
+              <a:t>Funciona si…</a:t>
+            </a:r>
+            <a:endParaRPr lang="en-US" sz="1100" dirty="0"/>
+          </a:p>
+        </p:txBody>
+      </p:sp>
+      <p:sp>
+        <p:nvSpPr>
+          <p:cNvPr id="19" name="Text 17"/>
+          <p:cNvSpPr/>
+          <p:nvPr/>
+        </p:nvSpPr>
+        <p:spPr>
+          <a:xfrm>
+            <a:off x="6446520" y="3547872"/>
+            <a:ext cx="4663440" cy="457200"/>
+          </a:xfrm>
+          <a:prstGeom prst="rect">
+            <a:avLst/>
+          </a:prstGeom>
+          <a:noFill/>
+          <a:ln/>
+        </p:spPr>
+        <p:txBody>
+          <a:bodyPr wrap="square" lIns="0" tIns="0" rIns="0" bIns="0" rtlCol="0" anchor="t"/>
+          <a:lstStyle/>
+          <a:p>
+            <a:pPr indent="0" marL="0">
+              <a:buNone/>
+            </a:pPr>
+            <a:r>
+              <a:rPr lang="en-US" sz="1050" dirty="0">
+                <a:solidFill>
+                  <a:srgbClr val="5A6478"/>
+                </a:solidFill>
+                <a:latin typeface="Calibri" pitchFamily="34" charset="0"/>
+                <a:ea typeface="Calibri" pitchFamily="34" charset="-122"/>
+                <a:cs typeface="Calibri" pitchFamily="34" charset="-120"/>
+              </a:rPr>
+              <a:t>…la respuesta trae roles, tribunales, fechas y enlaces concretos.</a:t>
+            </a:r>
+            <a:endParaRPr lang="en-US" sz="1050" dirty="0"/>
+          </a:p>
+        </p:txBody>
+      </p:sp>
+      <p:sp>
+        <p:nvSpPr>
+          <p:cNvPr id="20" name="Shape 18"/>
+          <p:cNvSpPr/>
+          <p:nvPr/>
+        </p:nvSpPr>
+        <p:spPr>
+          <a:xfrm>
+            <a:off x="6172200" y="4279392"/>
+            <a:ext cx="5239512" cy="1051560"/>
+          </a:xfrm>
+          <a:prstGeom prst="roundRect">
+            <a:avLst>
+              <a:gd name="adj" fmla="val 5217"/>
+            </a:avLst>
+          </a:prstGeom>
+          <a:solidFill>
+            <a:srgbClr val="FFFFFF"/>
+          </a:solidFill>
+          <a:ln w="9525">
+            <a:solidFill>
+              <a:srgbClr val="E3DED3"/>
+            </a:solidFill>
+            <a:prstDash val="solid"/>
+          </a:ln>
+        </p:spPr>
+      </p:sp>
+      <p:sp>
+        <p:nvSpPr>
+          <p:cNvPr id="21" name="Text 19"/>
+          <p:cNvSpPr/>
+          <p:nvPr/>
+        </p:nvSpPr>
+        <p:spPr>
+          <a:xfrm>
+            <a:off x="6446520" y="4443984"/>
+            <a:ext cx="4663440" cy="237744"/>
+          </a:xfrm>
+          <a:prstGeom prst="rect">
+            <a:avLst/>
+          </a:prstGeom>
+          <a:noFill/>
+          <a:ln/>
+        </p:spPr>
+        <p:txBody>
+          <a:bodyPr wrap="square" lIns="0" tIns="0" rIns="0" bIns="0" rtlCol="0" anchor="t"/>
+          <a:lstStyle/>
+          <a:p>
+            <a:pPr indent="0" marL="0">
+              <a:buNone/>
+            </a:pPr>
+            <a:r>
+              <a:rPr lang="en-US" sz="1100" b="1" dirty="0">
+                <a:solidFill>
+                  <a:srgbClr val="6B2C33"/>
+                </a:solidFill>
+                <a:latin typeface="Calibri" pitchFamily="34" charset="0"/>
+                <a:ea typeface="Calibri" pitchFamily="34" charset="-122"/>
+                <a:cs typeface="Calibri" pitchFamily="34" charset="-120"/>
+              </a:rPr>
+              <a:t>No funciona si…</a:t>
+            </a:r>
+            <a:endParaRPr lang="en-US" sz="1100" dirty="0"/>
+          </a:p>
+        </p:txBody>
+      </p:sp>
+      <p:sp>
+        <p:nvSpPr>
+          <p:cNvPr id="22" name="Text 20"/>
+          <p:cNvSpPr/>
+          <p:nvPr/>
+        </p:nvSpPr>
+        <p:spPr>
+          <a:xfrm>
+            <a:off x="6446520" y="4700016"/>
+            <a:ext cx="4663440" cy="502920"/>
+          </a:xfrm>
+          <a:prstGeom prst="rect">
+            <a:avLst/>
+          </a:prstGeom>
+          <a:noFill/>
+          <a:ln/>
+        </p:spPr>
+        <p:txBody>
+          <a:bodyPr wrap="square" lIns="0" tIns="0" rIns="0" bIns="0" rtlCol="0" anchor="t"/>
+          <a:lstStyle/>
+          <a:p>
+            <a:pPr indent="0" marL="0">
+              <a:buNone/>
+            </a:pPr>
+            <a:r>
+              <a:rPr lang="en-US" sz="1050" dirty="0">
+                <a:solidFill>
+                  <a:srgbClr val="5A6478"/>
+                </a:solidFill>
+                <a:latin typeface="Calibri" pitchFamily="34" charset="0"/>
+                <a:ea typeface="Calibri" pitchFamily="34" charset="-122"/>
+                <a:cs typeface="Calibri" pitchFamily="34" charset="-120"/>
+              </a:rPr>
+              <a:t>…explica en general qué es la nulidad del despido sin citar ni un fallo. Revisa el paso 4.</a:t>
+            </a:r>
+            <a:endParaRPr lang="en-US" sz="1050" dirty="0"/>
+          </a:p>
+        </p:txBody>
+      </p:sp>
+      <p:sp>
+        <p:nvSpPr>
+          <p:cNvPr id="23" name="Text 21"/>
+          <p:cNvSpPr/>
+          <p:nvPr/>
+        </p:nvSpPr>
+        <p:spPr>
+          <a:xfrm>
+            <a:off x="777240" y="4443984"/>
+            <a:ext cx="5029200" cy="256032"/>
+          </a:xfrm>
+          <a:prstGeom prst="rect">
+            <a:avLst/>
+          </a:prstGeom>
+          <a:noFill/>
+          <a:ln/>
+        </p:spPr>
+        <p:txBody>
+          <a:bodyPr wrap="square" lIns="0" tIns="0" rIns="0" bIns="0" rtlCol="0" anchor="t"/>
+          <a:lstStyle/>
+          <a:p>
+            <a:pPr indent="0" marL="0">
+              <a:buNone/>
+            </a:pPr>
+            <a:r>
+              <a:rPr lang="en-US" sz="1100" dirty="0">
+                <a:solidFill>
+                  <a:srgbClr val="5A6478"/>
+                </a:solidFill>
+                <a:latin typeface="Calibri" pitchFamily="34" charset="0"/>
+                <a:ea typeface="Calibri" pitchFamily="34" charset="-122"/>
+                <a:cs typeface="Calibri" pitchFamily="34" charset="-120"/>
+              </a:rPr>
+              <a:t>También desde la terminal:</a:t>
+            </a:r>
+            <a:endParaRPr lang="en-US" sz="1100" dirty="0"/>
+          </a:p>
+        </p:txBody>
+      </p:sp>
+      <p:sp>
+        <p:nvSpPr>
+          <p:cNvPr id="24" name="Shape 22"/>
+          <p:cNvSpPr/>
+          <p:nvPr/>
+        </p:nvSpPr>
+        <p:spPr>
+          <a:xfrm>
+            <a:off x="777240" y="4736592"/>
+            <a:ext cx="5029200" cy="457200"/>
+          </a:xfrm>
+          <a:prstGeom prst="roundRect">
+            <a:avLst>
+              <a:gd name="adj" fmla="val 10000"/>
+            </a:avLst>
+          </a:prstGeom>
+          <a:solidFill>
+            <a:srgbClr val="1B2230"/>
+          </a:solidFill>
+          <a:ln/>
+        </p:spPr>
+      </p:sp>
+      <p:sp>
+        <p:nvSpPr>
+          <p:cNvPr id="25" name="Text 23"/>
+          <p:cNvSpPr/>
+          <p:nvPr/>
+        </p:nvSpPr>
+        <p:spPr>
+          <a:xfrm>
+            <a:off x="978408" y="4736592"/>
+            <a:ext cx="4626864" cy="457200"/>
+          </a:xfrm>
+          <a:prstGeom prst="rect">
+            <a:avLst/>
+          </a:prstGeom>
+          <a:noFill/>
+          <a:ln/>
+        </p:spPr>
+        <p:txBody>
+          <a:bodyPr wrap="square" lIns="0" tIns="0" rIns="0" bIns="0" rtlCol="0" anchor="ctr"/>
+          <a:lstStyle/>
+          <a:p>
+            <a:pPr indent="0" marL="0">
+              <a:buNone/>
+            </a:pPr>
+            <a:r>
+              <a:rPr lang="en-US" sz="1150" b="1" dirty="0">
+                <a:solidFill>
+                  <a:srgbClr val="C9A574"/>
+                </a:solidFill>
+                <a:latin typeface="Courier New" pitchFamily="34" charset="0"/>
+                <a:ea typeface="Courier New" pitchFamily="34" charset="-122"/>
+                <a:cs typeface="Courier New" pitchFamily="34" charset="-120"/>
+              </a:rPr>
+              <a:t>npm run salud</a:t>
+            </a:r>
+            <a:endParaRPr lang="en-US" sz="1150" dirty="0"/>
+          </a:p>
+        </p:txBody>
+      </p:sp>
+      <p:sp>
+        <p:nvSpPr>
+          <p:cNvPr id="26" name="Text 24"/>
+          <p:cNvSpPr/>
+          <p:nvPr/>
+        </p:nvSpPr>
+        <p:spPr>
+          <a:xfrm>
+            <a:off x="777240" y="5303520"/>
+            <a:ext cx="5029200" cy="457200"/>
+          </a:xfrm>
+          <a:prstGeom prst="rect">
+            <a:avLst/>
+          </a:prstGeom>
+          <a:noFill/>
+          <a:ln/>
+        </p:spPr>
+        <p:txBody>
+          <a:bodyPr wrap="square" lIns="0" tIns="0" rIns="0" bIns="0" rtlCol="0" anchor="t"/>
+          <a:lstStyle/>
+          <a:p>
+            <a:pPr indent="0" marL="0">
+              <a:buNone/>
+            </a:pPr>
+            <a:r>
+              <a:rPr lang="en-US" sz="1000" i="1" dirty="0">
+                <a:solidFill>
+                  <a:srgbClr val="5A6478"/>
+                </a:solidFill>
+                <a:latin typeface="Calibri" pitchFamily="34" charset="0"/>
+                <a:ea typeface="Calibri" pitchFamily="34" charset="-122"/>
+                <a:cs typeface="Calibri" pitchFamily="34" charset="-120"/>
+              </a:rPr>
+              <a:t>Consulta las diez fuentes con preguntas de respuesta conocida y dice cuál responde y cuál no.</a:t>
+            </a:r>
+            <a:endParaRPr lang="en-US" sz="1000" dirty="0"/>
+          </a:p>
+        </p:txBody>
+      </p:sp>
+    </p:spTree>
+  </p:cSld>
+  <p:clrMapOvr>
+    <a:masterClrMapping/>
+  </p:clrMapOvr>
+</p:sld>
+</file>
+
+<file path=ppt/slides/slide15.xml><?xml version="1.0" encoding="utf-8"?>
+<p:sld xmlns:a="http://schemas.openxmlformats.org/drawingml/2006/main" xmlns:r="http://schemas.openxmlformats.org/officeDocument/2006/relationships" xmlns:p="http://schemas.openxmlformats.org/presentationml/2006/main">
+  <p:cSld name="Slide 15">
+    <p:bg>
+      <p:bgPr>
+        <a:solidFill>
+          <a:srgbClr val="F4F1EA"/>
+        </a:solidFill>
+      </p:bgPr>
+    </p:bg>
+    <p:spTree>
+      <p:nvGrpSpPr>
+        <p:cNvPr id="1" name=""/>
+        <p:cNvGrpSpPr/>
+        <p:nvPr/>
+      </p:nvGrpSpPr>
+      <p:grpSpPr>
+        <a:xfrm>
+          <a:off x="0" y="0"/>
+          <a:ext cx="0" cy="0"/>
+          <a:chOff x="0" y="0"/>
+          <a:chExt cx="0" cy="0"/>
+        </a:xfrm>
+      </p:grpSpPr>
+      <p:sp>
+        <p:nvSpPr>
+          <p:cNvPr id="2" name="Text 0"/>
+          <p:cNvSpPr/>
+          <p:nvPr/>
+        </p:nvSpPr>
+        <p:spPr>
+          <a:xfrm>
+            <a:off x="777240" y="566928"/>
+            <a:ext cx="10634472" cy="566928"/>
+          </a:xfrm>
+          <a:prstGeom prst="rect">
+            <a:avLst/>
+          </a:prstGeom>
+          <a:noFill/>
+          <a:ln/>
+        </p:spPr>
+        <p:txBody>
+          <a:bodyPr wrap="square" lIns="0" tIns="0" rIns="0" bIns="0" rtlCol="0" anchor="ctr"/>
+          <a:lstStyle/>
+          <a:p>
+            <a:pPr indent="0" marL="0">
+              <a:buNone/>
+            </a:pPr>
+            <a:r>
+              <a:rPr lang="en-US" sz="3200" b="1" dirty="0">
+                <a:solidFill>
+                  <a:srgbClr val="1B2230"/>
+                </a:solidFill>
+                <a:latin typeface="Cambria" pitchFamily="34" charset="0"/>
+                <a:ea typeface="Cambria" pitchFamily="34" charset="-122"/>
+                <a:cs typeface="Cambria" pitchFamily="34" charset="-120"/>
+              </a:rPr>
+              <a:t>Problemas frecuentes</a:t>
+            </a:r>
+            <a:endParaRPr lang="en-US" sz="3200" dirty="0"/>
+          </a:p>
+        </p:txBody>
+      </p:sp>
+      <p:sp>
+        <p:nvSpPr>
+          <p:cNvPr id="3" name="Text 1"/>
+          <p:cNvSpPr/>
+          <p:nvPr/>
+        </p:nvSpPr>
+        <p:spPr>
+          <a:xfrm>
+            <a:off x="777240" y="1152144"/>
+            <a:ext cx="9537192" cy="384048"/>
+          </a:xfrm>
+          <a:prstGeom prst="rect">
+            <a:avLst/>
+          </a:prstGeom>
+          <a:noFill/>
+          <a:ln/>
+        </p:spPr>
+        <p:txBody>
+          <a:bodyPr wrap="square" lIns="0" tIns="0" rIns="0" bIns="0" rtlCol="0" anchor="ctr"/>
+          <a:lstStyle/>
+          <a:p>
+            <a:pPr indent="0" marL="0">
+              <a:buNone/>
+            </a:pPr>
+            <a:r>
+              <a:rPr lang="en-US" sz="1350" i="1" dirty="0">
+                <a:solidFill>
+                  <a:srgbClr val="5A6478"/>
+                </a:solidFill>
+                <a:latin typeface="Calibri" pitchFamily="34" charset="0"/>
+                <a:ea typeface="Calibri" pitchFamily="34" charset="-122"/>
+                <a:cs typeface="Calibri" pitchFamily="34" charset="-120"/>
+              </a:rPr>
+              <a:t>Los cinco que aparecen de verdad, y qué hacer con cada uno</a:t>
+            </a:r>
+            <a:endParaRPr lang="en-US" sz="1350" dirty="0"/>
+          </a:p>
+        </p:txBody>
+      </p:sp>
+      <p:sp>
+        <p:nvSpPr>
+          <p:cNvPr id="4" name="Shape 2"/>
+          <p:cNvSpPr/>
+          <p:nvPr/>
+        </p:nvSpPr>
+        <p:spPr>
+          <a:xfrm>
+            <a:off x="777240" y="1865376"/>
+            <a:ext cx="310896" cy="310896"/>
+          </a:xfrm>
+          <a:prstGeom prst="ellipse">
+            <a:avLst/>
+          </a:prstGeom>
+          <a:solidFill>
+            <a:srgbClr val="A87C4F"/>
+          </a:solidFill>
+          <a:ln/>
+        </p:spPr>
+      </p:sp>
+      <p:sp>
+        <p:nvSpPr>
+          <p:cNvPr id="5" name="Text 3"/>
+          <p:cNvSpPr/>
+          <p:nvPr/>
+        </p:nvSpPr>
+        <p:spPr>
+          <a:xfrm>
+            <a:off x="777240" y="1865376"/>
+            <a:ext cx="310896" cy="310896"/>
+          </a:xfrm>
+          <a:prstGeom prst="rect">
+            <a:avLst/>
+          </a:prstGeom>
+          <a:noFill/>
+          <a:ln/>
+        </p:spPr>
+        <p:txBody>
+          <a:bodyPr wrap="square" lIns="0" tIns="0" rIns="0" bIns="0" rtlCol="0" anchor="ctr"/>
+          <a:lstStyle/>
+          <a:p>
+            <a:pPr algn="ctr" indent="0" marL="0">
+              <a:buNone/>
+            </a:pPr>
+            <a:r>
+              <a:rPr lang="en-US" sz="1200" b="1" dirty="0">
+                <a:solidFill>
+                  <a:srgbClr val="FFFFFF"/>
+                </a:solidFill>
+                <a:latin typeface="Calibri" pitchFamily="34" charset="0"/>
+                <a:ea typeface="Calibri" pitchFamily="34" charset="-122"/>
+                <a:cs typeface="Calibri" pitchFamily="34" charset="-120"/>
+              </a:rPr>
+              <a:t>1</a:t>
+            </a:r>
+            <a:endParaRPr lang="en-US" sz="1200" dirty="0"/>
+          </a:p>
+        </p:txBody>
+      </p:sp>
+      <p:sp>
+        <p:nvSpPr>
+          <p:cNvPr id="6" name="Text 4"/>
+          <p:cNvSpPr/>
+          <p:nvPr/>
+        </p:nvSpPr>
+        <p:spPr>
+          <a:xfrm>
+            <a:off x="1234440" y="1828800"/>
+            <a:ext cx="3657600" cy="274320"/>
+          </a:xfrm>
+          <a:prstGeom prst="rect">
+            <a:avLst/>
+          </a:prstGeom>
+          <a:noFill/>
+          <a:ln/>
+        </p:spPr>
+        <p:txBody>
+          <a:bodyPr wrap="square" lIns="0" tIns="0" rIns="0" bIns="0" rtlCol="0" anchor="t"/>
+          <a:lstStyle/>
+          <a:p>
+            <a:pPr indent="0" marL="0">
+              <a:buNone/>
+            </a:pPr>
+            <a:r>
+              <a:rPr lang="en-US" sz="1200" b="1" dirty="0">
+                <a:solidFill>
+                  <a:srgbClr val="1B2230"/>
+                </a:solidFill>
+                <a:latin typeface="Calibri" pitchFamily="34" charset="0"/>
+                <a:ea typeface="Calibri" pitchFamily="34" charset="-122"/>
+                <a:cs typeface="Calibri" pitchFamily="34" charset="-120"/>
+              </a:rPr>
+              <a:t>Claude responde sin citar fuentes</a:t>
+            </a:r>
+            <a:endParaRPr lang="en-US" sz="1200" dirty="0"/>
+          </a:p>
+        </p:txBody>
+      </p:sp>
+      <p:sp>
+        <p:nvSpPr>
+          <p:cNvPr id="7" name="Text 5"/>
+          <p:cNvSpPr/>
+          <p:nvPr/>
+        </p:nvSpPr>
+        <p:spPr>
+          <a:xfrm>
+            <a:off x="5074920" y="1810512"/>
+            <a:ext cx="6309360" cy="713232"/>
+          </a:xfrm>
+          <a:prstGeom prst="rect">
+            <a:avLst/>
+          </a:prstGeom>
+          <a:noFill/>
+          <a:ln/>
+        </p:spPr>
+        <p:txBody>
+          <a:bodyPr wrap="square" lIns="0" tIns="0" rIns="0" bIns="0" rtlCol="0" anchor="t"/>
+          <a:lstStyle/>
+          <a:p>
+            <a:pPr indent="0" marL="0">
+              <a:lnSpc>
+                <a:spcPct val="105000"/>
+              </a:lnSpc>
+              <a:buNone/>
+            </a:pPr>
+            <a:r>
+              <a:rPr lang="en-US" sz="1050" dirty="0">
+                <a:solidFill>
+                  <a:srgbClr val="5A6478"/>
+                </a:solidFill>
+                <a:latin typeface="Calibri" pitchFamily="34" charset="0"/>
+                <a:ea typeface="Calibri" pitchFamily="34" charset="-122"/>
+                <a:cs typeface="Calibri" pitchFamily="34" charset="-120"/>
+              </a:rPr>
+              <a:t>Casi siempre es que no se reinició Claude por completo. En Windows hay que salir desde el ícono junto al reloj; en macOS con Command + Q. Si ya lo hiciste, vuelve a ejecutar el instalador.</a:t>
+            </a:r>
+            <a:endParaRPr lang="en-US" sz="1050" dirty="0"/>
+          </a:p>
+        </p:txBody>
+      </p:sp>
+      <p:sp>
+        <p:nvSpPr>
+          <p:cNvPr id="8" name="Shape 6"/>
+          <p:cNvSpPr/>
+          <p:nvPr/>
+        </p:nvSpPr>
+        <p:spPr>
+          <a:xfrm>
+            <a:off x="777240" y="2706624"/>
+            <a:ext cx="310896" cy="310896"/>
+          </a:xfrm>
+          <a:prstGeom prst="ellipse">
+            <a:avLst/>
+          </a:prstGeom>
+          <a:solidFill>
+            <a:srgbClr val="A87C4F"/>
+          </a:solidFill>
+          <a:ln/>
+        </p:spPr>
+      </p:sp>
+      <p:sp>
+        <p:nvSpPr>
+          <p:cNvPr id="9" name="Text 7"/>
+          <p:cNvSpPr/>
+          <p:nvPr/>
+        </p:nvSpPr>
+        <p:spPr>
+          <a:xfrm>
+            <a:off x="777240" y="2706624"/>
+            <a:ext cx="310896" cy="310896"/>
+          </a:xfrm>
+          <a:prstGeom prst="rect">
+            <a:avLst/>
+          </a:prstGeom>
+          <a:noFill/>
+          <a:ln/>
+        </p:spPr>
+        <p:txBody>
+          <a:bodyPr wrap="square" lIns="0" tIns="0" rIns="0" bIns="0" rtlCol="0" anchor="ctr"/>
+          <a:lstStyle/>
+          <a:p>
+            <a:pPr algn="ctr" indent="0" marL="0">
+              <a:buNone/>
+            </a:pPr>
+            <a:r>
+              <a:rPr lang="en-US" sz="1200" b="1" dirty="0">
+                <a:solidFill>
+                  <a:srgbClr val="FFFFFF"/>
+                </a:solidFill>
+                <a:latin typeface="Calibri" pitchFamily="34" charset="0"/>
+                <a:ea typeface="Calibri" pitchFamily="34" charset="-122"/>
+                <a:cs typeface="Calibri" pitchFamily="34" charset="-120"/>
+              </a:rPr>
+              <a:t>2</a:t>
+            </a:r>
+            <a:endParaRPr lang="en-US" sz="1200" dirty="0"/>
+          </a:p>
+        </p:txBody>
+      </p:sp>
+      <p:sp>
+        <p:nvSpPr>
+          <p:cNvPr id="10" name="Text 8"/>
+          <p:cNvSpPr/>
+          <p:nvPr/>
+        </p:nvSpPr>
+        <p:spPr>
+          <a:xfrm>
+            <a:off x="1234440" y="2670048"/>
+            <a:ext cx="3657600" cy="274320"/>
+          </a:xfrm>
+          <a:prstGeom prst="rect">
+            <a:avLst/>
+          </a:prstGeom>
+          <a:noFill/>
+          <a:ln/>
+        </p:spPr>
+        <p:txBody>
+          <a:bodyPr wrap="square" lIns="0" tIns="0" rIns="0" bIns="0" rtlCol="0" anchor="t"/>
+          <a:lstStyle/>
+          <a:p>
+            <a:pPr indent="0" marL="0">
+              <a:buNone/>
+            </a:pPr>
+            <a:r>
+              <a:rPr lang="en-US" sz="1200" b="1" dirty="0">
+                <a:solidFill>
+                  <a:srgbClr val="1B2230"/>
+                </a:solidFill>
+                <a:latin typeface="Calibri" pitchFamily="34" charset="0"/>
+                <a:ea typeface="Calibri" pitchFamily="34" charset="-122"/>
+                <a:cs typeface="Calibri" pitchFamily="34" charset="-120"/>
+              </a:rPr>
+              <a:t>«node no se reconoce como un comando»</a:t>
+            </a:r>
+            <a:endParaRPr lang="en-US" sz="1200" dirty="0"/>
+          </a:p>
+        </p:txBody>
+      </p:sp>
+      <p:sp>
+        <p:nvSpPr>
+          <p:cNvPr id="11" name="Text 9"/>
+          <p:cNvSpPr/>
+          <p:nvPr/>
+        </p:nvSpPr>
+        <p:spPr>
+          <a:xfrm>
+            <a:off x="5074920" y="2651760"/>
+            <a:ext cx="6309360" cy="713232"/>
+          </a:xfrm>
+          <a:prstGeom prst="rect">
+            <a:avLst/>
+          </a:prstGeom>
+          <a:noFill/>
+          <a:ln/>
+        </p:spPr>
+        <p:txBody>
+          <a:bodyPr wrap="square" lIns="0" tIns="0" rIns="0" bIns="0" rtlCol="0" anchor="t"/>
+          <a:lstStyle/>
+          <a:p>
+            <a:pPr indent="0" marL="0">
+              <a:lnSpc>
+                <a:spcPct val="105000"/>
+              </a:lnSpc>
+              <a:buNone/>
+            </a:pPr>
+            <a:r>
+              <a:rPr lang="en-US" sz="1050" dirty="0">
+                <a:solidFill>
+                  <a:srgbClr val="5A6478"/>
+                </a:solidFill>
+                <a:latin typeface="Calibri" pitchFamily="34" charset="0"/>
+                <a:ea typeface="Calibri" pitchFamily="34" charset="-122"/>
+                <a:cs typeface="Calibri" pitchFamily="34" charset="-120"/>
+              </a:rPr>
+              <a:t>Node.js no quedó instalado, o la terminal se abrió antes de instalarlo. Ciérrala, ábrela de nuevo y prueba node --version.</a:t>
+            </a:r>
+            <a:endParaRPr lang="en-US" sz="1050" dirty="0"/>
+          </a:p>
+        </p:txBody>
+      </p:sp>
+      <p:sp>
+        <p:nvSpPr>
+          <p:cNvPr id="12" name="Shape 10"/>
+          <p:cNvSpPr/>
+          <p:nvPr/>
+        </p:nvSpPr>
+        <p:spPr>
+          <a:xfrm>
+            <a:off x="777240" y="3547872"/>
+            <a:ext cx="310896" cy="310896"/>
+          </a:xfrm>
+          <a:prstGeom prst="ellipse">
+            <a:avLst/>
+          </a:prstGeom>
+          <a:solidFill>
+            <a:srgbClr val="A87C4F"/>
+          </a:solidFill>
+          <a:ln/>
+        </p:spPr>
+      </p:sp>
+      <p:sp>
+        <p:nvSpPr>
+          <p:cNvPr id="13" name="Text 11"/>
+          <p:cNvSpPr/>
+          <p:nvPr/>
+        </p:nvSpPr>
+        <p:spPr>
+          <a:xfrm>
+            <a:off x="777240" y="3547872"/>
+            <a:ext cx="310896" cy="310896"/>
+          </a:xfrm>
+          <a:prstGeom prst="rect">
+            <a:avLst/>
+          </a:prstGeom>
+          <a:noFill/>
+          <a:ln/>
+        </p:spPr>
+        <p:txBody>
+          <a:bodyPr wrap="square" lIns="0" tIns="0" rIns="0" bIns="0" rtlCol="0" anchor="ctr"/>
+          <a:lstStyle/>
+          <a:p>
+            <a:pPr algn="ctr" indent="0" marL="0">
+              <a:buNone/>
+            </a:pPr>
+            <a:r>
+              <a:rPr lang="en-US" sz="1200" b="1" dirty="0">
+                <a:solidFill>
+                  <a:srgbClr val="FFFFFF"/>
+                </a:solidFill>
+                <a:latin typeface="Calibri" pitchFamily="34" charset="0"/>
+                <a:ea typeface="Calibri" pitchFamily="34" charset="-122"/>
+                <a:cs typeface="Calibri" pitchFamily="34" charset="-120"/>
+              </a:rPr>
+              <a:t>3</a:t>
+            </a:r>
+            <a:endParaRPr lang="en-US" sz="1200" dirty="0"/>
+          </a:p>
+        </p:txBody>
+      </p:sp>
+      <p:sp>
+        <p:nvSpPr>
+          <p:cNvPr id="14" name="Text 12"/>
+          <p:cNvSpPr/>
+          <p:nvPr/>
+        </p:nvSpPr>
+        <p:spPr>
+          <a:xfrm>
+            <a:off x="1234440" y="3511296"/>
+            <a:ext cx="3657600" cy="274320"/>
+          </a:xfrm>
+          <a:prstGeom prst="rect">
+            <a:avLst/>
+          </a:prstGeom>
+          <a:noFill/>
+          <a:ln/>
+        </p:spPr>
+        <p:txBody>
+          <a:bodyPr wrap="square" lIns="0" tIns="0" rIns="0" bIns="0" rtlCol="0" anchor="t"/>
+          <a:lstStyle/>
+          <a:p>
+            <a:pPr indent="0" marL="0">
+              <a:buNone/>
+            </a:pPr>
+            <a:r>
+              <a:rPr lang="en-US" sz="1200" b="1" dirty="0">
+                <a:solidFill>
+                  <a:srgbClr val="1B2230"/>
+                </a:solidFill>
+                <a:latin typeface="Calibri" pitchFamily="34" charset="0"/>
+                <a:ea typeface="Calibri" pitchFamily="34" charset="-122"/>
+                <a:cs typeface="Calibri" pitchFamily="34" charset="-120"/>
+              </a:rPr>
+              <a:t>«Ley Chile alcanzó su límite de servicio»</a:t>
+            </a:r>
+            <a:endParaRPr lang="en-US" sz="1200" dirty="0"/>
+          </a:p>
+        </p:txBody>
+      </p:sp>
+      <p:sp>
+        <p:nvSpPr>
+          <p:cNvPr id="15" name="Text 13"/>
+          <p:cNvSpPr/>
+          <p:nvPr/>
+        </p:nvSpPr>
+        <p:spPr>
+          <a:xfrm>
+            <a:off x="5074920" y="3493008"/>
+            <a:ext cx="6309360" cy="713232"/>
+          </a:xfrm>
+          <a:prstGeom prst="rect">
+            <a:avLst/>
+          </a:prstGeom>
+          <a:noFill/>
+          <a:ln/>
+        </p:spPr>
+        <p:txBody>
+          <a:bodyPr wrap="square" lIns="0" tIns="0" rIns="0" bIns="0" rtlCol="0" anchor="t"/>
+          <a:lstStyle/>
+          <a:p>
+            <a:pPr indent="0" marL="0">
+              <a:lnSpc>
+                <a:spcPct val="105000"/>
+              </a:lnSpc>
+              <a:buNone/>
+            </a:pPr>
+            <a:r>
+              <a:rPr lang="en-US" sz="1050" dirty="0">
+                <a:solidFill>
+                  <a:srgbClr val="5A6478"/>
+                </a:solidFill>
+                <a:latin typeface="Calibri" pitchFamily="34" charset="0"/>
+                <a:ea typeface="Calibri" pitchFamily="34" charset="-122"/>
+                <a:cs typeface="Calibri" pitchFamily="34" charset="-120"/>
+              </a:rPr>
+              <a:t>La Biblioteca del Congreso limita las descargas grandes. Espera un minuto o ejecuta npm run precargar, que retoma sólo lo que falta.</a:t>
+            </a:r>
+            <a:endParaRPr lang="en-US" sz="1050" dirty="0"/>
+          </a:p>
+        </p:txBody>
+      </p:sp>
+      <p:sp>
+        <p:nvSpPr>
+          <p:cNvPr id="16" name="Shape 14"/>
+          <p:cNvSpPr/>
+          <p:nvPr/>
+        </p:nvSpPr>
+        <p:spPr>
+          <a:xfrm>
+            <a:off x="777240" y="4389120"/>
+            <a:ext cx="310896" cy="310896"/>
+          </a:xfrm>
+          <a:prstGeom prst="ellipse">
+            <a:avLst/>
+          </a:prstGeom>
+          <a:solidFill>
+            <a:srgbClr val="A87C4F"/>
+          </a:solidFill>
+          <a:ln/>
+        </p:spPr>
+      </p:sp>
+      <p:sp>
+        <p:nvSpPr>
+          <p:cNvPr id="17" name="Text 15"/>
+          <p:cNvSpPr/>
+          <p:nvPr/>
+        </p:nvSpPr>
+        <p:spPr>
+          <a:xfrm>
+            <a:off x="777240" y="4389120"/>
+            <a:ext cx="310896" cy="310896"/>
+          </a:xfrm>
+          <a:prstGeom prst="rect">
+            <a:avLst/>
+          </a:prstGeom>
+          <a:noFill/>
+          <a:ln/>
+        </p:spPr>
+        <p:txBody>
+          <a:bodyPr wrap="square" lIns="0" tIns="0" rIns="0" bIns="0" rtlCol="0" anchor="ctr"/>
+          <a:lstStyle/>
+          <a:p>
+            <a:pPr algn="ctr" indent="0" marL="0">
+              <a:buNone/>
+            </a:pPr>
+            <a:r>
+              <a:rPr lang="en-US" sz="1200" b="1" dirty="0">
+                <a:solidFill>
+                  <a:srgbClr val="FFFFFF"/>
+                </a:solidFill>
+                <a:latin typeface="Calibri" pitchFamily="34" charset="0"/>
+                <a:ea typeface="Calibri" pitchFamily="34" charset="-122"/>
+                <a:cs typeface="Calibri" pitchFamily="34" charset="-120"/>
+              </a:rPr>
+              <a:t>4</a:t>
+            </a:r>
+            <a:endParaRPr lang="en-US" sz="1200" dirty="0"/>
+          </a:p>
+        </p:txBody>
+      </p:sp>
+      <p:sp>
+        <p:nvSpPr>
+          <p:cNvPr id="18" name="Text 16"/>
+          <p:cNvSpPr/>
+          <p:nvPr/>
+        </p:nvSpPr>
+        <p:spPr>
+          <a:xfrm>
+            <a:off x="1234440" y="4352544"/>
+            <a:ext cx="3657600" cy="274320"/>
+          </a:xfrm>
+          <a:prstGeom prst="rect">
+            <a:avLst/>
+          </a:prstGeom>
+          <a:noFill/>
+          <a:ln/>
+        </p:spPr>
+        <p:txBody>
+          <a:bodyPr wrap="square" lIns="0" tIns="0" rIns="0" bIns="0" rtlCol="0" anchor="t"/>
+          <a:lstStyle/>
+          <a:p>
+            <a:pPr indent="0" marL="0">
+              <a:buNone/>
+            </a:pPr>
+            <a:r>
+              <a:rPr lang="en-US" sz="1200" b="1" dirty="0">
+                <a:solidFill>
+                  <a:srgbClr val="1B2230"/>
+                </a:solidFill>
+                <a:latin typeface="Calibri" pitchFamily="34" charset="0"/>
+                <a:ea typeface="Calibri" pitchFamily="34" charset="-122"/>
+                <a:cs typeface="Calibri" pitchFamily="34" charset="-120"/>
+              </a:rPr>
+              <a:t>Una fuente aparece caída</a:t>
+            </a:r>
+            <a:endParaRPr lang="en-US" sz="1200" dirty="0"/>
+          </a:p>
+        </p:txBody>
+      </p:sp>
+      <p:sp>
+        <p:nvSpPr>
+          <p:cNvPr id="19" name="Text 17"/>
+          <p:cNvSpPr/>
+          <p:nvPr/>
+        </p:nvSpPr>
+        <p:spPr>
+          <a:xfrm>
+            <a:off x="5074920" y="4334256"/>
+            <a:ext cx="6309360" cy="713232"/>
+          </a:xfrm>
+          <a:prstGeom prst="rect">
+            <a:avLst/>
+          </a:prstGeom>
+          <a:noFill/>
+          <a:ln/>
+        </p:spPr>
+        <p:txBody>
+          <a:bodyPr wrap="square" lIns="0" tIns="0" rIns="0" bIns="0" rtlCol="0" anchor="t"/>
+          <a:lstStyle/>
+          <a:p>
+            <a:pPr indent="0" marL="0">
+              <a:lnSpc>
+                <a:spcPct val="105000"/>
+              </a:lnSpc>
+              <a:buNone/>
+            </a:pPr>
+            <a:r>
+              <a:rPr lang="en-US" sz="1050" dirty="0">
+                <a:solidFill>
+                  <a:srgbClr val="5A6478"/>
+                </a:solidFill>
+                <a:latin typeface="Calibri" pitchFamily="34" charset="0"/>
+                <a:ea typeface="Calibri" pitchFamily="34" charset="-122"/>
+                <a:cs typeface="Calibri" pitchFamily="34" charset="-120"/>
+              </a:rPr>
+              <a:t>Son sitios de organismos públicos y a veces se caen. No es la instalación: npm run salud dice cuál está fallando.</a:t>
+            </a:r>
+            <a:endParaRPr lang="en-US" sz="1050" dirty="0"/>
+          </a:p>
+        </p:txBody>
+      </p:sp>
+      <p:sp>
+        <p:nvSpPr>
+          <p:cNvPr id="20" name="Shape 18"/>
+          <p:cNvSpPr/>
+          <p:nvPr/>
+        </p:nvSpPr>
+        <p:spPr>
+          <a:xfrm>
+            <a:off x="777240" y="5230368"/>
+            <a:ext cx="310896" cy="310896"/>
+          </a:xfrm>
+          <a:prstGeom prst="ellipse">
+            <a:avLst/>
+          </a:prstGeom>
+          <a:solidFill>
+            <a:srgbClr val="A87C4F"/>
+          </a:solidFill>
+          <a:ln/>
+        </p:spPr>
+      </p:sp>
+      <p:sp>
+        <p:nvSpPr>
+          <p:cNvPr id="21" name="Text 19"/>
+          <p:cNvSpPr/>
+          <p:nvPr/>
+        </p:nvSpPr>
+        <p:spPr>
+          <a:xfrm>
+            <a:off x="777240" y="5230368"/>
+            <a:ext cx="310896" cy="310896"/>
+          </a:xfrm>
+          <a:prstGeom prst="rect">
+            <a:avLst/>
+          </a:prstGeom>
+          <a:noFill/>
+          <a:ln/>
+        </p:spPr>
+        <p:txBody>
+          <a:bodyPr wrap="square" lIns="0" tIns="0" rIns="0" bIns="0" rtlCol="0" anchor="ctr"/>
+          <a:lstStyle/>
+          <a:p>
+            <a:pPr algn="ctr" indent="0" marL="0">
+              <a:buNone/>
+            </a:pPr>
+            <a:r>
+              <a:rPr lang="en-US" sz="1200" b="1" dirty="0">
+                <a:solidFill>
+                  <a:srgbClr val="FFFFFF"/>
+                </a:solidFill>
+                <a:latin typeface="Calibri" pitchFamily="34" charset="0"/>
+                <a:ea typeface="Calibri" pitchFamily="34" charset="-122"/>
+                <a:cs typeface="Calibri" pitchFamily="34" charset="-120"/>
+              </a:rPr>
+              <a:t>5</a:t>
+            </a:r>
+            <a:endParaRPr lang="en-US" sz="1200" dirty="0"/>
+          </a:p>
+        </p:txBody>
+      </p:sp>
+      <p:sp>
+        <p:nvSpPr>
+          <p:cNvPr id="22" name="Text 20"/>
+          <p:cNvSpPr/>
+          <p:nvPr/>
+        </p:nvSpPr>
+        <p:spPr>
+          <a:xfrm>
+            <a:off x="1234440" y="5193792"/>
+            <a:ext cx="3657600" cy="274320"/>
+          </a:xfrm>
+          <a:prstGeom prst="rect">
+            <a:avLst/>
+          </a:prstGeom>
+          <a:noFill/>
+          <a:ln/>
+        </p:spPr>
+        <p:txBody>
+          <a:bodyPr wrap="square" lIns="0" tIns="0" rIns="0" bIns="0" rtlCol="0" anchor="t"/>
+          <a:lstStyle/>
+          <a:p>
+            <a:pPr indent="0" marL="0">
+              <a:buNone/>
+            </a:pPr>
+            <a:r>
+              <a:rPr lang="en-US" sz="1200" b="1" dirty="0">
+                <a:solidFill>
+                  <a:srgbClr val="1B2230"/>
+                </a:solidFill>
+                <a:latin typeface="Calibri" pitchFamily="34" charset="0"/>
+                <a:ea typeface="Calibri" pitchFamily="34" charset="-122"/>
+                <a:cs typeface="Calibri" pitchFamily="34" charset="-120"/>
+              </a:rPr>
+              <a:t>Cambiaste la carpeta de lugar</a:t>
+            </a:r>
+            <a:endParaRPr lang="en-US" sz="1200" dirty="0"/>
+          </a:p>
+        </p:txBody>
+      </p:sp>
+      <p:sp>
+        <p:nvSpPr>
+          <p:cNvPr id="23" name="Text 21"/>
+          <p:cNvSpPr/>
+          <p:nvPr/>
+        </p:nvSpPr>
+        <p:spPr>
+          <a:xfrm>
+            <a:off x="5074920" y="5175504"/>
+            <a:ext cx="6309360" cy="713232"/>
+          </a:xfrm>
+          <a:prstGeom prst="rect">
+            <a:avLst/>
+          </a:prstGeom>
+          <a:noFill/>
+          <a:ln/>
+        </p:spPr>
+        <p:txBody>
+          <a:bodyPr wrap="square" lIns="0" tIns="0" rIns="0" bIns="0" rtlCol="0" anchor="t"/>
+          <a:lstStyle/>
+          <a:p>
+            <a:pPr indent="0" marL="0">
+              <a:lnSpc>
+                <a:spcPct val="105000"/>
+              </a:lnSpc>
+              <a:buNone/>
+            </a:pPr>
+            <a:r>
+              <a:rPr lang="en-US" sz="1050" dirty="0">
+                <a:solidFill>
+                  <a:srgbClr val="5A6478"/>
+                </a:solidFill>
+                <a:latin typeface="Calibri" pitchFamily="34" charset="0"/>
+                <a:ea typeface="Calibri" pitchFamily="34" charset="-122"/>
+                <a:cs typeface="Calibri" pitchFamily="34" charset="-120"/>
+              </a:rPr>
+              <a:t>Claude sigue apuntando a la ruta antigua. Ejecuta node instalar.mjs desde la ubicación nueva.</a:t>
+            </a:r>
+            <a:endParaRPr lang="en-US" sz="1050" dirty="0"/>
+          </a:p>
+        </p:txBody>
+      </p:sp>
+      <p:sp>
+        <p:nvSpPr>
+          <p:cNvPr id="24" name="Shape 22"/>
+          <p:cNvSpPr/>
+          <p:nvPr/>
+        </p:nvSpPr>
+        <p:spPr>
+          <a:xfrm>
+            <a:off x="777240" y="5943600"/>
+            <a:ext cx="10634472" cy="566928"/>
+          </a:xfrm>
+          <a:prstGeom prst="roundRect">
+            <a:avLst>
+              <a:gd name="adj" fmla="val 8065"/>
+            </a:avLst>
+          </a:prstGeom>
+          <a:solidFill>
+            <a:srgbClr val="FDF7E8"/>
+          </a:solidFill>
+          <a:ln/>
+        </p:spPr>
+      </p:sp>
+      <p:sp>
+        <p:nvSpPr>
+          <p:cNvPr id="25" name="Text 23"/>
+          <p:cNvSpPr/>
+          <p:nvPr/>
+        </p:nvSpPr>
+        <p:spPr>
+          <a:xfrm>
+            <a:off x="1033272" y="5943600"/>
+            <a:ext cx="10149840" cy="566928"/>
+          </a:xfrm>
+          <a:prstGeom prst="rect">
+            <a:avLst/>
+          </a:prstGeom>
+          <a:noFill/>
+          <a:ln/>
+        </p:spPr>
+        <p:txBody>
+          <a:bodyPr wrap="square" lIns="0" tIns="0" rIns="0" bIns="0" rtlCol="0" anchor="ctr"/>
+          <a:lstStyle/>
+          <a:p>
+            <a:pPr indent="0" marL="0">
+              <a:buNone/>
+            </a:pPr>
+            <a:r>
+              <a:rPr lang="en-US" sz="1100" b="1" dirty="0">
+                <a:solidFill>
+                  <a:srgbClr val="6B2C33"/>
+                </a:solidFill>
+                <a:latin typeface="Calibri" pitchFamily="34" charset="0"/>
+                <a:ea typeface="Calibri" pitchFamily="34" charset="-122"/>
+                <a:cs typeface="Calibri" pitchFamily="34" charset="-120"/>
+              </a:rPr>
+              <a:t>Cuando una fuente no responde, Claude debe decirlo y no rellenar el hueco con conocimiento propio. Si alguna vez entrega citas sin haberlas consultado, no las des por buenas.</a:t>
+            </a:r>
+            <a:endParaRPr lang="en-US" sz="1100" dirty="0"/>
+          </a:p>
+        </p:txBody>
+      </p:sp>
+    </p:spTree>
+  </p:cSld>
+  <p:clrMapOvr>
+    <a:masterClrMapping/>
+  </p:clrMapOvr>
+</p:sld>
+</file>
+
+<file path=ppt/slides/slide16.xml><?xml version="1.0" encoding="utf-8"?>
+<p:sld xmlns:a="http://schemas.openxmlformats.org/drawingml/2006/main" xmlns:r="http://schemas.openxmlformats.org/officeDocument/2006/relationships" xmlns:p="http://schemas.openxmlformats.org/presentationml/2006/main">
+  <p:cSld name="Slide 16">
+    <p:bg>
+      <p:bgPr>
+        <a:solidFill>
+          <a:srgbClr val="F4F1EA"/>
+        </a:solidFill>
+      </p:bgPr>
+    </p:bg>
+    <p:spTree>
+      <p:nvGrpSpPr>
+        <p:cNvPr id="1" name=""/>
+        <p:cNvGrpSpPr/>
+        <p:nvPr/>
+      </p:nvGrpSpPr>
+      <p:grpSpPr>
+        <a:xfrm>
+          <a:off x="0" y="0"/>
+          <a:ext cx="0" cy="0"/>
+          <a:chOff x="0" y="0"/>
+          <a:chExt cx="0" cy="0"/>
+        </a:xfrm>
+      </p:grpSpPr>
+      <p:sp>
+        <p:nvSpPr>
+          <p:cNvPr id="2" name="Text 0"/>
+          <p:cNvSpPr/>
+          <p:nvPr/>
+        </p:nvSpPr>
+        <p:spPr>
+          <a:xfrm>
+            <a:off x="777240" y="566928"/>
+            <a:ext cx="10634472" cy="566928"/>
+          </a:xfrm>
+          <a:prstGeom prst="rect">
+            <a:avLst/>
+          </a:prstGeom>
+          <a:noFill/>
+          <a:ln/>
+        </p:spPr>
+        <p:txBody>
+          <a:bodyPr wrap="square" lIns="0" tIns="0" rIns="0" bIns="0" rtlCol="0" anchor="ctr"/>
+          <a:lstStyle/>
+          <a:p>
+            <a:pPr indent="0" marL="0">
+              <a:buNone/>
+            </a:pPr>
+            <a:r>
+              <a:rPr lang="en-US" sz="3200" b="1" dirty="0">
+                <a:solidFill>
+                  <a:srgbClr val="1B2230"/>
+                </a:solidFill>
+                <a:latin typeface="Cambria" pitchFamily="34" charset="0"/>
+                <a:ea typeface="Cambria" pitchFamily="34" charset="-122"/>
+                <a:cs typeface="Cambria" pitchFamily="34" charset="-120"/>
+              </a:rPr>
+              <a:t>Mantención</a:t>
+            </a:r>
+            <a:endParaRPr lang="en-US" sz="3200" dirty="0"/>
+          </a:p>
+        </p:txBody>
+      </p:sp>
+      <p:sp>
+        <p:nvSpPr>
+          <p:cNvPr id="3" name="Text 1"/>
+          <p:cNvSpPr/>
+          <p:nvPr/>
+        </p:nvSpPr>
+        <p:spPr>
+          <a:xfrm>
+            <a:off x="777240" y="1152144"/>
+            <a:ext cx="9537192" cy="384048"/>
+          </a:xfrm>
+          <a:prstGeom prst="rect">
+            <a:avLst/>
+          </a:prstGeom>
+          <a:noFill/>
+          <a:ln/>
+        </p:spPr>
+        <p:txBody>
+          <a:bodyPr wrap="square" lIns="0" tIns="0" rIns="0" bIns="0" rtlCol="0" anchor="ctr"/>
+          <a:lstStyle/>
+          <a:p>
+            <a:pPr indent="0" marL="0">
+              <a:buNone/>
+            </a:pPr>
+            <a:r>
+              <a:rPr lang="en-US" sz="1350" i="1" dirty="0">
+                <a:solidFill>
+                  <a:srgbClr val="5A6478"/>
+                </a:solidFill>
+                <a:latin typeface="Calibri" pitchFamily="34" charset="0"/>
+                <a:ea typeface="Calibri" pitchFamily="34" charset="-122"/>
+                <a:cs typeface="Calibri" pitchFamily="34" charset="-120"/>
+              </a:rPr>
+              <a:t>Cómo actualizar, comprobar que sigue en pie, y desinstalar</a:t>
+            </a:r>
+            <a:endParaRPr lang="en-US" sz="1350" dirty="0"/>
+          </a:p>
+        </p:txBody>
+      </p:sp>
+      <p:sp>
+        <p:nvSpPr>
+          <p:cNvPr id="4" name="Text 2"/>
+          <p:cNvSpPr/>
+          <p:nvPr/>
+        </p:nvSpPr>
+        <p:spPr>
+          <a:xfrm>
+            <a:off x="777240" y="1810512"/>
+            <a:ext cx="5486400" cy="274320"/>
+          </a:xfrm>
+          <a:prstGeom prst="rect">
+            <a:avLst/>
+          </a:prstGeom>
+          <a:noFill/>
+          <a:ln/>
+        </p:spPr>
+        <p:txBody>
+          <a:bodyPr wrap="square" lIns="0" tIns="0" rIns="0" bIns="0" rtlCol="0" anchor="t"/>
+          <a:lstStyle/>
+          <a:p>
+            <a:pPr indent="0" marL="0">
+              <a:buNone/>
+            </a:pPr>
+            <a:r>
+              <a:rPr lang="en-US" sz="1250" b="1" dirty="0">
+                <a:solidFill>
+                  <a:srgbClr val="1B2230"/>
+                </a:solidFill>
+                <a:latin typeface="Calibri" pitchFamily="34" charset="0"/>
+                <a:ea typeface="Calibri" pitchFamily="34" charset="-122"/>
+                <a:cs typeface="Calibri" pitchFamily="34" charset="-120"/>
+              </a:rPr>
+              <a:t>Comandos</a:t>
+            </a:r>
+            <a:endParaRPr lang="en-US" sz="1250" dirty="0"/>
+          </a:p>
+        </p:txBody>
+      </p:sp>
+      <p:sp>
+        <p:nvSpPr>
+          <p:cNvPr id="5" name="Shape 3"/>
+          <p:cNvSpPr/>
+          <p:nvPr/>
+        </p:nvSpPr>
+        <p:spPr>
+          <a:xfrm>
+            <a:off x="777240" y="2176272"/>
+            <a:ext cx="3017520" cy="402336"/>
+          </a:xfrm>
+          <a:prstGeom prst="roundRect">
+            <a:avLst>
+              <a:gd name="adj" fmla="val 11364"/>
+            </a:avLst>
+          </a:prstGeom>
+          <a:solidFill>
+            <a:srgbClr val="1B2230"/>
+          </a:solidFill>
+          <a:ln/>
+        </p:spPr>
+      </p:sp>
+      <p:sp>
+        <p:nvSpPr>
+          <p:cNvPr id="6" name="Text 4"/>
+          <p:cNvSpPr/>
+          <p:nvPr/>
+        </p:nvSpPr>
+        <p:spPr>
+          <a:xfrm>
+            <a:off x="978408" y="2176272"/>
+            <a:ext cx="2615184" cy="402336"/>
+          </a:xfrm>
+          <a:prstGeom prst="rect">
+            <a:avLst/>
+          </a:prstGeom>
+          <a:noFill/>
+          <a:ln/>
+        </p:spPr>
+        <p:txBody>
+          <a:bodyPr wrap="square" lIns="0" tIns="0" rIns="0" bIns="0" rtlCol="0" anchor="ctr"/>
+          <a:lstStyle/>
+          <a:p>
+            <a:pPr indent="0" marL="0">
+              <a:buNone/>
+            </a:pPr>
+            <a:r>
+              <a:rPr lang="en-US" sz="1150" b="1" dirty="0">
+                <a:solidFill>
+                  <a:srgbClr val="C9A574"/>
+                </a:solidFill>
+                <a:latin typeface="Courier New" pitchFamily="34" charset="0"/>
+                <a:ea typeface="Courier New" pitchFamily="34" charset="-122"/>
+                <a:cs typeface="Courier New" pitchFamily="34" charset="-120"/>
+              </a:rPr>
+              <a:t>node instalar.mjs</a:t>
+            </a:r>
+            <a:endParaRPr lang="en-US" sz="1150" dirty="0"/>
+          </a:p>
+        </p:txBody>
+      </p:sp>
+      <p:sp>
+        <p:nvSpPr>
+          <p:cNvPr id="7" name="Text 5"/>
+          <p:cNvSpPr/>
+          <p:nvPr/>
+        </p:nvSpPr>
+        <p:spPr>
+          <a:xfrm>
+            <a:off x="3977640" y="2212848"/>
+            <a:ext cx="2651760" cy="457200"/>
+          </a:xfrm>
+          <a:prstGeom prst="rect">
+            <a:avLst/>
+          </a:prstGeom>
+          <a:noFill/>
+          <a:ln/>
+        </p:spPr>
+        <p:txBody>
+          <a:bodyPr wrap="square" lIns="0" tIns="0" rIns="0" bIns="0" rtlCol="0" anchor="t"/>
+          <a:lstStyle/>
+          <a:p>
+            <a:pPr indent="0" marL="0">
+              <a:lnSpc>
+                <a:spcPct val="100000"/>
+              </a:lnSpc>
+              <a:buNone/>
+            </a:pPr>
+            <a:r>
+              <a:rPr lang="en-US" sz="1000" dirty="0">
+                <a:solidFill>
+                  <a:srgbClr val="5A6478"/>
+                </a:solidFill>
+                <a:latin typeface="Calibri" pitchFamily="34" charset="0"/>
+                <a:ea typeface="Calibri" pitchFamily="34" charset="-122"/>
+                <a:cs typeface="Calibri" pitchFamily="34" charset="-120"/>
+              </a:rPr>
+              <a:t>Instala todo. Se puede repetir sin riesgo</a:t>
+            </a:r>
+            <a:endParaRPr lang="en-US" sz="1000" dirty="0"/>
+          </a:p>
+        </p:txBody>
+      </p:sp>
+      <p:sp>
+        <p:nvSpPr>
+          <p:cNvPr id="8" name="Shape 6"/>
+          <p:cNvSpPr/>
+          <p:nvPr/>
+        </p:nvSpPr>
+        <p:spPr>
+          <a:xfrm>
+            <a:off x="777240" y="2889504"/>
+            <a:ext cx="3017520" cy="402336"/>
+          </a:xfrm>
+          <a:prstGeom prst="roundRect">
+            <a:avLst>
+              <a:gd name="adj" fmla="val 11364"/>
+            </a:avLst>
+          </a:prstGeom>
+          <a:solidFill>
+            <a:srgbClr val="1B2230"/>
+          </a:solidFill>
+          <a:ln/>
+        </p:spPr>
+      </p:sp>
+      <p:sp>
+        <p:nvSpPr>
+          <p:cNvPr id="9" name="Text 7"/>
+          <p:cNvSpPr/>
+          <p:nvPr/>
+        </p:nvSpPr>
+        <p:spPr>
+          <a:xfrm>
+            <a:off x="978408" y="2889504"/>
+            <a:ext cx="2615184" cy="402336"/>
+          </a:xfrm>
+          <a:prstGeom prst="rect">
+            <a:avLst/>
+          </a:prstGeom>
+          <a:noFill/>
+          <a:ln/>
+        </p:spPr>
+        <p:txBody>
+          <a:bodyPr wrap="square" lIns="0" tIns="0" rIns="0" bIns="0" rtlCol="0" anchor="ctr"/>
+          <a:lstStyle/>
+          <a:p>
+            <a:pPr indent="0" marL="0">
+              <a:buNone/>
+            </a:pPr>
+            <a:r>
+              <a:rPr lang="en-US" sz="1150" b="1" dirty="0">
+                <a:solidFill>
+                  <a:srgbClr val="C9A574"/>
+                </a:solidFill>
+                <a:latin typeface="Courier New" pitchFamily="34" charset="0"/>
+                <a:ea typeface="Courier New" pitchFamily="34" charset="-122"/>
+                <a:cs typeface="Courier New" pitchFamily="34" charset="-120"/>
+              </a:rPr>
+              <a:t>npm run salud</a:t>
+            </a:r>
+            <a:endParaRPr lang="en-US" sz="1150" dirty="0"/>
+          </a:p>
+        </p:txBody>
+      </p:sp>
+      <p:sp>
+        <p:nvSpPr>
+          <p:cNvPr id="10" name="Text 8"/>
+          <p:cNvSpPr/>
+          <p:nvPr/>
+        </p:nvSpPr>
+        <p:spPr>
+          <a:xfrm>
+            <a:off x="3977640" y="2926080"/>
+            <a:ext cx="2651760" cy="457200"/>
+          </a:xfrm>
+          <a:prstGeom prst="rect">
+            <a:avLst/>
+          </a:prstGeom>
+          <a:noFill/>
+          <a:ln/>
+        </p:spPr>
+        <p:txBody>
+          <a:bodyPr wrap="square" lIns="0" tIns="0" rIns="0" bIns="0" rtlCol="0" anchor="t"/>
+          <a:lstStyle/>
+          <a:p>
+            <a:pPr indent="0" marL="0">
+              <a:lnSpc>
+                <a:spcPct val="100000"/>
+              </a:lnSpc>
+              <a:buNone/>
+            </a:pPr>
+            <a:r>
+              <a:rPr lang="en-US" sz="1000" dirty="0">
+                <a:solidFill>
+                  <a:srgbClr val="5A6478"/>
+                </a:solidFill>
+                <a:latin typeface="Calibri" pitchFamily="34" charset="0"/>
+                <a:ea typeface="Calibri" pitchFamily="34" charset="-122"/>
+                <a:cs typeface="Calibri" pitchFamily="34" charset="-120"/>
+              </a:rPr>
+              <a:t>Comprueba que las diez fuentes respondan (segundos)</a:t>
+            </a:r>
+            <a:endParaRPr lang="en-US" sz="1000" dirty="0"/>
+          </a:p>
+        </p:txBody>
+      </p:sp>
+      <p:sp>
+        <p:nvSpPr>
+          <p:cNvPr id="11" name="Shape 9"/>
+          <p:cNvSpPr/>
+          <p:nvPr/>
+        </p:nvSpPr>
+        <p:spPr>
+          <a:xfrm>
+            <a:off x="777240" y="3602736"/>
+            <a:ext cx="3017520" cy="402336"/>
+          </a:xfrm>
+          <a:prstGeom prst="roundRect">
+            <a:avLst>
+              <a:gd name="adj" fmla="val 11364"/>
+            </a:avLst>
+          </a:prstGeom>
+          <a:solidFill>
+            <a:srgbClr val="1B2230"/>
+          </a:solidFill>
+          <a:ln/>
+        </p:spPr>
+      </p:sp>
+      <p:sp>
+        <p:nvSpPr>
+          <p:cNvPr id="12" name="Text 10"/>
+          <p:cNvSpPr/>
+          <p:nvPr/>
+        </p:nvSpPr>
+        <p:spPr>
+          <a:xfrm>
+            <a:off x="978408" y="3602736"/>
+            <a:ext cx="2615184" cy="402336"/>
+          </a:xfrm>
+          <a:prstGeom prst="rect">
+            <a:avLst/>
+          </a:prstGeom>
+          <a:noFill/>
+          <a:ln/>
+        </p:spPr>
+        <p:txBody>
+          <a:bodyPr wrap="square" lIns="0" tIns="0" rIns="0" bIns="0" rtlCol="0" anchor="ctr"/>
+          <a:lstStyle/>
+          <a:p>
+            <a:pPr indent="0" marL="0">
+              <a:buNone/>
+            </a:pPr>
+            <a:r>
+              <a:rPr lang="en-US" sz="1150" b="1" dirty="0">
+                <a:solidFill>
+                  <a:srgbClr val="C9A574"/>
+                </a:solidFill>
+                <a:latin typeface="Courier New" pitchFamily="34" charset="0"/>
+                <a:ea typeface="Courier New" pitchFamily="34" charset="-122"/>
+                <a:cs typeface="Courier New" pitchFamily="34" charset="-120"/>
+              </a:rPr>
+              <a:t>npm run prueba</a:t>
+            </a:r>
+            <a:endParaRPr lang="en-US" sz="1150" dirty="0"/>
+          </a:p>
+        </p:txBody>
+      </p:sp>
+      <p:sp>
+        <p:nvSpPr>
+          <p:cNvPr id="13" name="Text 11"/>
+          <p:cNvSpPr/>
+          <p:nvPr/>
+        </p:nvSpPr>
+        <p:spPr>
+          <a:xfrm>
+            <a:off x="3977640" y="3639312"/>
+            <a:ext cx="2651760" cy="457200"/>
+          </a:xfrm>
+          <a:prstGeom prst="rect">
+            <a:avLst/>
+          </a:prstGeom>
+          <a:noFill/>
+          <a:ln/>
+        </p:spPr>
+        <p:txBody>
+          <a:bodyPr wrap="square" lIns="0" tIns="0" rIns="0" bIns="0" rtlCol="0" anchor="t"/>
+          <a:lstStyle/>
+          <a:p>
+            <a:pPr indent="0" marL="0">
+              <a:lnSpc>
+                <a:spcPct val="100000"/>
+              </a:lnSpc>
+              <a:buNone/>
+            </a:pPr>
+            <a:r>
+              <a:rPr lang="en-US" sz="1000" dirty="0">
+                <a:solidFill>
+                  <a:srgbClr val="5A6478"/>
+                </a:solidFill>
+                <a:latin typeface="Calibri" pitchFamily="34" charset="0"/>
+                <a:ea typeface="Calibri" pitchFamily="34" charset="-122"/>
+                <a:cs typeface="Calibri" pitchFamily="34" charset="-120"/>
+              </a:rPr>
+              <a:t>Banco completo, 68 comprobaciones (minutos)</a:t>
+            </a:r>
+            <a:endParaRPr lang="en-US" sz="1000" dirty="0"/>
+          </a:p>
+        </p:txBody>
+      </p:sp>
+      <p:sp>
+        <p:nvSpPr>
+          <p:cNvPr id="14" name="Shape 12"/>
+          <p:cNvSpPr/>
+          <p:nvPr/>
+        </p:nvSpPr>
+        <p:spPr>
+          <a:xfrm>
+            <a:off x="777240" y="4315968"/>
+            <a:ext cx="3017520" cy="402336"/>
+          </a:xfrm>
+          <a:prstGeom prst="roundRect">
+            <a:avLst>
+              <a:gd name="adj" fmla="val 11364"/>
+            </a:avLst>
+          </a:prstGeom>
+          <a:solidFill>
+            <a:srgbClr val="1B2230"/>
+          </a:solidFill>
+          <a:ln/>
+        </p:spPr>
+      </p:sp>
+      <p:sp>
+        <p:nvSpPr>
+          <p:cNvPr id="15" name="Text 13"/>
+          <p:cNvSpPr/>
+          <p:nvPr/>
+        </p:nvSpPr>
+        <p:spPr>
+          <a:xfrm>
+            <a:off x="978408" y="4315968"/>
+            <a:ext cx="2615184" cy="402336"/>
+          </a:xfrm>
+          <a:prstGeom prst="rect">
+            <a:avLst/>
+          </a:prstGeom>
+          <a:noFill/>
+          <a:ln/>
+        </p:spPr>
+        <p:txBody>
+          <a:bodyPr wrap="square" lIns="0" tIns="0" rIns="0" bIns="0" rtlCol="0" anchor="ctr"/>
+          <a:lstStyle/>
+          <a:p>
+            <a:pPr indent="0" marL="0">
+              <a:buNone/>
+            </a:pPr>
+            <a:r>
+              <a:rPr lang="en-US" sz="1150" b="1" dirty="0">
+                <a:solidFill>
+                  <a:srgbClr val="C9A574"/>
+                </a:solidFill>
+                <a:latin typeface="Courier New" pitchFamily="34" charset="0"/>
+                <a:ea typeface="Courier New" pitchFamily="34" charset="-122"/>
+                <a:cs typeface="Courier New" pitchFamily="34" charset="-120"/>
+              </a:rPr>
+              <a:t>npm run auditoria</a:t>
+            </a:r>
+            <a:endParaRPr lang="en-US" sz="1150" dirty="0"/>
+          </a:p>
+        </p:txBody>
+      </p:sp>
+      <p:sp>
+        <p:nvSpPr>
+          <p:cNvPr id="16" name="Text 14"/>
+          <p:cNvSpPr/>
+          <p:nvPr/>
+        </p:nvSpPr>
+        <p:spPr>
+          <a:xfrm>
+            <a:off x="3977640" y="4352544"/>
+            <a:ext cx="2651760" cy="457200"/>
+          </a:xfrm>
+          <a:prstGeom prst="rect">
+            <a:avLst/>
+          </a:prstGeom>
+          <a:noFill/>
+          <a:ln/>
+        </p:spPr>
+        <p:txBody>
+          <a:bodyPr wrap="square" lIns="0" tIns="0" rIns="0" bIns="0" rtlCol="0" anchor="t"/>
+          <a:lstStyle/>
+          <a:p>
+            <a:pPr indent="0" marL="0">
+              <a:lnSpc>
+                <a:spcPct val="100000"/>
+              </a:lnSpc>
+              <a:buNone/>
+            </a:pPr>
+            <a:r>
+              <a:rPr lang="en-US" sz="1000" dirty="0">
+                <a:solidFill>
+                  <a:srgbClr val="5A6478"/>
+                </a:solidFill>
+                <a:latin typeface="Calibri" pitchFamily="34" charset="0"/>
+                <a:ea typeface="Calibri" pitchFamily="34" charset="-122"/>
+                <a:cs typeface="Calibri" pitchFamily="34" charset="-120"/>
+              </a:rPr>
+              <a:t>Verifica que los datos del código sigan siendo ciertos</a:t>
+            </a:r>
+            <a:endParaRPr lang="en-US" sz="1000" dirty="0"/>
+          </a:p>
+        </p:txBody>
+      </p:sp>
+      <p:sp>
+        <p:nvSpPr>
+          <p:cNvPr id="17" name="Shape 15"/>
+          <p:cNvSpPr/>
+          <p:nvPr/>
+        </p:nvSpPr>
+        <p:spPr>
+          <a:xfrm>
+            <a:off x="777240" y="5029200"/>
+            <a:ext cx="3017520" cy="402336"/>
+          </a:xfrm>
+          <a:prstGeom prst="roundRect">
+            <a:avLst>
+              <a:gd name="adj" fmla="val 11364"/>
+            </a:avLst>
+          </a:prstGeom>
+          <a:solidFill>
+            <a:srgbClr val="1B2230"/>
+          </a:solidFill>
+          <a:ln/>
+        </p:spPr>
+      </p:sp>
+      <p:sp>
+        <p:nvSpPr>
+          <p:cNvPr id="18" name="Text 16"/>
+          <p:cNvSpPr/>
+          <p:nvPr/>
+        </p:nvSpPr>
+        <p:spPr>
+          <a:xfrm>
+            <a:off x="978408" y="5029200"/>
+            <a:ext cx="2615184" cy="402336"/>
+          </a:xfrm>
+          <a:prstGeom prst="rect">
+            <a:avLst/>
+          </a:prstGeom>
+          <a:noFill/>
+          <a:ln/>
+        </p:spPr>
+        <p:txBody>
+          <a:bodyPr wrap="square" lIns="0" tIns="0" rIns="0" bIns="0" rtlCol="0" anchor="ctr"/>
+          <a:lstStyle/>
+          <a:p>
+            <a:pPr indent="0" marL="0">
+              <a:buNone/>
+            </a:pPr>
+            <a:r>
+              <a:rPr lang="en-US" sz="1150" b="1" dirty="0">
+                <a:solidFill>
+                  <a:srgbClr val="C9A574"/>
+                </a:solidFill>
+                <a:latin typeface="Courier New" pitchFamily="34" charset="0"/>
+                <a:ea typeface="Courier New" pitchFamily="34" charset="-122"/>
+                <a:cs typeface="Courier New" pitchFamily="34" charset="-120"/>
+              </a:rPr>
+              <a:t>npm run precargar</a:t>
+            </a:r>
+            <a:endParaRPr lang="en-US" sz="1150" dirty="0"/>
+          </a:p>
+        </p:txBody>
+      </p:sp>
+      <p:sp>
+        <p:nvSpPr>
+          <p:cNvPr id="19" name="Text 17"/>
+          <p:cNvSpPr/>
+          <p:nvPr/>
+        </p:nvSpPr>
+        <p:spPr>
+          <a:xfrm>
+            <a:off x="3977640" y="5065776"/>
+            <a:ext cx="2651760" cy="457200"/>
+          </a:xfrm>
+          <a:prstGeom prst="rect">
+            <a:avLst/>
+          </a:prstGeom>
+          <a:noFill/>
+          <a:ln/>
+        </p:spPr>
+        <p:txBody>
+          <a:bodyPr wrap="square" lIns="0" tIns="0" rIns="0" bIns="0" rtlCol="0" anchor="t"/>
+          <a:lstStyle/>
+          <a:p>
+            <a:pPr indent="0" marL="0">
+              <a:lnSpc>
+                <a:spcPct val="100000"/>
+              </a:lnSpc>
+              <a:buNone/>
+            </a:pPr>
+            <a:r>
+              <a:rPr lang="en-US" sz="1000" dirty="0">
+                <a:solidFill>
+                  <a:srgbClr val="5A6478"/>
+                </a:solidFill>
+                <a:latin typeface="Calibri" pitchFamily="34" charset="0"/>
+                <a:ea typeface="Calibri" pitchFamily="34" charset="-122"/>
+                <a:cs typeface="Calibri" pitchFamily="34" charset="-120"/>
+              </a:rPr>
+              <a:t>Reintenta la precarga de códigos y leyes</a:t>
+            </a:r>
+            <a:endParaRPr lang="en-US" sz="1000" dirty="0"/>
+          </a:p>
+        </p:txBody>
+      </p:sp>
+      <p:sp>
+        <p:nvSpPr>
+          <p:cNvPr id="20" name="Shape 18"/>
+          <p:cNvSpPr/>
+          <p:nvPr/>
+        </p:nvSpPr>
+        <p:spPr>
+          <a:xfrm>
+            <a:off x="6675120" y="1810512"/>
+            <a:ext cx="4736592" cy="1920240"/>
+          </a:xfrm>
+          <a:prstGeom prst="roundRect">
+            <a:avLst>
+              <a:gd name="adj" fmla="val 2857"/>
+            </a:avLst>
+          </a:prstGeom>
+          <a:solidFill>
+            <a:srgbClr val="1B2230"/>
+          </a:solidFill>
+          <a:ln/>
+        </p:spPr>
+      </p:sp>
+      <p:sp>
+        <p:nvSpPr>
+          <p:cNvPr id="21" name="Text 19"/>
+          <p:cNvSpPr/>
+          <p:nvPr/>
+        </p:nvSpPr>
+        <p:spPr>
+          <a:xfrm>
+            <a:off x="6995160" y="2048256"/>
+            <a:ext cx="4114800" cy="274320"/>
+          </a:xfrm>
+          <a:prstGeom prst="rect">
+            <a:avLst/>
+          </a:prstGeom>
+          <a:noFill/>
+          <a:ln/>
+        </p:spPr>
+        <p:txBody>
+          <a:bodyPr wrap="square" lIns="0" tIns="0" rIns="0" bIns="0" rtlCol="0" anchor="t"/>
+          <a:lstStyle/>
+          <a:p>
+            <a:pPr indent="0" marL="0">
+              <a:buNone/>
+            </a:pPr>
+            <a:r>
+              <a:rPr lang="en-US" sz="1100" spc="120" kern="0" dirty="0">
+                <a:solidFill>
+                  <a:srgbClr val="C9A574"/>
+                </a:solidFill>
+                <a:latin typeface="Calibri" pitchFamily="34" charset="0"/>
+                <a:ea typeface="Calibri" pitchFamily="34" charset="-122"/>
+                <a:cs typeface="Calibri" pitchFamily="34" charset="-120"/>
+              </a:rPr>
+              <a:t>Por qué existe la auditoría</a:t>
+            </a:r>
+            <a:endParaRPr lang="en-US" sz="1100" dirty="0"/>
+          </a:p>
+        </p:txBody>
+      </p:sp>
+      <p:sp>
+        <p:nvSpPr>
+          <p:cNvPr id="22" name="Text 20"/>
+          <p:cNvSpPr/>
+          <p:nvPr/>
+        </p:nvSpPr>
+        <p:spPr>
+          <a:xfrm>
+            <a:off x="6995160" y="2377440"/>
+            <a:ext cx="4114800" cy="914400"/>
+          </a:xfrm>
+          <a:prstGeom prst="rect">
+            <a:avLst/>
+          </a:prstGeom>
+          <a:noFill/>
+          <a:ln/>
+        </p:spPr>
+        <p:txBody>
+          <a:bodyPr wrap="square" lIns="0" tIns="0" rIns="0" bIns="0" rtlCol="0" anchor="t"/>
+          <a:lstStyle/>
+          <a:p>
+            <a:pPr indent="0" marL="0">
+              <a:lnSpc>
+                <a:spcPct val="115000"/>
+              </a:lnSpc>
+              <a:buNone/>
+            </a:pPr>
+            <a:r>
+              <a:rPr lang="en-US" sz="1100" dirty="0">
+                <a:solidFill>
+                  <a:srgbClr val="FFFFFF"/>
+                </a:solidFill>
+                <a:latin typeface="Calibri" pitchFamily="34" charset="0"/>
+                <a:ea typeface="Calibri" pitchFamily="34" charset="-122"/>
+                <a:cs typeface="Calibri" pitchFamily="34" charset="-120"/>
+              </a:rPr>
+              <a:t>Comprueba contra las fuentes reales que cada identificador de norma apunte a la norma que dice, que los códigos de corte sean los correctos y que cada revista sea la declarada.</a:t>
+            </a:r>
+            <a:endParaRPr lang="en-US" sz="1100" dirty="0"/>
+          </a:p>
+        </p:txBody>
+      </p:sp>
+      <p:sp>
+        <p:nvSpPr>
+          <p:cNvPr id="23" name="Text 21"/>
+          <p:cNvSpPr/>
+          <p:nvPr/>
+        </p:nvSpPr>
+        <p:spPr>
+          <a:xfrm>
+            <a:off x="6995160" y="3255264"/>
+            <a:ext cx="4114800" cy="365760"/>
+          </a:xfrm>
+          <a:prstGeom prst="rect">
+            <a:avLst/>
+          </a:prstGeom>
+          <a:noFill/>
+          <a:ln/>
+        </p:spPr>
+        <p:txBody>
+          <a:bodyPr wrap="square" lIns="0" tIns="0" rIns="0" bIns="0" rtlCol="0" anchor="t"/>
+          <a:lstStyle/>
+          <a:p>
+            <a:pPr indent="0" marL="0">
+              <a:buNone/>
+            </a:pPr>
+            <a:r>
+              <a:rPr lang="en-US" sz="1050" i="1" dirty="0">
+                <a:solidFill>
+                  <a:srgbClr val="C9A574"/>
+                </a:solidFill>
+                <a:latin typeface="Calibri" pitchFamily="34" charset="0"/>
+                <a:ea typeface="Calibri" pitchFamily="34" charset="-122"/>
+                <a:cs typeface="Calibri" pitchFamily="34" charset="-120"/>
+              </a:rPr>
+              <a:t>Es la comprobación que importa cuando se trabaja con citas.</a:t>
+            </a:r>
+            <a:endParaRPr lang="en-US" sz="1050" dirty="0"/>
+          </a:p>
+        </p:txBody>
+      </p:sp>
+      <p:sp>
+        <p:nvSpPr>
+          <p:cNvPr id="24" name="Text 22"/>
+          <p:cNvSpPr/>
+          <p:nvPr/>
+        </p:nvSpPr>
+        <p:spPr>
+          <a:xfrm>
+            <a:off x="6675120" y="3950208"/>
+            <a:ext cx="4572000" cy="274320"/>
+          </a:xfrm>
+          <a:prstGeom prst="rect">
+            <a:avLst/>
+          </a:prstGeom>
+          <a:noFill/>
+          <a:ln/>
+        </p:spPr>
+        <p:txBody>
+          <a:bodyPr wrap="square" lIns="0" tIns="0" rIns="0" bIns="0" rtlCol="0" anchor="t"/>
+          <a:lstStyle/>
+          <a:p>
+            <a:pPr indent="0" marL="0">
+              <a:buNone/>
+            </a:pPr>
+            <a:r>
+              <a:rPr lang="en-US" sz="1250" b="1" dirty="0">
+                <a:solidFill>
+                  <a:srgbClr val="1B2230"/>
+                </a:solidFill>
+                <a:latin typeface="Calibri" pitchFamily="34" charset="0"/>
+                <a:ea typeface="Calibri" pitchFamily="34" charset="-122"/>
+                <a:cs typeface="Calibri" pitchFamily="34" charset="-120"/>
+              </a:rPr>
+              <a:t>Desinstalar</a:t>
+            </a:r>
+            <a:endParaRPr lang="en-US" sz="1250" dirty="0"/>
+          </a:p>
+        </p:txBody>
+      </p:sp>
+      <p:sp>
+        <p:nvSpPr>
+          <p:cNvPr id="25" name="Text 23"/>
+          <p:cNvSpPr/>
+          <p:nvPr/>
+        </p:nvSpPr>
+        <p:spPr>
+          <a:xfrm>
+            <a:off x="6675120" y="4297680"/>
+            <a:ext cx="4736592" cy="365760"/>
+          </a:xfrm>
+          <a:prstGeom prst="rect">
+            <a:avLst/>
+          </a:prstGeom>
+          <a:noFill/>
+          <a:ln/>
+        </p:spPr>
+        <p:txBody>
+          <a:bodyPr wrap="square" lIns="0" tIns="0" rIns="0" bIns="0" rtlCol="0" anchor="t"/>
+          <a:lstStyle/>
+          <a:p>
+            <a:pPr indent="0" marL="0">
+              <a:buNone/>
+            </a:pPr>
+            <a:r>
+              <a:rPr lang="en-US" sz="1050" dirty="0">
+                <a:solidFill>
+                  <a:srgbClr val="5A6478"/>
+                </a:solidFill>
+                <a:latin typeface="Calibri" pitchFamily="34" charset="0"/>
+                <a:ea typeface="Calibri" pitchFamily="34" charset="-122"/>
+                <a:cs typeface="Calibri" pitchFamily="34" charset="-120"/>
+              </a:rPr>
+              <a:t>1.  Borrar la entrada "responsa" del archivo de configuración de Claude Desktop</a:t>
+            </a:r>
+            <a:endParaRPr lang="en-US" sz="1050" dirty="0"/>
+          </a:p>
+        </p:txBody>
+      </p:sp>
+      <p:sp>
+        <p:nvSpPr>
+          <p:cNvPr id="26" name="Text 24"/>
+          <p:cNvSpPr/>
+          <p:nvPr/>
+        </p:nvSpPr>
+        <p:spPr>
+          <a:xfrm>
+            <a:off x="6675120" y="4681728"/>
+            <a:ext cx="4736592" cy="365760"/>
+          </a:xfrm>
+          <a:prstGeom prst="rect">
+            <a:avLst/>
+          </a:prstGeom>
+          <a:noFill/>
+          <a:ln/>
+        </p:spPr>
+        <p:txBody>
+          <a:bodyPr wrap="square" lIns="0" tIns="0" rIns="0" bIns="0" rtlCol="0" anchor="t"/>
+          <a:lstStyle/>
+          <a:p>
+            <a:pPr indent="0" marL="0">
+              <a:buNone/>
+            </a:pPr>
+            <a:r>
+              <a:rPr lang="en-US" sz="1050" dirty="0">
+                <a:solidFill>
+                  <a:srgbClr val="5A6478"/>
+                </a:solidFill>
+                <a:latin typeface="Calibri" pitchFamily="34" charset="0"/>
+                <a:ea typeface="Calibri" pitchFamily="34" charset="-122"/>
+                <a:cs typeface="Calibri" pitchFamily="34" charset="-120"/>
+              </a:rPr>
+              <a:t>2.  Borrar la carpeta ~/.claude/skills/responsa</a:t>
+            </a:r>
+            <a:endParaRPr lang="en-US" sz="1050" dirty="0"/>
+          </a:p>
+        </p:txBody>
+      </p:sp>
+      <p:sp>
+        <p:nvSpPr>
+          <p:cNvPr id="27" name="Text 25"/>
+          <p:cNvSpPr/>
+          <p:nvPr/>
+        </p:nvSpPr>
+        <p:spPr>
+          <a:xfrm>
+            <a:off x="6675120" y="5065776"/>
+            <a:ext cx="4736592" cy="365760"/>
+          </a:xfrm>
+          <a:prstGeom prst="rect">
+            <a:avLst/>
+          </a:prstGeom>
+          <a:noFill/>
+          <a:ln/>
+        </p:spPr>
+        <p:txBody>
+          <a:bodyPr wrap="square" lIns="0" tIns="0" rIns="0" bIns="0" rtlCol="0" anchor="t"/>
+          <a:lstStyle/>
+          <a:p>
+            <a:pPr indent="0" marL="0">
+              <a:buNone/>
+            </a:pPr>
+            <a:r>
+              <a:rPr lang="en-US" sz="1050" dirty="0">
+                <a:solidFill>
+                  <a:srgbClr val="5A6478"/>
+                </a:solidFill>
+                <a:latin typeface="Calibri" pitchFamily="34" charset="0"/>
+                <a:ea typeface="Calibri" pitchFamily="34" charset="-122"/>
+                <a:cs typeface="Calibri" pitchFamily="34" charset="-120"/>
+              </a:rPr>
+              <a:t>3.  Borrar la carpeta ~/.responsa (los datos guardados)</a:t>
+            </a:r>
+            <a:endParaRPr lang="en-US" sz="1050" dirty="0"/>
+          </a:p>
+        </p:txBody>
+      </p:sp>
+      <p:sp>
+        <p:nvSpPr>
+          <p:cNvPr id="28" name="Text 26"/>
+          <p:cNvSpPr/>
+          <p:nvPr/>
+        </p:nvSpPr>
+        <p:spPr>
+          <a:xfrm>
+            <a:off x="6675120" y="5449824"/>
+            <a:ext cx="4736592" cy="365760"/>
+          </a:xfrm>
+          <a:prstGeom prst="rect">
+            <a:avLst/>
+          </a:prstGeom>
+          <a:noFill/>
+          <a:ln/>
+        </p:spPr>
+        <p:txBody>
+          <a:bodyPr wrap="square" lIns="0" tIns="0" rIns="0" bIns="0" rtlCol="0" anchor="t"/>
+          <a:lstStyle/>
+          <a:p>
+            <a:pPr indent="0" marL="0">
+              <a:buNone/>
+            </a:pPr>
+            <a:r>
+              <a:rPr lang="en-US" sz="1050" dirty="0">
+                <a:solidFill>
+                  <a:srgbClr val="5A6478"/>
+                </a:solidFill>
+                <a:latin typeface="Calibri" pitchFamily="34" charset="0"/>
+                <a:ea typeface="Calibri" pitchFamily="34" charset="-122"/>
+                <a:cs typeface="Calibri" pitchFamily="34" charset="-120"/>
+              </a:rPr>
+              <a:t>4.  Borrar la carpeta de Responsa</a:t>
+            </a:r>
+            <a:endParaRPr lang="en-US" sz="1050" dirty="0"/>
+          </a:p>
+        </p:txBody>
+      </p:sp>
+    </p:spTree>
+  </p:cSld>
+  <p:clrMapOvr>
+    <a:masterClrMapping/>
+  </p:clrMapOvr>
+</p:sld>
+</file>
+
+<file path=ppt/slides/slide17.xml><?xml version="1.0" encoding="utf-8"?>
+<p:sld xmlns:a="http://schemas.openxmlformats.org/drawingml/2006/main" xmlns:r="http://schemas.openxmlformats.org/officeDocument/2006/relationships" xmlns:p="http://schemas.openxmlformats.org/presentationml/2006/main">
+  <p:cSld name="Slide 17">
+    <p:bg>
+      <p:bgPr>
+        <a:solidFill>
+          <a:srgbClr val="F4F1EA"/>
+        </a:solidFill>
+      </p:bgPr>
+    </p:bg>
+    <p:spTree>
+      <p:nvGrpSpPr>
+        <p:cNvPr id="1" name=""/>
+        <p:cNvGrpSpPr/>
+        <p:nvPr/>
+      </p:nvGrpSpPr>
+      <p:grpSpPr>
+        <a:xfrm>
+          <a:off x="0" y="0"/>
+          <a:ext cx="0" cy="0"/>
+          <a:chOff x="0" y="0"/>
+          <a:chExt cx="0" cy="0"/>
+        </a:xfrm>
+      </p:grpSpPr>
+      <p:sp>
+        <p:nvSpPr>
+          <p:cNvPr id="2" name="Text 0"/>
+          <p:cNvSpPr/>
+          <p:nvPr/>
+        </p:nvSpPr>
+        <p:spPr>
+          <a:xfrm>
             <a:off x="777240" y="2148840"/>
             <a:ext cx="6400800" cy="868680"/>
           </a:xfrm>
@@ -11004,7 +16467,7 @@
     <p:bg>
       <p:bgPr>
         <a:solidFill>
-          <a:srgbClr val="F4F1EA"/>
+          <a:srgbClr val="1B2230"/>
         </a:solidFill>
       </p:bgPr>
     </p:bg>
@@ -11031,7 +16494,7 @@
         <p:spPr>
           <a:xfrm>
             <a:off x="777240" y="566928"/>
-            <a:ext cx="10634472" cy="566928"/>
+            <a:ext cx="7315200" cy="548640"/>
           </a:xfrm>
           <a:prstGeom prst="rect">
             <a:avLst/>
@@ -11049,13 +16512,13 @@
             <a:r>
               <a:rPr lang="en-US" sz="3200" b="1" dirty="0">
                 <a:solidFill>
-                  <a:srgbClr val="1B2230"/>
+                  <a:srgbClr val="FFFFFF"/>
                 </a:solidFill>
                 <a:latin typeface="Cambria" pitchFamily="34" charset="0"/>
                 <a:ea typeface="Cambria" pitchFamily="34" charset="-122"/>
                 <a:cs typeface="Cambria" pitchFamily="34" charset="-120"/>
               </a:rPr>
-              <a:t>Instalación en Windows</a:t>
+              <a:t>Qué preguntarle</a:t>
             </a:r>
             <a:endParaRPr lang="en-US" sz="3200" dirty="0"/>
           </a:p>
@@ -11069,8 +16532,8 @@
         </p:nvSpPr>
         <p:spPr>
           <a:xfrm>
-            <a:off x="777240" y="1152144"/>
-            <a:ext cx="9537192" cy="384048"/>
+            <a:off x="777240" y="1133856"/>
+            <a:ext cx="8229600" cy="365760"/>
           </a:xfrm>
           <a:prstGeom prst="rect">
             <a:avLst/>
@@ -11088,13 +16551,13 @@
             <a:r>
               <a:rPr lang="en-US" sz="1350" i="1" dirty="0">
                 <a:solidFill>
-                  <a:srgbClr val="5A6478"/>
-                </a:solidFill>
-                <a:latin typeface="Calibri" pitchFamily="34" charset="0"/>
-                <a:ea typeface="Calibri" pitchFamily="34" charset="-122"/>
-                <a:cs typeface="Calibri" pitchFamily="34" charset="-120"/>
-              </a:rPr>
-              <a:t>Un solo comando hace todo: dependencias, registro, skill, precarga y verificación</a:t>
+                  <a:srgbClr val="8A93A5"/>
+                </a:solidFill>
+                <a:latin typeface="Calibri" pitchFamily="34" charset="0"/>
+                <a:ea typeface="Calibri" pitchFamily="34" charset="-122"/>
+                <a:cs typeface="Calibri" pitchFamily="34" charset="-120"/>
+              </a:rPr>
+              <a:t>En lenguaje natural. Responsa decide a qué fuente ir.</a:t>
             </a:r>
             <a:endParaRPr lang="en-US" sz="1350" dirty="0"/>
           </a:p>
@@ -11102,23 +16565,42 @@
       </p:sp>
       <p:sp>
         <p:nvSpPr>
-          <p:cNvPr id="4" name="Shape 2"/>
-          <p:cNvSpPr/>
-          <p:nvPr/>
-        </p:nvSpPr>
-        <p:spPr>
-          <a:xfrm>
-            <a:off x="777240" y="1901952"/>
-            <a:ext cx="347472" cy="347472"/>
-          </a:xfrm>
-          <a:prstGeom prst="ellipse">
-            <a:avLst/>
-          </a:prstGeom>
-          <a:solidFill>
-            <a:srgbClr val="A87C4F"/>
-          </a:solidFill>
-          <a:ln/>
-        </p:spPr>
+          <p:cNvPr id="4" name="Text 2"/>
+          <p:cNvSpPr/>
+          <p:nvPr/>
+        </p:nvSpPr>
+        <p:spPr>
+          <a:xfrm>
+            <a:off x="777240" y="1755648"/>
+            <a:ext cx="6309360" cy="310896"/>
+          </a:xfrm>
+          <a:prstGeom prst="rect">
+            <a:avLst/>
+          </a:prstGeom>
+          <a:noFill/>
+          <a:ln/>
+        </p:spPr>
+        <p:txBody>
+          <a:bodyPr wrap="square" lIns="0" tIns="0" rIns="0" bIns="0" rtlCol="0" anchor="ctr"/>
+          <a:lstStyle/>
+          <a:p>
+            <a:pPr indent="0" marL="0">
+              <a:buNone/>
+            </a:pPr>
+            <a:r>
+              <a:rPr lang="en-US" sz="1450" dirty="0">
+                <a:solidFill>
+                  <a:srgbClr val="FFFFFF"/>
+                </a:solidFill>
+                <a:latin typeface="Cambria" pitchFamily="34" charset="0"/>
+                <a:ea typeface="Cambria" pitchFamily="34" charset="-122"/>
+                <a:cs typeface="Cambria" pitchFamily="34" charset="-120"/>
+              </a:rPr>
+              <a:t>«Fallos que apliquen el artículo 16 de la Ley 19.496»</a:t>
+            </a:r>
+            <a:endParaRPr lang="en-US" sz="1450" dirty="0"/>
+          </a:p>
+        </p:txBody>
       </p:sp>
       <p:sp>
         <p:nvSpPr>
@@ -11128,73 +16610,73 @@
         </p:nvSpPr>
         <p:spPr>
           <a:xfrm>
-            <a:off x="777240" y="1901952"/>
-            <a:ext cx="347472" cy="347472"/>
-          </a:xfrm>
-          <a:prstGeom prst="rect">
-            <a:avLst/>
-          </a:prstGeom>
-          <a:noFill/>
-          <a:ln/>
-        </p:spPr>
-        <p:txBody>
-          <a:bodyPr wrap="square" lIns="0" tIns="0" rIns="0" bIns="0" rtlCol="0" anchor="ctr"/>
-          <a:lstStyle/>
-          <a:p>
-            <a:pPr algn="ctr" indent="0" marL="0">
-              <a:buNone/>
-            </a:pPr>
-            <a:r>
-              <a:rPr lang="en-US" sz="1200" b="1" dirty="0">
+            <a:off x="7269480" y="1792224"/>
+            <a:ext cx="4114800" cy="274320"/>
+          </a:xfrm>
+          <a:prstGeom prst="rect">
+            <a:avLst/>
+          </a:prstGeom>
+          <a:noFill/>
+          <a:ln/>
+        </p:spPr>
+        <p:txBody>
+          <a:bodyPr wrap="square" lIns="0" tIns="0" rIns="0" bIns="0" rtlCol="0" anchor="ctr"/>
+          <a:lstStyle/>
+          <a:p>
+            <a:pPr indent="0" marL="0">
+              <a:buNone/>
+            </a:pPr>
+            <a:r>
+              <a:rPr lang="en-US" sz="1050" dirty="0">
+                <a:solidFill>
+                  <a:srgbClr val="C9A574"/>
+                </a:solidFill>
+                <a:latin typeface="Calibri" pitchFamily="34" charset="0"/>
+                <a:ea typeface="Calibri" pitchFamily="34" charset="-122"/>
+                <a:cs typeface="Calibri" pitchFamily="34" charset="-120"/>
+              </a:rPr>
+              <a:t>Ley Chile + Poder Judicial, filtrando por norma aplicada</a:t>
+            </a:r>
+            <a:endParaRPr lang="en-US" sz="1050" dirty="0"/>
+          </a:p>
+        </p:txBody>
+      </p:sp>
+      <p:sp>
+        <p:nvSpPr>
+          <p:cNvPr id="6" name="Text 4"/>
+          <p:cNvSpPr/>
+          <p:nvPr/>
+        </p:nvSpPr>
+        <p:spPr>
+          <a:xfrm>
+            <a:off x="777240" y="2377440"/>
+            <a:ext cx="6309360" cy="310896"/>
+          </a:xfrm>
+          <a:prstGeom prst="rect">
+            <a:avLst/>
+          </a:prstGeom>
+          <a:noFill/>
+          <a:ln/>
+        </p:spPr>
+        <p:txBody>
+          <a:bodyPr wrap="square" lIns="0" tIns="0" rIns="0" bIns="0" rtlCol="0" anchor="ctr"/>
+          <a:lstStyle/>
+          <a:p>
+            <a:pPr indent="0" marL="0">
+              <a:buNone/>
+            </a:pPr>
+            <a:r>
+              <a:rPr lang="en-US" sz="1450" dirty="0">
                 <a:solidFill>
                   <a:srgbClr val="FFFFFF"/>
                 </a:solidFill>
-                <a:latin typeface="Calibri" pitchFamily="34" charset="0"/>
-                <a:ea typeface="Calibri" pitchFamily="34" charset="-122"/>
-                <a:cs typeface="Calibri" pitchFamily="34" charset="-120"/>
-              </a:rPr>
-              <a:t>1</a:t>
-            </a:r>
-            <a:endParaRPr lang="en-US" sz="1200" dirty="0"/>
-          </a:p>
-        </p:txBody>
-      </p:sp>
-      <p:sp>
-        <p:nvSpPr>
-          <p:cNvPr id="6" name="Text 4"/>
-          <p:cNvSpPr/>
-          <p:nvPr/>
-        </p:nvSpPr>
-        <p:spPr>
-          <a:xfrm>
-            <a:off x="1289304" y="1847088"/>
-            <a:ext cx="3200400" cy="274320"/>
-          </a:xfrm>
-          <a:prstGeom prst="rect">
-            <a:avLst/>
-          </a:prstGeom>
-          <a:noFill/>
-          <a:ln/>
-        </p:spPr>
-        <p:txBody>
-          <a:bodyPr wrap="square" lIns="0" tIns="0" rIns="0" bIns="0" rtlCol="0" anchor="ctr"/>
-          <a:lstStyle/>
-          <a:p>
-            <a:pPr indent="0" marL="0">
-              <a:buNone/>
-            </a:pPr>
-            <a:r>
-              <a:rPr lang="en-US" sz="1300" b="1" dirty="0">
-                <a:solidFill>
-                  <a:srgbClr val="1B2230"/>
-                </a:solidFill>
-                <a:latin typeface="Calibri" pitchFamily="34" charset="0"/>
-                <a:ea typeface="Calibri" pitchFamily="34" charset="-122"/>
-                <a:cs typeface="Calibri" pitchFamily="34" charset="-120"/>
-              </a:rPr>
-              <a:t>Instalar Node.js</a:t>
-            </a:r>
-            <a:endParaRPr lang="en-US" sz="1300" dirty="0"/>
+                <a:latin typeface="Cambria" pitchFamily="34" charset="0"/>
+                <a:ea typeface="Cambria" pitchFamily="34" charset="-122"/>
+                <a:cs typeface="Cambria" pitchFamily="34" charset="-120"/>
+              </a:rPr>
+              <a:t>«¿Qué han resuelto los tribunales sobre tutela laboral?»</a:t>
+            </a:r>
+            <a:endParaRPr lang="en-US" sz="1450" dirty="0"/>
           </a:p>
         </p:txBody>
       </p:sp>
@@ -11206,61 +16688,75 @@
         </p:nvSpPr>
         <p:spPr>
           <a:xfrm>
-            <a:off x="1289304" y="2121408"/>
-            <a:ext cx="3200400" cy="566928"/>
-          </a:xfrm>
-          <a:prstGeom prst="rect">
-            <a:avLst/>
-          </a:prstGeom>
-          <a:noFill/>
-          <a:ln/>
-        </p:spPr>
-        <p:txBody>
-          <a:bodyPr wrap="square" lIns="0" tIns="0" rIns="0" bIns="0" rtlCol="0" anchor="ctr"/>
-          <a:lstStyle/>
-          <a:p>
-            <a:pPr indent="0" marL="0">
-              <a:lnSpc>
-                <a:spcPct val="100000"/>
-              </a:lnSpc>
-              <a:buNone/>
-            </a:pPr>
-            <a:r>
-              <a:rPr lang="en-US" sz="1000" dirty="0">
-                <a:solidFill>
-                  <a:srgbClr val="5A6478"/>
-                </a:solidFill>
-                <a:latin typeface="Calibri" pitchFamily="34" charset="0"/>
-                <a:ea typeface="Calibri" pitchFamily="34" charset="-122"/>
-                <a:cs typeface="Calibri" pitchFamily="34" charset="-120"/>
-              </a:rPr>
-              <a:t>Descargar la versión LTS desde nodejs.org y ejecutar el instalador. Aceptar las opciones por defecto.</a:t>
-            </a:r>
-            <a:endParaRPr lang="en-US" sz="1000" dirty="0"/>
-          </a:p>
-        </p:txBody>
-      </p:sp>
-      <p:sp>
-        <p:nvSpPr>
-          <p:cNvPr id="8" name="Shape 6"/>
-          <p:cNvSpPr/>
-          <p:nvPr/>
-        </p:nvSpPr>
-        <p:spPr>
-          <a:xfrm>
-            <a:off x="4709160" y="1865376"/>
-            <a:ext cx="6675120" cy="658368"/>
-          </a:xfrm>
-          <a:prstGeom prst="roundRect">
-            <a:avLst>
-              <a:gd name="adj" fmla="val 6944"/>
-            </a:avLst>
-          </a:prstGeom>
-          <a:solidFill>
-            <a:srgbClr val="1B2230"/>
-          </a:solidFill>
-          <a:ln/>
-        </p:spPr>
+            <a:off x="7269480" y="2414016"/>
+            <a:ext cx="4114800" cy="274320"/>
+          </a:xfrm>
+          <a:prstGeom prst="rect">
+            <a:avLst/>
+          </a:prstGeom>
+          <a:noFill/>
+          <a:ln/>
+        </p:spPr>
+        <p:txBody>
+          <a:bodyPr wrap="square" lIns="0" tIns="0" rIns="0" bIns="0" rtlCol="0" anchor="ctr"/>
+          <a:lstStyle/>
+          <a:p>
+            <a:pPr indent="0" marL="0">
+              <a:buNone/>
+            </a:pPr>
+            <a:r>
+              <a:rPr lang="en-US" sz="1050" dirty="0">
+                <a:solidFill>
+                  <a:srgbClr val="C9A574"/>
+                </a:solidFill>
+                <a:latin typeface="Calibri" pitchFamily="34" charset="0"/>
+                <a:ea typeface="Calibri" pitchFamily="34" charset="-122"/>
+                <a:cs typeface="Calibri" pitchFamily="34" charset="-120"/>
+              </a:rPr>
+              <a:t>Los siete buscadores del Poder Judicial a la vez</a:t>
+            </a:r>
+            <a:endParaRPr lang="en-US" sz="1050" dirty="0"/>
+          </a:p>
+        </p:txBody>
+      </p:sp>
+      <p:sp>
+        <p:nvSpPr>
+          <p:cNvPr id="8" name="Text 6"/>
+          <p:cNvSpPr/>
+          <p:nvPr/>
+        </p:nvSpPr>
+        <p:spPr>
+          <a:xfrm>
+            <a:off x="777240" y="2999232"/>
+            <a:ext cx="6309360" cy="310896"/>
+          </a:xfrm>
+          <a:prstGeom prst="rect">
+            <a:avLst/>
+          </a:prstGeom>
+          <a:noFill/>
+          <a:ln/>
+        </p:spPr>
+        <p:txBody>
+          <a:bodyPr wrap="square" lIns="0" tIns="0" rIns="0" bIns="0" rtlCol="0" anchor="ctr"/>
+          <a:lstStyle/>
+          <a:p>
+            <a:pPr indent="0" marL="0">
+              <a:buNone/>
+            </a:pPr>
+            <a:r>
+              <a:rPr lang="en-US" sz="1450" dirty="0">
+                <a:solidFill>
+                  <a:srgbClr val="FFFFFF"/>
+                </a:solidFill>
+                <a:latin typeface="Cambria" pitchFamily="34" charset="0"/>
+                <a:ea typeface="Cambria" pitchFamily="34" charset="-122"/>
+                <a:cs typeface="Cambria" pitchFamily="34" charset="-120"/>
+              </a:rPr>
+              <a:t>«¿Es constitucional esta norma?»</a:t>
+            </a:r>
+            <a:endParaRPr lang="en-US" sz="1450" dirty="0"/>
+          </a:p>
+        </p:txBody>
       </p:sp>
       <p:sp>
         <p:nvSpPr>
@@ -11270,56 +16766,75 @@
         </p:nvSpPr>
         <p:spPr>
           <a:xfrm>
-            <a:off x="4937760" y="1865376"/>
-            <a:ext cx="6217920" cy="658368"/>
-          </a:xfrm>
-          <a:prstGeom prst="rect">
-            <a:avLst/>
-          </a:prstGeom>
-          <a:noFill/>
-          <a:ln/>
-        </p:spPr>
-        <p:txBody>
-          <a:bodyPr wrap="square" lIns="0" tIns="0" rIns="0" bIns="0" rtlCol="0" anchor="ctr"/>
-          <a:lstStyle/>
-          <a:p>
-            <a:pPr indent="0" marL="0">
-              <a:buNone/>
-            </a:pPr>
-            <a:r>
-              <a:rPr lang="en-US" sz="1150" b="1" dirty="0">
+            <a:off x="7269480" y="3035808"/>
+            <a:ext cx="4114800" cy="274320"/>
+          </a:xfrm>
+          <a:prstGeom prst="rect">
+            <a:avLst/>
+          </a:prstGeom>
+          <a:noFill/>
+          <a:ln/>
+        </p:spPr>
+        <p:txBody>
+          <a:bodyPr wrap="square" lIns="0" tIns="0" rIns="0" bIns="0" rtlCol="0" anchor="ctr"/>
+          <a:lstStyle/>
+          <a:p>
+            <a:pPr indent="0" marL="0">
+              <a:buNone/>
+            </a:pPr>
+            <a:r>
+              <a:rPr lang="en-US" sz="1050" dirty="0">
                 <a:solidFill>
                   <a:srgbClr val="C9A574"/>
                 </a:solidFill>
-                <a:latin typeface="Courier New" pitchFamily="34" charset="0"/>
-                <a:ea typeface="Courier New" pitchFamily="34" charset="-122"/>
-                <a:cs typeface="Courier New" pitchFamily="34" charset="-120"/>
-              </a:rPr>
-              <a:t>nodejs.org  →  descargar LTS</a:t>
-            </a:r>
-            <a:endParaRPr lang="en-US" sz="1150" dirty="0"/>
-          </a:p>
-        </p:txBody>
-      </p:sp>
-      <p:sp>
-        <p:nvSpPr>
-          <p:cNvPr id="10" name="Shape 8"/>
-          <p:cNvSpPr/>
-          <p:nvPr/>
-        </p:nvSpPr>
-        <p:spPr>
-          <a:xfrm>
-            <a:off x="777240" y="2871216"/>
-            <a:ext cx="347472" cy="347472"/>
-          </a:xfrm>
-          <a:prstGeom prst="ellipse">
-            <a:avLst/>
-          </a:prstGeom>
-          <a:solidFill>
-            <a:srgbClr val="A87C4F"/>
-          </a:solidFill>
-          <a:ln/>
-        </p:spPr>
+                <a:latin typeface="Calibri" pitchFamily="34" charset="0"/>
+                <a:ea typeface="Calibri" pitchFamily="34" charset="-122"/>
+                <a:cs typeface="Calibri" pitchFamily="34" charset="-120"/>
+              </a:rPr>
+              <a:t>Tribunal Constitucional, con los párrafos pertinentes y el PDF</a:t>
+            </a:r>
+            <a:endParaRPr lang="en-US" sz="1050" dirty="0"/>
+          </a:p>
+        </p:txBody>
+      </p:sp>
+      <p:sp>
+        <p:nvSpPr>
+          <p:cNvPr id="10" name="Text 8"/>
+          <p:cNvSpPr/>
+          <p:nvPr/>
+        </p:nvSpPr>
+        <p:spPr>
+          <a:xfrm>
+            <a:off x="777240" y="3621024"/>
+            <a:ext cx="6309360" cy="310896"/>
+          </a:xfrm>
+          <a:prstGeom prst="rect">
+            <a:avLst/>
+          </a:prstGeom>
+          <a:noFill/>
+          <a:ln/>
+        </p:spPr>
+        <p:txBody>
+          <a:bodyPr wrap="square" lIns="0" tIns="0" rIns="0" bIns="0" rtlCol="0" anchor="ctr"/>
+          <a:lstStyle/>
+          <a:p>
+            <a:pPr indent="0" marL="0">
+              <a:buNone/>
+            </a:pPr>
+            <a:r>
+              <a:rPr lang="en-US" sz="1450" dirty="0">
+                <a:solidFill>
+                  <a:srgbClr val="FFFFFF"/>
+                </a:solidFill>
+                <a:latin typeface="Cambria" pitchFamily="34" charset="0"/>
+                <a:ea typeface="Cambria" pitchFamily="34" charset="-122"/>
+                <a:cs typeface="Cambria" pitchFamily="34" charset="-120"/>
+              </a:rPr>
+              <a:t>«Dictámenes sobre sala cuna»</a:t>
+            </a:r>
+            <a:endParaRPr lang="en-US" sz="1450" dirty="0"/>
+          </a:p>
+        </p:txBody>
       </p:sp>
       <p:sp>
         <p:nvSpPr>
@@ -11329,73 +16844,73 @@
         </p:nvSpPr>
         <p:spPr>
           <a:xfrm>
-            <a:off x="777240" y="2871216"/>
-            <a:ext cx="347472" cy="347472"/>
-          </a:xfrm>
-          <a:prstGeom prst="rect">
-            <a:avLst/>
-          </a:prstGeom>
-          <a:noFill/>
-          <a:ln/>
-        </p:spPr>
-        <p:txBody>
-          <a:bodyPr wrap="square" lIns="0" tIns="0" rIns="0" bIns="0" rtlCol="0" anchor="ctr"/>
-          <a:lstStyle/>
-          <a:p>
-            <a:pPr algn="ctr" indent="0" marL="0">
-              <a:buNone/>
-            </a:pPr>
-            <a:r>
-              <a:rPr lang="en-US" sz="1200" b="1" dirty="0">
+            <a:off x="7269480" y="3657600"/>
+            <a:ext cx="4114800" cy="274320"/>
+          </a:xfrm>
+          <a:prstGeom prst="rect">
+            <a:avLst/>
+          </a:prstGeom>
+          <a:noFill/>
+          <a:ln/>
+        </p:spPr>
+        <p:txBody>
+          <a:bodyPr wrap="square" lIns="0" tIns="0" rIns="0" bIns="0" rtlCol="0" anchor="ctr"/>
+          <a:lstStyle/>
+          <a:p>
+            <a:pPr indent="0" marL="0">
+              <a:buNone/>
+            </a:pPr>
+            <a:r>
+              <a:rPr lang="en-US" sz="1050" dirty="0">
+                <a:solidFill>
+                  <a:srgbClr val="C9A574"/>
+                </a:solidFill>
+                <a:latin typeface="Calibri" pitchFamily="34" charset="0"/>
+                <a:ea typeface="Calibri" pitchFamily="34" charset="-122"/>
+                <a:cs typeface="Calibri" pitchFamily="34" charset="-120"/>
+              </a:rPr>
+              <a:t>Dirección del Trabajo, o Contraloría si es función pública</a:t>
+            </a:r>
+            <a:endParaRPr lang="en-US" sz="1050" dirty="0"/>
+          </a:p>
+        </p:txBody>
+      </p:sp>
+      <p:sp>
+        <p:nvSpPr>
+          <p:cNvPr id="12" name="Text 10"/>
+          <p:cNvSpPr/>
+          <p:nvPr/>
+        </p:nvSpPr>
+        <p:spPr>
+          <a:xfrm>
+            <a:off x="777240" y="4242816"/>
+            <a:ext cx="6309360" cy="310896"/>
+          </a:xfrm>
+          <a:prstGeom prst="rect">
+            <a:avLst/>
+          </a:prstGeom>
+          <a:noFill/>
+          <a:ln/>
+        </p:spPr>
+        <p:txBody>
+          <a:bodyPr wrap="square" lIns="0" tIns="0" rIns="0" bIns="0" rtlCol="0" anchor="ctr"/>
+          <a:lstStyle/>
+          <a:p>
+            <a:pPr indent="0" marL="0">
+              <a:buNone/>
+            </a:pPr>
+            <a:r>
+              <a:rPr lang="en-US" sz="1450" dirty="0">
                 <a:solidFill>
                   <a:srgbClr val="FFFFFF"/>
                 </a:solidFill>
-                <a:latin typeface="Calibri" pitchFamily="34" charset="0"/>
-                <a:ea typeface="Calibri" pitchFamily="34" charset="-122"/>
-                <a:cs typeface="Calibri" pitchFamily="34" charset="-120"/>
-              </a:rPr>
-              <a:t>2</a:t>
-            </a:r>
-            <a:endParaRPr lang="en-US" sz="1200" dirty="0"/>
-          </a:p>
-        </p:txBody>
-      </p:sp>
-      <p:sp>
-        <p:nvSpPr>
-          <p:cNvPr id="12" name="Text 10"/>
-          <p:cNvSpPr/>
-          <p:nvPr/>
-        </p:nvSpPr>
-        <p:spPr>
-          <a:xfrm>
-            <a:off x="1289304" y="2816352"/>
-            <a:ext cx="3200400" cy="274320"/>
-          </a:xfrm>
-          <a:prstGeom prst="rect">
-            <a:avLst/>
-          </a:prstGeom>
-          <a:noFill/>
-          <a:ln/>
-        </p:spPr>
-        <p:txBody>
-          <a:bodyPr wrap="square" lIns="0" tIns="0" rIns="0" bIns="0" rtlCol="0" anchor="ctr"/>
-          <a:lstStyle/>
-          <a:p>
-            <a:pPr indent="0" marL="0">
-              <a:buNone/>
-            </a:pPr>
-            <a:r>
-              <a:rPr lang="en-US" sz="1300" b="1" dirty="0">
-                <a:solidFill>
-                  <a:srgbClr val="1B2230"/>
-                </a:solidFill>
-                <a:latin typeface="Calibri" pitchFamily="34" charset="0"/>
-                <a:ea typeface="Calibri" pitchFamily="34" charset="-122"/>
-                <a:cs typeface="Calibri" pitchFamily="34" charset="-120"/>
-              </a:rPr>
-              <a:t>Abrir PowerShell</a:t>
-            </a:r>
-            <a:endParaRPr lang="en-US" sz="1300" dirty="0"/>
+                <a:latin typeface="Cambria" pitchFamily="34" charset="0"/>
+                <a:ea typeface="Cambria" pitchFamily="34" charset="-122"/>
+                <a:cs typeface="Cambria" pitchFamily="34" charset="-120"/>
+              </a:rPr>
+              <a:t>«Arbitrajes sobre contratos de construcción»</a:t>
+            </a:r>
+            <a:endParaRPr lang="en-US" sz="1450" dirty="0"/>
           </a:p>
         </p:txBody>
       </p:sp>
@@ -11407,61 +16922,75 @@
         </p:nvSpPr>
         <p:spPr>
           <a:xfrm>
-            <a:off x="1289304" y="3090672"/>
-            <a:ext cx="3200400" cy="566928"/>
-          </a:xfrm>
-          <a:prstGeom prst="rect">
-            <a:avLst/>
-          </a:prstGeom>
-          <a:noFill/>
-          <a:ln/>
-        </p:spPr>
-        <p:txBody>
-          <a:bodyPr wrap="square" lIns="0" tIns="0" rIns="0" bIns="0" rtlCol="0" anchor="ctr"/>
-          <a:lstStyle/>
-          <a:p>
-            <a:pPr indent="0" marL="0">
-              <a:lnSpc>
-                <a:spcPct val="100000"/>
-              </a:lnSpc>
-              <a:buNone/>
-            </a:pPr>
-            <a:r>
-              <a:rPr lang="en-US" sz="1000" dirty="0">
-                <a:solidFill>
-                  <a:srgbClr val="5A6478"/>
-                </a:solidFill>
-                <a:latin typeface="Calibri" pitchFamily="34" charset="0"/>
-                <a:ea typeface="Calibri" pitchFamily="34" charset="-122"/>
-                <a:cs typeface="Calibri" pitchFamily="34" charset="-120"/>
-              </a:rPr>
-              <a:t>Menú Inicio, escribir «PowerShell» y abrirlo. Situarse en la carpeta de Responsa.</a:t>
-            </a:r>
-            <a:endParaRPr lang="en-US" sz="1000" dirty="0"/>
-          </a:p>
-        </p:txBody>
-      </p:sp>
-      <p:sp>
-        <p:nvSpPr>
-          <p:cNvPr id="14" name="Shape 12"/>
-          <p:cNvSpPr/>
-          <p:nvPr/>
-        </p:nvSpPr>
-        <p:spPr>
-          <a:xfrm>
-            <a:off x="4709160" y="2834640"/>
-            <a:ext cx="6675120" cy="658368"/>
-          </a:xfrm>
-          <a:prstGeom prst="roundRect">
-            <a:avLst>
-              <a:gd name="adj" fmla="val 6944"/>
-            </a:avLst>
-          </a:prstGeom>
-          <a:solidFill>
-            <a:srgbClr val="1B2230"/>
-          </a:solidFill>
-          <a:ln/>
-        </p:spPr>
+            <a:off x="7269480" y="4279392"/>
+            <a:ext cx="4114800" cy="274320"/>
+          </a:xfrm>
+          <a:prstGeom prst="rect">
+            <a:avLst/>
+          </a:prstGeom>
+          <a:noFill/>
+          <a:ln/>
+        </p:spPr>
+        <p:txBody>
+          <a:bodyPr wrap="square" lIns="0" tIns="0" rIns="0" bIns="0" rtlCol="0" anchor="ctr"/>
+          <a:lstStyle/>
+          <a:p>
+            <a:pPr indent="0" marL="0">
+              <a:buNone/>
+            </a:pPr>
+            <a:r>
+              <a:rPr lang="en-US" sz="1050" dirty="0">
+                <a:solidFill>
+                  <a:srgbClr val="C9A574"/>
+                </a:solidFill>
+                <a:latin typeface="Calibri" pitchFamily="34" charset="0"/>
+                <a:ea typeface="Calibri" pitchFamily="34" charset="-122"/>
+                <a:cs typeface="Calibri" pitchFamily="34" charset="-120"/>
+              </a:rPr>
+              <a:t>Laudos del CAM Santiago, con enlace al PDF</a:t>
+            </a:r>
+            <a:endParaRPr lang="en-US" sz="1050" dirty="0"/>
+          </a:p>
+        </p:txBody>
+      </p:sp>
+      <p:sp>
+        <p:nvSpPr>
+          <p:cNvPr id="14" name="Text 12"/>
+          <p:cNvSpPr/>
+          <p:nvPr/>
+        </p:nvSpPr>
+        <p:spPr>
+          <a:xfrm>
+            <a:off x="777240" y="4864608"/>
+            <a:ext cx="6309360" cy="310896"/>
+          </a:xfrm>
+          <a:prstGeom prst="rect">
+            <a:avLst/>
+          </a:prstGeom>
+          <a:noFill/>
+          <a:ln/>
+        </p:spPr>
+        <p:txBody>
+          <a:bodyPr wrap="square" lIns="0" tIns="0" rIns="0" bIns="0" rtlCol="0" anchor="ctr"/>
+          <a:lstStyle/>
+          <a:p>
+            <a:pPr indent="0" marL="0">
+              <a:buNone/>
+            </a:pPr>
+            <a:r>
+              <a:rPr lang="en-US" sz="1450" dirty="0">
+                <a:solidFill>
+                  <a:srgbClr val="FFFFFF"/>
+                </a:solidFill>
+                <a:latin typeface="Cambria" pitchFamily="34" charset="0"/>
+                <a:ea typeface="Cambria" pitchFamily="34" charset="-122"/>
+                <a:cs typeface="Cambria" pitchFamily="34" charset="-120"/>
+              </a:rPr>
+              <a:t>«¿Cuánto demora un juicio laboral en Valparaíso?»</a:t>
+            </a:r>
+            <a:endParaRPr lang="en-US" sz="1450" dirty="0"/>
+          </a:p>
+        </p:txBody>
       </p:sp>
       <p:sp>
         <p:nvSpPr>
@@ -11471,56 +17000,75 @@
         </p:nvSpPr>
         <p:spPr>
           <a:xfrm>
-            <a:off x="4937760" y="2834640"/>
-            <a:ext cx="6217920" cy="658368"/>
-          </a:xfrm>
-          <a:prstGeom prst="rect">
-            <a:avLst/>
-          </a:prstGeom>
-          <a:noFill/>
-          <a:ln/>
-        </p:spPr>
-        <p:txBody>
-          <a:bodyPr wrap="square" lIns="0" tIns="0" rIns="0" bIns="0" rtlCol="0" anchor="ctr"/>
-          <a:lstStyle/>
-          <a:p>
-            <a:pPr indent="0" marL="0">
-              <a:buNone/>
-            </a:pPr>
-            <a:r>
-              <a:rPr lang="en-US" sz="1150" b="1" dirty="0">
+            <a:off x="7269480" y="4901184"/>
+            <a:ext cx="4114800" cy="274320"/>
+          </a:xfrm>
+          <a:prstGeom prst="rect">
+            <a:avLst/>
+          </a:prstGeom>
+          <a:noFill/>
+          <a:ln/>
+        </p:spPr>
+        <p:txBody>
+          <a:bodyPr wrap="square" lIns="0" tIns="0" rIns="0" bIns="0" rtlCol="0" anchor="ctr"/>
+          <a:lstStyle/>
+          <a:p>
+            <a:pPr indent="0" marL="0">
+              <a:buNone/>
+            </a:pPr>
+            <a:r>
+              <a:rPr lang="en-US" sz="1050" dirty="0">
                 <a:solidFill>
                   <a:srgbClr val="C9A574"/>
                 </a:solidFill>
-                <a:latin typeface="Courier New" pitchFamily="34" charset="0"/>
-                <a:ea typeface="Courier New" pitchFamily="34" charset="-122"/>
-                <a:cs typeface="Courier New" pitchFamily="34" charset="-120"/>
-              </a:rPr>
-              <a:t>cd C:\Users\&lt;usuario&gt;\Responsa</a:t>
-            </a:r>
-            <a:endParaRPr lang="en-US" sz="1150" dirty="0"/>
-          </a:p>
-        </p:txBody>
-      </p:sp>
-      <p:sp>
-        <p:nvSpPr>
-          <p:cNvPr id="16" name="Shape 14"/>
-          <p:cNvSpPr/>
-          <p:nvPr/>
-        </p:nvSpPr>
-        <p:spPr>
-          <a:xfrm>
-            <a:off x="777240" y="3840480"/>
-            <a:ext cx="347472" cy="347472"/>
-          </a:xfrm>
-          <a:prstGeom prst="ellipse">
-            <a:avLst/>
-          </a:prstGeom>
-          <a:solidFill>
-            <a:srgbClr val="A87C4F"/>
-          </a:solidFill>
-          <a:ln/>
-        </p:spPr>
+                <a:latin typeface="Calibri" pitchFamily="34" charset="0"/>
+                <a:ea typeface="Calibri" pitchFamily="34" charset="-122"/>
+                <a:cs typeface="Calibri" pitchFamily="34" charset="-120"/>
+              </a:rPr>
+              <a:t>Estadísticas oficiales del Poder Judicial</a:t>
+            </a:r>
+            <a:endParaRPr lang="en-US" sz="1050" dirty="0"/>
+          </a:p>
+        </p:txBody>
+      </p:sp>
+      <p:sp>
+        <p:nvSpPr>
+          <p:cNvPr id="16" name="Text 14"/>
+          <p:cNvSpPr/>
+          <p:nvPr/>
+        </p:nvSpPr>
+        <p:spPr>
+          <a:xfrm>
+            <a:off x="777240" y="5486400"/>
+            <a:ext cx="6309360" cy="310896"/>
+          </a:xfrm>
+          <a:prstGeom prst="rect">
+            <a:avLst/>
+          </a:prstGeom>
+          <a:noFill/>
+          <a:ln/>
+        </p:spPr>
+        <p:txBody>
+          <a:bodyPr wrap="square" lIns="0" tIns="0" rIns="0" bIns="0" rtlCol="0" anchor="ctr"/>
+          <a:lstStyle/>
+          <a:p>
+            <a:pPr indent="0" marL="0">
+              <a:buNone/>
+            </a:pPr>
+            <a:r>
+              <a:rPr lang="en-US" sz="1450" dirty="0">
+                <a:solidFill>
+                  <a:srgbClr val="FFFFFF"/>
+                </a:solidFill>
+                <a:latin typeface="Cambria" pitchFamily="34" charset="0"/>
+                <a:ea typeface="Cambria" pitchFamily="34" charset="-122"/>
+                <a:cs typeface="Cambria" pitchFamily="34" charset="-120"/>
+              </a:rPr>
+              <a:t>«¿A cuánto equivalen 50 UTM hoy?»</a:t>
+            </a:r>
+            <a:endParaRPr lang="en-US" sz="1450" dirty="0"/>
+          </a:p>
+        </p:txBody>
       </p:sp>
       <p:sp>
         <p:nvSpPr>
@@ -11530,34 +17078,34 @@
         </p:nvSpPr>
         <p:spPr>
           <a:xfrm>
-            <a:off x="777240" y="3840480"/>
-            <a:ext cx="347472" cy="347472"/>
-          </a:xfrm>
-          <a:prstGeom prst="rect">
-            <a:avLst/>
-          </a:prstGeom>
-          <a:noFill/>
-          <a:ln/>
-        </p:spPr>
-        <p:txBody>
-          <a:bodyPr wrap="square" lIns="0" tIns="0" rIns="0" bIns="0" rtlCol="0" anchor="ctr"/>
-          <a:lstStyle/>
-          <a:p>
-            <a:pPr algn="ctr" indent="0" marL="0">
-              <a:buNone/>
-            </a:pPr>
-            <a:r>
-              <a:rPr lang="en-US" sz="1200" b="1" dirty="0">
-                <a:solidFill>
-                  <a:srgbClr val="FFFFFF"/>
-                </a:solidFill>
-                <a:latin typeface="Calibri" pitchFamily="34" charset="0"/>
-                <a:ea typeface="Calibri" pitchFamily="34" charset="-122"/>
-                <a:cs typeface="Calibri" pitchFamily="34" charset="-120"/>
-              </a:rPr>
-              <a:t>3</a:t>
-            </a:r>
-            <a:endParaRPr lang="en-US" sz="1200" dirty="0"/>
+            <a:off x="7269480" y="5522976"/>
+            <a:ext cx="4114800" cy="274320"/>
+          </a:xfrm>
+          <a:prstGeom prst="rect">
+            <a:avLst/>
+          </a:prstGeom>
+          <a:noFill/>
+          <a:ln/>
+        </p:spPr>
+        <p:txBody>
+          <a:bodyPr wrap="square" lIns="0" tIns="0" rIns="0" bIns="0" rtlCol="0" anchor="ctr"/>
+          <a:lstStyle/>
+          <a:p>
+            <a:pPr indent="0" marL="0">
+              <a:buNone/>
+            </a:pPr>
+            <a:r>
+              <a:rPr lang="en-US" sz="1050" dirty="0">
+                <a:solidFill>
+                  <a:srgbClr val="C9A574"/>
+                </a:solidFill>
+                <a:latin typeface="Calibri" pitchFamily="34" charset="0"/>
+                <a:ea typeface="Calibri" pitchFamily="34" charset="-122"/>
+                <a:cs typeface="Calibri" pitchFamily="34" charset="-120"/>
+              </a:rPr>
+              <a:t>Valores del Banco Central y del SII</a:t>
+            </a:r>
+            <a:endParaRPr lang="en-US" sz="1050" dirty="0"/>
           </a:p>
         </p:txBody>
       </p:sp>
@@ -11569,316 +17117,34 @@
         </p:nvSpPr>
         <p:spPr>
           <a:xfrm>
-            <a:off x="1289304" y="3785616"/>
-            <a:ext cx="3200400" cy="274320"/>
-          </a:xfrm>
-          <a:prstGeom prst="rect">
-            <a:avLst/>
-          </a:prstGeom>
-          <a:noFill/>
-          <a:ln/>
-        </p:spPr>
-        <p:txBody>
-          <a:bodyPr wrap="square" lIns="0" tIns="0" rIns="0" bIns="0" rtlCol="0" anchor="ctr"/>
-          <a:lstStyle/>
-          <a:p>
-            <a:pPr indent="0" marL="0">
-              <a:buNone/>
-            </a:pPr>
-            <a:r>
-              <a:rPr lang="en-US" sz="1300" b="1" dirty="0">
-                <a:solidFill>
-                  <a:srgbClr val="1B2230"/>
-                </a:solidFill>
-                <a:latin typeface="Calibri" pitchFamily="34" charset="0"/>
-                <a:ea typeface="Calibri" pitchFamily="34" charset="-122"/>
-                <a:cs typeface="Calibri" pitchFamily="34" charset="-120"/>
-              </a:rPr>
-              <a:t>Ejecutar el instalador</a:t>
-            </a:r>
-            <a:endParaRPr lang="en-US" sz="1300" dirty="0"/>
-          </a:p>
-        </p:txBody>
-      </p:sp>
-      <p:sp>
-        <p:nvSpPr>
-          <p:cNvPr id="19" name="Text 17"/>
-          <p:cNvSpPr/>
-          <p:nvPr/>
-        </p:nvSpPr>
-        <p:spPr>
-          <a:xfrm>
-            <a:off x="1289304" y="4059936"/>
-            <a:ext cx="3200400" cy="566928"/>
-          </a:xfrm>
-          <a:prstGeom prst="rect">
-            <a:avLst/>
-          </a:prstGeom>
-          <a:noFill/>
-          <a:ln/>
-        </p:spPr>
-        <p:txBody>
-          <a:bodyPr wrap="square" lIns="0" tIns="0" rIns="0" bIns="0" rtlCol="0" anchor="ctr"/>
-          <a:lstStyle/>
-          <a:p>
-            <a:pPr indent="0" marL="0">
-              <a:lnSpc>
-                <a:spcPct val="100000"/>
-              </a:lnSpc>
-              <a:buNone/>
-            </a:pPr>
-            <a:r>
-              <a:rPr lang="en-US" sz="1000" dirty="0">
-                <a:solidFill>
-                  <a:srgbClr val="5A6478"/>
-                </a:solidFill>
-                <a:latin typeface="Calibri" pitchFamily="34" charset="0"/>
-                <a:ea typeface="Calibri" pitchFamily="34" charset="-122"/>
-                <a:cs typeface="Calibri" pitchFamily="34" charset="-120"/>
-              </a:rPr>
-              <a:t>Instala dependencias, registra el servidor en Claude Desktop y Claude Code, instala la skill, precarga los códigos y verifica las fuentes.</a:t>
-            </a:r>
-            <a:endParaRPr lang="en-US" sz="1000" dirty="0"/>
-          </a:p>
-        </p:txBody>
-      </p:sp>
-      <p:sp>
-        <p:nvSpPr>
-          <p:cNvPr id="20" name="Shape 18"/>
-          <p:cNvSpPr/>
-          <p:nvPr/>
-        </p:nvSpPr>
-        <p:spPr>
-          <a:xfrm>
-            <a:off x="4709160" y="3803904"/>
-            <a:ext cx="6675120" cy="658368"/>
-          </a:xfrm>
-          <a:prstGeom prst="roundRect">
-            <a:avLst>
-              <a:gd name="adj" fmla="val 6944"/>
-            </a:avLst>
-          </a:prstGeom>
-          <a:solidFill>
-            <a:srgbClr val="1B2230"/>
-          </a:solidFill>
-          <a:ln/>
-        </p:spPr>
-      </p:sp>
-      <p:sp>
-        <p:nvSpPr>
-          <p:cNvPr id="21" name="Text 19"/>
-          <p:cNvSpPr/>
-          <p:nvPr/>
-        </p:nvSpPr>
-        <p:spPr>
-          <a:xfrm>
-            <a:off x="4937760" y="3803904"/>
-            <a:ext cx="6217920" cy="658368"/>
-          </a:xfrm>
-          <a:prstGeom prst="rect">
-            <a:avLst/>
-          </a:prstGeom>
-          <a:noFill/>
-          <a:ln/>
-        </p:spPr>
-        <p:txBody>
-          <a:bodyPr wrap="square" lIns="0" tIns="0" rIns="0" bIns="0" rtlCol="0" anchor="ctr"/>
-          <a:lstStyle/>
-          <a:p>
-            <a:pPr indent="0" marL="0">
-              <a:buNone/>
-            </a:pPr>
-            <a:r>
-              <a:rPr lang="en-US" sz="1150" b="1" dirty="0">
-                <a:solidFill>
-                  <a:srgbClr val="C9A574"/>
-                </a:solidFill>
-                <a:latin typeface="Courier New" pitchFamily="34" charset="0"/>
-                <a:ea typeface="Courier New" pitchFamily="34" charset="-122"/>
-                <a:cs typeface="Courier New" pitchFamily="34" charset="-120"/>
-              </a:rPr>
-              <a:t>node instalar.mjs</a:t>
-            </a:r>
-            <a:endParaRPr lang="en-US" sz="1150" dirty="0"/>
-          </a:p>
-        </p:txBody>
-      </p:sp>
-      <p:sp>
-        <p:nvSpPr>
-          <p:cNvPr id="22" name="Shape 20"/>
-          <p:cNvSpPr/>
-          <p:nvPr/>
-        </p:nvSpPr>
-        <p:spPr>
-          <a:xfrm>
-            <a:off x="777240" y="4809744"/>
-            <a:ext cx="347472" cy="347472"/>
-          </a:xfrm>
-          <a:prstGeom prst="ellipse">
-            <a:avLst/>
-          </a:prstGeom>
-          <a:solidFill>
-            <a:srgbClr val="A87C4F"/>
-          </a:solidFill>
-          <a:ln/>
-        </p:spPr>
-      </p:sp>
-      <p:sp>
-        <p:nvSpPr>
-          <p:cNvPr id="23" name="Text 21"/>
-          <p:cNvSpPr/>
-          <p:nvPr/>
-        </p:nvSpPr>
-        <p:spPr>
-          <a:xfrm>
-            <a:off x="777240" y="4809744"/>
-            <a:ext cx="347472" cy="347472"/>
-          </a:xfrm>
-          <a:prstGeom prst="rect">
-            <a:avLst/>
-          </a:prstGeom>
-          <a:noFill/>
-          <a:ln/>
-        </p:spPr>
-        <p:txBody>
-          <a:bodyPr wrap="square" lIns="0" tIns="0" rIns="0" bIns="0" rtlCol="0" anchor="ctr"/>
-          <a:lstStyle/>
-          <a:p>
-            <a:pPr algn="ctr" indent="0" marL="0">
-              <a:buNone/>
-            </a:pPr>
-            <a:r>
-              <a:rPr lang="en-US" sz="1200" b="1" dirty="0">
-                <a:solidFill>
-                  <a:srgbClr val="FFFFFF"/>
-                </a:solidFill>
-                <a:latin typeface="Calibri" pitchFamily="34" charset="0"/>
-                <a:ea typeface="Calibri" pitchFamily="34" charset="-122"/>
-                <a:cs typeface="Calibri" pitchFamily="34" charset="-120"/>
-              </a:rPr>
-              <a:t>4</a:t>
-            </a:r>
-            <a:endParaRPr lang="en-US" sz="1200" dirty="0"/>
-          </a:p>
-        </p:txBody>
-      </p:sp>
-      <p:sp>
-        <p:nvSpPr>
-          <p:cNvPr id="24" name="Text 22"/>
-          <p:cNvSpPr/>
-          <p:nvPr/>
-        </p:nvSpPr>
-        <p:spPr>
-          <a:xfrm>
-            <a:off x="1289304" y="4754880"/>
-            <a:ext cx="3200400" cy="274320"/>
-          </a:xfrm>
-          <a:prstGeom prst="rect">
-            <a:avLst/>
-          </a:prstGeom>
-          <a:noFill/>
-          <a:ln/>
-        </p:spPr>
-        <p:txBody>
-          <a:bodyPr wrap="square" lIns="0" tIns="0" rIns="0" bIns="0" rtlCol="0" anchor="ctr"/>
-          <a:lstStyle/>
-          <a:p>
-            <a:pPr indent="0" marL="0">
-              <a:buNone/>
-            </a:pPr>
-            <a:r>
-              <a:rPr lang="en-US" sz="1300" b="1" dirty="0">
-                <a:solidFill>
-                  <a:srgbClr val="1B2230"/>
-                </a:solidFill>
-                <a:latin typeface="Calibri" pitchFamily="34" charset="0"/>
-                <a:ea typeface="Calibri" pitchFamily="34" charset="-122"/>
-                <a:cs typeface="Calibri" pitchFamily="34" charset="-120"/>
-              </a:rPr>
-              <a:t>Reiniciar Claude Desktop</a:t>
-            </a:r>
-            <a:endParaRPr lang="en-US" sz="1300" dirty="0"/>
-          </a:p>
-        </p:txBody>
-      </p:sp>
-      <p:sp>
-        <p:nvSpPr>
-          <p:cNvPr id="25" name="Text 23"/>
-          <p:cNvSpPr/>
-          <p:nvPr/>
-        </p:nvSpPr>
-        <p:spPr>
-          <a:xfrm>
-            <a:off x="1289304" y="5029200"/>
-            <a:ext cx="3200400" cy="566928"/>
-          </a:xfrm>
-          <a:prstGeom prst="rect">
-            <a:avLst/>
-          </a:prstGeom>
-          <a:noFill/>
-          <a:ln/>
-        </p:spPr>
-        <p:txBody>
-          <a:bodyPr wrap="square" lIns="0" tIns="0" rIns="0" bIns="0" rtlCol="0" anchor="ctr"/>
-          <a:lstStyle/>
-          <a:p>
-            <a:pPr indent="0" marL="0">
-              <a:lnSpc>
-                <a:spcPct val="100000"/>
-              </a:lnSpc>
-              <a:buNone/>
-            </a:pPr>
-            <a:r>
-              <a:rPr lang="en-US" sz="1000" dirty="0">
-                <a:solidFill>
-                  <a:srgbClr val="5A6478"/>
-                </a:solidFill>
-                <a:latin typeface="Calibri" pitchFamily="34" charset="0"/>
-                <a:ea typeface="Calibri" pitchFamily="34" charset="-122"/>
-                <a:cs typeface="Calibri" pitchFamily="34" charset="-120"/>
-              </a:rPr>
-              <a:t>Cerrarlo por completo desde la bandeja del sistema, junto al reloj, no sólo la ventana. Los servidores se cargan al arrancar.</a:t>
-            </a:r>
-            <a:endParaRPr lang="en-US" sz="1000" dirty="0"/>
-          </a:p>
-        </p:txBody>
-      </p:sp>
-      <p:sp>
-        <p:nvSpPr>
-          <p:cNvPr id="26" name="Text 24"/>
-          <p:cNvSpPr/>
-          <p:nvPr/>
-        </p:nvSpPr>
-        <p:spPr>
-          <a:xfrm>
-            <a:off x="777240" y="5870448"/>
-            <a:ext cx="10607040" cy="457200"/>
-          </a:xfrm>
-          <a:prstGeom prst="rect">
-            <a:avLst/>
-          </a:prstGeom>
-          <a:noFill/>
-          <a:ln/>
-        </p:spPr>
-        <p:txBody>
-          <a:bodyPr wrap="square" lIns="0" tIns="0" rIns="0" bIns="0" rtlCol="0" anchor="ctr"/>
-          <a:lstStyle/>
-          <a:p>
-            <a:pPr indent="0" marL="0">
-              <a:buNone/>
-            </a:pPr>
-            <a:r>
-              <a:rPr lang="en-US" sz="1150" i="1" dirty="0">
-                <a:solidFill>
-                  <a:srgbClr val="1B2230"/>
-                </a:solidFill>
-                <a:latin typeface="Calibri" pitchFamily="34" charset="0"/>
-                <a:ea typeface="Calibri" pitchFamily="34" charset="-122"/>
-                <a:cs typeface="Calibri" pitchFamily="34" charset="-120"/>
-              </a:rPr>
-              <a:t>Para comprobar que quedó bien: preguntar cualquier cosa de derecho chileno. Si responde con roles, tribunales y enlaces, está funcionando.</a:t>
-            </a:r>
-            <a:endParaRPr lang="en-US" sz="1150" dirty="0"/>
+            <a:off x="777240" y="6035040"/>
+            <a:ext cx="10607040" cy="411480"/>
+          </a:xfrm>
+          <a:prstGeom prst="rect">
+            <a:avLst/>
+          </a:prstGeom>
+          <a:noFill/>
+          <a:ln/>
+        </p:spPr>
+        <p:txBody>
+          <a:bodyPr wrap="square" lIns="0" tIns="0" rIns="0" bIns="0" rtlCol="0" anchor="t"/>
+          <a:lstStyle/>
+          <a:p>
+            <a:pPr indent="0" marL="0">
+              <a:buNone/>
+            </a:pPr>
+            <a:r>
+              <a:rPr lang="en-US" sz="1100" i="1" dirty="0">
+                <a:solidFill>
+                  <a:srgbClr val="8A93A5"/>
+                </a:solidFill>
+                <a:latin typeface="Calibri" pitchFamily="34" charset="0"/>
+                <a:ea typeface="Calibri" pitchFamily="34" charset="-122"/>
+                <a:cs typeface="Calibri" pitchFamily="34" charset="-120"/>
+              </a:rPr>
+              <a:t>Una sola pregunta puede combinar varias fuentes: ubicar la norma, leer su texto vigente, traer los fallos que la aplican y sumar el criterio administrativo.</a:t>
+            </a:r>
+            <a:endParaRPr lang="en-US" sz="1100" dirty="0"/>
           </a:p>
         </p:txBody>
       </p:sp>

--- a/docs/Responsa.pptx
+++ b/docs/Responsa.pptx
@@ -20,11 +20,9 @@
     <p:sldId id="268" r:id="rId14"/>
     <p:sldId id="269" r:id="rId15"/>
     <p:sldId id="270" r:id="rId16"/>
-    <p:sldId id="271" r:id="rId17"/>
-    <p:sldId id="272" r:id="rId18"/>
   </p:sldIdLst>
   <p:notesMasterIdLst>
-    <p:notesMasterId r:id="rId19"/>
+    <p:notesMasterId r:id="rId17"/>
   </p:notesMasterIdLst>
   <p:sldSz cx="12192000" cy="6858000"/>
   <p:notesSz cx="6858000" cy="12192000"/>
@@ -1070,182 +1068,6 @@
             <a:fld id="{F7021451-1387-4CA6-816F-3879F97B5CBC}" type="slidenum">
               <a:rPr lang="en-US"/>
               <a:t>15</a:t>
-            </a:fld>
-            <a:endParaRPr lang="en-US"/>
-          </a:p>
-        </p:txBody>
-      </p:sp>
-    </p:spTree>
-    <p:extLst>
-      <p:ext uri="{BB962C8B-B14F-4D97-AF65-F5344CB8AC3E}">
-        <p14:creationId xmlns:p14="http://schemas.microsoft.com/office/powerpoint/2010/main" val="1024086991"/>
-      </p:ext>
-    </p:extLst>
-  </p:cSld>
-  <p:clrMapOvr>
-    <a:masterClrMapping/>
-  </p:clrMapOvr>
-</p:notes>
-</file>
-
-<file path=ppt/notesSlides/notesSlide16.xml><?xml version="1.0" encoding="utf-8"?>
-<p:notes xmlns:a="http://schemas.openxmlformats.org/drawingml/2006/main" xmlns:r="http://schemas.openxmlformats.org/officeDocument/2006/relationships" xmlns:p="http://schemas.openxmlformats.org/presentationml/2006/main">
-  <p:cSld>
-    <p:spTree>
-      <p:nvGrpSpPr>
-        <p:cNvPr id="1" name=""/>
-        <p:cNvGrpSpPr/>
-        <p:nvPr/>
-      </p:nvGrpSpPr>
-      <p:grpSpPr>
-        <a:xfrm>
-          <a:off x="0" y="0"/>
-          <a:ext cx="0" cy="0"/>
-          <a:chOff x="0" y="0"/>
-          <a:chExt cx="0" cy="0"/>
-        </a:xfrm>
-      </p:grpSpPr>
-      <p:sp>
-        <p:nvSpPr>
-          <p:cNvPr id="2" name="Slide Image Placeholder 1"/>
-          <p:cNvSpPr>
-            <a:spLocks noGrp="1" noRot="1" noChangeAspect="1"/>
-          </p:cNvSpPr>
-          <p:nvPr>
-            <p:ph type="sldImg"/>
-          </p:nvPr>
-        </p:nvSpPr>
-        <p:spPr/>
-      </p:sp>
-      <p:sp>
-        <p:nvSpPr>
-          <p:cNvPr id="3" name="Notes Placeholder 2"/>
-          <p:cNvSpPr>
-            <a:spLocks noGrp="1"/>
-          </p:cNvSpPr>
-          <p:nvPr>
-            <p:ph type="body" idx="1"/>
-          </p:nvPr>
-        </p:nvSpPr>
-        <p:spPr/>
-        <p:txBody>
-          <a:bodyPr/>
-          <a:lstStyle/>
-          <a:p>
-            <a:r>
-              <a:rPr lang="en-US" dirty="0"/>
-              <a:t/>
-            </a:r>
-            <a:endParaRPr lang="en-US" dirty="0"/>
-          </a:p>
-        </p:txBody>
-      </p:sp>
-      <p:sp>
-        <p:nvSpPr>
-          <p:cNvPr id="4" name="Slide Number Placeholder 3"/>
-          <p:cNvSpPr>
-            <a:spLocks noGrp="1"/>
-          </p:cNvSpPr>
-          <p:nvPr>
-            <p:ph type="sldNum" sz="quarter" idx="10"/>
-          </p:nvPr>
-        </p:nvSpPr>
-        <p:spPr/>
-        <p:txBody>
-          <a:bodyPr/>
-          <a:lstStyle/>
-          <a:p>
-            <a:fld id="{F7021451-1387-4CA6-816F-3879F97B5CBC}" type="slidenum">
-              <a:rPr lang="en-US"/>
-              <a:t>16</a:t>
-            </a:fld>
-            <a:endParaRPr lang="en-US"/>
-          </a:p>
-        </p:txBody>
-      </p:sp>
-    </p:spTree>
-    <p:extLst>
-      <p:ext uri="{BB962C8B-B14F-4D97-AF65-F5344CB8AC3E}">
-        <p14:creationId xmlns:p14="http://schemas.microsoft.com/office/powerpoint/2010/main" val="1024086991"/>
-      </p:ext>
-    </p:extLst>
-  </p:cSld>
-  <p:clrMapOvr>
-    <a:masterClrMapping/>
-  </p:clrMapOvr>
-</p:notes>
-</file>
-
-<file path=ppt/notesSlides/notesSlide17.xml><?xml version="1.0" encoding="utf-8"?>
-<p:notes xmlns:a="http://schemas.openxmlformats.org/drawingml/2006/main" xmlns:r="http://schemas.openxmlformats.org/officeDocument/2006/relationships" xmlns:p="http://schemas.openxmlformats.org/presentationml/2006/main">
-  <p:cSld>
-    <p:spTree>
-      <p:nvGrpSpPr>
-        <p:cNvPr id="1" name=""/>
-        <p:cNvGrpSpPr/>
-        <p:nvPr/>
-      </p:nvGrpSpPr>
-      <p:grpSpPr>
-        <a:xfrm>
-          <a:off x="0" y="0"/>
-          <a:ext cx="0" cy="0"/>
-          <a:chOff x="0" y="0"/>
-          <a:chExt cx="0" cy="0"/>
-        </a:xfrm>
-      </p:grpSpPr>
-      <p:sp>
-        <p:nvSpPr>
-          <p:cNvPr id="2" name="Slide Image Placeholder 1"/>
-          <p:cNvSpPr>
-            <a:spLocks noGrp="1" noRot="1" noChangeAspect="1"/>
-          </p:cNvSpPr>
-          <p:nvPr>
-            <p:ph type="sldImg"/>
-          </p:nvPr>
-        </p:nvSpPr>
-        <p:spPr/>
-      </p:sp>
-      <p:sp>
-        <p:nvSpPr>
-          <p:cNvPr id="3" name="Notes Placeholder 2"/>
-          <p:cNvSpPr>
-            <a:spLocks noGrp="1"/>
-          </p:cNvSpPr>
-          <p:nvPr>
-            <p:ph type="body" idx="1"/>
-          </p:nvPr>
-        </p:nvSpPr>
-        <p:spPr/>
-        <p:txBody>
-          <a:bodyPr/>
-          <a:lstStyle/>
-          <a:p>
-            <a:r>
-              <a:rPr lang="en-US" dirty="0"/>
-              <a:t/>
-            </a:r>
-            <a:endParaRPr lang="en-US" dirty="0"/>
-          </a:p>
-        </p:txBody>
-      </p:sp>
-      <p:sp>
-        <p:nvSpPr>
-          <p:cNvPr id="4" name="Slide Number Placeholder 3"/>
-          <p:cNvSpPr>
-            <a:spLocks noGrp="1"/>
-          </p:cNvSpPr>
-          <p:nvPr>
-            <p:ph type="sldNum" sz="quarter" idx="10"/>
-          </p:nvPr>
-        </p:nvSpPr>
-        <p:spPr/>
-        <p:txBody>
-          <a:bodyPr/>
-          <a:lstStyle/>
-          <a:p>
-            <a:fld id="{F7021451-1387-4CA6-816F-3879F97B5CBC}" type="slidenum">
-              <a:rPr lang="en-US"/>
-              <a:t>17</a:t>
             </a:fld>
             <a:endParaRPr lang="en-US"/>
           </a:p>
@@ -2632,24 +2454,24 @@
         </p:nvSpPr>
         <p:spPr>
           <a:xfrm>
-            <a:off x="777240" y="2286000"/>
-            <a:ext cx="6766560" cy="777240"/>
-          </a:xfrm>
-          <a:prstGeom prst="rect">
-            <a:avLst/>
-          </a:prstGeom>
-          <a:noFill/>
-          <a:ln/>
-        </p:spPr>
-        <p:txBody>
-          <a:bodyPr wrap="square" lIns="0" tIns="0" rIns="0" bIns="0" rtlCol="0" anchor="ctr"/>
-          <a:lstStyle/>
-          <a:p>
-            <a:pPr indent="0" marL="0">
-              <a:buNone/>
-            </a:pPr>
-            <a:r>
-              <a:rPr lang="en-US" sz="4400" b="1" dirty="0">
+            <a:off x="777240" y="2212848"/>
+            <a:ext cx="6766560" cy="868680"/>
+          </a:xfrm>
+          <a:prstGeom prst="rect">
+            <a:avLst/>
+          </a:prstGeom>
+          <a:noFill/>
+          <a:ln/>
+        </p:spPr>
+        <p:txBody>
+          <a:bodyPr wrap="square" lIns="0" tIns="0" rIns="0" bIns="0" rtlCol="0" anchor="ctr"/>
+          <a:lstStyle/>
+          <a:p>
+            <a:pPr indent="0" marL="0">
+              <a:buNone/>
+            </a:pPr>
+            <a:r>
+              <a:rPr lang="en-US" sz="5200" b="1" dirty="0">
                 <a:solidFill>
                   <a:srgbClr val="FFFFFF"/>
                 </a:solidFill>
@@ -2657,9 +2479,9 @@
                 <a:ea typeface="Cambria" pitchFamily="34" charset="-122"/>
                 <a:cs typeface="Cambria" pitchFamily="34" charset="-120"/>
               </a:rPr>
-              <a:t>Manual de instalación</a:t>
-            </a:r>
-            <a:endParaRPr lang="en-US" sz="4400" dirty="0"/>
+              <a:t>Instalación</a:t>
+            </a:r>
+            <a:endParaRPr lang="en-US" sz="5200" dirty="0"/>
           </a:p>
         </p:txBody>
       </p:sp>
@@ -2671,8 +2493,8 @@
         </p:nvSpPr>
         <p:spPr>
           <a:xfrm>
-            <a:off x="777240" y="3127248"/>
-            <a:ext cx="6766560" cy="365760"/>
+            <a:off x="777240" y="3163824"/>
+            <a:ext cx="6766560" cy="411480"/>
           </a:xfrm>
           <a:prstGeom prst="rect">
             <a:avLst/>
@@ -2688,7 +2510,7 @@
               <a:buNone/>
             </a:pPr>
             <a:r>
-              <a:rPr lang="en-US" sz="1400" dirty="0">
+              <a:rPr lang="en-US" sz="1700" dirty="0">
                 <a:solidFill>
                   <a:srgbClr val="C9A574"/>
                 </a:solidFill>
@@ -2696,9 +2518,9 @@
                 <a:ea typeface="Calibri" pitchFamily="34" charset="-122"/>
                 <a:cs typeface="Calibri" pitchFamily="34" charset="-120"/>
               </a:rPr>
-              <a:t>Windows y macOS · unos quince minutos, casi todo esperando descargas</a:t>
-            </a:r>
-            <a:endParaRPr lang="en-US" sz="1400" dirty="0"/>
+              <a:t>Un comando, y reiniciar Claude. Eso es todo.</a:t>
+            </a:r>
+            <a:endParaRPr lang="en-US" sz="1700" dirty="0"/>
           </a:p>
         </p:txBody>
       </p:sp>
@@ -2710,8 +2532,8 @@
         </p:nvSpPr>
         <p:spPr>
           <a:xfrm>
-            <a:off x="777240" y="3611880"/>
-            <a:ext cx="6583680" cy="548640"/>
+            <a:off x="777240" y="3749040"/>
+            <a:ext cx="6400800" cy="731520"/>
           </a:xfrm>
           <a:prstGeom prst="rect">
             <a:avLst/>
@@ -2724,10 +2546,13 @@
           <a:lstStyle/>
           <a:p>
             <a:pPr indent="0" marL="0">
-              <a:buNone/>
-            </a:pPr>
-            <a:r>
-              <a:rPr lang="en-US" sz="1200" i="1" dirty="0">
+              <a:lnSpc>
+                <a:spcPct val="120000"/>
+              </a:lnSpc>
+              <a:buNone/>
+            </a:pPr>
+            <a:r>
+              <a:rPr lang="en-US" sz="1250" dirty="0">
                 <a:solidFill>
                   <a:srgbClr val="8A93A5"/>
                 </a:solidFill>
@@ -2735,9 +2560,9 @@
                 <a:ea typeface="Calibri" pitchFamily="34" charset="-122"/>
                 <a:cs typeface="Calibri" pitchFamily="34" charset="-120"/>
               </a:rPr>
-              <a:t>Escrito para quien no programa. Si algún paso da por sabido algo, es un error de esta guía y conviene avisarlo.</a:t>
-            </a:r>
-            <a:endParaRPr lang="en-US" sz="1200" dirty="0"/>
+              <a:t>No hay que instalar nada a mano ni saber usar la terminal más allá de pegar una línea. El instalador se encarga de Node.js, de la descarga y de la configuración.</a:t>
+            </a:r>
+            <a:endParaRPr lang="en-US" sz="1250" dirty="0"/>
           </a:p>
         </p:txBody>
       </p:sp>
@@ -2749,8 +2574,8 @@
         </p:nvSpPr>
         <p:spPr>
           <a:xfrm>
-            <a:off x="777240" y="4617720"/>
-            <a:ext cx="310896" cy="310896"/>
+            <a:off x="777240" y="4892040"/>
+            <a:ext cx="365760" cy="365760"/>
           </a:xfrm>
           <a:prstGeom prst="ellipse">
             <a:avLst/>
@@ -2769,8 +2594,8 @@
         </p:nvSpPr>
         <p:spPr>
           <a:xfrm>
-            <a:off x="777240" y="4617720"/>
-            <a:ext cx="310896" cy="310896"/>
+            <a:off x="777240" y="4892040"/>
+            <a:ext cx="365760" cy="365760"/>
           </a:xfrm>
           <a:prstGeom prst="rect">
             <a:avLst/>
@@ -2808,8 +2633,8 @@
         </p:nvSpPr>
         <p:spPr>
           <a:xfrm>
-            <a:off x="1197864" y="4636008"/>
-            <a:ext cx="1874520" cy="274320"/>
+            <a:off x="1289304" y="4919472"/>
+            <a:ext cx="3840480" cy="292608"/>
           </a:xfrm>
           <a:prstGeom prst="rect">
             <a:avLst/>
@@ -2825,7 +2650,7 @@
               <a:buNone/>
             </a:pPr>
             <a:r>
-              <a:rPr lang="en-US" sz="1150" dirty="0">
+              <a:rPr lang="en-US" sz="1300" dirty="0">
                 <a:solidFill>
                   <a:srgbClr val="FFFFFF"/>
                 </a:solidFill>
@@ -2833,9 +2658,9 @@
                 <a:ea typeface="Calibri" pitchFamily="34" charset="-122"/>
                 <a:cs typeface="Calibri" pitchFamily="34" charset="-120"/>
               </a:rPr>
-              <a:t>Instalar Node.js</a:t>
-            </a:r>
-            <a:endParaRPr lang="en-US" sz="1150" dirty="0"/>
+              <a:t>Pegar el comando en la terminal</a:t>
+            </a:r>
+            <a:endParaRPr lang="en-US" sz="1300" dirty="0"/>
           </a:p>
         </p:txBody>
       </p:sp>
@@ -2847,8 +2672,8 @@
         </p:nvSpPr>
         <p:spPr>
           <a:xfrm>
-            <a:off x="3108960" y="4617720"/>
-            <a:ext cx="310896" cy="310896"/>
+            <a:off x="777240" y="5440680"/>
+            <a:ext cx="365760" cy="365760"/>
           </a:xfrm>
           <a:prstGeom prst="ellipse">
             <a:avLst/>
@@ -2867,8 +2692,8 @@
         </p:nvSpPr>
         <p:spPr>
           <a:xfrm>
-            <a:off x="3108960" y="4617720"/>
-            <a:ext cx="310896" cy="310896"/>
+            <a:off x="777240" y="5440680"/>
+            <a:ext cx="365760" cy="365760"/>
           </a:xfrm>
           <a:prstGeom prst="rect">
             <a:avLst/>
@@ -2906,8 +2731,8 @@
         </p:nvSpPr>
         <p:spPr>
           <a:xfrm>
-            <a:off x="3529584" y="4636008"/>
-            <a:ext cx="1874520" cy="274320"/>
+            <a:off x="1289304" y="5468112"/>
+            <a:ext cx="3840480" cy="292608"/>
           </a:xfrm>
           <a:prstGeom prst="rect">
             <a:avLst/>
@@ -2923,7 +2748,7 @@
               <a:buNone/>
             </a:pPr>
             <a:r>
-              <a:rPr lang="en-US" sz="1150" dirty="0">
+              <a:rPr lang="en-US" sz="1300" dirty="0">
                 <a:solidFill>
                   <a:srgbClr val="FFFFFF"/>
                 </a:solidFill>
@@ -2931,309 +2756,15 @@
                 <a:ea typeface="Calibri" pitchFamily="34" charset="-122"/>
                 <a:cs typeface="Calibri" pitchFamily="34" charset="-120"/>
               </a:rPr>
-              <a:t>Descargar Responsa</a:t>
-            </a:r>
-            <a:endParaRPr lang="en-US" sz="1150" dirty="0"/>
+              <a:t>Reiniciar Claude</a:t>
+            </a:r>
+            <a:endParaRPr lang="en-US" sz="1300" dirty="0"/>
           </a:p>
         </p:txBody>
       </p:sp>
       <p:sp>
         <p:nvSpPr>
           <p:cNvPr id="11" name="Shape 9"/>
-          <p:cNvSpPr/>
-          <p:nvPr/>
-        </p:nvSpPr>
-        <p:spPr>
-          <a:xfrm>
-            <a:off x="5440680" y="4617720"/>
-            <a:ext cx="310896" cy="310896"/>
-          </a:xfrm>
-          <a:prstGeom prst="ellipse">
-            <a:avLst/>
-          </a:prstGeom>
-          <a:solidFill>
-            <a:srgbClr val="A87C4F"/>
-          </a:solidFill>
-          <a:ln/>
-        </p:spPr>
-      </p:sp>
-      <p:sp>
-        <p:nvSpPr>
-          <p:cNvPr id="12" name="Text 10"/>
-          <p:cNvSpPr/>
-          <p:nvPr/>
-        </p:nvSpPr>
-        <p:spPr>
-          <a:xfrm>
-            <a:off x="5440680" y="4617720"/>
-            <a:ext cx="310896" cy="310896"/>
-          </a:xfrm>
-          <a:prstGeom prst="rect">
-            <a:avLst/>
-          </a:prstGeom>
-          <a:noFill/>
-          <a:ln/>
-        </p:spPr>
-        <p:txBody>
-          <a:bodyPr wrap="square" lIns="0" tIns="0" rIns="0" bIns="0" rtlCol="0" anchor="ctr"/>
-          <a:lstStyle/>
-          <a:p>
-            <a:pPr algn="ctr" indent="0" marL="0">
-              <a:buNone/>
-            </a:pPr>
-            <a:r>
-              <a:rPr lang="en-US" sz="1200" b="1" dirty="0">
-                <a:solidFill>
-                  <a:srgbClr val="FFFFFF"/>
-                </a:solidFill>
-                <a:latin typeface="Calibri" pitchFamily="34" charset="0"/>
-                <a:ea typeface="Calibri" pitchFamily="34" charset="-122"/>
-                <a:cs typeface="Calibri" pitchFamily="34" charset="-120"/>
-              </a:rPr>
-              <a:t>3</a:t>
-            </a:r>
-            <a:endParaRPr lang="en-US" sz="1200" dirty="0"/>
-          </a:p>
-        </p:txBody>
-      </p:sp>
-      <p:sp>
-        <p:nvSpPr>
-          <p:cNvPr id="13" name="Text 11"/>
-          <p:cNvSpPr/>
-          <p:nvPr/>
-        </p:nvSpPr>
-        <p:spPr>
-          <a:xfrm>
-            <a:off x="5861304" y="4636008"/>
-            <a:ext cx="1874520" cy="274320"/>
-          </a:xfrm>
-          <a:prstGeom prst="rect">
-            <a:avLst/>
-          </a:prstGeom>
-          <a:noFill/>
-          <a:ln/>
-        </p:spPr>
-        <p:txBody>
-          <a:bodyPr wrap="square" lIns="0" tIns="0" rIns="0" bIns="0" rtlCol="0" anchor="t"/>
-          <a:lstStyle/>
-          <a:p>
-            <a:pPr indent="0" marL="0">
-              <a:buNone/>
-            </a:pPr>
-            <a:r>
-              <a:rPr lang="en-US" sz="1150" dirty="0">
-                <a:solidFill>
-                  <a:srgbClr val="FFFFFF"/>
-                </a:solidFill>
-                <a:latin typeface="Calibri" pitchFamily="34" charset="0"/>
-                <a:ea typeface="Calibri" pitchFamily="34" charset="-122"/>
-                <a:cs typeface="Calibri" pitchFamily="34" charset="-120"/>
-              </a:rPr>
-              <a:t>Ejecutar el instalador</a:t>
-            </a:r>
-            <a:endParaRPr lang="en-US" sz="1150" dirty="0"/>
-          </a:p>
-        </p:txBody>
-      </p:sp>
-      <p:sp>
-        <p:nvSpPr>
-          <p:cNvPr id="14" name="Shape 12"/>
-          <p:cNvSpPr/>
-          <p:nvPr/>
-        </p:nvSpPr>
-        <p:spPr>
-          <a:xfrm>
-            <a:off x="777240" y="5184648"/>
-            <a:ext cx="310896" cy="310896"/>
-          </a:xfrm>
-          <a:prstGeom prst="ellipse">
-            <a:avLst/>
-          </a:prstGeom>
-          <a:solidFill>
-            <a:srgbClr val="A87C4F"/>
-          </a:solidFill>
-          <a:ln/>
-        </p:spPr>
-      </p:sp>
-      <p:sp>
-        <p:nvSpPr>
-          <p:cNvPr id="15" name="Text 13"/>
-          <p:cNvSpPr/>
-          <p:nvPr/>
-        </p:nvSpPr>
-        <p:spPr>
-          <a:xfrm>
-            <a:off x="777240" y="5184648"/>
-            <a:ext cx="310896" cy="310896"/>
-          </a:xfrm>
-          <a:prstGeom prst="rect">
-            <a:avLst/>
-          </a:prstGeom>
-          <a:noFill/>
-          <a:ln/>
-        </p:spPr>
-        <p:txBody>
-          <a:bodyPr wrap="square" lIns="0" tIns="0" rIns="0" bIns="0" rtlCol="0" anchor="ctr"/>
-          <a:lstStyle/>
-          <a:p>
-            <a:pPr algn="ctr" indent="0" marL="0">
-              <a:buNone/>
-            </a:pPr>
-            <a:r>
-              <a:rPr lang="en-US" sz="1200" b="1" dirty="0">
-                <a:solidFill>
-                  <a:srgbClr val="FFFFFF"/>
-                </a:solidFill>
-                <a:latin typeface="Calibri" pitchFamily="34" charset="0"/>
-                <a:ea typeface="Calibri" pitchFamily="34" charset="-122"/>
-                <a:cs typeface="Calibri" pitchFamily="34" charset="-120"/>
-              </a:rPr>
-              <a:t>4</a:t>
-            </a:r>
-            <a:endParaRPr lang="en-US" sz="1200" dirty="0"/>
-          </a:p>
-        </p:txBody>
-      </p:sp>
-      <p:sp>
-        <p:nvSpPr>
-          <p:cNvPr id="16" name="Text 14"/>
-          <p:cNvSpPr/>
-          <p:nvPr/>
-        </p:nvSpPr>
-        <p:spPr>
-          <a:xfrm>
-            <a:off x="1197864" y="5202936"/>
-            <a:ext cx="1874520" cy="274320"/>
-          </a:xfrm>
-          <a:prstGeom prst="rect">
-            <a:avLst/>
-          </a:prstGeom>
-          <a:noFill/>
-          <a:ln/>
-        </p:spPr>
-        <p:txBody>
-          <a:bodyPr wrap="square" lIns="0" tIns="0" rIns="0" bIns="0" rtlCol="0" anchor="t"/>
-          <a:lstStyle/>
-          <a:p>
-            <a:pPr indent="0" marL="0">
-              <a:buNone/>
-            </a:pPr>
-            <a:r>
-              <a:rPr lang="en-US" sz="1150" dirty="0">
-                <a:solidFill>
-                  <a:srgbClr val="FFFFFF"/>
-                </a:solidFill>
-                <a:latin typeface="Calibri" pitchFamily="34" charset="0"/>
-                <a:ea typeface="Calibri" pitchFamily="34" charset="-122"/>
-                <a:cs typeface="Calibri" pitchFamily="34" charset="-120"/>
-              </a:rPr>
-              <a:t>Reiniciar Claude</a:t>
-            </a:r>
-            <a:endParaRPr lang="en-US" sz="1150" dirty="0"/>
-          </a:p>
-        </p:txBody>
-      </p:sp>
-      <p:sp>
-        <p:nvSpPr>
-          <p:cNvPr id="17" name="Shape 15"/>
-          <p:cNvSpPr/>
-          <p:nvPr/>
-        </p:nvSpPr>
-        <p:spPr>
-          <a:xfrm>
-            <a:off x="3108960" y="5184648"/>
-            <a:ext cx="310896" cy="310896"/>
-          </a:xfrm>
-          <a:prstGeom prst="ellipse">
-            <a:avLst/>
-          </a:prstGeom>
-          <a:solidFill>
-            <a:srgbClr val="A87C4F"/>
-          </a:solidFill>
-          <a:ln/>
-        </p:spPr>
-      </p:sp>
-      <p:sp>
-        <p:nvSpPr>
-          <p:cNvPr id="18" name="Text 16"/>
-          <p:cNvSpPr/>
-          <p:nvPr/>
-        </p:nvSpPr>
-        <p:spPr>
-          <a:xfrm>
-            <a:off x="3108960" y="5184648"/>
-            <a:ext cx="310896" cy="310896"/>
-          </a:xfrm>
-          <a:prstGeom prst="rect">
-            <a:avLst/>
-          </a:prstGeom>
-          <a:noFill/>
-          <a:ln/>
-        </p:spPr>
-        <p:txBody>
-          <a:bodyPr wrap="square" lIns="0" tIns="0" rIns="0" bIns="0" rtlCol="0" anchor="ctr"/>
-          <a:lstStyle/>
-          <a:p>
-            <a:pPr algn="ctr" indent="0" marL="0">
-              <a:buNone/>
-            </a:pPr>
-            <a:r>
-              <a:rPr lang="en-US" sz="1200" b="1" dirty="0">
-                <a:solidFill>
-                  <a:srgbClr val="FFFFFF"/>
-                </a:solidFill>
-                <a:latin typeface="Calibri" pitchFamily="34" charset="0"/>
-                <a:ea typeface="Calibri" pitchFamily="34" charset="-122"/>
-                <a:cs typeface="Calibri" pitchFamily="34" charset="-120"/>
-              </a:rPr>
-              <a:t>5</a:t>
-            </a:r>
-            <a:endParaRPr lang="en-US" sz="1200" dirty="0"/>
-          </a:p>
-        </p:txBody>
-      </p:sp>
-      <p:sp>
-        <p:nvSpPr>
-          <p:cNvPr id="19" name="Text 17"/>
-          <p:cNvSpPr/>
-          <p:nvPr/>
-        </p:nvSpPr>
-        <p:spPr>
-          <a:xfrm>
-            <a:off x="3529584" y="5202936"/>
-            <a:ext cx="1874520" cy="274320"/>
-          </a:xfrm>
-          <a:prstGeom prst="rect">
-            <a:avLst/>
-          </a:prstGeom>
-          <a:noFill/>
-          <a:ln/>
-        </p:spPr>
-        <p:txBody>
-          <a:bodyPr wrap="square" lIns="0" tIns="0" rIns="0" bIns="0" rtlCol="0" anchor="t"/>
-          <a:lstStyle/>
-          <a:p>
-            <a:pPr indent="0" marL="0">
-              <a:buNone/>
-            </a:pPr>
-            <a:r>
-              <a:rPr lang="en-US" sz="1150" dirty="0">
-                <a:solidFill>
-                  <a:srgbClr val="FFFFFF"/>
-                </a:solidFill>
-                <a:latin typeface="Calibri" pitchFamily="34" charset="0"/>
-                <a:ea typeface="Calibri" pitchFamily="34" charset="-122"/>
-                <a:cs typeface="Calibri" pitchFamily="34" charset="-120"/>
-              </a:rPr>
-              <a:t>Comprobar que funciona</a:t>
-            </a:r>
-            <a:endParaRPr lang="en-US" sz="1150" dirty="0"/>
-          </a:p>
-        </p:txBody>
-      </p:sp>
-      <p:sp>
-        <p:nvSpPr>
-          <p:cNvPr id="20" name="Shape 18"/>
           <p:cNvSpPr/>
           <p:nvPr/>
         </p:nvSpPr>
@@ -3255,7 +2786,7 @@
       </p:sp>
       <p:sp>
         <p:nvSpPr>
-          <p:cNvPr id="21" name="Text 19"/>
+          <p:cNvPr id="12" name="Text 10"/>
           <p:cNvSpPr/>
           <p:nvPr/>
         </p:nvSpPr>
@@ -3294,7 +2825,7 @@
       </p:sp>
       <p:sp>
         <p:nvSpPr>
-          <p:cNvPr id="22" name="Text 20"/>
+          <p:cNvPr id="13" name="Text 11"/>
           <p:cNvSpPr/>
           <p:nvPr/>
         </p:nvSpPr>
@@ -3333,7 +2864,7 @@
       </p:sp>
       <p:sp>
         <p:nvSpPr>
-          <p:cNvPr id="23" name="Text 21"/>
+          <p:cNvPr id="14" name="Text 12"/>
           <p:cNvSpPr/>
           <p:nvPr/>
         </p:nvSpPr>
@@ -3375,7 +2906,7 @@
       </p:sp>
       <p:sp>
         <p:nvSpPr>
-          <p:cNvPr id="24" name="Text 22"/>
+          <p:cNvPr id="15" name="Text 13"/>
           <p:cNvSpPr/>
           <p:nvPr/>
         </p:nvSpPr>
@@ -3414,7 +2945,7 @@
       </p:sp>
       <p:sp>
         <p:nvSpPr>
-          <p:cNvPr id="25" name="Text 23"/>
+          <p:cNvPr id="16" name="Text 14"/>
           <p:cNvSpPr/>
           <p:nvPr/>
         </p:nvSpPr>
@@ -3456,7 +2987,7 @@
       </p:sp>
       <p:sp>
         <p:nvSpPr>
-          <p:cNvPr id="26" name="Text 24"/>
+          <p:cNvPr id="17" name="Text 15"/>
           <p:cNvSpPr/>
           <p:nvPr/>
         </p:nvSpPr>
@@ -3495,7 +3026,7 @@
       </p:sp>
       <p:sp>
         <p:nvSpPr>
-          <p:cNvPr id="27" name="Text 25"/>
+          <p:cNvPr id="18" name="Text 16"/>
           <p:cNvSpPr/>
           <p:nvPr/>
         </p:nvSpPr>
@@ -3537,7 +3068,7 @@
       </p:sp>
       <p:sp>
         <p:nvSpPr>
-          <p:cNvPr id="28" name="Text 26"/>
+          <p:cNvPr id="19" name="Text 17"/>
           <p:cNvSpPr/>
           <p:nvPr/>
         </p:nvSpPr>
@@ -3642,7 +3173,7 @@
                 <a:ea typeface="Cambria" pitchFamily="34" charset="-122"/>
                 <a:cs typeface="Cambria" pitchFamily="34" charset="-120"/>
               </a:rPr>
-              <a:t>Paso 1 · Instalar Node.js</a:t>
+              <a:t>Paso 1 · Pegar el comando</a:t>
             </a:r>
             <a:endParaRPr lang="en-US" sz="3200" dirty="0"/>
           </a:p>
@@ -3681,7 +3212,7 @@
                 <a:ea typeface="Calibri" pitchFamily="34" charset="-122"/>
                 <a:cs typeface="Calibri" pitchFamily="34" charset="-120"/>
               </a:rPr>
-              <a:t>Es el motor que ejecuta Responsa. Software estándar y gratuito</a:t>
+              <a:t>Abre la terminal, pega la línea que corresponde a tu sistema y pulsa Enter</a:t>
             </a:r>
             <a:endParaRPr lang="en-US" sz="1350" dirty="0"/>
           </a:p>
@@ -3689,57 +3220,118 @@
       </p:sp>
       <p:sp>
         <p:nvSpPr>
-          <p:cNvPr id="4" name="Text 2"/>
+          <p:cNvPr id="4" name="Shape 2"/>
           <p:cNvSpPr/>
           <p:nvPr/>
         </p:nvSpPr>
         <p:spPr>
           <a:xfrm>
             <a:off x="777240" y="1828800"/>
-            <a:ext cx="5669280" cy="274320"/>
-          </a:xfrm>
-          <a:prstGeom prst="rect">
-            <a:avLst/>
-          </a:prstGeom>
-          <a:noFill/>
-          <a:ln/>
-        </p:spPr>
-        <p:txBody>
-          <a:bodyPr wrap="square" lIns="0" tIns="0" rIns="0" bIns="0" rtlCol="0" anchor="t"/>
-          <a:lstStyle/>
-          <a:p>
-            <a:pPr indent="0" marL="0">
-              <a:buNone/>
-            </a:pPr>
-            <a:r>
-              <a:rPr lang="en-US" sz="1200" dirty="0">
-                <a:solidFill>
-                  <a:srgbClr val="1B2230"/>
-                </a:solidFill>
-                <a:latin typeface="Calibri" pitchFamily="34" charset="0"/>
-                <a:ea typeface="Calibri" pitchFamily="34" charset="-122"/>
-                <a:cs typeface="Calibri" pitchFamily="34" charset="-120"/>
-              </a:rPr>
-              <a:t>Primero, comprobar si ya está. Abre la terminal y escribe:</a:t>
-            </a:r>
-            <a:endParaRPr lang="en-US" sz="1200" dirty="0"/>
-          </a:p>
-        </p:txBody>
-      </p:sp>
-      <p:sp>
-        <p:nvSpPr>
-          <p:cNvPr id="5" name="Shape 3"/>
-          <p:cNvSpPr/>
-          <p:nvPr/>
-        </p:nvSpPr>
-        <p:spPr>
-          <a:xfrm>
-            <a:off x="777240" y="2157984"/>
-            <a:ext cx="4572000" cy="457200"/>
+            <a:ext cx="1051560" cy="274320"/>
           </a:xfrm>
           <a:prstGeom prst="roundRect">
             <a:avLst>
-              <a:gd name="adj" fmla="val 10000"/>
+              <a:gd name="adj" fmla="val 13333"/>
+            </a:avLst>
+          </a:prstGeom>
+          <a:solidFill>
+            <a:srgbClr val="A87C4F"/>
+          </a:solidFill>
+          <a:ln/>
+        </p:spPr>
+      </p:sp>
+      <p:sp>
+        <p:nvSpPr>
+          <p:cNvPr id="5" name="Text 3"/>
+          <p:cNvSpPr/>
+          <p:nvPr/>
+        </p:nvSpPr>
+        <p:spPr>
+          <a:xfrm>
+            <a:off x="777240" y="1828800"/>
+            <a:ext cx="1051560" cy="274320"/>
+          </a:xfrm>
+          <a:prstGeom prst="rect">
+            <a:avLst/>
+          </a:prstGeom>
+          <a:noFill/>
+          <a:ln/>
+        </p:spPr>
+        <p:txBody>
+          <a:bodyPr wrap="square" lIns="0" tIns="0" rIns="0" bIns="0" rtlCol="0" anchor="ctr"/>
+          <a:lstStyle/>
+          <a:p>
+            <a:pPr algn="ctr" indent="0" marL="0">
+              <a:buNone/>
+            </a:pPr>
+            <a:r>
+              <a:rPr lang="en-US" sz="1000" b="1" dirty="0">
+                <a:solidFill>
+                  <a:srgbClr val="FFFFFF"/>
+                </a:solidFill>
+                <a:latin typeface="Calibri" pitchFamily="34" charset="0"/>
+                <a:ea typeface="Calibri" pitchFamily="34" charset="-122"/>
+                <a:cs typeface="Calibri" pitchFamily="34" charset="-120"/>
+              </a:rPr>
+              <a:t>Windows</a:t>
+            </a:r>
+            <a:endParaRPr lang="en-US" sz="1000" dirty="0"/>
+          </a:p>
+        </p:txBody>
+      </p:sp>
+      <p:sp>
+        <p:nvSpPr>
+          <p:cNvPr id="6" name="Text 4"/>
+          <p:cNvSpPr/>
+          <p:nvPr/>
+        </p:nvSpPr>
+        <p:spPr>
+          <a:xfrm>
+            <a:off x="1965960" y="1847088"/>
+            <a:ext cx="4572000" cy="256032"/>
+          </a:xfrm>
+          <a:prstGeom prst="rect">
+            <a:avLst/>
+          </a:prstGeom>
+          <a:noFill/>
+          <a:ln/>
+        </p:spPr>
+        <p:txBody>
+          <a:bodyPr wrap="square" lIns="0" tIns="0" rIns="0" bIns="0" rtlCol="0" anchor="t"/>
+          <a:lstStyle/>
+          <a:p>
+            <a:pPr indent="0" marL="0">
+              <a:buNone/>
+            </a:pPr>
+            <a:r>
+              <a:rPr lang="en-US" sz="1100" dirty="0">
+                <a:solidFill>
+                  <a:srgbClr val="5A6478"/>
+                </a:solidFill>
+                <a:latin typeface="Calibri" pitchFamily="34" charset="0"/>
+                <a:ea typeface="Calibri" pitchFamily="34" charset="-122"/>
+                <a:cs typeface="Calibri" pitchFamily="34" charset="-120"/>
+              </a:rPr>
+              <a:t>Menú Inicio → escribe «PowerShell» → ábrelo</a:t>
+            </a:r>
+            <a:endParaRPr lang="en-US" sz="1100" dirty="0"/>
+          </a:p>
+        </p:txBody>
+      </p:sp>
+      <p:sp>
+        <p:nvSpPr>
+          <p:cNvPr id="7" name="Shape 5"/>
+          <p:cNvSpPr/>
+          <p:nvPr/>
+        </p:nvSpPr>
+        <p:spPr>
+          <a:xfrm>
+            <a:off x="777240" y="2212848"/>
+            <a:ext cx="10634472" cy="603504"/>
+          </a:xfrm>
+          <a:prstGeom prst="roundRect">
+            <a:avLst>
+              <a:gd name="adj" fmla="val 7576"/>
             </a:avLst>
           </a:prstGeom>
           <a:solidFill>
@@ -3750,30 +3342,30 @@
       </p:sp>
       <p:sp>
         <p:nvSpPr>
-          <p:cNvPr id="6" name="Text 4"/>
-          <p:cNvSpPr/>
-          <p:nvPr/>
-        </p:nvSpPr>
-        <p:spPr>
-          <a:xfrm>
-            <a:off x="978408" y="2157984"/>
-            <a:ext cx="4169664" cy="457200"/>
-          </a:xfrm>
-          <a:prstGeom prst="rect">
-            <a:avLst/>
-          </a:prstGeom>
-          <a:noFill/>
-          <a:ln/>
-        </p:spPr>
-        <p:txBody>
-          <a:bodyPr wrap="square" lIns="0" tIns="0" rIns="0" bIns="0" rtlCol="0" anchor="ctr"/>
-          <a:lstStyle/>
-          <a:p>
-            <a:pPr indent="0" marL="0">
-              <a:buNone/>
-            </a:pPr>
-            <a:r>
-              <a:rPr lang="en-US" sz="1150" b="1" dirty="0">
+          <p:cNvPr id="8" name="Text 6"/>
+          <p:cNvSpPr/>
+          <p:nvPr/>
+        </p:nvSpPr>
+        <p:spPr>
+          <a:xfrm>
+            <a:off x="996696" y="2212848"/>
+            <a:ext cx="10195560" cy="603504"/>
+          </a:xfrm>
+          <a:prstGeom prst="rect">
+            <a:avLst/>
+          </a:prstGeom>
+          <a:noFill/>
+          <a:ln/>
+        </p:spPr>
+        <p:txBody>
+          <a:bodyPr wrap="square" lIns="0" tIns="0" rIns="0" bIns="0" rtlCol="0" anchor="ctr"/>
+          <a:lstStyle/>
+          <a:p>
+            <a:pPr indent="0" marL="0">
+              <a:buNone/>
+            </a:pPr>
+            <a:r>
+              <a:rPr lang="en-US" sz="1250" b="1" dirty="0">
                 <a:solidFill>
                   <a:srgbClr val="C9A574"/>
                 </a:solidFill>
@@ -3781,65 +3373,187 @@
                 <a:ea typeface="Courier New" pitchFamily="34" charset="-122"/>
                 <a:cs typeface="Courier New" pitchFamily="34" charset="-120"/>
               </a:rPr>
-              <a:t>node --version</a:t>
-            </a:r>
-            <a:endParaRPr lang="en-US" sz="1150" dirty="0"/>
-          </a:p>
-        </p:txBody>
-      </p:sp>
-      <p:sp>
-        <p:nvSpPr>
-          <p:cNvPr id="7" name="Text 5"/>
-          <p:cNvSpPr/>
-          <p:nvPr/>
-        </p:nvSpPr>
-        <p:spPr>
-          <a:xfrm>
-            <a:off x="777240" y="2724912"/>
-            <a:ext cx="4572000" cy="457200"/>
-          </a:xfrm>
-          <a:prstGeom prst="rect">
-            <a:avLst/>
-          </a:prstGeom>
-          <a:noFill/>
-          <a:ln/>
-        </p:spPr>
-        <p:txBody>
-          <a:bodyPr wrap="square" lIns="0" tIns="0" rIns="0" bIns="0" rtlCol="0" anchor="t"/>
-          <a:lstStyle/>
-          <a:p>
-            <a:pPr indent="0" marL="0">
-              <a:buNone/>
-            </a:pPr>
-            <a:r>
-              <a:rPr lang="en-US" sz="1100" dirty="0">
-                <a:solidFill>
-                  <a:srgbClr val="5A6478"/>
-                </a:solidFill>
-                <a:latin typeface="Calibri" pitchFamily="34" charset="0"/>
-                <a:ea typeface="Calibri" pitchFamily="34" charset="-122"/>
-                <a:cs typeface="Calibri" pitchFamily="34" charset="-120"/>
-              </a:rPr>
-              <a:t>Si responde v20 o superior, ya está: salta al paso 2. Si dice que no reconoce el comando, sigue aquí.</a:t>
-            </a:r>
-            <a:endParaRPr lang="en-US" sz="1100" dirty="0"/>
-          </a:p>
-        </p:txBody>
-      </p:sp>
-      <p:sp>
-        <p:nvSpPr>
-          <p:cNvPr id="8" name="Shape 6"/>
-          <p:cNvSpPr/>
-          <p:nvPr/>
-        </p:nvSpPr>
-        <p:spPr>
-          <a:xfrm>
-            <a:off x="777240" y="3364992"/>
-            <a:ext cx="4572000" cy="1371600"/>
+              <a:t>irm https://raw.githubusercontent.com/djlarrix/Responsa/main/instalar.ps1 | iex</a:t>
+            </a:r>
+            <a:endParaRPr lang="en-US" sz="1250" dirty="0"/>
+          </a:p>
+        </p:txBody>
+      </p:sp>
+      <p:sp>
+        <p:nvSpPr>
+          <p:cNvPr id="9" name="Shape 7"/>
+          <p:cNvSpPr/>
+          <p:nvPr/>
+        </p:nvSpPr>
+        <p:spPr>
+          <a:xfrm>
+            <a:off x="777240" y="3054096"/>
+            <a:ext cx="1051560" cy="274320"/>
           </a:xfrm>
           <a:prstGeom prst="roundRect">
             <a:avLst>
-              <a:gd name="adj" fmla="val 4000"/>
+              <a:gd name="adj" fmla="val 13333"/>
+            </a:avLst>
+          </a:prstGeom>
+          <a:solidFill>
+            <a:srgbClr val="A87C4F"/>
+          </a:solidFill>
+          <a:ln/>
+        </p:spPr>
+      </p:sp>
+      <p:sp>
+        <p:nvSpPr>
+          <p:cNvPr id="10" name="Text 8"/>
+          <p:cNvSpPr/>
+          <p:nvPr/>
+        </p:nvSpPr>
+        <p:spPr>
+          <a:xfrm>
+            <a:off x="777240" y="3054096"/>
+            <a:ext cx="1051560" cy="274320"/>
+          </a:xfrm>
+          <a:prstGeom prst="rect">
+            <a:avLst/>
+          </a:prstGeom>
+          <a:noFill/>
+          <a:ln/>
+        </p:spPr>
+        <p:txBody>
+          <a:bodyPr wrap="square" lIns="0" tIns="0" rIns="0" bIns="0" rtlCol="0" anchor="ctr"/>
+          <a:lstStyle/>
+          <a:p>
+            <a:pPr algn="ctr" indent="0" marL="0">
+              <a:buNone/>
+            </a:pPr>
+            <a:r>
+              <a:rPr lang="en-US" sz="1000" b="1" dirty="0">
+                <a:solidFill>
+                  <a:srgbClr val="FFFFFF"/>
+                </a:solidFill>
+                <a:latin typeface="Calibri" pitchFamily="34" charset="0"/>
+                <a:ea typeface="Calibri" pitchFamily="34" charset="-122"/>
+                <a:cs typeface="Calibri" pitchFamily="34" charset="-120"/>
+              </a:rPr>
+              <a:t>macOS</a:t>
+            </a:r>
+            <a:endParaRPr lang="en-US" sz="1000" dirty="0"/>
+          </a:p>
+        </p:txBody>
+      </p:sp>
+      <p:sp>
+        <p:nvSpPr>
+          <p:cNvPr id="11" name="Text 9"/>
+          <p:cNvSpPr/>
+          <p:nvPr/>
+        </p:nvSpPr>
+        <p:spPr>
+          <a:xfrm>
+            <a:off x="1965960" y="3072384"/>
+            <a:ext cx="4572000" cy="256032"/>
+          </a:xfrm>
+          <a:prstGeom prst="rect">
+            <a:avLst/>
+          </a:prstGeom>
+          <a:noFill/>
+          <a:ln/>
+        </p:spPr>
+        <p:txBody>
+          <a:bodyPr wrap="square" lIns="0" tIns="0" rIns="0" bIns="0" rtlCol="0" anchor="t"/>
+          <a:lstStyle/>
+          <a:p>
+            <a:pPr indent="0" marL="0">
+              <a:buNone/>
+            </a:pPr>
+            <a:r>
+              <a:rPr lang="en-US" sz="1100" dirty="0">
+                <a:solidFill>
+                  <a:srgbClr val="5A6478"/>
+                </a:solidFill>
+                <a:latin typeface="Calibri" pitchFamily="34" charset="0"/>
+                <a:ea typeface="Calibri" pitchFamily="34" charset="-122"/>
+                <a:cs typeface="Calibri" pitchFamily="34" charset="-120"/>
+              </a:rPr>
+              <a:t>Command + Espacio → escribe «Terminal» → Enter</a:t>
+            </a:r>
+            <a:endParaRPr lang="en-US" sz="1100" dirty="0"/>
+          </a:p>
+        </p:txBody>
+      </p:sp>
+      <p:sp>
+        <p:nvSpPr>
+          <p:cNvPr id="12" name="Shape 10"/>
+          <p:cNvSpPr/>
+          <p:nvPr/>
+        </p:nvSpPr>
+        <p:spPr>
+          <a:xfrm>
+            <a:off x="777240" y="3438144"/>
+            <a:ext cx="10634472" cy="603504"/>
+          </a:xfrm>
+          <a:prstGeom prst="roundRect">
+            <a:avLst>
+              <a:gd name="adj" fmla="val 7576"/>
+            </a:avLst>
+          </a:prstGeom>
+          <a:solidFill>
+            <a:srgbClr val="1B2230"/>
+          </a:solidFill>
+          <a:ln/>
+        </p:spPr>
+      </p:sp>
+      <p:sp>
+        <p:nvSpPr>
+          <p:cNvPr id="13" name="Text 11"/>
+          <p:cNvSpPr/>
+          <p:nvPr/>
+        </p:nvSpPr>
+        <p:spPr>
+          <a:xfrm>
+            <a:off x="996696" y="3438144"/>
+            <a:ext cx="10195560" cy="603504"/>
+          </a:xfrm>
+          <a:prstGeom prst="rect">
+            <a:avLst/>
+          </a:prstGeom>
+          <a:noFill/>
+          <a:ln/>
+        </p:spPr>
+        <p:txBody>
+          <a:bodyPr wrap="square" lIns="0" tIns="0" rIns="0" bIns="0" rtlCol="0" anchor="ctr"/>
+          <a:lstStyle/>
+          <a:p>
+            <a:pPr indent="0" marL="0">
+              <a:buNone/>
+            </a:pPr>
+            <a:r>
+              <a:rPr lang="en-US" sz="1250" b="1" dirty="0">
+                <a:solidFill>
+                  <a:srgbClr val="C9A574"/>
+                </a:solidFill>
+                <a:latin typeface="Courier New" pitchFamily="34" charset="0"/>
+                <a:ea typeface="Courier New" pitchFamily="34" charset="-122"/>
+                <a:cs typeface="Courier New" pitchFamily="34" charset="-120"/>
+              </a:rPr>
+              <a:t>curl -fsSL https://raw.githubusercontent.com/djlarrix/Responsa/main/instalar.sh | bash</a:t>
+            </a:r>
+            <a:endParaRPr lang="en-US" sz="1250" dirty="0"/>
+          </a:p>
+        </p:txBody>
+      </p:sp>
+      <p:sp>
+        <p:nvSpPr>
+          <p:cNvPr id="14" name="Shape 12"/>
+          <p:cNvSpPr/>
+          <p:nvPr/>
+        </p:nvSpPr>
+        <p:spPr>
+          <a:xfrm>
+            <a:off x="777240" y="4315968"/>
+            <a:ext cx="5120640" cy="1783080"/>
+          </a:xfrm>
+          <a:prstGeom prst="roundRect">
+            <a:avLst>
+              <a:gd name="adj" fmla="val 3077"/>
             </a:avLst>
           </a:prstGeom>
           <a:solidFill>
@@ -3855,14 +3569,14 @@
       </p:sp>
       <p:sp>
         <p:nvSpPr>
-          <p:cNvPr id="9" name="Text 7"/>
-          <p:cNvSpPr/>
-          <p:nvPr/>
-        </p:nvSpPr>
-        <p:spPr>
-          <a:xfrm>
-            <a:off x="1051560" y="3566160"/>
-            <a:ext cx="4023360" cy="256032"/>
+          <p:cNvPr id="15" name="Text 13"/>
+          <p:cNvSpPr/>
+          <p:nvPr/>
+        </p:nvSpPr>
+        <p:spPr>
+          <a:xfrm>
+            <a:off x="1069848" y="4517136"/>
+            <a:ext cx="4480560" cy="256032"/>
           </a:xfrm>
           <a:prstGeom prst="rect">
             <a:avLst/>
@@ -3878,7 +3592,7 @@
               <a:buNone/>
             </a:pPr>
             <a:r>
-              <a:rPr lang="en-US" sz="1150" b="1" dirty="0">
+              <a:rPr lang="en-US" sz="1200" b="1" dirty="0">
                 <a:solidFill>
                   <a:srgbClr val="1B2230"/>
                 </a:solidFill>
@@ -3886,22 +3600,22 @@
                 <a:ea typeface="Calibri" pitchFamily="34" charset="-122"/>
                 <a:cs typeface="Calibri" pitchFamily="34" charset="-120"/>
               </a:rPr>
-              <a:t>Cómo se abre la terminal</a:t>
-            </a:r>
-            <a:endParaRPr lang="en-US" sz="1150" dirty="0"/>
-          </a:p>
-        </p:txBody>
-      </p:sp>
-      <p:sp>
-        <p:nvSpPr>
-          <p:cNvPr id="10" name="Text 8"/>
-          <p:cNvSpPr/>
-          <p:nvPr/>
-        </p:nvSpPr>
-        <p:spPr>
-          <a:xfrm>
-            <a:off x="1051560" y="3877056"/>
-            <a:ext cx="4023360" cy="274320"/>
+              <a:t>Qué hace por ti</a:t>
+            </a:r>
+            <a:endParaRPr lang="en-US" sz="1200" dirty="0"/>
+          </a:p>
+        </p:txBody>
+      </p:sp>
+      <p:sp>
+        <p:nvSpPr>
+          <p:cNvPr id="16" name="Text 14"/>
+          <p:cNvSpPr/>
+          <p:nvPr/>
+        </p:nvSpPr>
+        <p:spPr>
+          <a:xfrm>
+            <a:off x="1069848" y="4846320"/>
+            <a:ext cx="4572000" cy="274320"/>
           </a:xfrm>
           <a:prstGeom prst="rect">
             <a:avLst/>
@@ -3925,7 +3639,7 @@
                 <a:ea typeface="Calibri" pitchFamily="34" charset="-122"/>
                 <a:cs typeface="Calibri" pitchFamily="34" charset="-120"/>
               </a:rPr>
-              <a:t>Windows:  menú Inicio → escribir «PowerShell» → abrirlo.</a:t>
+              <a:t>·  Instala Node.js si falta</a:t>
             </a:r>
             <a:endParaRPr lang="en-US" sz="1050" dirty="0"/>
           </a:p>
@@ -3933,14 +3647,14 @@
       </p:sp>
       <p:sp>
         <p:nvSpPr>
-          <p:cNvPr id="11" name="Text 9"/>
-          <p:cNvSpPr/>
-          <p:nvPr/>
-        </p:nvSpPr>
-        <p:spPr>
-          <a:xfrm>
-            <a:off x="1051560" y="4206240"/>
-            <a:ext cx="4023360" cy="274320"/>
+          <p:cNvPr id="17" name="Text 15"/>
+          <p:cNvSpPr/>
+          <p:nvPr/>
+        </p:nvSpPr>
+        <p:spPr>
+          <a:xfrm>
+            <a:off x="1069848" y="5148072"/>
+            <a:ext cx="4572000" cy="274320"/>
           </a:xfrm>
           <a:prstGeom prst="rect">
             <a:avLst/>
@@ -3964,7 +3678,7 @@
                 <a:ea typeface="Calibri" pitchFamily="34" charset="-122"/>
                 <a:cs typeface="Calibri" pitchFamily="34" charset="-120"/>
               </a:rPr>
-              <a:t>macOS:  Command + Espacio → escribir «Terminal» → Enter.</a:t>
+              <a:t>·  Descarga Responsa a tu carpeta de usuario</a:t>
             </a:r>
             <a:endParaRPr lang="en-US" sz="1050" dirty="0"/>
           </a:p>
@@ -3972,52 +3686,172 @@
       </p:sp>
       <p:sp>
         <p:nvSpPr>
-          <p:cNvPr id="12" name="Shape 10"/>
-          <p:cNvSpPr/>
-          <p:nvPr/>
-        </p:nvSpPr>
-        <p:spPr>
-          <a:xfrm>
-            <a:off x="5989320" y="1828800"/>
-            <a:ext cx="1051560" cy="274320"/>
+          <p:cNvPr id="18" name="Text 16"/>
+          <p:cNvSpPr/>
+          <p:nvPr/>
+        </p:nvSpPr>
+        <p:spPr>
+          <a:xfrm>
+            <a:off x="1069848" y="5449824"/>
+            <a:ext cx="4572000" cy="274320"/>
+          </a:xfrm>
+          <a:prstGeom prst="rect">
+            <a:avLst/>
+          </a:prstGeom>
+          <a:noFill/>
+          <a:ln/>
+        </p:spPr>
+        <p:txBody>
+          <a:bodyPr wrap="square" lIns="0" tIns="0" rIns="0" bIns="0" rtlCol="0" anchor="t"/>
+          <a:lstStyle/>
+          <a:p>
+            <a:pPr indent="0" marL="0">
+              <a:buNone/>
+            </a:pPr>
+            <a:r>
+              <a:rPr lang="en-US" sz="1050" dirty="0">
+                <a:solidFill>
+                  <a:srgbClr val="5A6478"/>
+                </a:solidFill>
+                <a:latin typeface="Calibri" pitchFamily="34" charset="0"/>
+                <a:ea typeface="Calibri" pitchFamily="34" charset="-122"/>
+                <a:cs typeface="Calibri" pitchFamily="34" charset="-120"/>
+              </a:rPr>
+              <a:t>·  Registra el servidor en Claude e instala la skill</a:t>
+            </a:r>
+            <a:endParaRPr lang="en-US" sz="1050" dirty="0"/>
+          </a:p>
+        </p:txBody>
+      </p:sp>
+      <p:sp>
+        <p:nvSpPr>
+          <p:cNvPr id="19" name="Text 17"/>
+          <p:cNvSpPr/>
+          <p:nvPr/>
+        </p:nvSpPr>
+        <p:spPr>
+          <a:xfrm>
+            <a:off x="1069848" y="5751576"/>
+            <a:ext cx="4572000" cy="274320"/>
+          </a:xfrm>
+          <a:prstGeom prst="rect">
+            <a:avLst/>
+          </a:prstGeom>
+          <a:noFill/>
+          <a:ln/>
+        </p:spPr>
+        <p:txBody>
+          <a:bodyPr wrap="square" lIns="0" tIns="0" rIns="0" bIns="0" rtlCol="0" anchor="t"/>
+          <a:lstStyle/>
+          <a:p>
+            <a:pPr indent="0" marL="0">
+              <a:buNone/>
+            </a:pPr>
+            <a:r>
+              <a:rPr lang="en-US" sz="1050" dirty="0">
+                <a:solidFill>
+                  <a:srgbClr val="5A6478"/>
+                </a:solidFill>
+                <a:latin typeface="Calibri" pitchFamily="34" charset="0"/>
+                <a:ea typeface="Calibri" pitchFamily="34" charset="-122"/>
+                <a:cs typeface="Calibri" pitchFamily="34" charset="-120"/>
+              </a:rPr>
+              <a:t>·  Precarga los códigos y verifica las diez fuentes</a:t>
+            </a:r>
+            <a:endParaRPr lang="en-US" sz="1050" dirty="0"/>
+          </a:p>
+        </p:txBody>
+      </p:sp>
+      <p:sp>
+        <p:nvSpPr>
+          <p:cNvPr id="20" name="Shape 18"/>
+          <p:cNvSpPr/>
+          <p:nvPr/>
+        </p:nvSpPr>
+        <p:spPr>
+          <a:xfrm>
+            <a:off x="6263640" y="4315968"/>
+            <a:ext cx="5148072" cy="1783080"/>
           </a:xfrm>
           <a:prstGeom prst="roundRect">
             <a:avLst>
-              <a:gd name="adj" fmla="val 13333"/>
+              <a:gd name="adj" fmla="val 3077"/>
             </a:avLst>
           </a:prstGeom>
           <a:solidFill>
-            <a:srgbClr val="A87C4F"/>
+            <a:srgbClr val="1B2230"/>
           </a:solidFill>
           <a:ln/>
         </p:spPr>
       </p:sp>
       <p:sp>
         <p:nvSpPr>
-          <p:cNvPr id="13" name="Text 11"/>
-          <p:cNvSpPr/>
-          <p:nvPr/>
-        </p:nvSpPr>
-        <p:spPr>
-          <a:xfrm>
-            <a:off x="5989320" y="1828800"/>
-            <a:ext cx="1051560" cy="274320"/>
-          </a:xfrm>
-          <a:prstGeom prst="rect">
-            <a:avLst/>
-          </a:prstGeom>
-          <a:noFill/>
-          <a:ln/>
-        </p:spPr>
-        <p:txBody>
-          <a:bodyPr wrap="square" lIns="0" tIns="0" rIns="0" bIns="0" rtlCol="0" anchor="ctr"/>
-          <a:lstStyle/>
-          <a:p>
-            <a:pPr algn="ctr" indent="0" marL="0">
-              <a:buNone/>
-            </a:pPr>
-            <a:r>
-              <a:rPr lang="en-US" sz="1000" b="1" dirty="0">
+          <p:cNvPr id="21" name="Text 19"/>
+          <p:cNvSpPr/>
+          <p:nvPr/>
+        </p:nvSpPr>
+        <p:spPr>
+          <a:xfrm>
+            <a:off x="6583680" y="4517136"/>
+            <a:ext cx="4480560" cy="256032"/>
+          </a:xfrm>
+          <a:prstGeom prst="rect">
+            <a:avLst/>
+          </a:prstGeom>
+          <a:noFill/>
+          <a:ln/>
+        </p:spPr>
+        <p:txBody>
+          <a:bodyPr wrap="square" lIns="0" tIns="0" rIns="0" bIns="0" rtlCol="0" anchor="t"/>
+          <a:lstStyle/>
+          <a:p>
+            <a:pPr indent="0" marL="0">
+              <a:buNone/>
+            </a:pPr>
+            <a:r>
+              <a:rPr lang="en-US" sz="1200" b="1" dirty="0">
+                <a:solidFill>
+                  <a:srgbClr val="C9A574"/>
+                </a:solidFill>
+                <a:latin typeface="Calibri" pitchFamily="34" charset="0"/>
+                <a:ea typeface="Calibri" pitchFamily="34" charset="-122"/>
+                <a:cs typeface="Calibri" pitchFamily="34" charset="-120"/>
+              </a:rPr>
+              <a:t>Qué vas a ver</a:t>
+            </a:r>
+            <a:endParaRPr lang="en-US" sz="1200" dirty="0"/>
+          </a:p>
+        </p:txBody>
+      </p:sp>
+      <p:sp>
+        <p:nvSpPr>
+          <p:cNvPr id="22" name="Text 20"/>
+          <p:cNvSpPr/>
+          <p:nvPr/>
+        </p:nvSpPr>
+        <p:spPr>
+          <a:xfrm>
+            <a:off x="6583680" y="4828032"/>
+            <a:ext cx="4480560" cy="822960"/>
+          </a:xfrm>
+          <a:prstGeom prst="rect">
+            <a:avLst/>
+          </a:prstGeom>
+          <a:noFill/>
+          <a:ln/>
+        </p:spPr>
+        <p:txBody>
+          <a:bodyPr wrap="square" lIns="0" tIns="0" rIns="0" bIns="0" rtlCol="0" anchor="t"/>
+          <a:lstStyle/>
+          <a:p>
+            <a:pPr indent="0" marL="0">
+              <a:lnSpc>
+                <a:spcPct val="110000"/>
+              </a:lnSpc>
+              <a:buNone/>
+            </a:pPr>
+            <a:r>
+              <a:rPr lang="en-US" sz="1050" dirty="0">
                 <a:solidFill>
                   <a:srgbClr val="FFFFFF"/>
                 </a:solidFill>
@@ -4025,22 +3859,22 @@
                 <a:ea typeface="Calibri" pitchFamily="34" charset="-122"/>
                 <a:cs typeface="Calibri" pitchFamily="34" charset="-120"/>
               </a:rPr>
-              <a:t>Windows</a:t>
-            </a:r>
-            <a:endParaRPr lang="en-US" sz="1000" dirty="0"/>
-          </a:p>
-        </p:txBody>
-      </p:sp>
-      <p:sp>
-        <p:nvSpPr>
-          <p:cNvPr id="14" name="Text 12"/>
-          <p:cNvSpPr/>
-          <p:nvPr/>
-        </p:nvSpPr>
-        <p:spPr>
-          <a:xfrm>
-            <a:off x="5989320" y="2212848"/>
-            <a:ext cx="4937760" cy="347472"/>
+              <a:t>Cuatro pasos numerados en pantalla. Tarda unos minutos, sobre todo la precarga de los códigos: la Biblioteca del Congreso limita las descargas grandes y conviene bajarlos con calma una vez.</a:t>
+            </a:r>
+            <a:endParaRPr lang="en-US" sz="1050" dirty="0"/>
+          </a:p>
+        </p:txBody>
+      </p:sp>
+      <p:sp>
+        <p:nvSpPr>
+          <p:cNvPr id="23" name="Text 21"/>
+          <p:cNvSpPr/>
+          <p:nvPr/>
+        </p:nvSpPr>
+        <p:spPr>
+          <a:xfrm>
+            <a:off x="6583680" y="5687568"/>
+            <a:ext cx="4480560" cy="292608"/>
           </a:xfrm>
           <a:prstGeom prst="rect">
             <a:avLst/>
@@ -4056,30 +3890,30 @@
               <a:buNone/>
             </a:pPr>
             <a:r>
-              <a:rPr lang="en-US" sz="1100" dirty="0">
-                <a:solidFill>
-                  <a:srgbClr val="1B2230"/>
-                </a:solidFill>
-                <a:latin typeface="Calibri" pitchFamily="34" charset="0"/>
-                <a:ea typeface="Calibri" pitchFamily="34" charset="-122"/>
-                <a:cs typeface="Calibri" pitchFamily="34" charset="-120"/>
-              </a:rPr>
-              <a:t>1.  Entrar a nodejs.org</a:t>
-            </a:r>
-            <a:endParaRPr lang="en-US" sz="1100" dirty="0"/>
-          </a:p>
-        </p:txBody>
-      </p:sp>
-      <p:sp>
-        <p:nvSpPr>
-          <p:cNvPr id="15" name="Text 13"/>
-          <p:cNvSpPr/>
-          <p:nvPr/>
-        </p:nvSpPr>
-        <p:spPr>
-          <a:xfrm>
-            <a:off x="5989320" y="2596896"/>
-            <a:ext cx="4937760" cy="347472"/>
+              <a:rPr lang="en-US" sz="1050" b="1" i="1" dirty="0">
+                <a:solidFill>
+                  <a:srgbClr val="C9A574"/>
+                </a:solidFill>
+                <a:latin typeface="Calibri" pitchFamily="34" charset="0"/>
+                <a:ea typeface="Calibri" pitchFamily="34" charset="-122"/>
+                <a:cs typeface="Calibri" pitchFamily="34" charset="-120"/>
+              </a:rPr>
+              <a:t>Termina diciendo: Instalado. 10/10 fuentes responden.</a:t>
+            </a:r>
+            <a:endParaRPr lang="en-US" sz="1050" dirty="0"/>
+          </a:p>
+        </p:txBody>
+      </p:sp>
+      <p:sp>
+        <p:nvSpPr>
+          <p:cNvPr id="24" name="Text 22"/>
+          <p:cNvSpPr/>
+          <p:nvPr/>
+        </p:nvSpPr>
+        <p:spPr>
+          <a:xfrm>
+            <a:off x="777240" y="6236208"/>
+            <a:ext cx="10634472" cy="365760"/>
           </a:xfrm>
           <a:prstGeom prst="rect">
             <a:avLst/>
@@ -4095,312 +3929,17 @@
               <a:buNone/>
             </a:pPr>
             <a:r>
-              <a:rPr lang="en-US" sz="1100" dirty="0">
-                <a:solidFill>
-                  <a:srgbClr val="1B2230"/>
-                </a:solidFill>
-                <a:latin typeface="Calibri" pitchFamily="34" charset="0"/>
-                <a:ea typeface="Calibri" pitchFamily="34" charset="-122"/>
-                <a:cs typeface="Calibri" pitchFamily="34" charset="-120"/>
-              </a:rPr>
-              <a:t>2.  Descargar la versión que dice LTS (la otra es para desarrolladores)</a:t>
-            </a:r>
-            <a:endParaRPr lang="en-US" sz="1100" dirty="0"/>
-          </a:p>
-        </p:txBody>
-      </p:sp>
-      <p:sp>
-        <p:nvSpPr>
-          <p:cNvPr id="16" name="Text 14"/>
-          <p:cNvSpPr/>
-          <p:nvPr/>
-        </p:nvSpPr>
-        <p:spPr>
-          <a:xfrm>
-            <a:off x="5989320" y="2980944"/>
-            <a:ext cx="4937760" cy="347472"/>
-          </a:xfrm>
-          <a:prstGeom prst="rect">
-            <a:avLst/>
-          </a:prstGeom>
-          <a:noFill/>
-          <a:ln/>
-        </p:spPr>
-        <p:txBody>
-          <a:bodyPr wrap="square" lIns="0" tIns="0" rIns="0" bIns="0" rtlCol="0" anchor="t"/>
-          <a:lstStyle/>
-          <a:p>
-            <a:pPr indent="0" marL="0">
-              <a:buNone/>
-            </a:pPr>
-            <a:r>
-              <a:rPr lang="en-US" sz="1100" dirty="0">
-                <a:solidFill>
-                  <a:srgbClr val="1B2230"/>
-                </a:solidFill>
-                <a:latin typeface="Calibri" pitchFamily="34" charset="0"/>
-                <a:ea typeface="Calibri" pitchFamily="34" charset="-122"/>
-                <a:cs typeface="Calibri" pitchFamily="34" charset="-120"/>
-              </a:rPr>
-              <a:t>3.  Abrir el archivo .msi y aceptar todo por defecto</a:t>
-            </a:r>
-            <a:endParaRPr lang="en-US" sz="1100" dirty="0"/>
-          </a:p>
-        </p:txBody>
-      </p:sp>
-      <p:sp>
-        <p:nvSpPr>
-          <p:cNvPr id="17" name="Text 15"/>
-          <p:cNvSpPr/>
-          <p:nvPr/>
-        </p:nvSpPr>
-        <p:spPr>
-          <a:xfrm>
-            <a:off x="5989320" y="3364992"/>
-            <a:ext cx="4937760" cy="347472"/>
-          </a:xfrm>
-          <a:prstGeom prst="rect">
-            <a:avLst/>
-          </a:prstGeom>
-          <a:noFill/>
-          <a:ln/>
-        </p:spPr>
-        <p:txBody>
-          <a:bodyPr wrap="square" lIns="0" tIns="0" rIns="0" bIns="0" rtlCol="0" anchor="t"/>
-          <a:lstStyle/>
-          <a:p>
-            <a:pPr indent="0" marL="0">
-              <a:buNone/>
-            </a:pPr>
-            <a:r>
-              <a:rPr lang="en-US" sz="1100" dirty="0">
-                <a:solidFill>
-                  <a:srgbClr val="1B2230"/>
-                </a:solidFill>
-                <a:latin typeface="Calibri" pitchFamily="34" charset="0"/>
-                <a:ea typeface="Calibri" pitchFamily="34" charset="-122"/>
-                <a:cs typeface="Calibri" pitchFamily="34" charset="-120"/>
-              </a:rPr>
-              <a:t>4.  Cerrar y volver a abrir la terminal</a:t>
-            </a:r>
-            <a:endParaRPr lang="en-US" sz="1100" dirty="0"/>
-          </a:p>
-        </p:txBody>
-      </p:sp>
-      <p:sp>
-        <p:nvSpPr>
-          <p:cNvPr id="18" name="Shape 16"/>
-          <p:cNvSpPr/>
-          <p:nvPr/>
-        </p:nvSpPr>
-        <p:spPr>
-          <a:xfrm>
-            <a:off x="5989320" y="3931920"/>
-            <a:ext cx="1051560" cy="274320"/>
-          </a:xfrm>
-          <a:prstGeom prst="roundRect">
-            <a:avLst>
-              <a:gd name="adj" fmla="val 13333"/>
-            </a:avLst>
-          </a:prstGeom>
-          <a:solidFill>
-            <a:srgbClr val="A87C4F"/>
-          </a:solidFill>
-          <a:ln/>
-        </p:spPr>
-      </p:sp>
-      <p:sp>
-        <p:nvSpPr>
-          <p:cNvPr id="19" name="Text 17"/>
-          <p:cNvSpPr/>
-          <p:nvPr/>
-        </p:nvSpPr>
-        <p:spPr>
-          <a:xfrm>
-            <a:off x="5989320" y="3931920"/>
-            <a:ext cx="1051560" cy="274320"/>
-          </a:xfrm>
-          <a:prstGeom prst="rect">
-            <a:avLst/>
-          </a:prstGeom>
-          <a:noFill/>
-          <a:ln/>
-        </p:spPr>
-        <p:txBody>
-          <a:bodyPr wrap="square" lIns="0" tIns="0" rIns="0" bIns="0" rtlCol="0" anchor="ctr"/>
-          <a:lstStyle/>
-          <a:p>
-            <a:pPr algn="ctr" indent="0" marL="0">
-              <a:buNone/>
-            </a:pPr>
-            <a:r>
-              <a:rPr lang="en-US" sz="1000" b="1" dirty="0">
-                <a:solidFill>
-                  <a:srgbClr val="FFFFFF"/>
-                </a:solidFill>
-                <a:latin typeface="Calibri" pitchFamily="34" charset="0"/>
-                <a:ea typeface="Calibri" pitchFamily="34" charset="-122"/>
-                <a:cs typeface="Calibri" pitchFamily="34" charset="-120"/>
-              </a:rPr>
-              <a:t>macOS</a:t>
-            </a:r>
-            <a:endParaRPr lang="en-US" sz="1000" dirty="0"/>
-          </a:p>
-        </p:txBody>
-      </p:sp>
-      <p:sp>
-        <p:nvSpPr>
-          <p:cNvPr id="20" name="Text 18"/>
-          <p:cNvSpPr/>
-          <p:nvPr/>
-        </p:nvSpPr>
-        <p:spPr>
-          <a:xfrm>
-            <a:off x="5989320" y="4315968"/>
-            <a:ext cx="4937760" cy="347472"/>
-          </a:xfrm>
-          <a:prstGeom prst="rect">
-            <a:avLst/>
-          </a:prstGeom>
-          <a:noFill/>
-          <a:ln/>
-        </p:spPr>
-        <p:txBody>
-          <a:bodyPr wrap="square" lIns="0" tIns="0" rIns="0" bIns="0" rtlCol="0" anchor="t"/>
-          <a:lstStyle/>
-          <a:p>
-            <a:pPr indent="0" marL="0">
-              <a:buNone/>
-            </a:pPr>
-            <a:r>
-              <a:rPr lang="en-US" sz="1100" dirty="0">
-                <a:solidFill>
-                  <a:srgbClr val="1B2230"/>
-                </a:solidFill>
-                <a:latin typeface="Calibri" pitchFamily="34" charset="0"/>
-                <a:ea typeface="Calibri" pitchFamily="34" charset="-122"/>
-                <a:cs typeface="Calibri" pitchFamily="34" charset="-120"/>
-              </a:rPr>
-              <a:t>1.  Entrar a nodejs.org</a:t>
-            </a:r>
-            <a:endParaRPr lang="en-US" sz="1100" dirty="0"/>
-          </a:p>
-        </p:txBody>
-      </p:sp>
-      <p:sp>
-        <p:nvSpPr>
-          <p:cNvPr id="21" name="Text 19"/>
-          <p:cNvSpPr/>
-          <p:nvPr/>
-        </p:nvSpPr>
-        <p:spPr>
-          <a:xfrm>
-            <a:off x="5989320" y="4700016"/>
-            <a:ext cx="4937760" cy="347472"/>
-          </a:xfrm>
-          <a:prstGeom prst="rect">
-            <a:avLst/>
-          </a:prstGeom>
-          <a:noFill/>
-          <a:ln/>
-        </p:spPr>
-        <p:txBody>
-          <a:bodyPr wrap="square" lIns="0" tIns="0" rIns="0" bIns="0" rtlCol="0" anchor="t"/>
-          <a:lstStyle/>
-          <a:p>
-            <a:pPr indent="0" marL="0">
-              <a:buNone/>
-            </a:pPr>
-            <a:r>
-              <a:rPr lang="en-US" sz="1100" dirty="0">
-                <a:solidFill>
-                  <a:srgbClr val="1B2230"/>
-                </a:solidFill>
-                <a:latin typeface="Calibri" pitchFamily="34" charset="0"/>
-                <a:ea typeface="Calibri" pitchFamily="34" charset="-122"/>
-                <a:cs typeface="Calibri" pitchFamily="34" charset="-120"/>
-              </a:rPr>
-              <a:t>2.  Descargar la versión LTS para macOS</a:t>
-            </a:r>
-            <a:endParaRPr lang="en-US" sz="1100" dirty="0"/>
-          </a:p>
-        </p:txBody>
-      </p:sp>
-      <p:sp>
-        <p:nvSpPr>
-          <p:cNvPr id="22" name="Text 20"/>
-          <p:cNvSpPr/>
-          <p:nvPr/>
-        </p:nvSpPr>
-        <p:spPr>
-          <a:xfrm>
-            <a:off x="5989320" y="5084064"/>
-            <a:ext cx="4937760" cy="347472"/>
-          </a:xfrm>
-          <a:prstGeom prst="rect">
-            <a:avLst/>
-          </a:prstGeom>
-          <a:noFill/>
-          <a:ln/>
-        </p:spPr>
-        <p:txBody>
-          <a:bodyPr wrap="square" lIns="0" tIns="0" rIns="0" bIns="0" rtlCol="0" anchor="t"/>
-          <a:lstStyle/>
-          <a:p>
-            <a:pPr indent="0" marL="0">
-              <a:buNone/>
-            </a:pPr>
-            <a:r>
-              <a:rPr lang="en-US" sz="1100" dirty="0">
-                <a:solidFill>
-                  <a:srgbClr val="1B2230"/>
-                </a:solidFill>
-                <a:latin typeface="Calibri" pitchFamily="34" charset="0"/>
-                <a:ea typeface="Calibri" pitchFamily="34" charset="-122"/>
-                <a:cs typeface="Calibri" pitchFamily="34" charset="-120"/>
-              </a:rPr>
-              <a:t>3.  Abrir el archivo .pkg y aceptar todo por defecto</a:t>
-            </a:r>
-            <a:endParaRPr lang="en-US" sz="1100" dirty="0"/>
-          </a:p>
-        </p:txBody>
-      </p:sp>
-      <p:sp>
-        <p:nvSpPr>
-          <p:cNvPr id="23" name="Text 21"/>
-          <p:cNvSpPr/>
-          <p:nvPr/>
-        </p:nvSpPr>
-        <p:spPr>
-          <a:xfrm>
-            <a:off x="5989320" y="5486400"/>
-            <a:ext cx="4937760" cy="457200"/>
-          </a:xfrm>
-          <a:prstGeom prst="rect">
-            <a:avLst/>
-          </a:prstGeom>
-          <a:noFill/>
-          <a:ln/>
-        </p:spPr>
-        <p:txBody>
-          <a:bodyPr wrap="square" lIns="0" tIns="0" rIns="0" bIns="0" rtlCol="0" anchor="t"/>
-          <a:lstStyle/>
-          <a:p>
-            <a:pPr indent="0" marL="0">
-              <a:buNone/>
-            </a:pPr>
-            <a:r>
-              <a:rPr lang="en-US" sz="1000" i="1" dirty="0">
-                <a:solidFill>
-                  <a:srgbClr val="6B2C33"/>
-                </a:solidFill>
-                <a:latin typeface="Calibri" pitchFamily="34" charset="0"/>
-                <a:ea typeface="Calibri" pitchFamily="34" charset="-122"/>
-                <a:cs typeface="Calibri" pitchFamily="34" charset="-120"/>
-              </a:rPr>
-              <a:t>Si macOS advierte sobre «un desarrollador no identificado»: Ajustes del Sistema → Privacidad y seguridad → Abrir de todas formas.</a:t>
-            </a:r>
-            <a:endParaRPr lang="en-US" sz="1000" dirty="0"/>
+              <a:rPr lang="en-US" sz="1050" i="1" dirty="0">
+                <a:solidFill>
+                  <a:srgbClr val="5A6478"/>
+                </a:solidFill>
+                <a:latin typeface="Calibri" pitchFamily="34" charset="0"/>
+                <a:ea typeface="Calibri" pitchFamily="34" charset="-122"/>
+                <a:cs typeface="Calibri" pitchFamily="34" charset="-120"/>
+              </a:rPr>
+              <a:t>Se puede ejecutar las veces que haga falta: si ya está instalado, actualiza.</a:t>
+            </a:r>
+            <a:endParaRPr lang="en-US" sz="1050" dirty="0"/>
           </a:p>
         </p:txBody>
       </p:sp>
@@ -4469,7 +4008,7 @@
                 <a:ea typeface="Cambria" pitchFamily="34" charset="-122"/>
                 <a:cs typeface="Cambria" pitchFamily="34" charset="-120"/>
               </a:rPr>
-              <a:t>Paso 2 · Descargar Responsa</a:t>
+              <a:t>Paso 2 · Reiniciar Claude</a:t>
             </a:r>
             <a:endParaRPr lang="en-US" sz="3200" dirty="0"/>
           </a:p>
@@ -4508,7 +4047,7 @@
                 <a:ea typeface="Calibri" pitchFamily="34" charset="-122"/>
                 <a:cs typeface="Calibri" pitchFamily="34" charset="-120"/>
               </a:rPr>
-              <a:t>Y dejarlo en un lugar donde no se vaya a borrar por error</a:t>
+              <a:t>Es obligatorio: Claude carga los servidores al arrancar</a:t>
             </a:r>
             <a:endParaRPr lang="en-US" sz="1350" dirty="0"/>
           </a:p>
@@ -4522,12 +4061,271 @@
         </p:nvSpPr>
         <p:spPr>
           <a:xfrm>
-            <a:off x="777240" y="1828800"/>
-            <a:ext cx="5120640" cy="2468880"/>
+            <a:off x="777240" y="1810512"/>
+            <a:ext cx="5029200" cy="2103120"/>
           </a:xfrm>
           <a:prstGeom prst="roundRect">
             <a:avLst>
-              <a:gd name="adj" fmla="val 2222"/>
+              <a:gd name="adj" fmla="val 2609"/>
+            </a:avLst>
+          </a:prstGeom>
+          <a:solidFill>
+            <a:srgbClr val="1B2230"/>
+          </a:solidFill>
+          <a:ln/>
+        </p:spPr>
+      </p:sp>
+      <p:sp>
+        <p:nvSpPr>
+          <p:cNvPr id="5" name="Text 3"/>
+          <p:cNvSpPr/>
+          <p:nvPr/>
+        </p:nvSpPr>
+        <p:spPr>
+          <a:xfrm>
+            <a:off x="1069848" y="2048256"/>
+            <a:ext cx="4480560" cy="256032"/>
+          </a:xfrm>
+          <a:prstGeom prst="rect">
+            <a:avLst/>
+          </a:prstGeom>
+          <a:noFill/>
+          <a:ln/>
+        </p:spPr>
+        <p:txBody>
+          <a:bodyPr wrap="square" lIns="0" tIns="0" rIns="0" bIns="0" rtlCol="0" anchor="t"/>
+          <a:lstStyle/>
+          <a:p>
+            <a:pPr indent="0" marL="0">
+              <a:buNone/>
+            </a:pPr>
+            <a:r>
+              <a:rPr lang="en-US" sz="1250" b="1" dirty="0">
+                <a:solidFill>
+                  <a:srgbClr val="C9A574"/>
+                </a:solidFill>
+                <a:latin typeface="Calibri" pitchFamily="34" charset="0"/>
+                <a:ea typeface="Calibri" pitchFamily="34" charset="-122"/>
+                <a:cs typeface="Calibri" pitchFamily="34" charset="-120"/>
+              </a:rPr>
+              <a:t>Windows</a:t>
+            </a:r>
+            <a:endParaRPr lang="en-US" sz="1250" dirty="0"/>
+          </a:p>
+        </p:txBody>
+      </p:sp>
+      <p:sp>
+        <p:nvSpPr>
+          <p:cNvPr id="6" name="Text 4"/>
+          <p:cNvSpPr/>
+          <p:nvPr/>
+        </p:nvSpPr>
+        <p:spPr>
+          <a:xfrm>
+            <a:off x="1069848" y="2359152"/>
+            <a:ext cx="4480560" cy="685800"/>
+          </a:xfrm>
+          <a:prstGeom prst="rect">
+            <a:avLst/>
+          </a:prstGeom>
+          <a:noFill/>
+          <a:ln/>
+        </p:spPr>
+        <p:txBody>
+          <a:bodyPr wrap="square" lIns="0" tIns="0" rIns="0" bIns="0" rtlCol="0" anchor="t"/>
+          <a:lstStyle/>
+          <a:p>
+            <a:pPr indent="0" marL="0">
+              <a:lnSpc>
+                <a:spcPct val="110000"/>
+              </a:lnSpc>
+              <a:buNone/>
+            </a:pPr>
+            <a:r>
+              <a:rPr lang="en-US" sz="1100" dirty="0">
+                <a:solidFill>
+                  <a:srgbClr val="FFFFFF"/>
+                </a:solidFill>
+                <a:latin typeface="Calibri" pitchFamily="34" charset="0"/>
+                <a:ea typeface="Calibri" pitchFamily="34" charset="-122"/>
+                <a:cs typeface="Calibri" pitchFamily="34" charset="-120"/>
+              </a:rPr>
+              <a:t>No basta con cerrar la ventana. Busca el ícono junto al reloj, abajo a la derecha (puede estar tras la flecha ^), clic derecho → Quit. Después ábrelo de nuevo.</a:t>
+            </a:r>
+            <a:endParaRPr lang="en-US" sz="1100" dirty="0"/>
+          </a:p>
+        </p:txBody>
+      </p:sp>
+      <p:sp>
+        <p:nvSpPr>
+          <p:cNvPr id="7" name="Text 5"/>
+          <p:cNvSpPr/>
+          <p:nvPr/>
+        </p:nvSpPr>
+        <p:spPr>
+          <a:xfrm>
+            <a:off x="1069848" y="3090672"/>
+            <a:ext cx="4480560" cy="256032"/>
+          </a:xfrm>
+          <a:prstGeom prst="rect">
+            <a:avLst/>
+          </a:prstGeom>
+          <a:noFill/>
+          <a:ln/>
+        </p:spPr>
+        <p:txBody>
+          <a:bodyPr wrap="square" lIns="0" tIns="0" rIns="0" bIns="0" rtlCol="0" anchor="t"/>
+          <a:lstStyle/>
+          <a:p>
+            <a:pPr indent="0" marL="0">
+              <a:buNone/>
+            </a:pPr>
+            <a:r>
+              <a:rPr lang="en-US" sz="1250" b="1" dirty="0">
+                <a:solidFill>
+                  <a:srgbClr val="C9A574"/>
+                </a:solidFill>
+                <a:latin typeface="Calibri" pitchFamily="34" charset="0"/>
+                <a:ea typeface="Calibri" pitchFamily="34" charset="-122"/>
+                <a:cs typeface="Calibri" pitchFamily="34" charset="-120"/>
+              </a:rPr>
+              <a:t>macOS</a:t>
+            </a:r>
+            <a:endParaRPr lang="en-US" sz="1250" dirty="0"/>
+          </a:p>
+        </p:txBody>
+      </p:sp>
+      <p:sp>
+        <p:nvSpPr>
+          <p:cNvPr id="8" name="Text 6"/>
+          <p:cNvSpPr/>
+          <p:nvPr/>
+        </p:nvSpPr>
+        <p:spPr>
+          <a:xfrm>
+            <a:off x="1069848" y="3401568"/>
+            <a:ext cx="4480560" cy="411480"/>
+          </a:xfrm>
+          <a:prstGeom prst="rect">
+            <a:avLst/>
+          </a:prstGeom>
+          <a:noFill/>
+          <a:ln/>
+        </p:spPr>
+        <p:txBody>
+          <a:bodyPr wrap="square" lIns="0" tIns="0" rIns="0" bIns="0" rtlCol="0" anchor="t"/>
+          <a:lstStyle/>
+          <a:p>
+            <a:pPr indent="0" marL="0">
+              <a:buNone/>
+            </a:pPr>
+            <a:r>
+              <a:rPr lang="en-US" sz="1100" dirty="0">
+                <a:solidFill>
+                  <a:srgbClr val="FFFFFF"/>
+                </a:solidFill>
+                <a:latin typeface="Calibri" pitchFamily="34" charset="0"/>
+                <a:ea typeface="Calibri" pitchFamily="34" charset="-122"/>
+                <a:cs typeface="Calibri" pitchFamily="34" charset="-120"/>
+              </a:rPr>
+              <a:t>Command + Q con Claude en primer plano. Cerrar con la bolita roja no basta.</a:t>
+            </a:r>
+            <a:endParaRPr lang="en-US" sz="1100" dirty="0"/>
+          </a:p>
+        </p:txBody>
+      </p:sp>
+      <p:sp>
+        <p:nvSpPr>
+          <p:cNvPr id="9" name="Text 7"/>
+          <p:cNvSpPr/>
+          <p:nvPr/>
+        </p:nvSpPr>
+        <p:spPr>
+          <a:xfrm>
+            <a:off x="777240" y="4206240"/>
+            <a:ext cx="5029200" cy="274320"/>
+          </a:xfrm>
+          <a:prstGeom prst="rect">
+            <a:avLst/>
+          </a:prstGeom>
+          <a:noFill/>
+          <a:ln/>
+        </p:spPr>
+        <p:txBody>
+          <a:bodyPr wrap="square" lIns="0" tIns="0" rIns="0" bIns="0" rtlCol="0" anchor="t"/>
+          <a:lstStyle/>
+          <a:p>
+            <a:pPr indent="0" marL="0">
+              <a:buNone/>
+            </a:pPr>
+            <a:r>
+              <a:rPr lang="en-US" sz="1150" dirty="0">
+                <a:solidFill>
+                  <a:srgbClr val="1B2230"/>
+                </a:solidFill>
+                <a:latin typeface="Calibri" pitchFamily="34" charset="0"/>
+                <a:ea typeface="Calibri" pitchFamily="34" charset="-122"/>
+                <a:cs typeface="Calibri" pitchFamily="34" charset="-120"/>
+              </a:rPr>
+              <a:t>Y listo. Para comprobarlo, pregúntale algo de derecho chileno:</a:t>
+            </a:r>
+            <a:endParaRPr lang="en-US" sz="1150" dirty="0"/>
+          </a:p>
+        </p:txBody>
+      </p:sp>
+      <p:sp>
+        <p:nvSpPr>
+          <p:cNvPr id="10" name="Text 8"/>
+          <p:cNvSpPr/>
+          <p:nvPr/>
+        </p:nvSpPr>
+        <p:spPr>
+          <a:xfrm>
+            <a:off x="777240" y="4526280"/>
+            <a:ext cx="5029200" cy="548640"/>
+          </a:xfrm>
+          <a:prstGeom prst="rect">
+            <a:avLst/>
+          </a:prstGeom>
+          <a:noFill/>
+          <a:ln/>
+        </p:spPr>
+        <p:txBody>
+          <a:bodyPr wrap="square" lIns="0" tIns="0" rIns="0" bIns="0" rtlCol="0" anchor="t"/>
+          <a:lstStyle/>
+          <a:p>
+            <a:pPr indent="0" marL="0">
+              <a:buNone/>
+            </a:pPr>
+            <a:r>
+              <a:rPr lang="en-US" sz="1500" dirty="0">
+                <a:solidFill>
+                  <a:srgbClr val="1B2230"/>
+                </a:solidFill>
+                <a:latin typeface="Cambria" pitchFamily="34" charset="0"/>
+                <a:ea typeface="Cambria" pitchFamily="34" charset="-122"/>
+                <a:cs typeface="Cambria" pitchFamily="34" charset="-120"/>
+              </a:rPr>
+              <a:t>«¿Qué ha resuelto la Corte Suprema sobre nulidad del despido?»</a:t>
+            </a:r>
+            <a:endParaRPr lang="en-US" sz="1500" dirty="0"/>
+          </a:p>
+        </p:txBody>
+      </p:sp>
+      <p:sp>
+        <p:nvSpPr>
+          <p:cNvPr id="11" name="Shape 9"/>
+          <p:cNvSpPr/>
+          <p:nvPr/>
+        </p:nvSpPr>
+        <p:spPr>
+          <a:xfrm>
+            <a:off x="6263640" y="1810512"/>
+            <a:ext cx="5148072" cy="1371600"/>
+          </a:xfrm>
+          <a:prstGeom prst="roundRect">
+            <a:avLst>
+              <a:gd name="adj" fmla="val 4000"/>
             </a:avLst>
           </a:prstGeom>
           <a:solidFill>
@@ -4543,14 +4341,14 @@
       </p:sp>
       <p:sp>
         <p:nvSpPr>
-          <p:cNvPr id="5" name="Text 3"/>
-          <p:cNvSpPr/>
-          <p:nvPr/>
-        </p:nvSpPr>
-        <p:spPr>
-          <a:xfrm>
-            <a:off x="1069848" y="2066544"/>
-            <a:ext cx="4480560" cy="274320"/>
+          <p:cNvPr id="12" name="Text 10"/>
+          <p:cNvSpPr/>
+          <p:nvPr/>
+        </p:nvSpPr>
+        <p:spPr>
+          <a:xfrm>
+            <a:off x="6556248" y="2011680"/>
+            <a:ext cx="4572000" cy="256032"/>
           </a:xfrm>
           <a:prstGeom prst="rect">
             <a:avLst/>
@@ -4566,30 +4364,30 @@
               <a:buNone/>
             </a:pPr>
             <a:r>
-              <a:rPr lang="en-US" sz="1250" b="1" dirty="0">
-                <a:solidFill>
-                  <a:srgbClr val="1B2230"/>
-                </a:solidFill>
-                <a:latin typeface="Calibri" pitchFamily="34" charset="0"/>
-                <a:ea typeface="Calibri" pitchFamily="34" charset="-122"/>
-                <a:cs typeface="Calibri" pitchFamily="34" charset="-120"/>
-              </a:rPr>
-              <a:t>Opción A · descarga directa</a:t>
-            </a:r>
-            <a:endParaRPr lang="en-US" sz="1250" dirty="0"/>
-          </a:p>
-        </p:txBody>
-      </p:sp>
-      <p:sp>
-        <p:nvSpPr>
-          <p:cNvPr id="6" name="Text 4"/>
-          <p:cNvSpPr/>
-          <p:nvPr/>
-        </p:nvSpPr>
-        <p:spPr>
-          <a:xfrm>
-            <a:off x="1069848" y="2432304"/>
-            <a:ext cx="4480560" cy="329184"/>
+              <a:rPr lang="en-US" sz="1150" b="1" dirty="0">
+                <a:solidFill>
+                  <a:srgbClr val="A87C4F"/>
+                </a:solidFill>
+                <a:latin typeface="Calibri" pitchFamily="34" charset="0"/>
+                <a:ea typeface="Calibri" pitchFamily="34" charset="-122"/>
+                <a:cs typeface="Calibri" pitchFamily="34" charset="-120"/>
+              </a:rPr>
+              <a:t>Funciona si…</a:t>
+            </a:r>
+            <a:endParaRPr lang="en-US" sz="1150" dirty="0"/>
+          </a:p>
+        </p:txBody>
+      </p:sp>
+      <p:sp>
+        <p:nvSpPr>
+          <p:cNvPr id="13" name="Text 11"/>
+          <p:cNvSpPr/>
+          <p:nvPr/>
+        </p:nvSpPr>
+        <p:spPr>
+          <a:xfrm>
+            <a:off x="6556248" y="2322576"/>
+            <a:ext cx="4572000" cy="685800"/>
           </a:xfrm>
           <a:prstGeom prst="rect">
             <a:avLst/>
@@ -4613,7 +4411,7 @@
                 <a:ea typeface="Calibri" pitchFamily="34" charset="-122"/>
                 <a:cs typeface="Calibri" pitchFamily="34" charset="-120"/>
               </a:rPr>
-              <a:t>1.  Entrar a la página del proyecto en GitHub</a:t>
+              <a:t>…la respuesta trae roles, tribunales, fechas y enlaces concretos.</a:t>
             </a:r>
             <a:endParaRPr lang="en-US" sz="1100" dirty="0"/>
           </a:p>
@@ -4621,174 +4419,18 @@
       </p:sp>
       <p:sp>
         <p:nvSpPr>
-          <p:cNvPr id="7" name="Text 5"/>
-          <p:cNvSpPr/>
-          <p:nvPr/>
-        </p:nvSpPr>
-        <p:spPr>
-          <a:xfrm>
-            <a:off x="1069848" y="2798064"/>
-            <a:ext cx="4480560" cy="329184"/>
-          </a:xfrm>
-          <a:prstGeom prst="rect">
-            <a:avLst/>
-          </a:prstGeom>
-          <a:noFill/>
-          <a:ln/>
-        </p:spPr>
-        <p:txBody>
-          <a:bodyPr wrap="square" lIns="0" tIns="0" rIns="0" bIns="0" rtlCol="0" anchor="t"/>
-          <a:lstStyle/>
-          <a:p>
-            <a:pPr indent="0" marL="0">
-              <a:buNone/>
-            </a:pPr>
-            <a:r>
-              <a:rPr lang="en-US" sz="1100" dirty="0">
-                <a:solidFill>
-                  <a:srgbClr val="5A6478"/>
-                </a:solidFill>
-                <a:latin typeface="Calibri" pitchFamily="34" charset="0"/>
-                <a:ea typeface="Calibri" pitchFamily="34" charset="-122"/>
-                <a:cs typeface="Calibri" pitchFamily="34" charset="-120"/>
-              </a:rPr>
-              <a:t>2.  Pulsar el botón verde Code → Download ZIP</a:t>
-            </a:r>
-            <a:endParaRPr lang="en-US" sz="1100" dirty="0"/>
-          </a:p>
-        </p:txBody>
-      </p:sp>
-      <p:sp>
-        <p:nvSpPr>
-          <p:cNvPr id="8" name="Text 6"/>
-          <p:cNvSpPr/>
-          <p:nvPr/>
-        </p:nvSpPr>
-        <p:spPr>
-          <a:xfrm>
-            <a:off x="1069848" y="3163824"/>
-            <a:ext cx="4480560" cy="329184"/>
-          </a:xfrm>
-          <a:prstGeom prst="rect">
-            <a:avLst/>
-          </a:prstGeom>
-          <a:noFill/>
-          <a:ln/>
-        </p:spPr>
-        <p:txBody>
-          <a:bodyPr wrap="square" lIns="0" tIns="0" rIns="0" bIns="0" rtlCol="0" anchor="t"/>
-          <a:lstStyle/>
-          <a:p>
-            <a:pPr indent="0" marL="0">
-              <a:buNone/>
-            </a:pPr>
-            <a:r>
-              <a:rPr lang="en-US" sz="1100" dirty="0">
-                <a:solidFill>
-                  <a:srgbClr val="5A6478"/>
-                </a:solidFill>
-                <a:latin typeface="Calibri" pitchFamily="34" charset="0"/>
-                <a:ea typeface="Calibri" pitchFamily="34" charset="-122"/>
-                <a:cs typeface="Calibri" pitchFamily="34" charset="-120"/>
-              </a:rPr>
-              <a:t>3.  Descomprimir el archivo</a:t>
-            </a:r>
-            <a:endParaRPr lang="en-US" sz="1100" dirty="0"/>
-          </a:p>
-        </p:txBody>
-      </p:sp>
-      <p:sp>
-        <p:nvSpPr>
-          <p:cNvPr id="9" name="Text 7"/>
-          <p:cNvSpPr/>
-          <p:nvPr/>
-        </p:nvSpPr>
-        <p:spPr>
-          <a:xfrm>
-            <a:off x="1069848" y="3529584"/>
-            <a:ext cx="4480560" cy="329184"/>
-          </a:xfrm>
-          <a:prstGeom prst="rect">
-            <a:avLst/>
-          </a:prstGeom>
-          <a:noFill/>
-          <a:ln/>
-        </p:spPr>
-        <p:txBody>
-          <a:bodyPr wrap="square" lIns="0" tIns="0" rIns="0" bIns="0" rtlCol="0" anchor="t"/>
-          <a:lstStyle/>
-          <a:p>
-            <a:pPr indent="0" marL="0">
-              <a:buNone/>
-            </a:pPr>
-            <a:r>
-              <a:rPr lang="en-US" sz="1100" dirty="0">
-                <a:solidFill>
-                  <a:srgbClr val="5A6478"/>
-                </a:solidFill>
-                <a:latin typeface="Calibri" pitchFamily="34" charset="0"/>
-                <a:ea typeface="Calibri" pitchFamily="34" charset="-122"/>
-                <a:cs typeface="Calibri" pitchFamily="34" charset="-120"/>
-              </a:rPr>
-              <a:t>4.  Mover la carpeta a tu carpeta de usuario</a:t>
-            </a:r>
-            <a:endParaRPr lang="en-US" sz="1100" dirty="0"/>
-          </a:p>
-        </p:txBody>
-      </p:sp>
-      <p:sp>
-        <p:nvSpPr>
-          <p:cNvPr id="10" name="Text 8"/>
-          <p:cNvSpPr/>
-          <p:nvPr/>
-        </p:nvSpPr>
-        <p:spPr>
-          <a:xfrm>
-            <a:off x="1069848" y="3840480"/>
-            <a:ext cx="4572000" cy="274320"/>
-          </a:xfrm>
-          <a:prstGeom prst="rect">
-            <a:avLst/>
-          </a:prstGeom>
-          <a:noFill/>
-          <a:ln/>
-        </p:spPr>
-        <p:txBody>
-          <a:bodyPr wrap="square" lIns="0" tIns="0" rIns="0" bIns="0" rtlCol="0" anchor="t"/>
-          <a:lstStyle/>
-          <a:p>
-            <a:pPr indent="0" marL="0">
-              <a:buNone/>
-            </a:pPr>
-            <a:r>
-              <a:rPr lang="en-US" sz="950" dirty="0">
-                <a:solidFill>
-                  <a:srgbClr val="1B2230"/>
-                </a:solidFill>
-                <a:latin typeface="Courier New" pitchFamily="34" charset="0"/>
-                <a:ea typeface="Courier New" pitchFamily="34" charset="-122"/>
-                <a:cs typeface="Courier New" pitchFamily="34" charset="-120"/>
-              </a:rPr>
-              <a:t>Windows:  C:\Users\TU_USUARIO\Responsa          macOS:  ~/Responsa</a:t>
-            </a:r>
-            <a:endParaRPr lang="en-US" sz="950" dirty="0"/>
-          </a:p>
-        </p:txBody>
-      </p:sp>
-      <p:sp>
-        <p:nvSpPr>
-          <p:cNvPr id="11" name="Shape 9"/>
-          <p:cNvSpPr/>
-          <p:nvPr/>
-        </p:nvSpPr>
-        <p:spPr>
-          <a:xfrm>
-            <a:off x="777240" y="4526280"/>
-            <a:ext cx="5120640" cy="1234440"/>
+          <p:cNvPr id="14" name="Shape 12"/>
+          <p:cNvSpPr/>
+          <p:nvPr/>
+        </p:nvSpPr>
+        <p:spPr>
+          <a:xfrm>
+            <a:off x="6263640" y="3310128"/>
+            <a:ext cx="5148072" cy="1371600"/>
           </a:xfrm>
           <a:prstGeom prst="roundRect">
             <a:avLst>
-              <a:gd name="adj" fmla="val 4444"/>
+              <a:gd name="adj" fmla="val 4000"/>
             </a:avLst>
           </a:prstGeom>
           <a:solidFill>
@@ -4804,14 +4446,14 @@
       </p:sp>
       <p:sp>
         <p:nvSpPr>
-          <p:cNvPr id="12" name="Text 10"/>
-          <p:cNvSpPr/>
-          <p:nvPr/>
-        </p:nvSpPr>
-        <p:spPr>
-          <a:xfrm>
-            <a:off x="1069848" y="4736592"/>
-            <a:ext cx="4480560" cy="274320"/>
+          <p:cNvPr id="15" name="Text 13"/>
+          <p:cNvSpPr/>
+          <p:nvPr/>
+        </p:nvSpPr>
+        <p:spPr>
+          <a:xfrm>
+            <a:off x="6556248" y="3511296"/>
+            <a:ext cx="4572000" cy="256032"/>
           </a:xfrm>
           <a:prstGeom prst="rect">
             <a:avLst/>
@@ -4827,34 +4469,112 @@
               <a:buNone/>
             </a:pPr>
             <a:r>
-              <a:rPr lang="en-US" sz="1250" b="1" dirty="0">
-                <a:solidFill>
-                  <a:srgbClr val="1B2230"/>
-                </a:solidFill>
-                <a:latin typeface="Calibri" pitchFamily="34" charset="0"/>
-                <a:ea typeface="Calibri" pitchFamily="34" charset="-122"/>
-                <a:cs typeface="Calibri" pitchFamily="34" charset="-120"/>
-              </a:rPr>
-              <a:t>Opción B · con git</a:t>
-            </a:r>
-            <a:endParaRPr lang="en-US" sz="1250" dirty="0"/>
-          </a:p>
-        </p:txBody>
-      </p:sp>
-      <p:sp>
-        <p:nvSpPr>
-          <p:cNvPr id="13" name="Shape 11"/>
-          <p:cNvSpPr/>
-          <p:nvPr/>
-        </p:nvSpPr>
-        <p:spPr>
-          <a:xfrm>
-            <a:off x="1069848" y="5084064"/>
-            <a:ext cx="4480560" cy="411480"/>
+              <a:rPr lang="en-US" sz="1150" b="1" dirty="0">
+                <a:solidFill>
+                  <a:srgbClr val="6B2C33"/>
+                </a:solidFill>
+                <a:latin typeface="Calibri" pitchFamily="34" charset="0"/>
+                <a:ea typeface="Calibri" pitchFamily="34" charset="-122"/>
+                <a:cs typeface="Calibri" pitchFamily="34" charset="-120"/>
+              </a:rPr>
+              <a:t>No funciona si…</a:t>
+            </a:r>
+            <a:endParaRPr lang="en-US" sz="1150" dirty="0"/>
+          </a:p>
+        </p:txBody>
+      </p:sp>
+      <p:sp>
+        <p:nvSpPr>
+          <p:cNvPr id="16" name="Text 14"/>
+          <p:cNvSpPr/>
+          <p:nvPr/>
+        </p:nvSpPr>
+        <p:spPr>
+          <a:xfrm>
+            <a:off x="6556248" y="3822192"/>
+            <a:ext cx="4572000" cy="731520"/>
+          </a:xfrm>
+          <a:prstGeom prst="rect">
+            <a:avLst/>
+          </a:prstGeom>
+          <a:noFill/>
+          <a:ln/>
+        </p:spPr>
+        <p:txBody>
+          <a:bodyPr wrap="square" lIns="0" tIns="0" rIns="0" bIns="0" rtlCol="0" anchor="t"/>
+          <a:lstStyle/>
+          <a:p>
+            <a:pPr indent="0" marL="0">
+              <a:buNone/>
+            </a:pPr>
+            <a:r>
+              <a:rPr lang="en-US" sz="1100" dirty="0">
+                <a:solidFill>
+                  <a:srgbClr val="5A6478"/>
+                </a:solidFill>
+                <a:latin typeface="Calibri" pitchFamily="34" charset="0"/>
+                <a:ea typeface="Calibri" pitchFamily="34" charset="-122"/>
+                <a:cs typeface="Calibri" pitchFamily="34" charset="-120"/>
+              </a:rPr>
+              <a:t>…explica en general qué es la nulidad del despido sin citar ni un fallo. Casi siempre es que Claude no se cerró del todo.</a:t>
+            </a:r>
+            <a:endParaRPr lang="en-US" sz="1100" dirty="0"/>
+          </a:p>
+        </p:txBody>
+      </p:sp>
+      <p:sp>
+        <p:nvSpPr>
+          <p:cNvPr id="17" name="Text 15"/>
+          <p:cNvSpPr/>
+          <p:nvPr/>
+        </p:nvSpPr>
+        <p:spPr>
+          <a:xfrm>
+            <a:off x="6263640" y="4937760"/>
+            <a:ext cx="5148072" cy="274320"/>
+          </a:xfrm>
+          <a:prstGeom prst="rect">
+            <a:avLst/>
+          </a:prstGeom>
+          <a:noFill/>
+          <a:ln/>
+        </p:spPr>
+        <p:txBody>
+          <a:bodyPr wrap="square" lIns="0" tIns="0" rIns="0" bIns="0" rtlCol="0" anchor="t"/>
+          <a:lstStyle/>
+          <a:p>
+            <a:pPr indent="0" marL="0">
+              <a:buNone/>
+            </a:pPr>
+            <a:r>
+              <a:rPr lang="en-US" sz="1100" dirty="0">
+                <a:solidFill>
+                  <a:srgbClr val="5A6478"/>
+                </a:solidFill>
+                <a:latin typeface="Calibri" pitchFamily="34" charset="0"/>
+                <a:ea typeface="Calibri" pitchFamily="34" charset="-122"/>
+                <a:cs typeface="Calibri" pitchFamily="34" charset="-120"/>
+              </a:rPr>
+              <a:t>También se puede comprobar desde la terminal:</a:t>
+            </a:r>
+            <a:endParaRPr lang="en-US" sz="1100" dirty="0"/>
+          </a:p>
+        </p:txBody>
+      </p:sp>
+      <p:sp>
+        <p:nvSpPr>
+          <p:cNvPr id="18" name="Shape 16"/>
+          <p:cNvSpPr/>
+          <p:nvPr/>
+        </p:nvSpPr>
+        <p:spPr>
+          <a:xfrm>
+            <a:off x="6263640" y="5230368"/>
+            <a:ext cx="5148072" cy="475488"/>
           </a:xfrm>
           <a:prstGeom prst="roundRect">
             <a:avLst>
-              <a:gd name="adj" fmla="val 11111"/>
+              <a:gd name="adj" fmla="val 9615"/>
             </a:avLst>
           </a:prstGeom>
           <a:solidFill>
@@ -4865,14 +4585,14 @@
       </p:sp>
       <p:sp>
         <p:nvSpPr>
-          <p:cNvPr id="14" name="Text 12"/>
-          <p:cNvSpPr/>
-          <p:nvPr/>
-        </p:nvSpPr>
-        <p:spPr>
-          <a:xfrm>
-            <a:off x="1271016" y="5084064"/>
-            <a:ext cx="4078224" cy="411480"/>
+          <p:cNvPr id="19" name="Text 17"/>
+          <p:cNvSpPr/>
+          <p:nvPr/>
+        </p:nvSpPr>
+        <p:spPr>
+          <a:xfrm>
+            <a:off x="6464808" y="5230368"/>
+            <a:ext cx="4745736" cy="475488"/>
           </a:xfrm>
           <a:prstGeom prst="rect">
             <a:avLst/>
@@ -4896,190 +4616,9 @@
                 <a:ea typeface="Courier New" pitchFamily="34" charset="-122"/>
                 <a:cs typeface="Courier New" pitchFamily="34" charset="-120"/>
               </a:rPr>
-              <a:t>git clone &lt;URL&gt; Responsa</a:t>
+              <a:t>cd ~/Responsa  &amp;&amp;  npm run salud</a:t>
             </a:r>
             <a:endParaRPr lang="en-US" sz="1150" dirty="0"/>
-          </a:p>
-        </p:txBody>
-      </p:sp>
-      <p:sp>
-        <p:nvSpPr>
-          <p:cNvPr id="15" name="Shape 13"/>
-          <p:cNvSpPr/>
-          <p:nvPr/>
-        </p:nvSpPr>
-        <p:spPr>
-          <a:xfrm>
-            <a:off x="6400800" y="1828800"/>
-            <a:ext cx="5010912" cy="2194560"/>
-          </a:xfrm>
-          <a:prstGeom prst="roundRect">
-            <a:avLst>
-              <a:gd name="adj" fmla="val 2500"/>
-            </a:avLst>
-          </a:prstGeom>
-          <a:solidFill>
-            <a:srgbClr val="1B2230"/>
-          </a:solidFill>
-          <a:ln/>
-        </p:spPr>
-      </p:sp>
-      <p:sp>
-        <p:nvSpPr>
-          <p:cNvPr id="16" name="Text 14"/>
-          <p:cNvSpPr/>
-          <p:nvPr/>
-        </p:nvSpPr>
-        <p:spPr>
-          <a:xfrm>
-            <a:off x="6766560" y="2103120"/>
-            <a:ext cx="4297680" cy="292608"/>
-          </a:xfrm>
-          <a:prstGeom prst="rect">
-            <a:avLst/>
-          </a:prstGeom>
-          <a:noFill/>
-          <a:ln/>
-        </p:spPr>
-        <p:txBody>
-          <a:bodyPr wrap="square" lIns="0" tIns="0" rIns="0" bIns="0" rtlCol="0" anchor="t"/>
-          <a:lstStyle/>
-          <a:p>
-            <a:pPr indent="0" marL="0">
-              <a:buNone/>
-            </a:pPr>
-            <a:r>
-              <a:rPr lang="en-US" sz="1700" b="1" dirty="0">
-                <a:solidFill>
-                  <a:srgbClr val="C9A574"/>
-                </a:solidFill>
-                <a:latin typeface="Cambria" pitchFamily="34" charset="0"/>
-                <a:ea typeface="Cambria" pitchFamily="34" charset="-122"/>
-                <a:cs typeface="Cambria" pitchFamily="34" charset="-120"/>
-              </a:rPr>
-              <a:t>La carpeta se queda donde la dejes</a:t>
-            </a:r>
-            <a:endParaRPr lang="en-US" sz="1700" dirty="0"/>
-          </a:p>
-        </p:txBody>
-      </p:sp>
-      <p:sp>
-        <p:nvSpPr>
-          <p:cNvPr id="17" name="Text 15"/>
-          <p:cNvSpPr/>
-          <p:nvPr/>
-        </p:nvSpPr>
-        <p:spPr>
-          <a:xfrm>
-            <a:off x="6766560" y="2542032"/>
-            <a:ext cx="4297680" cy="731520"/>
-          </a:xfrm>
-          <a:prstGeom prst="rect">
-            <a:avLst/>
-          </a:prstGeom>
-          <a:noFill/>
-          <a:ln/>
-        </p:spPr>
-        <p:txBody>
-          <a:bodyPr wrap="square" lIns="0" tIns="0" rIns="0" bIns="0" rtlCol="0" anchor="t"/>
-          <a:lstStyle/>
-          <a:p>
-            <a:pPr indent="0" marL="0">
-              <a:lnSpc>
-                <a:spcPct val="115000"/>
-              </a:lnSpc>
-              <a:buNone/>
-            </a:pPr>
-            <a:r>
-              <a:rPr lang="en-US" sz="1150" dirty="0">
-                <a:solidFill>
-                  <a:srgbClr val="FFFFFF"/>
-                </a:solidFill>
-                <a:latin typeface="Calibri" pitchFamily="34" charset="0"/>
-                <a:ea typeface="Calibri" pitchFamily="34" charset="-122"/>
-                <a:cs typeface="Calibri" pitchFamily="34" charset="-120"/>
-              </a:rPr>
-              <a:t>Claude va a apuntar a esa ruta cada vez que arranque. Si después mueves la carpeta o la renombras, deja de encontrarla.</a:t>
-            </a:r>
-            <a:endParaRPr lang="en-US" sz="1150" dirty="0"/>
-          </a:p>
-        </p:txBody>
-      </p:sp>
-      <p:sp>
-        <p:nvSpPr>
-          <p:cNvPr id="18" name="Text 16"/>
-          <p:cNvSpPr/>
-          <p:nvPr/>
-        </p:nvSpPr>
-        <p:spPr>
-          <a:xfrm>
-            <a:off x="6766560" y="3310128"/>
-            <a:ext cx="4297680" cy="548640"/>
-          </a:xfrm>
-          <a:prstGeom prst="rect">
-            <a:avLst/>
-          </a:prstGeom>
-          <a:noFill/>
-          <a:ln/>
-        </p:spPr>
-        <p:txBody>
-          <a:bodyPr wrap="square" lIns="0" tIns="0" rIns="0" bIns="0" rtlCol="0" anchor="t"/>
-          <a:lstStyle/>
-          <a:p>
-            <a:pPr indent="0" marL="0">
-              <a:buNone/>
-            </a:pPr>
-            <a:r>
-              <a:rPr lang="en-US" sz="1050" i="1" dirty="0">
-                <a:solidFill>
-                  <a:srgbClr val="8A93A5"/>
-                </a:solidFill>
-                <a:latin typeface="Calibri" pitchFamily="34" charset="0"/>
-                <a:ea typeface="Calibri" pitchFamily="34" charset="-122"/>
-                <a:cs typeface="Calibri" pitchFamily="34" charset="-120"/>
-              </a:rPr>
-              <a:t>No es grave si pasa: basta con volver a ejecutar el instalador desde la ubicación nueva.</a:t>
-            </a:r>
-            <a:endParaRPr lang="en-US" sz="1050" dirty="0"/>
-          </a:p>
-        </p:txBody>
-      </p:sp>
-      <p:sp>
-        <p:nvSpPr>
-          <p:cNvPr id="19" name="Text 17"/>
-          <p:cNvSpPr/>
-          <p:nvPr/>
-        </p:nvSpPr>
-        <p:spPr>
-          <a:xfrm>
-            <a:off x="6400800" y="4315968"/>
-            <a:ext cx="5010912" cy="457200"/>
-          </a:xfrm>
-          <a:prstGeom prst="rect">
-            <a:avLst/>
-          </a:prstGeom>
-          <a:noFill/>
-          <a:ln/>
-        </p:spPr>
-        <p:txBody>
-          <a:bodyPr wrap="square" lIns="0" tIns="0" rIns="0" bIns="0" rtlCol="0" anchor="t"/>
-          <a:lstStyle/>
-          <a:p>
-            <a:pPr indent="0" marL="0">
-              <a:buNone/>
-            </a:pPr>
-            <a:r>
-              <a:rPr lang="en-US" sz="1100" i="1" dirty="0">
-                <a:solidFill>
-                  <a:srgbClr val="5A6478"/>
-                </a:solidFill>
-                <a:latin typeface="Calibri" pitchFamily="34" charset="0"/>
-                <a:ea typeface="Calibri" pitchFamily="34" charset="-122"/>
-                <a:cs typeface="Calibri" pitchFamily="34" charset="-120"/>
-              </a:rPr>
-              <a:t>No hace falta cuenta en ningún servicio, ni claves, ni suscripciones. Todas las fuentes son públicas y gratuitas.</a:t>
-            </a:r>
-            <a:endParaRPr lang="en-US" sz="1100" dirty="0"/>
           </a:p>
         </p:txBody>
       </p:sp>
@@ -5148,7 +4687,7 @@
                 <a:ea typeface="Cambria" pitchFamily="34" charset="-122"/>
                 <a:cs typeface="Cambria" pitchFamily="34" charset="-120"/>
               </a:rPr>
-              <a:t>Paso 3 · Ejecutar el instalador</a:t>
+              <a:t>Si algo no resulta</a:t>
             </a:r>
             <a:endParaRPr lang="en-US" sz="3200" dirty="0"/>
           </a:p>
@@ -5187,7 +4726,7 @@
                 <a:ea typeface="Calibri" pitchFamily="34" charset="-122"/>
                 <a:cs typeface="Calibri" pitchFamily="34" charset="-120"/>
               </a:rPr>
-              <a:t>Un solo comando hace todo, y se puede repetir sin riesgo</a:t>
+              <a:t>Los cuatro casos que aparecen de verdad</a:t>
             </a:r>
             <a:endParaRPr lang="en-US" sz="1350" dirty="0"/>
           </a:p>
@@ -5195,58 +4734,17 @@
       </p:sp>
       <p:sp>
         <p:nvSpPr>
-          <p:cNvPr id="4" name="Text 2"/>
-          <p:cNvSpPr/>
-          <p:nvPr/>
-        </p:nvSpPr>
-        <p:spPr>
-          <a:xfrm>
-            <a:off x="777240" y="1810512"/>
-            <a:ext cx="4846320" cy="256032"/>
-          </a:xfrm>
-          <a:prstGeom prst="rect">
-            <a:avLst/>
-          </a:prstGeom>
-          <a:noFill/>
-          <a:ln/>
-        </p:spPr>
-        <p:txBody>
-          <a:bodyPr wrap="square" lIns="0" tIns="0" rIns="0" bIns="0" rtlCol="0" anchor="t"/>
-          <a:lstStyle/>
-          <a:p>
-            <a:pPr indent="0" marL="0">
-              <a:buNone/>
-            </a:pPr>
-            <a:r>
-              <a:rPr lang="en-US" sz="1200" dirty="0">
-                <a:solidFill>
-                  <a:srgbClr val="1B2230"/>
-                </a:solidFill>
-                <a:latin typeface="Calibri" pitchFamily="34" charset="0"/>
-                <a:ea typeface="Calibri" pitchFamily="34" charset="-122"/>
-                <a:cs typeface="Calibri" pitchFamily="34" charset="-120"/>
-              </a:rPr>
-              <a:t>Situarse en la carpeta:</a:t>
-            </a:r>
-            <a:endParaRPr lang="en-US" sz="1200" dirty="0"/>
-          </a:p>
-        </p:txBody>
-      </p:sp>
-      <p:sp>
-        <p:nvSpPr>
-          <p:cNvPr id="5" name="Shape 3"/>
-          <p:cNvSpPr/>
-          <p:nvPr/>
-        </p:nvSpPr>
-        <p:spPr>
-          <a:xfrm>
-            <a:off x="777240" y="2103120"/>
-            <a:ext cx="1051560" cy="274320"/>
-          </a:xfrm>
-          <a:prstGeom prst="roundRect">
-            <a:avLst>
-              <a:gd name="adj" fmla="val 13333"/>
-            </a:avLst>
+          <p:cNvPr id="4" name="Shape 2"/>
+          <p:cNvSpPr/>
+          <p:nvPr/>
+        </p:nvSpPr>
+        <p:spPr>
+          <a:xfrm>
+            <a:off x="777240" y="1938528"/>
+            <a:ext cx="329184" cy="329184"/>
+          </a:xfrm>
+          <a:prstGeom prst="ellipse">
+            <a:avLst/>
           </a:prstGeom>
           <a:solidFill>
             <a:srgbClr val="A87C4F"/>
@@ -5256,119 +4754,137 @@
       </p:sp>
       <p:sp>
         <p:nvSpPr>
+          <p:cNvPr id="5" name="Text 3"/>
+          <p:cNvSpPr/>
+          <p:nvPr/>
+        </p:nvSpPr>
+        <p:spPr>
+          <a:xfrm>
+            <a:off x="777240" y="1938528"/>
+            <a:ext cx="329184" cy="329184"/>
+          </a:xfrm>
+          <a:prstGeom prst="rect">
+            <a:avLst/>
+          </a:prstGeom>
+          <a:noFill/>
+          <a:ln/>
+        </p:spPr>
+        <p:txBody>
+          <a:bodyPr wrap="square" lIns="0" tIns="0" rIns="0" bIns="0" rtlCol="0" anchor="ctr"/>
+          <a:lstStyle/>
+          <a:p>
+            <a:pPr algn="ctr" indent="0" marL="0">
+              <a:buNone/>
+            </a:pPr>
+            <a:r>
+              <a:rPr lang="en-US" sz="1200" b="1" dirty="0">
+                <a:solidFill>
+                  <a:srgbClr val="FFFFFF"/>
+                </a:solidFill>
+                <a:latin typeface="Calibri" pitchFamily="34" charset="0"/>
+                <a:ea typeface="Calibri" pitchFamily="34" charset="-122"/>
+                <a:cs typeface="Calibri" pitchFamily="34" charset="-120"/>
+              </a:rPr>
+              <a:t>1</a:t>
+            </a:r>
+            <a:endParaRPr lang="en-US" sz="1200" dirty="0"/>
+          </a:p>
+        </p:txBody>
+      </p:sp>
+      <p:sp>
+        <p:nvSpPr>
           <p:cNvPr id="6" name="Text 4"/>
           <p:cNvSpPr/>
           <p:nvPr/>
         </p:nvSpPr>
         <p:spPr>
           <a:xfrm>
-            <a:off x="777240" y="2103120"/>
-            <a:ext cx="1051560" cy="274320"/>
-          </a:xfrm>
-          <a:prstGeom prst="rect">
-            <a:avLst/>
-          </a:prstGeom>
-          <a:noFill/>
-          <a:ln/>
-        </p:spPr>
-        <p:txBody>
-          <a:bodyPr wrap="square" lIns="0" tIns="0" rIns="0" bIns="0" rtlCol="0" anchor="ctr"/>
-          <a:lstStyle/>
-          <a:p>
-            <a:pPr algn="ctr" indent="0" marL="0">
-              <a:buNone/>
-            </a:pPr>
-            <a:r>
-              <a:rPr lang="en-US" sz="1000" b="1" dirty="0">
-                <a:solidFill>
-                  <a:srgbClr val="FFFFFF"/>
-                </a:solidFill>
-                <a:latin typeface="Calibri" pitchFamily="34" charset="0"/>
-                <a:ea typeface="Calibri" pitchFamily="34" charset="-122"/>
-                <a:cs typeface="Calibri" pitchFamily="34" charset="-120"/>
-              </a:rPr>
-              <a:t>Windows</a:t>
-            </a:r>
-            <a:endParaRPr lang="en-US" sz="1000" dirty="0"/>
-          </a:p>
-        </p:txBody>
-      </p:sp>
-      <p:sp>
-        <p:nvSpPr>
-          <p:cNvPr id="7" name="Shape 5"/>
-          <p:cNvSpPr/>
-          <p:nvPr/>
-        </p:nvSpPr>
-        <p:spPr>
-          <a:xfrm>
-            <a:off x="1965960" y="2066544"/>
-            <a:ext cx="3657600" cy="384048"/>
-          </a:xfrm>
-          <a:prstGeom prst="roundRect">
-            <a:avLst>
-              <a:gd name="adj" fmla="val 11905"/>
-            </a:avLst>
-          </a:prstGeom>
-          <a:solidFill>
-            <a:srgbClr val="1B2230"/>
-          </a:solidFill>
-          <a:ln/>
-        </p:spPr>
-      </p:sp>
-      <p:sp>
-        <p:nvSpPr>
-          <p:cNvPr id="8" name="Text 6"/>
-          <p:cNvSpPr/>
-          <p:nvPr/>
-        </p:nvSpPr>
-        <p:spPr>
-          <a:xfrm>
-            <a:off x="2167128" y="2066544"/>
-            <a:ext cx="3255264" cy="384048"/>
-          </a:xfrm>
-          <a:prstGeom prst="rect">
-            <a:avLst/>
-          </a:prstGeom>
-          <a:noFill/>
-          <a:ln/>
-        </p:spPr>
-        <p:txBody>
-          <a:bodyPr wrap="square" lIns="0" tIns="0" rIns="0" bIns="0" rtlCol="0" anchor="ctr"/>
-          <a:lstStyle/>
-          <a:p>
-            <a:pPr indent="0" marL="0">
-              <a:buNone/>
-            </a:pPr>
-            <a:r>
-              <a:rPr lang="en-US" sz="1150" b="1" dirty="0">
-                <a:solidFill>
-                  <a:srgbClr val="C9A574"/>
-                </a:solidFill>
-                <a:latin typeface="Courier New" pitchFamily="34" charset="0"/>
-                <a:ea typeface="Courier New" pitchFamily="34" charset="-122"/>
-                <a:cs typeface="Courier New" pitchFamily="34" charset="-120"/>
-              </a:rPr>
-              <a:t>cd C:\Users\TU_USUARIO\Responsa</a:t>
-            </a:r>
-            <a:endParaRPr lang="en-US" sz="1150" dirty="0"/>
-          </a:p>
-        </p:txBody>
-      </p:sp>
-      <p:sp>
-        <p:nvSpPr>
-          <p:cNvPr id="9" name="Shape 7"/>
-          <p:cNvSpPr/>
-          <p:nvPr/>
-        </p:nvSpPr>
-        <p:spPr>
-          <a:xfrm>
-            <a:off x="777240" y="2578608"/>
-            <a:ext cx="1051560" cy="274320"/>
-          </a:xfrm>
-          <a:prstGeom prst="roundRect">
-            <a:avLst>
-              <a:gd name="adj" fmla="val 13333"/>
-            </a:avLst>
+            <a:off x="1271016" y="1901952"/>
+            <a:ext cx="3749040" cy="274320"/>
+          </a:xfrm>
+          <a:prstGeom prst="rect">
+            <a:avLst/>
+          </a:prstGeom>
+          <a:noFill/>
+          <a:ln/>
+        </p:spPr>
+        <p:txBody>
+          <a:bodyPr wrap="square" lIns="0" tIns="0" rIns="0" bIns="0" rtlCol="0" anchor="t"/>
+          <a:lstStyle/>
+          <a:p>
+            <a:pPr indent="0" marL="0">
+              <a:buNone/>
+            </a:pPr>
+            <a:r>
+              <a:rPr lang="en-US" sz="1250" b="1" dirty="0">
+                <a:solidFill>
+                  <a:srgbClr val="1B2230"/>
+                </a:solidFill>
+                <a:latin typeface="Calibri" pitchFamily="34" charset="0"/>
+                <a:ea typeface="Calibri" pitchFamily="34" charset="-122"/>
+                <a:cs typeface="Calibri" pitchFamily="34" charset="-120"/>
+              </a:rPr>
+              <a:t>Claude responde sin citar fuentes</a:t>
+            </a:r>
+            <a:endParaRPr lang="en-US" sz="1250" dirty="0"/>
+          </a:p>
+        </p:txBody>
+      </p:sp>
+      <p:sp>
+        <p:nvSpPr>
+          <p:cNvPr id="7" name="Text 5"/>
+          <p:cNvSpPr/>
+          <p:nvPr/>
+        </p:nvSpPr>
+        <p:spPr>
+          <a:xfrm>
+            <a:off x="5166360" y="1883664"/>
+            <a:ext cx="6217920" cy="822960"/>
+          </a:xfrm>
+          <a:prstGeom prst="rect">
+            <a:avLst/>
+          </a:prstGeom>
+          <a:noFill/>
+          <a:ln/>
+        </p:spPr>
+        <p:txBody>
+          <a:bodyPr wrap="square" lIns="0" tIns="0" rIns="0" bIns="0" rtlCol="0" anchor="t"/>
+          <a:lstStyle/>
+          <a:p>
+            <a:pPr indent="0" marL="0">
+              <a:lnSpc>
+                <a:spcPct val="108000"/>
+              </a:lnSpc>
+              <a:buNone/>
+            </a:pPr>
+            <a:r>
+              <a:rPr lang="en-US" sz="1100" dirty="0">
+                <a:solidFill>
+                  <a:srgbClr val="5A6478"/>
+                </a:solidFill>
+                <a:latin typeface="Calibri" pitchFamily="34" charset="0"/>
+                <a:ea typeface="Calibri" pitchFamily="34" charset="-122"/>
+                <a:cs typeface="Calibri" pitchFamily="34" charset="-120"/>
+              </a:rPr>
+              <a:t>No se reinició del todo. En Windows hay que salir desde el ícono junto al reloj; en macOS con Command + Q. Si ya lo hiciste, vuelve a pegar el comando de instalación.</a:t>
+            </a:r>
+            <a:endParaRPr lang="en-US" sz="1100" dirty="0"/>
+          </a:p>
+        </p:txBody>
+      </p:sp>
+      <p:sp>
+        <p:nvSpPr>
+          <p:cNvPr id="8" name="Shape 6"/>
+          <p:cNvSpPr/>
+          <p:nvPr/>
+        </p:nvSpPr>
+        <p:spPr>
+          <a:xfrm>
+            <a:off x="777240" y="2926080"/>
+            <a:ext cx="329184" cy="329184"/>
+          </a:xfrm>
+          <a:prstGeom prst="ellipse">
+            <a:avLst/>
           </a:prstGeom>
           <a:solidFill>
             <a:srgbClr val="A87C4F"/>
@@ -5378,114 +4894,53 @@
       </p:sp>
       <p:sp>
         <p:nvSpPr>
+          <p:cNvPr id="9" name="Text 7"/>
+          <p:cNvSpPr/>
+          <p:nvPr/>
+        </p:nvSpPr>
+        <p:spPr>
+          <a:xfrm>
+            <a:off x="777240" y="2926080"/>
+            <a:ext cx="329184" cy="329184"/>
+          </a:xfrm>
+          <a:prstGeom prst="rect">
+            <a:avLst/>
+          </a:prstGeom>
+          <a:noFill/>
+          <a:ln/>
+        </p:spPr>
+        <p:txBody>
+          <a:bodyPr wrap="square" lIns="0" tIns="0" rIns="0" bIns="0" rtlCol="0" anchor="ctr"/>
+          <a:lstStyle/>
+          <a:p>
+            <a:pPr algn="ctr" indent="0" marL="0">
+              <a:buNone/>
+            </a:pPr>
+            <a:r>
+              <a:rPr lang="en-US" sz="1200" b="1" dirty="0">
+                <a:solidFill>
+                  <a:srgbClr val="FFFFFF"/>
+                </a:solidFill>
+                <a:latin typeface="Calibri" pitchFamily="34" charset="0"/>
+                <a:ea typeface="Calibri" pitchFamily="34" charset="-122"/>
+                <a:cs typeface="Calibri" pitchFamily="34" charset="-120"/>
+              </a:rPr>
+              <a:t>2</a:t>
+            </a:r>
+            <a:endParaRPr lang="en-US" sz="1200" dirty="0"/>
+          </a:p>
+        </p:txBody>
+      </p:sp>
+      <p:sp>
+        <p:nvSpPr>
           <p:cNvPr id="10" name="Text 8"/>
           <p:cNvSpPr/>
           <p:nvPr/>
         </p:nvSpPr>
         <p:spPr>
           <a:xfrm>
-            <a:off x="777240" y="2578608"/>
-            <a:ext cx="1051560" cy="274320"/>
-          </a:xfrm>
-          <a:prstGeom prst="rect">
-            <a:avLst/>
-          </a:prstGeom>
-          <a:noFill/>
-          <a:ln/>
-        </p:spPr>
-        <p:txBody>
-          <a:bodyPr wrap="square" lIns="0" tIns="0" rIns="0" bIns="0" rtlCol="0" anchor="ctr"/>
-          <a:lstStyle/>
-          <a:p>
-            <a:pPr algn="ctr" indent="0" marL="0">
-              <a:buNone/>
-            </a:pPr>
-            <a:r>
-              <a:rPr lang="en-US" sz="1000" b="1" dirty="0">
-                <a:solidFill>
-                  <a:srgbClr val="FFFFFF"/>
-                </a:solidFill>
-                <a:latin typeface="Calibri" pitchFamily="34" charset="0"/>
-                <a:ea typeface="Calibri" pitchFamily="34" charset="-122"/>
-                <a:cs typeface="Calibri" pitchFamily="34" charset="-120"/>
-              </a:rPr>
-              <a:t>macOS</a:t>
-            </a:r>
-            <a:endParaRPr lang="en-US" sz="1000" dirty="0"/>
-          </a:p>
-        </p:txBody>
-      </p:sp>
-      <p:sp>
-        <p:nvSpPr>
-          <p:cNvPr id="11" name="Shape 9"/>
-          <p:cNvSpPr/>
-          <p:nvPr/>
-        </p:nvSpPr>
-        <p:spPr>
-          <a:xfrm>
-            <a:off x="1965960" y="2542032"/>
-            <a:ext cx="3657600" cy="384048"/>
-          </a:xfrm>
-          <a:prstGeom prst="roundRect">
-            <a:avLst>
-              <a:gd name="adj" fmla="val 11905"/>
-            </a:avLst>
-          </a:prstGeom>
-          <a:solidFill>
-            <a:srgbClr val="1B2230"/>
-          </a:solidFill>
-          <a:ln/>
-        </p:spPr>
-      </p:sp>
-      <p:sp>
-        <p:nvSpPr>
-          <p:cNvPr id="12" name="Text 10"/>
-          <p:cNvSpPr/>
-          <p:nvPr/>
-        </p:nvSpPr>
-        <p:spPr>
-          <a:xfrm>
-            <a:off x="2167128" y="2542032"/>
-            <a:ext cx="3255264" cy="384048"/>
-          </a:xfrm>
-          <a:prstGeom prst="rect">
-            <a:avLst/>
-          </a:prstGeom>
-          <a:noFill/>
-          <a:ln/>
-        </p:spPr>
-        <p:txBody>
-          <a:bodyPr wrap="square" lIns="0" tIns="0" rIns="0" bIns="0" rtlCol="0" anchor="ctr"/>
-          <a:lstStyle/>
-          <a:p>
-            <a:pPr indent="0" marL="0">
-              <a:buNone/>
-            </a:pPr>
-            <a:r>
-              <a:rPr lang="en-US" sz="1150" b="1" dirty="0">
-                <a:solidFill>
-                  <a:srgbClr val="C9A574"/>
-                </a:solidFill>
-                <a:latin typeface="Courier New" pitchFamily="34" charset="0"/>
-                <a:ea typeface="Courier New" pitchFamily="34" charset="-122"/>
-                <a:cs typeface="Courier New" pitchFamily="34" charset="-120"/>
-              </a:rPr>
-              <a:t>cd ~/Responsa</a:t>
-            </a:r>
-            <a:endParaRPr lang="en-US" sz="1150" dirty="0"/>
-          </a:p>
-        </p:txBody>
-      </p:sp>
-      <p:sp>
-        <p:nvSpPr>
-          <p:cNvPr id="13" name="Text 11"/>
-          <p:cNvSpPr/>
-          <p:nvPr/>
-        </p:nvSpPr>
-        <p:spPr>
-          <a:xfrm>
-            <a:off x="777240" y="3035808"/>
-            <a:ext cx="4846320" cy="365760"/>
+            <a:off x="1271016" y="2889504"/>
+            <a:ext cx="3749040" cy="274320"/>
           </a:xfrm>
           <a:prstGeom prst="rect">
             <a:avLst/>
@@ -5501,7 +4956,49 @@
               <a:buNone/>
             </a:pPr>
             <a:r>
-              <a:rPr lang="en-US" sz="1000" i="1" dirty="0">
+              <a:rPr lang="en-US" sz="1250" b="1" dirty="0">
+                <a:solidFill>
+                  <a:srgbClr val="1B2230"/>
+                </a:solidFill>
+                <a:latin typeface="Calibri" pitchFamily="34" charset="0"/>
+                <a:ea typeface="Calibri" pitchFamily="34" charset="-122"/>
+                <a:cs typeface="Calibri" pitchFamily="34" charset="-120"/>
+              </a:rPr>
+              <a:t>«no se reconoce como un comando»</a:t>
+            </a:r>
+            <a:endParaRPr lang="en-US" sz="1250" dirty="0"/>
+          </a:p>
+        </p:txBody>
+      </p:sp>
+      <p:sp>
+        <p:nvSpPr>
+          <p:cNvPr id="11" name="Text 9"/>
+          <p:cNvSpPr/>
+          <p:nvPr/>
+        </p:nvSpPr>
+        <p:spPr>
+          <a:xfrm>
+            <a:off x="5166360" y="2871216"/>
+            <a:ext cx="6217920" cy="822960"/>
+          </a:xfrm>
+          <a:prstGeom prst="rect">
+            <a:avLst/>
+          </a:prstGeom>
+          <a:noFill/>
+          <a:ln/>
+        </p:spPr>
+        <p:txBody>
+          <a:bodyPr wrap="square" lIns="0" tIns="0" rIns="0" bIns="0" rtlCol="0" anchor="t"/>
+          <a:lstStyle/>
+          <a:p>
+            <a:pPr indent="0" marL="0">
+              <a:lnSpc>
+                <a:spcPct val="108000"/>
+              </a:lnSpc>
+              <a:buNone/>
+            </a:pPr>
+            <a:r>
+              <a:rPr lang="en-US" sz="1100" dirty="0">
                 <a:solidFill>
                   <a:srgbClr val="5A6478"/>
                 </a:solidFill>
@@ -5509,230 +5006,22 @@
                 <a:ea typeface="Calibri" pitchFamily="34" charset="-122"/>
                 <a:cs typeface="Calibri" pitchFamily="34" charset="-120"/>
               </a:rPr>
-              <a:t>Truco: escribe «cd » y arrastra la carpeta a la ventana; la ruta se escribe sola.</a:t>
-            </a:r>
-            <a:endParaRPr lang="en-US" sz="1000" dirty="0"/>
-          </a:p>
-        </p:txBody>
-      </p:sp>
-      <p:sp>
-        <p:nvSpPr>
-          <p:cNvPr id="14" name="Text 12"/>
-          <p:cNvSpPr/>
-          <p:nvPr/>
-        </p:nvSpPr>
-        <p:spPr>
-          <a:xfrm>
-            <a:off x="777240" y="3529584"/>
-            <a:ext cx="4846320" cy="256032"/>
-          </a:xfrm>
-          <a:prstGeom prst="rect">
-            <a:avLst/>
-          </a:prstGeom>
-          <a:noFill/>
-          <a:ln/>
-        </p:spPr>
-        <p:txBody>
-          <a:bodyPr wrap="square" lIns="0" tIns="0" rIns="0" bIns="0" rtlCol="0" anchor="t"/>
-          <a:lstStyle/>
-          <a:p>
-            <a:pPr indent="0" marL="0">
-              <a:buNone/>
-            </a:pPr>
-            <a:r>
-              <a:rPr lang="en-US" sz="1200" dirty="0">
-                <a:solidFill>
-                  <a:srgbClr val="1B2230"/>
-                </a:solidFill>
-                <a:latin typeface="Calibri" pitchFamily="34" charset="0"/>
-                <a:ea typeface="Calibri" pitchFamily="34" charset="-122"/>
-                <a:cs typeface="Calibri" pitchFamily="34" charset="-120"/>
-              </a:rPr>
-              <a:t>Y ejecutar:</a:t>
-            </a:r>
-            <a:endParaRPr lang="en-US" sz="1200" dirty="0"/>
-          </a:p>
-        </p:txBody>
-      </p:sp>
-      <p:sp>
-        <p:nvSpPr>
-          <p:cNvPr id="15" name="Shape 13"/>
-          <p:cNvSpPr/>
-          <p:nvPr/>
-        </p:nvSpPr>
-        <p:spPr>
-          <a:xfrm>
-            <a:off x="777240" y="3822192"/>
-            <a:ext cx="4846320" cy="566928"/>
-          </a:xfrm>
-          <a:prstGeom prst="roundRect">
-            <a:avLst>
-              <a:gd name="adj" fmla="val 8065"/>
-            </a:avLst>
-          </a:prstGeom>
-          <a:solidFill>
-            <a:srgbClr val="1B2230"/>
-          </a:solidFill>
-          <a:ln/>
-        </p:spPr>
-      </p:sp>
-      <p:sp>
-        <p:nvSpPr>
-          <p:cNvPr id="16" name="Text 14"/>
-          <p:cNvSpPr/>
-          <p:nvPr/>
-        </p:nvSpPr>
-        <p:spPr>
-          <a:xfrm>
-            <a:off x="978408" y="3822192"/>
-            <a:ext cx="4443984" cy="566928"/>
-          </a:xfrm>
-          <a:prstGeom prst="rect">
-            <a:avLst/>
-          </a:prstGeom>
-          <a:noFill/>
-          <a:ln/>
-        </p:spPr>
-        <p:txBody>
-          <a:bodyPr wrap="square" lIns="0" tIns="0" rIns="0" bIns="0" rtlCol="0" anchor="ctr"/>
-          <a:lstStyle/>
-          <a:p>
-            <a:pPr indent="0" marL="0">
-              <a:buNone/>
-            </a:pPr>
-            <a:r>
-              <a:rPr lang="en-US" sz="1150" b="1" dirty="0">
-                <a:solidFill>
-                  <a:srgbClr val="C9A574"/>
-                </a:solidFill>
-                <a:latin typeface="Courier New" pitchFamily="34" charset="0"/>
-                <a:ea typeface="Courier New" pitchFamily="34" charset="-122"/>
-                <a:cs typeface="Courier New" pitchFamily="34" charset="-120"/>
-              </a:rPr>
-              <a:t>node instalar.mjs</a:t>
-            </a:r>
-            <a:endParaRPr lang="en-US" sz="1150" dirty="0"/>
-          </a:p>
-        </p:txBody>
-      </p:sp>
-      <p:sp>
-        <p:nvSpPr>
-          <p:cNvPr id="17" name="Text 15"/>
-          <p:cNvSpPr/>
-          <p:nvPr/>
-        </p:nvSpPr>
-        <p:spPr>
-          <a:xfrm>
-            <a:off x="777240" y="4572000"/>
-            <a:ext cx="4846320" cy="822960"/>
-          </a:xfrm>
-          <a:prstGeom prst="rect">
-            <a:avLst/>
-          </a:prstGeom>
-          <a:noFill/>
-          <a:ln/>
-        </p:spPr>
-        <p:txBody>
-          <a:bodyPr wrap="square" lIns="0" tIns="0" rIns="0" bIns="0" rtlCol="0" anchor="t"/>
-          <a:lstStyle/>
-          <a:p>
-            <a:pPr indent="0" marL="0">
-              <a:lnSpc>
-                <a:spcPct val="110000"/>
-              </a:lnSpc>
-              <a:buNone/>
-            </a:pPr>
-            <a:r>
-              <a:rPr lang="en-US" sz="1050" dirty="0">
-                <a:solidFill>
-                  <a:srgbClr val="5A6478"/>
-                </a:solidFill>
-                <a:latin typeface="Calibri" pitchFamily="34" charset="0"/>
-                <a:ea typeface="Calibri" pitchFamily="34" charset="-122"/>
-                <a:cs typeface="Calibri" pitchFamily="34" charset="-120"/>
-              </a:rPr>
-              <a:t>El paso 5 es el más lento, unos minutos. Es a propósito: la Biblioteca del Congreso limita las descargas grandes, y bajar los códigos con calma una vez evita topes durante el uso normal.</a:t>
-            </a:r>
-            <a:endParaRPr lang="en-US" sz="1050" dirty="0"/>
-          </a:p>
-        </p:txBody>
-      </p:sp>
-      <p:sp>
-        <p:nvSpPr>
-          <p:cNvPr id="18" name="Shape 16"/>
-          <p:cNvSpPr/>
-          <p:nvPr/>
-        </p:nvSpPr>
-        <p:spPr>
-          <a:xfrm>
-            <a:off x="6172200" y="1810512"/>
-            <a:ext cx="5239512" cy="3246120"/>
-          </a:xfrm>
-          <a:prstGeom prst="roundRect">
-            <a:avLst>
-              <a:gd name="adj" fmla="val 1690"/>
-            </a:avLst>
-          </a:prstGeom>
-          <a:solidFill>
-            <a:srgbClr val="FFFFFF"/>
-          </a:solidFill>
-          <a:ln w="9525">
-            <a:solidFill>
-              <a:srgbClr val="E3DED3"/>
-            </a:solidFill>
-            <a:prstDash val="solid"/>
-          </a:ln>
-        </p:spPr>
-      </p:sp>
-      <p:sp>
-        <p:nvSpPr>
-          <p:cNvPr id="19" name="Text 17"/>
-          <p:cNvSpPr/>
-          <p:nvPr/>
-        </p:nvSpPr>
-        <p:spPr>
-          <a:xfrm>
-            <a:off x="6492240" y="2029968"/>
-            <a:ext cx="4572000" cy="274320"/>
-          </a:xfrm>
-          <a:prstGeom prst="rect">
-            <a:avLst/>
-          </a:prstGeom>
-          <a:noFill/>
-          <a:ln/>
-        </p:spPr>
-        <p:txBody>
-          <a:bodyPr wrap="square" lIns="0" tIns="0" rIns="0" bIns="0" rtlCol="0" anchor="t"/>
-          <a:lstStyle/>
-          <a:p>
-            <a:pPr indent="0" marL="0">
-              <a:buNone/>
-            </a:pPr>
-            <a:r>
-              <a:rPr lang="en-US" sz="1200" b="1" dirty="0">
-                <a:solidFill>
-                  <a:srgbClr val="1B2230"/>
-                </a:solidFill>
-                <a:latin typeface="Calibri" pitchFamily="34" charset="0"/>
-                <a:ea typeface="Calibri" pitchFamily="34" charset="-122"/>
-                <a:cs typeface="Calibri" pitchFamily="34" charset="-120"/>
-              </a:rPr>
-              <a:t>Qué vas a ver en pantalla</a:t>
-            </a:r>
-            <a:endParaRPr lang="en-US" sz="1200" dirty="0"/>
-          </a:p>
-        </p:txBody>
-      </p:sp>
-      <p:sp>
-        <p:nvSpPr>
-          <p:cNvPr id="20" name="Shape 18"/>
-          <p:cNvSpPr/>
-          <p:nvPr/>
-        </p:nvSpPr>
-        <p:spPr>
-          <a:xfrm>
-            <a:off x="6492240" y="2395728"/>
-            <a:ext cx="274320" cy="274320"/>
+              <a:t>La terminal se abrió antes de que se instalara Node. Ciérrala, abre una nueva y pega el comando otra vez.</a:t>
+            </a:r>
+            <a:endParaRPr lang="en-US" sz="1100" dirty="0"/>
+          </a:p>
+        </p:txBody>
+      </p:sp>
+      <p:sp>
+        <p:nvSpPr>
+          <p:cNvPr id="12" name="Shape 10"/>
+          <p:cNvSpPr/>
+          <p:nvPr/>
+        </p:nvSpPr>
+        <p:spPr>
+          <a:xfrm>
+            <a:off x="777240" y="3913632"/>
+            <a:ext cx="329184" cy="329184"/>
           </a:xfrm>
           <a:prstGeom prst="ellipse">
             <a:avLst/>
@@ -5745,14 +5034,14 @@
       </p:sp>
       <p:sp>
         <p:nvSpPr>
-          <p:cNvPr id="21" name="Text 19"/>
-          <p:cNvSpPr/>
-          <p:nvPr/>
-        </p:nvSpPr>
-        <p:spPr>
-          <a:xfrm>
-            <a:off x="6492240" y="2395728"/>
-            <a:ext cx="274320" cy="274320"/>
+          <p:cNvPr id="13" name="Text 11"/>
+          <p:cNvSpPr/>
+          <p:nvPr/>
+        </p:nvSpPr>
+        <p:spPr>
+          <a:xfrm>
+            <a:off x="777240" y="3913632"/>
+            <a:ext cx="329184" cy="329184"/>
           </a:xfrm>
           <a:prstGeom prst="rect">
             <a:avLst/>
@@ -5776,7 +5065,7 @@
                 <a:ea typeface="Calibri" pitchFamily="34" charset="-122"/>
                 <a:cs typeface="Calibri" pitchFamily="34" charset="-120"/>
               </a:rPr>
-              <a:t>1</a:t>
+              <a:t>3</a:t>
             </a:r>
             <a:endParaRPr lang="en-US" sz="1200" dirty="0"/>
           </a:p>
@@ -5784,14 +5073,14 @@
       </p:sp>
       <p:sp>
         <p:nvSpPr>
-          <p:cNvPr id="22" name="Text 20"/>
-          <p:cNvSpPr/>
-          <p:nvPr/>
-        </p:nvSpPr>
-        <p:spPr>
-          <a:xfrm>
-            <a:off x="6876288" y="2414016"/>
-            <a:ext cx="4206240" cy="274320"/>
+          <p:cNvPr id="14" name="Text 12"/>
+          <p:cNvSpPr/>
+          <p:nvPr/>
+        </p:nvSpPr>
+        <p:spPr>
+          <a:xfrm>
+            <a:off x="1271016" y="3877056"/>
+            <a:ext cx="3749040" cy="274320"/>
           </a:xfrm>
           <a:prstGeom prst="rect">
             <a:avLst/>
@@ -5807,6 +5096,48 @@
               <a:buNone/>
             </a:pPr>
             <a:r>
+              <a:rPr lang="en-US" sz="1250" b="1" dirty="0">
+                <a:solidFill>
+                  <a:srgbClr val="1B2230"/>
+                </a:solidFill>
+                <a:latin typeface="Calibri" pitchFamily="34" charset="0"/>
+                <a:ea typeface="Calibri" pitchFamily="34" charset="-122"/>
+                <a:cs typeface="Calibri" pitchFamily="34" charset="-120"/>
+              </a:rPr>
+              <a:t>«Ley Chile alcanzó su límite de servicio»</a:t>
+            </a:r>
+            <a:endParaRPr lang="en-US" sz="1250" dirty="0"/>
+          </a:p>
+        </p:txBody>
+      </p:sp>
+      <p:sp>
+        <p:nvSpPr>
+          <p:cNvPr id="15" name="Text 13"/>
+          <p:cNvSpPr/>
+          <p:nvPr/>
+        </p:nvSpPr>
+        <p:spPr>
+          <a:xfrm>
+            <a:off x="5166360" y="3858768"/>
+            <a:ext cx="6217920" cy="822960"/>
+          </a:xfrm>
+          <a:prstGeom prst="rect">
+            <a:avLst/>
+          </a:prstGeom>
+          <a:noFill/>
+          <a:ln/>
+        </p:spPr>
+        <p:txBody>
+          <a:bodyPr wrap="square" lIns="0" tIns="0" rIns="0" bIns="0" rtlCol="0" anchor="t"/>
+          <a:lstStyle/>
+          <a:p>
+            <a:pPr indent="0" marL="0">
+              <a:lnSpc>
+                <a:spcPct val="108000"/>
+              </a:lnSpc>
+              <a:buNone/>
+            </a:pPr>
+            <a:r>
               <a:rPr lang="en-US" sz="1100" dirty="0">
                 <a:solidFill>
                   <a:srgbClr val="5A6478"/>
@@ -5815,7 +5146,7 @@
                 <a:ea typeface="Calibri" pitchFamily="34" charset="-122"/>
                 <a:cs typeface="Calibri" pitchFamily="34" charset="-120"/>
               </a:rPr>
-              <a:t>Comprueba Node</a:t>
+              <a:t>La Biblioteca del Congreso limita las descargas grandes. Espera un minuto; el propio comando de instalación retoma sólo lo que falta.</a:t>
             </a:r>
             <a:endParaRPr lang="en-US" sz="1100" dirty="0"/>
           </a:p>
@@ -5823,14 +5154,14 @@
       </p:sp>
       <p:sp>
         <p:nvSpPr>
-          <p:cNvPr id="23" name="Shape 21"/>
-          <p:cNvSpPr/>
-          <p:nvPr/>
-        </p:nvSpPr>
-        <p:spPr>
-          <a:xfrm>
-            <a:off x="6492240" y="2798064"/>
-            <a:ext cx="274320" cy="274320"/>
+          <p:cNvPr id="16" name="Shape 14"/>
+          <p:cNvSpPr/>
+          <p:nvPr/>
+        </p:nvSpPr>
+        <p:spPr>
+          <a:xfrm>
+            <a:off x="777240" y="4901184"/>
+            <a:ext cx="329184" cy="329184"/>
           </a:xfrm>
           <a:prstGeom prst="ellipse">
             <a:avLst/>
@@ -5843,14 +5174,14 @@
       </p:sp>
       <p:sp>
         <p:nvSpPr>
-          <p:cNvPr id="24" name="Text 22"/>
-          <p:cNvSpPr/>
-          <p:nvPr/>
-        </p:nvSpPr>
-        <p:spPr>
-          <a:xfrm>
-            <a:off x="6492240" y="2798064"/>
-            <a:ext cx="274320" cy="274320"/>
+          <p:cNvPr id="17" name="Text 15"/>
+          <p:cNvSpPr/>
+          <p:nvPr/>
+        </p:nvSpPr>
+        <p:spPr>
+          <a:xfrm>
+            <a:off x="777240" y="4901184"/>
+            <a:ext cx="329184" cy="329184"/>
           </a:xfrm>
           <a:prstGeom prst="rect">
             <a:avLst/>
@@ -5874,7 +5205,7 @@
                 <a:ea typeface="Calibri" pitchFamily="34" charset="-122"/>
                 <a:cs typeface="Calibri" pitchFamily="34" charset="-120"/>
               </a:rPr>
-              <a:t>2</a:t>
+              <a:t>4</a:t>
             </a:r>
             <a:endParaRPr lang="en-US" sz="1200" dirty="0"/>
           </a:p>
@@ -5882,14 +5213,14 @@
       </p:sp>
       <p:sp>
         <p:nvSpPr>
-          <p:cNvPr id="25" name="Text 23"/>
-          <p:cNvSpPr/>
-          <p:nvPr/>
-        </p:nvSpPr>
-        <p:spPr>
-          <a:xfrm>
-            <a:off x="6876288" y="2816352"/>
-            <a:ext cx="4206240" cy="274320"/>
+          <p:cNvPr id="18" name="Text 16"/>
+          <p:cNvSpPr/>
+          <p:nvPr/>
+        </p:nvSpPr>
+        <p:spPr>
+          <a:xfrm>
+            <a:off x="1271016" y="4864608"/>
+            <a:ext cx="3749040" cy="274320"/>
           </a:xfrm>
           <a:prstGeom prst="rect">
             <a:avLst/>
@@ -5905,6 +5236,48 @@
               <a:buNone/>
             </a:pPr>
             <a:r>
+              <a:rPr lang="en-US" sz="1250" b="1" dirty="0">
+                <a:solidFill>
+                  <a:srgbClr val="1B2230"/>
+                </a:solidFill>
+                <a:latin typeface="Calibri" pitchFamily="34" charset="0"/>
+                <a:ea typeface="Calibri" pitchFamily="34" charset="-122"/>
+                <a:cs typeface="Calibri" pitchFamily="34" charset="-120"/>
+              </a:rPr>
+              <a:t>Una fuente aparece caída</a:t>
+            </a:r>
+            <a:endParaRPr lang="en-US" sz="1250" dirty="0"/>
+          </a:p>
+        </p:txBody>
+      </p:sp>
+      <p:sp>
+        <p:nvSpPr>
+          <p:cNvPr id="19" name="Text 17"/>
+          <p:cNvSpPr/>
+          <p:nvPr/>
+        </p:nvSpPr>
+        <p:spPr>
+          <a:xfrm>
+            <a:off x="5166360" y="4846320"/>
+            <a:ext cx="6217920" cy="822960"/>
+          </a:xfrm>
+          <a:prstGeom prst="rect">
+            <a:avLst/>
+          </a:prstGeom>
+          <a:noFill/>
+          <a:ln/>
+        </p:spPr>
+        <p:txBody>
+          <a:bodyPr wrap="square" lIns="0" tIns="0" rIns="0" bIns="0" rtlCol="0" anchor="t"/>
+          <a:lstStyle/>
+          <a:p>
+            <a:pPr indent="0" marL="0">
+              <a:lnSpc>
+                <a:spcPct val="108000"/>
+              </a:lnSpc>
+              <a:buNone/>
+            </a:pPr>
+            <a:r>
               <a:rPr lang="en-US" sz="1100" dirty="0">
                 <a:solidFill>
                   <a:srgbClr val="5A6478"/>
@@ -5913,7 +5286,7 @@
                 <a:ea typeface="Calibri" pitchFamily="34" charset="-122"/>
                 <a:cs typeface="Calibri" pitchFamily="34" charset="-120"/>
               </a:rPr>
-              <a:t>Instala dependencias</a:t>
+              <a:t>Son sitios de organismos públicos y a veces se caen. No es la instalación: npm run salud dice cuál está fallando.</a:t>
             </a:r>
             <a:endParaRPr lang="en-US" sz="1100" dirty="0"/>
           </a:p>
@@ -5921,493 +5294,62 @@
       </p:sp>
       <p:sp>
         <p:nvSpPr>
-          <p:cNvPr id="26" name="Shape 24"/>
-          <p:cNvSpPr/>
-          <p:nvPr/>
-        </p:nvSpPr>
-        <p:spPr>
-          <a:xfrm>
-            <a:off x="6492240" y="3200400"/>
-            <a:ext cx="274320" cy="274320"/>
-          </a:xfrm>
-          <a:prstGeom prst="ellipse">
-            <a:avLst/>
-          </a:prstGeom>
-          <a:solidFill>
-            <a:srgbClr val="A87C4F"/>
-          </a:solidFill>
-          <a:ln/>
-        </p:spPr>
-      </p:sp>
-      <p:sp>
-        <p:nvSpPr>
-          <p:cNvPr id="27" name="Text 25"/>
-          <p:cNvSpPr/>
-          <p:nvPr/>
-        </p:nvSpPr>
-        <p:spPr>
-          <a:xfrm>
-            <a:off x="6492240" y="3200400"/>
-            <a:ext cx="274320" cy="274320"/>
-          </a:xfrm>
-          <a:prstGeom prst="rect">
-            <a:avLst/>
-          </a:prstGeom>
-          <a:noFill/>
-          <a:ln/>
-        </p:spPr>
-        <p:txBody>
-          <a:bodyPr wrap="square" lIns="0" tIns="0" rIns="0" bIns="0" rtlCol="0" anchor="ctr"/>
-          <a:lstStyle/>
-          <a:p>
-            <a:pPr algn="ctr" indent="0" marL="0">
-              <a:buNone/>
-            </a:pPr>
-            <a:r>
-              <a:rPr lang="en-US" sz="1200" b="1" dirty="0">
-                <a:solidFill>
-                  <a:srgbClr val="FFFFFF"/>
-                </a:solidFill>
-                <a:latin typeface="Calibri" pitchFamily="34" charset="0"/>
-                <a:ea typeface="Calibri" pitchFamily="34" charset="-122"/>
-                <a:cs typeface="Calibri" pitchFamily="34" charset="-120"/>
-              </a:rPr>
-              <a:t>3</a:t>
-            </a:r>
-            <a:endParaRPr lang="en-US" sz="1200" dirty="0"/>
-          </a:p>
-        </p:txBody>
-      </p:sp>
-      <p:sp>
-        <p:nvSpPr>
-          <p:cNvPr id="28" name="Text 26"/>
-          <p:cNvSpPr/>
-          <p:nvPr/>
-        </p:nvSpPr>
-        <p:spPr>
-          <a:xfrm>
-            <a:off x="6876288" y="3218688"/>
-            <a:ext cx="4206240" cy="274320"/>
-          </a:xfrm>
-          <a:prstGeom prst="rect">
-            <a:avLst/>
-          </a:prstGeom>
-          <a:noFill/>
-          <a:ln/>
-        </p:spPr>
-        <p:txBody>
-          <a:bodyPr wrap="square" lIns="0" tIns="0" rIns="0" bIns="0" rtlCol="0" anchor="t"/>
-          <a:lstStyle/>
-          <a:p>
-            <a:pPr indent="0" marL="0">
-              <a:buNone/>
-            </a:pPr>
-            <a:r>
-              <a:rPr lang="en-US" sz="1100" dirty="0">
-                <a:solidFill>
-                  <a:srgbClr val="5A6478"/>
-                </a:solidFill>
-                <a:latin typeface="Calibri" pitchFamily="34" charset="0"/>
-                <a:ea typeface="Calibri" pitchFamily="34" charset="-122"/>
-                <a:cs typeface="Calibri" pitchFamily="34" charset="-120"/>
-              </a:rPr>
-              <a:t>Registra el servidor en Claude</a:t>
-            </a:r>
-            <a:endParaRPr lang="en-US" sz="1100" dirty="0"/>
-          </a:p>
-        </p:txBody>
-      </p:sp>
-      <p:sp>
-        <p:nvSpPr>
-          <p:cNvPr id="29" name="Shape 27"/>
-          <p:cNvSpPr/>
-          <p:nvPr/>
-        </p:nvSpPr>
-        <p:spPr>
-          <a:xfrm>
-            <a:off x="6492240" y="3602736"/>
-            <a:ext cx="274320" cy="274320"/>
-          </a:xfrm>
-          <a:prstGeom prst="ellipse">
-            <a:avLst/>
-          </a:prstGeom>
-          <a:solidFill>
-            <a:srgbClr val="A87C4F"/>
-          </a:solidFill>
-          <a:ln/>
-        </p:spPr>
-      </p:sp>
-      <p:sp>
-        <p:nvSpPr>
-          <p:cNvPr id="30" name="Text 28"/>
-          <p:cNvSpPr/>
-          <p:nvPr/>
-        </p:nvSpPr>
-        <p:spPr>
-          <a:xfrm>
-            <a:off x="6492240" y="3602736"/>
-            <a:ext cx="274320" cy="274320"/>
-          </a:xfrm>
-          <a:prstGeom prst="rect">
-            <a:avLst/>
-          </a:prstGeom>
-          <a:noFill/>
-          <a:ln/>
-        </p:spPr>
-        <p:txBody>
-          <a:bodyPr wrap="square" lIns="0" tIns="0" rIns="0" bIns="0" rtlCol="0" anchor="ctr"/>
-          <a:lstStyle/>
-          <a:p>
-            <a:pPr algn="ctr" indent="0" marL="0">
-              <a:buNone/>
-            </a:pPr>
-            <a:r>
-              <a:rPr lang="en-US" sz="1200" b="1" dirty="0">
-                <a:solidFill>
-                  <a:srgbClr val="FFFFFF"/>
-                </a:solidFill>
-                <a:latin typeface="Calibri" pitchFamily="34" charset="0"/>
-                <a:ea typeface="Calibri" pitchFamily="34" charset="-122"/>
-                <a:cs typeface="Calibri" pitchFamily="34" charset="-120"/>
-              </a:rPr>
-              <a:t>4</a:t>
-            </a:r>
-            <a:endParaRPr lang="en-US" sz="1200" dirty="0"/>
-          </a:p>
-        </p:txBody>
-      </p:sp>
-      <p:sp>
-        <p:nvSpPr>
-          <p:cNvPr id="31" name="Text 29"/>
-          <p:cNvSpPr/>
-          <p:nvPr/>
-        </p:nvSpPr>
-        <p:spPr>
-          <a:xfrm>
-            <a:off x="6876288" y="3621024"/>
-            <a:ext cx="4206240" cy="274320"/>
-          </a:xfrm>
-          <a:prstGeom prst="rect">
-            <a:avLst/>
-          </a:prstGeom>
-          <a:noFill/>
-          <a:ln/>
-        </p:spPr>
-        <p:txBody>
-          <a:bodyPr wrap="square" lIns="0" tIns="0" rIns="0" bIns="0" rtlCol="0" anchor="t"/>
-          <a:lstStyle/>
-          <a:p>
-            <a:pPr indent="0" marL="0">
-              <a:buNone/>
-            </a:pPr>
-            <a:r>
-              <a:rPr lang="en-US" sz="1100" dirty="0">
-                <a:solidFill>
-                  <a:srgbClr val="5A6478"/>
-                </a:solidFill>
-                <a:latin typeface="Calibri" pitchFamily="34" charset="0"/>
-                <a:ea typeface="Calibri" pitchFamily="34" charset="-122"/>
-                <a:cs typeface="Calibri" pitchFamily="34" charset="-120"/>
-              </a:rPr>
-              <a:t>Instala la skill de método</a:t>
-            </a:r>
-            <a:endParaRPr lang="en-US" sz="1100" dirty="0"/>
-          </a:p>
-        </p:txBody>
-      </p:sp>
-      <p:sp>
-        <p:nvSpPr>
-          <p:cNvPr id="32" name="Shape 30"/>
-          <p:cNvSpPr/>
-          <p:nvPr/>
-        </p:nvSpPr>
-        <p:spPr>
-          <a:xfrm>
-            <a:off x="6492240" y="4005072"/>
-            <a:ext cx="274320" cy="274320"/>
-          </a:xfrm>
-          <a:prstGeom prst="ellipse">
-            <a:avLst/>
-          </a:prstGeom>
-          <a:solidFill>
-            <a:srgbClr val="A87C4F"/>
-          </a:solidFill>
-          <a:ln/>
-        </p:spPr>
-      </p:sp>
-      <p:sp>
-        <p:nvSpPr>
-          <p:cNvPr id="33" name="Text 31"/>
-          <p:cNvSpPr/>
-          <p:nvPr/>
-        </p:nvSpPr>
-        <p:spPr>
-          <a:xfrm>
-            <a:off x="6492240" y="4005072"/>
-            <a:ext cx="274320" cy="274320"/>
-          </a:xfrm>
-          <a:prstGeom prst="rect">
-            <a:avLst/>
-          </a:prstGeom>
-          <a:noFill/>
-          <a:ln/>
-        </p:spPr>
-        <p:txBody>
-          <a:bodyPr wrap="square" lIns="0" tIns="0" rIns="0" bIns="0" rtlCol="0" anchor="ctr"/>
-          <a:lstStyle/>
-          <a:p>
-            <a:pPr algn="ctr" indent="0" marL="0">
-              <a:buNone/>
-            </a:pPr>
-            <a:r>
-              <a:rPr lang="en-US" sz="1200" b="1" dirty="0">
-                <a:solidFill>
-                  <a:srgbClr val="FFFFFF"/>
-                </a:solidFill>
-                <a:latin typeface="Calibri" pitchFamily="34" charset="0"/>
-                <a:ea typeface="Calibri" pitchFamily="34" charset="-122"/>
-                <a:cs typeface="Calibri" pitchFamily="34" charset="-120"/>
-              </a:rPr>
-              <a:t>5</a:t>
-            </a:r>
-            <a:endParaRPr lang="en-US" sz="1200" dirty="0"/>
-          </a:p>
-        </p:txBody>
-      </p:sp>
-      <p:sp>
-        <p:nvSpPr>
-          <p:cNvPr id="34" name="Text 32"/>
-          <p:cNvSpPr/>
-          <p:nvPr/>
-        </p:nvSpPr>
-        <p:spPr>
-          <a:xfrm>
-            <a:off x="6876288" y="4023360"/>
-            <a:ext cx="4206240" cy="274320"/>
-          </a:xfrm>
-          <a:prstGeom prst="rect">
-            <a:avLst/>
-          </a:prstGeom>
-          <a:noFill/>
-          <a:ln/>
-        </p:spPr>
-        <p:txBody>
-          <a:bodyPr wrap="square" lIns="0" tIns="0" rIns="0" bIns="0" rtlCol="0" anchor="t"/>
-          <a:lstStyle/>
-          <a:p>
-            <a:pPr indent="0" marL="0">
-              <a:buNone/>
-            </a:pPr>
-            <a:r>
-              <a:rPr lang="en-US" sz="1100" dirty="0">
-                <a:solidFill>
-                  <a:srgbClr val="5A6478"/>
-                </a:solidFill>
-                <a:latin typeface="Calibri" pitchFamily="34" charset="0"/>
-                <a:ea typeface="Calibri" pitchFamily="34" charset="-122"/>
-                <a:cs typeface="Calibri" pitchFamily="34" charset="-120"/>
-              </a:rPr>
-              <a:t>Precarga los códigos más citados</a:t>
-            </a:r>
-            <a:endParaRPr lang="en-US" sz="1100" dirty="0"/>
-          </a:p>
-        </p:txBody>
-      </p:sp>
-      <p:sp>
-        <p:nvSpPr>
-          <p:cNvPr id="35" name="Shape 33"/>
-          <p:cNvSpPr/>
-          <p:nvPr/>
-        </p:nvSpPr>
-        <p:spPr>
-          <a:xfrm>
-            <a:off x="6492240" y="4407408"/>
-            <a:ext cx="274320" cy="274320"/>
-          </a:xfrm>
-          <a:prstGeom prst="ellipse">
-            <a:avLst/>
-          </a:prstGeom>
-          <a:solidFill>
-            <a:srgbClr val="A87C4F"/>
-          </a:solidFill>
-          <a:ln/>
-        </p:spPr>
-      </p:sp>
-      <p:sp>
-        <p:nvSpPr>
-          <p:cNvPr id="36" name="Text 34"/>
-          <p:cNvSpPr/>
-          <p:nvPr/>
-        </p:nvSpPr>
-        <p:spPr>
-          <a:xfrm>
-            <a:off x="6492240" y="4407408"/>
-            <a:ext cx="274320" cy="274320"/>
-          </a:xfrm>
-          <a:prstGeom prst="rect">
-            <a:avLst/>
-          </a:prstGeom>
-          <a:noFill/>
-          <a:ln/>
-        </p:spPr>
-        <p:txBody>
-          <a:bodyPr wrap="square" lIns="0" tIns="0" rIns="0" bIns="0" rtlCol="0" anchor="ctr"/>
-          <a:lstStyle/>
-          <a:p>
-            <a:pPr algn="ctr" indent="0" marL="0">
-              <a:buNone/>
-            </a:pPr>
-            <a:r>
-              <a:rPr lang="en-US" sz="1200" b="1" dirty="0">
-                <a:solidFill>
-                  <a:srgbClr val="FFFFFF"/>
-                </a:solidFill>
-                <a:latin typeface="Calibri" pitchFamily="34" charset="0"/>
-                <a:ea typeface="Calibri" pitchFamily="34" charset="-122"/>
-                <a:cs typeface="Calibri" pitchFamily="34" charset="-120"/>
-              </a:rPr>
-              <a:t>6</a:t>
-            </a:r>
-            <a:endParaRPr lang="en-US" sz="1200" dirty="0"/>
-          </a:p>
-        </p:txBody>
-      </p:sp>
-      <p:sp>
-        <p:nvSpPr>
-          <p:cNvPr id="37" name="Text 35"/>
-          <p:cNvSpPr/>
-          <p:nvPr/>
-        </p:nvSpPr>
-        <p:spPr>
-          <a:xfrm>
-            <a:off x="6876288" y="4425696"/>
-            <a:ext cx="4206240" cy="274320"/>
-          </a:xfrm>
-          <a:prstGeom prst="rect">
-            <a:avLst/>
-          </a:prstGeom>
-          <a:noFill/>
-          <a:ln/>
-        </p:spPr>
-        <p:txBody>
-          <a:bodyPr wrap="square" lIns="0" tIns="0" rIns="0" bIns="0" rtlCol="0" anchor="t"/>
-          <a:lstStyle/>
-          <a:p>
-            <a:pPr indent="0" marL="0">
-              <a:buNone/>
-            </a:pPr>
-            <a:r>
-              <a:rPr lang="en-US" sz="1100" dirty="0">
-                <a:solidFill>
-                  <a:srgbClr val="5A6478"/>
-                </a:solidFill>
-                <a:latin typeface="Calibri" pitchFamily="34" charset="0"/>
-                <a:ea typeface="Calibri" pitchFamily="34" charset="-122"/>
-                <a:cs typeface="Calibri" pitchFamily="34" charset="-120"/>
-              </a:rPr>
-              <a:t>Verifica las diez fuentes</a:t>
-            </a:r>
-            <a:endParaRPr lang="en-US" sz="1100" dirty="0"/>
-          </a:p>
-        </p:txBody>
-      </p:sp>
-      <p:sp>
-        <p:nvSpPr>
-          <p:cNvPr id="38" name="Shape 36"/>
-          <p:cNvSpPr/>
-          <p:nvPr/>
-        </p:nvSpPr>
-        <p:spPr>
-          <a:xfrm>
-            <a:off x="6172200" y="5230368"/>
-            <a:ext cx="5239512" cy="658368"/>
+          <p:cNvPr id="20" name="Shape 18"/>
+          <p:cNvSpPr/>
+          <p:nvPr/>
+        </p:nvSpPr>
+        <p:spPr>
+          <a:xfrm>
+            <a:off x="777240" y="5870448"/>
+            <a:ext cx="10634472" cy="621792"/>
           </a:xfrm>
           <a:prstGeom prst="roundRect">
             <a:avLst>
-              <a:gd name="adj" fmla="val 6944"/>
+              <a:gd name="adj" fmla="val 7353"/>
             </a:avLst>
           </a:prstGeom>
           <a:solidFill>
-            <a:srgbClr val="1B2230"/>
+            <a:srgbClr val="FDF7E8"/>
           </a:solidFill>
           <a:ln/>
         </p:spPr>
       </p:sp>
       <p:sp>
         <p:nvSpPr>
-          <p:cNvPr id="39" name="Text 37"/>
-          <p:cNvSpPr/>
-          <p:nvPr/>
-        </p:nvSpPr>
-        <p:spPr>
-          <a:xfrm>
-            <a:off x="6400800" y="5230368"/>
-            <a:ext cx="4754880" cy="658368"/>
-          </a:xfrm>
-          <a:prstGeom prst="rect">
-            <a:avLst/>
-          </a:prstGeom>
-          <a:noFill/>
-          <a:ln/>
-        </p:spPr>
-        <p:txBody>
-          <a:bodyPr wrap="square" lIns="0" tIns="0" rIns="0" bIns="0" rtlCol="0" anchor="ctr"/>
-          <a:lstStyle/>
-          <a:p>
-            <a:pPr indent="0" marL="0">
-              <a:buNone/>
-            </a:pPr>
-            <a:r>
-              <a:rPr lang="en-US" sz="1200" b="1" dirty="0">
-                <a:solidFill>
-                  <a:srgbClr val="C9A574"/>
-                </a:solidFill>
-                <a:latin typeface="Courier New" pitchFamily="34" charset="0"/>
-                <a:ea typeface="Courier New" pitchFamily="34" charset="-122"/>
-                <a:cs typeface="Courier New" pitchFamily="34" charset="-120"/>
-              </a:rPr>
-              <a:t>Instalado.  10/10 fuentes responden.</a:t>
-            </a:r>
-            <a:endParaRPr lang="en-US" sz="1200" dirty="0"/>
-          </a:p>
-        </p:txBody>
-      </p:sp>
-      <p:sp>
-        <p:nvSpPr>
-          <p:cNvPr id="40" name="Text 38"/>
-          <p:cNvSpPr/>
-          <p:nvPr/>
-        </p:nvSpPr>
-        <p:spPr>
-          <a:xfrm>
-            <a:off x="6172200" y="5943600"/>
-            <a:ext cx="5239512" cy="365760"/>
-          </a:xfrm>
-          <a:prstGeom prst="rect">
-            <a:avLst/>
-          </a:prstGeom>
-          <a:noFill/>
-          <a:ln/>
-        </p:spPr>
-        <p:txBody>
-          <a:bodyPr wrap="square" lIns="0" tIns="0" rIns="0" bIns="0" rtlCol="0" anchor="t"/>
-          <a:lstStyle/>
-          <a:p>
-            <a:pPr indent="0" marL="0">
-              <a:buNone/>
-            </a:pPr>
-            <a:r>
-              <a:rPr lang="en-US" sz="1000" i="1" dirty="0">
-                <a:solidFill>
-                  <a:srgbClr val="5A6478"/>
-                </a:solidFill>
-                <a:latin typeface="Calibri" pitchFamily="34" charset="0"/>
-                <a:ea typeface="Calibri" pitchFamily="34" charset="-122"/>
-                <a:cs typeface="Calibri" pitchFamily="34" charset="-120"/>
-              </a:rPr>
-              <a:t>Si dice menos de 10, algún organismo tenía su sitio caído. Se comprueba después.</a:t>
-            </a:r>
-            <a:endParaRPr lang="en-US" sz="1000" dirty="0"/>
+          <p:cNvPr id="21" name="Text 19"/>
+          <p:cNvSpPr/>
+          <p:nvPr/>
+        </p:nvSpPr>
+        <p:spPr>
+          <a:xfrm>
+            <a:off x="1051560" y="5870448"/>
+            <a:ext cx="10058400" cy="621792"/>
+          </a:xfrm>
+          <a:prstGeom prst="rect">
+            <a:avLst/>
+          </a:prstGeom>
+          <a:noFill/>
+          <a:ln/>
+        </p:spPr>
+        <p:txBody>
+          <a:bodyPr wrap="square" lIns="0" tIns="0" rIns="0" bIns="0" rtlCol="0" anchor="ctr"/>
+          <a:lstStyle/>
+          <a:p>
+            <a:pPr indent="0" marL="0">
+              <a:buNone/>
+            </a:pPr>
+            <a:r>
+              <a:rPr lang="en-US" sz="1100" b="1" dirty="0">
+                <a:solidFill>
+                  <a:srgbClr val="6B2C33"/>
+                </a:solidFill>
+                <a:latin typeface="Calibri" pitchFamily="34" charset="0"/>
+                <a:ea typeface="Calibri" pitchFamily="34" charset="-122"/>
+                <a:cs typeface="Calibri" pitchFamily="34" charset="-120"/>
+              </a:rPr>
+              <a:t>Cuando una fuente no responde, Claude debe decirlo y no rellenar el hueco con conocimiento propio. Si alguna vez entrega citas sin haberlas consultado, no las des por buenas.</a:t>
+            </a:r>
+            <a:endParaRPr lang="en-US" sz="1100" dirty="0"/>
           </a:p>
         </p:txBody>
       </p:sp>
@@ -6476,7 +5418,7 @@
                 <a:ea typeface="Cambria" pitchFamily="34" charset="-122"/>
                 <a:cs typeface="Cambria" pitchFamily="34" charset="-120"/>
               </a:rPr>
-              <a:t>Pasos 4 y 5 · Reiniciar y comprobar</a:t>
+              <a:t>Mantención</a:t>
             </a:r>
             <a:endParaRPr lang="en-US" sz="3200" dirty="0"/>
           </a:p>
@@ -6515,7 +5457,7 @@
                 <a:ea typeface="Calibri" pitchFamily="34" charset="-122"/>
                 <a:cs typeface="Calibri" pitchFamily="34" charset="-120"/>
               </a:rPr>
-              <a:t>El reinicio es obligatorio: Claude carga los servidores al arrancar</a:t>
+              <a:t>Actualizar, comprobar que sigue en pie, y desinstalar</a:t>
             </a:r>
             <a:endParaRPr lang="en-US" sz="1350" dirty="0"/>
           </a:p>
@@ -6523,18 +5465,57 @@
       </p:sp>
       <p:sp>
         <p:nvSpPr>
-          <p:cNvPr id="4" name="Shape 2"/>
+          <p:cNvPr id="4" name="Text 2"/>
           <p:cNvSpPr/>
           <p:nvPr/>
         </p:nvSpPr>
         <p:spPr>
           <a:xfrm>
             <a:off x="777240" y="1810512"/>
-            <a:ext cx="5029200" cy="2331720"/>
+            <a:ext cx="5486400" cy="274320"/>
+          </a:xfrm>
+          <a:prstGeom prst="rect">
+            <a:avLst/>
+          </a:prstGeom>
+          <a:noFill/>
+          <a:ln/>
+        </p:spPr>
+        <p:txBody>
+          <a:bodyPr wrap="square" lIns="0" tIns="0" rIns="0" bIns="0" rtlCol="0" anchor="t"/>
+          <a:lstStyle/>
+          <a:p>
+            <a:pPr indent="0" marL="0">
+              <a:buNone/>
+            </a:pPr>
+            <a:r>
+              <a:rPr lang="en-US" sz="1250" b="1" dirty="0">
+                <a:solidFill>
+                  <a:srgbClr val="1B2230"/>
+                </a:solidFill>
+                <a:latin typeface="Calibri" pitchFamily="34" charset="0"/>
+                <a:ea typeface="Calibri" pitchFamily="34" charset="-122"/>
+                <a:cs typeface="Calibri" pitchFamily="34" charset="-120"/>
+              </a:rPr>
+              <a:t>Desde la carpeta de Responsa</a:t>
+            </a:r>
+            <a:endParaRPr lang="en-US" sz="1250" dirty="0"/>
+          </a:p>
+        </p:txBody>
+      </p:sp>
+      <p:sp>
+        <p:nvSpPr>
+          <p:cNvPr id="5" name="Shape 3"/>
+          <p:cNvSpPr/>
+          <p:nvPr/>
+        </p:nvSpPr>
+        <p:spPr>
+          <a:xfrm>
+            <a:off x="777240" y="2194560"/>
+            <a:ext cx="3017520" cy="420624"/>
           </a:xfrm>
           <a:prstGeom prst="roundRect">
             <a:avLst>
-              <a:gd name="adj" fmla="val 2353"/>
+              <a:gd name="adj" fmla="val 10870"/>
             </a:avLst>
           </a:prstGeom>
           <a:solidFill>
@@ -6545,60 +5526,40 @@
       </p:sp>
       <p:sp>
         <p:nvSpPr>
-          <p:cNvPr id="5" name="Shape 3"/>
-          <p:cNvSpPr/>
-          <p:nvPr/>
-        </p:nvSpPr>
-        <p:spPr>
-          <a:xfrm>
-            <a:off x="1069848" y="2048256"/>
-            <a:ext cx="365760" cy="365760"/>
-          </a:xfrm>
-          <a:prstGeom prst="ellipse">
-            <a:avLst/>
-          </a:prstGeom>
-          <a:solidFill>
-            <a:srgbClr val="A87C4F"/>
-          </a:solidFill>
-          <a:ln/>
-        </p:spPr>
-      </p:sp>
-      <p:sp>
-        <p:nvSpPr>
           <p:cNvPr id="6" name="Text 4"/>
           <p:cNvSpPr/>
           <p:nvPr/>
         </p:nvSpPr>
         <p:spPr>
           <a:xfrm>
-            <a:off x="1069848" y="2048256"/>
-            <a:ext cx="365760" cy="365760"/>
-          </a:xfrm>
-          <a:prstGeom prst="rect">
-            <a:avLst/>
-          </a:prstGeom>
-          <a:noFill/>
-          <a:ln/>
-        </p:spPr>
-        <p:txBody>
-          <a:bodyPr wrap="square" lIns="0" tIns="0" rIns="0" bIns="0" rtlCol="0" anchor="ctr"/>
-          <a:lstStyle/>
-          <a:p>
-            <a:pPr algn="ctr" indent="0" marL="0">
-              <a:buNone/>
-            </a:pPr>
-            <a:r>
-              <a:rPr lang="en-US" sz="1200" b="1" dirty="0">
-                <a:solidFill>
-                  <a:srgbClr val="FFFFFF"/>
-                </a:solidFill>
-                <a:latin typeface="Calibri" pitchFamily="34" charset="0"/>
-                <a:ea typeface="Calibri" pitchFamily="34" charset="-122"/>
-                <a:cs typeface="Calibri" pitchFamily="34" charset="-120"/>
-              </a:rPr>
-              <a:t>4</a:t>
-            </a:r>
-            <a:endParaRPr lang="en-US" sz="1200" dirty="0"/>
+            <a:off x="978408" y="2194560"/>
+            <a:ext cx="2615184" cy="420624"/>
+          </a:xfrm>
+          <a:prstGeom prst="rect">
+            <a:avLst/>
+          </a:prstGeom>
+          <a:noFill/>
+          <a:ln/>
+        </p:spPr>
+        <p:txBody>
+          <a:bodyPr wrap="square" lIns="0" tIns="0" rIns="0" bIns="0" rtlCol="0" anchor="ctr"/>
+          <a:lstStyle/>
+          <a:p>
+            <a:pPr indent="0" marL="0">
+              <a:buNone/>
+            </a:pPr>
+            <a:r>
+              <a:rPr lang="en-US" sz="1150" b="1" dirty="0">
+                <a:solidFill>
+                  <a:srgbClr val="C9A574"/>
+                </a:solidFill>
+                <a:latin typeface="Courier New" pitchFamily="34" charset="0"/>
+                <a:ea typeface="Courier New" pitchFamily="34" charset="-122"/>
+                <a:cs typeface="Courier New" pitchFamily="34" charset="-120"/>
+              </a:rPr>
+              <a:t>npm run salud</a:t>
+            </a:r>
+            <a:endParaRPr lang="en-US" sz="1150" dirty="0"/>
           </a:p>
         </p:txBody>
       </p:sp>
@@ -6610,8 +5571,8 @@
         </p:nvSpPr>
         <p:spPr>
           <a:xfrm>
-            <a:off x="1581912" y="2048256"/>
-            <a:ext cx="3931920" cy="310896"/>
+            <a:off x="3977640" y="2231136"/>
+            <a:ext cx="2651760" cy="502920"/>
           </a:xfrm>
           <a:prstGeom prst="rect">
             <a:avLst/>
@@ -6624,306 +5585,13 @@
           <a:lstStyle/>
           <a:p>
             <a:pPr indent="0" marL="0">
-              <a:buNone/>
-            </a:pPr>
-            <a:r>
-              <a:rPr lang="en-US" sz="1350" b="1" dirty="0">
-                <a:solidFill>
-                  <a:srgbClr val="C9A574"/>
-                </a:solidFill>
-                <a:latin typeface="Calibri" pitchFamily="34" charset="0"/>
-                <a:ea typeface="Calibri" pitchFamily="34" charset="-122"/>
-                <a:cs typeface="Calibri" pitchFamily="34" charset="-120"/>
-              </a:rPr>
-              <a:t>Reiniciar Claude por completo</a:t>
-            </a:r>
-            <a:endParaRPr lang="en-US" sz="1350" dirty="0"/>
-          </a:p>
-        </p:txBody>
-      </p:sp>
-      <p:sp>
-        <p:nvSpPr>
-          <p:cNvPr id="8" name="Text 6"/>
-          <p:cNvSpPr/>
-          <p:nvPr/>
-        </p:nvSpPr>
-        <p:spPr>
-          <a:xfrm>
-            <a:off x="1069848" y="2596896"/>
-            <a:ext cx="4480560" cy="237744"/>
-          </a:xfrm>
-          <a:prstGeom prst="rect">
-            <a:avLst/>
-          </a:prstGeom>
-          <a:noFill/>
-          <a:ln/>
-        </p:spPr>
-        <p:txBody>
-          <a:bodyPr wrap="square" lIns="0" tIns="0" rIns="0" bIns="0" rtlCol="0" anchor="t"/>
-          <a:lstStyle/>
-          <a:p>
-            <a:pPr indent="0" marL="0">
-              <a:buNone/>
-            </a:pPr>
-            <a:r>
-              <a:rPr lang="en-US" sz="1100" b="1" dirty="0">
-                <a:solidFill>
-                  <a:srgbClr val="FFFFFF"/>
-                </a:solidFill>
-                <a:latin typeface="Calibri" pitchFamily="34" charset="0"/>
-                <a:ea typeface="Calibri" pitchFamily="34" charset="-122"/>
-                <a:cs typeface="Calibri" pitchFamily="34" charset="-120"/>
-              </a:rPr>
-              <a:t>Windows</a:t>
-            </a:r>
-            <a:endParaRPr lang="en-US" sz="1100" dirty="0"/>
-          </a:p>
-        </p:txBody>
-      </p:sp>
-      <p:sp>
-        <p:nvSpPr>
-          <p:cNvPr id="9" name="Text 7"/>
-          <p:cNvSpPr/>
-          <p:nvPr/>
-        </p:nvSpPr>
-        <p:spPr>
-          <a:xfrm>
-            <a:off x="1069848" y="2852928"/>
-            <a:ext cx="4480560" cy="548640"/>
-          </a:xfrm>
-          <a:prstGeom prst="rect">
-            <a:avLst/>
-          </a:prstGeom>
-          <a:noFill/>
-          <a:ln/>
-        </p:spPr>
-        <p:txBody>
-          <a:bodyPr wrap="square" lIns="0" tIns="0" rIns="0" bIns="0" rtlCol="0" anchor="t"/>
-          <a:lstStyle/>
-          <a:p>
-            <a:pPr indent="0" marL="0">
               <a:lnSpc>
-                <a:spcPct val="105000"/>
+                <a:spcPct val="100000"/>
               </a:lnSpc>
               <a:buNone/>
             </a:pPr>
             <a:r>
-              <a:rPr lang="en-US" sz="1050" dirty="0">
-                <a:solidFill>
-                  <a:srgbClr val="8A93A5"/>
-                </a:solidFill>
-                <a:latin typeface="Calibri" pitchFamily="34" charset="0"/>
-                <a:ea typeface="Calibri" pitchFamily="34" charset="-122"/>
-                <a:cs typeface="Calibri" pitchFamily="34" charset="-120"/>
-              </a:rPr>
-              <a:t>No basta con cerrar la ventana. Busca el ícono junto al reloj (puede estar tras la flecha ^), clic derecho → Quit. Después ábrelo de nuevo.</a:t>
-            </a:r>
-            <a:endParaRPr lang="en-US" sz="1050" dirty="0"/>
-          </a:p>
-        </p:txBody>
-      </p:sp>
-      <p:sp>
-        <p:nvSpPr>
-          <p:cNvPr id="10" name="Text 8"/>
-          <p:cNvSpPr/>
-          <p:nvPr/>
-        </p:nvSpPr>
-        <p:spPr>
-          <a:xfrm>
-            <a:off x="1069848" y="3438144"/>
-            <a:ext cx="4480560" cy="237744"/>
-          </a:xfrm>
-          <a:prstGeom prst="rect">
-            <a:avLst/>
-          </a:prstGeom>
-          <a:noFill/>
-          <a:ln/>
-        </p:spPr>
-        <p:txBody>
-          <a:bodyPr wrap="square" lIns="0" tIns="0" rIns="0" bIns="0" rtlCol="0" anchor="t"/>
-          <a:lstStyle/>
-          <a:p>
-            <a:pPr indent="0" marL="0">
-              <a:buNone/>
-            </a:pPr>
-            <a:r>
-              <a:rPr lang="en-US" sz="1100" b="1" dirty="0">
-                <a:solidFill>
-                  <a:srgbClr val="FFFFFF"/>
-                </a:solidFill>
-                <a:latin typeface="Calibri" pitchFamily="34" charset="0"/>
-                <a:ea typeface="Calibri" pitchFamily="34" charset="-122"/>
-                <a:cs typeface="Calibri" pitchFamily="34" charset="-120"/>
-              </a:rPr>
-              <a:t>macOS</a:t>
-            </a:r>
-            <a:endParaRPr lang="en-US" sz="1100" dirty="0"/>
-          </a:p>
-        </p:txBody>
-      </p:sp>
-      <p:sp>
-        <p:nvSpPr>
-          <p:cNvPr id="11" name="Text 9"/>
-          <p:cNvSpPr/>
-          <p:nvPr/>
-        </p:nvSpPr>
-        <p:spPr>
-          <a:xfrm>
-            <a:off x="1069848" y="3694176"/>
-            <a:ext cx="4480560" cy="365760"/>
-          </a:xfrm>
-          <a:prstGeom prst="rect">
-            <a:avLst/>
-          </a:prstGeom>
-          <a:noFill/>
-          <a:ln/>
-        </p:spPr>
-        <p:txBody>
-          <a:bodyPr wrap="square" lIns="0" tIns="0" rIns="0" bIns="0" rtlCol="0" anchor="t"/>
-          <a:lstStyle/>
-          <a:p>
-            <a:pPr indent="0" marL="0">
-              <a:buNone/>
-            </a:pPr>
-            <a:r>
-              <a:rPr lang="en-US" sz="1050" dirty="0">
-                <a:solidFill>
-                  <a:srgbClr val="8A93A5"/>
-                </a:solidFill>
-                <a:latin typeface="Calibri" pitchFamily="34" charset="0"/>
-                <a:ea typeface="Calibri" pitchFamily="34" charset="-122"/>
-                <a:cs typeface="Calibri" pitchFamily="34" charset="-120"/>
-              </a:rPr>
-              <a:t>Command + Q con Claude en primer plano. Cerrar con la bolita roja no basta.</a:t>
-            </a:r>
-            <a:endParaRPr lang="en-US" sz="1050" dirty="0"/>
-          </a:p>
-        </p:txBody>
-      </p:sp>
-      <p:sp>
-        <p:nvSpPr>
-          <p:cNvPr id="12" name="Shape 10"/>
-          <p:cNvSpPr/>
-          <p:nvPr/>
-        </p:nvSpPr>
-        <p:spPr>
-          <a:xfrm>
-            <a:off x="6172200" y="1883664"/>
-            <a:ext cx="365760" cy="365760"/>
-          </a:xfrm>
-          <a:prstGeom prst="ellipse">
-            <a:avLst/>
-          </a:prstGeom>
-          <a:solidFill>
-            <a:srgbClr val="A87C4F"/>
-          </a:solidFill>
-          <a:ln/>
-        </p:spPr>
-      </p:sp>
-      <p:sp>
-        <p:nvSpPr>
-          <p:cNvPr id="13" name="Text 11"/>
-          <p:cNvSpPr/>
-          <p:nvPr/>
-        </p:nvSpPr>
-        <p:spPr>
-          <a:xfrm>
-            <a:off x="6172200" y="1883664"/>
-            <a:ext cx="365760" cy="365760"/>
-          </a:xfrm>
-          <a:prstGeom prst="rect">
-            <a:avLst/>
-          </a:prstGeom>
-          <a:noFill/>
-          <a:ln/>
-        </p:spPr>
-        <p:txBody>
-          <a:bodyPr wrap="square" lIns="0" tIns="0" rIns="0" bIns="0" rtlCol="0" anchor="ctr"/>
-          <a:lstStyle/>
-          <a:p>
-            <a:pPr algn="ctr" indent="0" marL="0">
-              <a:buNone/>
-            </a:pPr>
-            <a:r>
-              <a:rPr lang="en-US" sz="1200" b="1" dirty="0">
-                <a:solidFill>
-                  <a:srgbClr val="FFFFFF"/>
-                </a:solidFill>
-                <a:latin typeface="Calibri" pitchFamily="34" charset="0"/>
-                <a:ea typeface="Calibri" pitchFamily="34" charset="-122"/>
-                <a:cs typeface="Calibri" pitchFamily="34" charset="-120"/>
-              </a:rPr>
-              <a:t>5</a:t>
-            </a:r>
-            <a:endParaRPr lang="en-US" sz="1200" dirty="0"/>
-          </a:p>
-        </p:txBody>
-      </p:sp>
-      <p:sp>
-        <p:nvSpPr>
-          <p:cNvPr id="14" name="Text 12"/>
-          <p:cNvSpPr/>
-          <p:nvPr/>
-        </p:nvSpPr>
-        <p:spPr>
-          <a:xfrm>
-            <a:off x="6684264" y="1883664"/>
-            <a:ext cx="4663440" cy="310896"/>
-          </a:xfrm>
-          <a:prstGeom prst="rect">
-            <a:avLst/>
-          </a:prstGeom>
-          <a:noFill/>
-          <a:ln/>
-        </p:spPr>
-        <p:txBody>
-          <a:bodyPr wrap="square" lIns="0" tIns="0" rIns="0" bIns="0" rtlCol="0" anchor="t"/>
-          <a:lstStyle/>
-          <a:p>
-            <a:pPr indent="0" marL="0">
-              <a:buNone/>
-            </a:pPr>
-            <a:r>
-              <a:rPr lang="en-US" sz="1350" b="1" dirty="0">
-                <a:solidFill>
-                  <a:srgbClr val="1B2230"/>
-                </a:solidFill>
-                <a:latin typeface="Calibri" pitchFamily="34" charset="0"/>
-                <a:ea typeface="Calibri" pitchFamily="34" charset="-122"/>
-                <a:cs typeface="Calibri" pitchFamily="34" charset="-120"/>
-              </a:rPr>
-              <a:t>Comprobar que funciona</a:t>
-            </a:r>
-            <a:endParaRPr lang="en-US" sz="1350" dirty="0"/>
-          </a:p>
-        </p:txBody>
-      </p:sp>
-      <p:sp>
-        <p:nvSpPr>
-          <p:cNvPr id="15" name="Text 13"/>
-          <p:cNvSpPr/>
-          <p:nvPr/>
-        </p:nvSpPr>
-        <p:spPr>
-          <a:xfrm>
-            <a:off x="6172200" y="2340864"/>
-            <a:ext cx="5120640" cy="256032"/>
-          </a:xfrm>
-          <a:prstGeom prst="rect">
-            <a:avLst/>
-          </a:prstGeom>
-          <a:noFill/>
-          <a:ln/>
-        </p:spPr>
-        <p:txBody>
-          <a:bodyPr wrap="square" lIns="0" tIns="0" rIns="0" bIns="0" rtlCol="0" anchor="t"/>
-          <a:lstStyle/>
-          <a:p>
-            <a:pPr indent="0" marL="0">
-              <a:buNone/>
-            </a:pPr>
-            <a:r>
-              <a:rPr lang="en-US" sz="1100" dirty="0">
+              <a:rPr lang="en-US" sz="1000" dirty="0">
                 <a:solidFill>
                   <a:srgbClr val="5A6478"/>
                 </a:solidFill>
@@ -6931,314 +5599,26 @@
                 <a:ea typeface="Calibri" pitchFamily="34" charset="-122"/>
                 <a:cs typeface="Calibri" pitchFamily="34" charset="-120"/>
               </a:rPr>
-              <a:t>Abre Claude y pregunta:</a:t>
-            </a:r>
-            <a:endParaRPr lang="en-US" sz="1100" dirty="0"/>
-          </a:p>
-        </p:txBody>
-      </p:sp>
-      <p:sp>
-        <p:nvSpPr>
-          <p:cNvPr id="16" name="Text 14"/>
-          <p:cNvSpPr/>
-          <p:nvPr/>
-        </p:nvSpPr>
-        <p:spPr>
-          <a:xfrm>
-            <a:off x="6172200" y="2615184"/>
-            <a:ext cx="5120640" cy="365760"/>
-          </a:xfrm>
-          <a:prstGeom prst="rect">
-            <a:avLst/>
-          </a:prstGeom>
-          <a:noFill/>
-          <a:ln/>
-        </p:spPr>
-        <p:txBody>
-          <a:bodyPr wrap="square" lIns="0" tIns="0" rIns="0" bIns="0" rtlCol="0" anchor="t"/>
-          <a:lstStyle/>
-          <a:p>
-            <a:pPr indent="0" marL="0">
-              <a:buNone/>
-            </a:pPr>
-            <a:r>
-              <a:rPr lang="en-US" sz="1400" dirty="0">
-                <a:solidFill>
-                  <a:srgbClr val="1B2230"/>
-                </a:solidFill>
-                <a:latin typeface="Cambria" pitchFamily="34" charset="0"/>
-                <a:ea typeface="Cambria" pitchFamily="34" charset="-122"/>
-                <a:cs typeface="Cambria" pitchFamily="34" charset="-120"/>
-              </a:rPr>
-              <a:t>«¿Qué ha resuelto la Corte Suprema sobre nulidad del despido?»</a:t>
-            </a:r>
-            <a:endParaRPr lang="en-US" sz="1400" dirty="0"/>
-          </a:p>
-        </p:txBody>
-      </p:sp>
-      <p:sp>
-        <p:nvSpPr>
-          <p:cNvPr id="17" name="Shape 15"/>
-          <p:cNvSpPr/>
-          <p:nvPr/>
-        </p:nvSpPr>
-        <p:spPr>
-          <a:xfrm>
-            <a:off x="6172200" y="3127248"/>
-            <a:ext cx="5239512" cy="1051560"/>
+              <a:t>Comprueba que las diez fuentes respondan (segundos)</a:t>
+            </a:r>
+            <a:endParaRPr lang="en-US" sz="1000" dirty="0"/>
+          </a:p>
+        </p:txBody>
+      </p:sp>
+      <p:sp>
+        <p:nvSpPr>
+          <p:cNvPr id="8" name="Shape 6"/>
+          <p:cNvSpPr/>
+          <p:nvPr/>
+        </p:nvSpPr>
+        <p:spPr>
+          <a:xfrm>
+            <a:off x="777240" y="2944368"/>
+            <a:ext cx="3017520" cy="420624"/>
           </a:xfrm>
           <a:prstGeom prst="roundRect">
             <a:avLst>
-              <a:gd name="adj" fmla="val 5217"/>
-            </a:avLst>
-          </a:prstGeom>
-          <a:solidFill>
-            <a:srgbClr val="FFFFFF"/>
-          </a:solidFill>
-          <a:ln w="9525">
-            <a:solidFill>
-              <a:srgbClr val="E3DED3"/>
-            </a:solidFill>
-            <a:prstDash val="solid"/>
-          </a:ln>
-        </p:spPr>
-      </p:sp>
-      <p:sp>
-        <p:nvSpPr>
-          <p:cNvPr id="18" name="Text 16"/>
-          <p:cNvSpPr/>
-          <p:nvPr/>
-        </p:nvSpPr>
-        <p:spPr>
-          <a:xfrm>
-            <a:off x="6446520" y="3291840"/>
-            <a:ext cx="4663440" cy="237744"/>
-          </a:xfrm>
-          <a:prstGeom prst="rect">
-            <a:avLst/>
-          </a:prstGeom>
-          <a:noFill/>
-          <a:ln/>
-        </p:spPr>
-        <p:txBody>
-          <a:bodyPr wrap="square" lIns="0" tIns="0" rIns="0" bIns="0" rtlCol="0" anchor="t"/>
-          <a:lstStyle/>
-          <a:p>
-            <a:pPr indent="0" marL="0">
-              <a:buNone/>
-            </a:pPr>
-            <a:r>
-              <a:rPr lang="en-US" sz="1100" b="1" dirty="0">
-                <a:solidFill>
-                  <a:srgbClr val="A87C4F"/>
-                </a:solidFill>
-                <a:latin typeface="Calibri" pitchFamily="34" charset="0"/>
-                <a:ea typeface="Calibri" pitchFamily="34" charset="-122"/>
-                <a:cs typeface="Calibri" pitchFamily="34" charset="-120"/>
-              </a:rPr>
-              <a:t>Funciona si…</a:t>
-            </a:r>
-            <a:endParaRPr lang="en-US" sz="1100" dirty="0"/>
-          </a:p>
-        </p:txBody>
-      </p:sp>
-      <p:sp>
-        <p:nvSpPr>
-          <p:cNvPr id="19" name="Text 17"/>
-          <p:cNvSpPr/>
-          <p:nvPr/>
-        </p:nvSpPr>
-        <p:spPr>
-          <a:xfrm>
-            <a:off x="6446520" y="3547872"/>
-            <a:ext cx="4663440" cy="457200"/>
-          </a:xfrm>
-          <a:prstGeom prst="rect">
-            <a:avLst/>
-          </a:prstGeom>
-          <a:noFill/>
-          <a:ln/>
-        </p:spPr>
-        <p:txBody>
-          <a:bodyPr wrap="square" lIns="0" tIns="0" rIns="0" bIns="0" rtlCol="0" anchor="t"/>
-          <a:lstStyle/>
-          <a:p>
-            <a:pPr indent="0" marL="0">
-              <a:buNone/>
-            </a:pPr>
-            <a:r>
-              <a:rPr lang="en-US" sz="1050" dirty="0">
-                <a:solidFill>
-                  <a:srgbClr val="5A6478"/>
-                </a:solidFill>
-                <a:latin typeface="Calibri" pitchFamily="34" charset="0"/>
-                <a:ea typeface="Calibri" pitchFamily="34" charset="-122"/>
-                <a:cs typeface="Calibri" pitchFamily="34" charset="-120"/>
-              </a:rPr>
-              <a:t>…la respuesta trae roles, tribunales, fechas y enlaces concretos.</a:t>
-            </a:r>
-            <a:endParaRPr lang="en-US" sz="1050" dirty="0"/>
-          </a:p>
-        </p:txBody>
-      </p:sp>
-      <p:sp>
-        <p:nvSpPr>
-          <p:cNvPr id="20" name="Shape 18"/>
-          <p:cNvSpPr/>
-          <p:nvPr/>
-        </p:nvSpPr>
-        <p:spPr>
-          <a:xfrm>
-            <a:off x="6172200" y="4279392"/>
-            <a:ext cx="5239512" cy="1051560"/>
-          </a:xfrm>
-          <a:prstGeom prst="roundRect">
-            <a:avLst>
-              <a:gd name="adj" fmla="val 5217"/>
-            </a:avLst>
-          </a:prstGeom>
-          <a:solidFill>
-            <a:srgbClr val="FFFFFF"/>
-          </a:solidFill>
-          <a:ln w="9525">
-            <a:solidFill>
-              <a:srgbClr val="E3DED3"/>
-            </a:solidFill>
-            <a:prstDash val="solid"/>
-          </a:ln>
-        </p:spPr>
-      </p:sp>
-      <p:sp>
-        <p:nvSpPr>
-          <p:cNvPr id="21" name="Text 19"/>
-          <p:cNvSpPr/>
-          <p:nvPr/>
-        </p:nvSpPr>
-        <p:spPr>
-          <a:xfrm>
-            <a:off x="6446520" y="4443984"/>
-            <a:ext cx="4663440" cy="237744"/>
-          </a:xfrm>
-          <a:prstGeom prst="rect">
-            <a:avLst/>
-          </a:prstGeom>
-          <a:noFill/>
-          <a:ln/>
-        </p:spPr>
-        <p:txBody>
-          <a:bodyPr wrap="square" lIns="0" tIns="0" rIns="0" bIns="0" rtlCol="0" anchor="t"/>
-          <a:lstStyle/>
-          <a:p>
-            <a:pPr indent="0" marL="0">
-              <a:buNone/>
-            </a:pPr>
-            <a:r>
-              <a:rPr lang="en-US" sz="1100" b="1" dirty="0">
-                <a:solidFill>
-                  <a:srgbClr val="6B2C33"/>
-                </a:solidFill>
-                <a:latin typeface="Calibri" pitchFamily="34" charset="0"/>
-                <a:ea typeface="Calibri" pitchFamily="34" charset="-122"/>
-                <a:cs typeface="Calibri" pitchFamily="34" charset="-120"/>
-              </a:rPr>
-              <a:t>No funciona si…</a:t>
-            </a:r>
-            <a:endParaRPr lang="en-US" sz="1100" dirty="0"/>
-          </a:p>
-        </p:txBody>
-      </p:sp>
-      <p:sp>
-        <p:nvSpPr>
-          <p:cNvPr id="22" name="Text 20"/>
-          <p:cNvSpPr/>
-          <p:nvPr/>
-        </p:nvSpPr>
-        <p:spPr>
-          <a:xfrm>
-            <a:off x="6446520" y="4700016"/>
-            <a:ext cx="4663440" cy="502920"/>
-          </a:xfrm>
-          <a:prstGeom prst="rect">
-            <a:avLst/>
-          </a:prstGeom>
-          <a:noFill/>
-          <a:ln/>
-        </p:spPr>
-        <p:txBody>
-          <a:bodyPr wrap="square" lIns="0" tIns="0" rIns="0" bIns="0" rtlCol="0" anchor="t"/>
-          <a:lstStyle/>
-          <a:p>
-            <a:pPr indent="0" marL="0">
-              <a:buNone/>
-            </a:pPr>
-            <a:r>
-              <a:rPr lang="en-US" sz="1050" dirty="0">
-                <a:solidFill>
-                  <a:srgbClr val="5A6478"/>
-                </a:solidFill>
-                <a:latin typeface="Calibri" pitchFamily="34" charset="0"/>
-                <a:ea typeface="Calibri" pitchFamily="34" charset="-122"/>
-                <a:cs typeface="Calibri" pitchFamily="34" charset="-120"/>
-              </a:rPr>
-              <a:t>…explica en general qué es la nulidad del despido sin citar ni un fallo. Revisa el paso 4.</a:t>
-            </a:r>
-            <a:endParaRPr lang="en-US" sz="1050" dirty="0"/>
-          </a:p>
-        </p:txBody>
-      </p:sp>
-      <p:sp>
-        <p:nvSpPr>
-          <p:cNvPr id="23" name="Text 21"/>
-          <p:cNvSpPr/>
-          <p:nvPr/>
-        </p:nvSpPr>
-        <p:spPr>
-          <a:xfrm>
-            <a:off x="777240" y="4443984"/>
-            <a:ext cx="5029200" cy="256032"/>
-          </a:xfrm>
-          <a:prstGeom prst="rect">
-            <a:avLst/>
-          </a:prstGeom>
-          <a:noFill/>
-          <a:ln/>
-        </p:spPr>
-        <p:txBody>
-          <a:bodyPr wrap="square" lIns="0" tIns="0" rIns="0" bIns="0" rtlCol="0" anchor="t"/>
-          <a:lstStyle/>
-          <a:p>
-            <a:pPr indent="0" marL="0">
-              <a:buNone/>
-            </a:pPr>
-            <a:r>
-              <a:rPr lang="en-US" sz="1100" dirty="0">
-                <a:solidFill>
-                  <a:srgbClr val="5A6478"/>
-                </a:solidFill>
-                <a:latin typeface="Calibri" pitchFamily="34" charset="0"/>
-                <a:ea typeface="Calibri" pitchFamily="34" charset="-122"/>
-                <a:cs typeface="Calibri" pitchFamily="34" charset="-120"/>
-              </a:rPr>
-              <a:t>También desde la terminal:</a:t>
-            </a:r>
-            <a:endParaRPr lang="en-US" sz="1100" dirty="0"/>
-          </a:p>
-        </p:txBody>
-      </p:sp>
-      <p:sp>
-        <p:nvSpPr>
-          <p:cNvPr id="24" name="Shape 22"/>
-          <p:cNvSpPr/>
-          <p:nvPr/>
-        </p:nvSpPr>
-        <p:spPr>
-          <a:xfrm>
-            <a:off x="777240" y="4736592"/>
-            <a:ext cx="5029200" cy="457200"/>
-          </a:xfrm>
-          <a:prstGeom prst="roundRect">
-            <a:avLst>
-              <a:gd name="adj" fmla="val 10000"/>
+              <a:gd name="adj" fmla="val 10870"/>
             </a:avLst>
           </a:prstGeom>
           <a:solidFill>
@@ -7249,14 +5629,14 @@
       </p:sp>
       <p:sp>
         <p:nvSpPr>
-          <p:cNvPr id="25" name="Text 23"/>
-          <p:cNvSpPr/>
-          <p:nvPr/>
-        </p:nvSpPr>
-        <p:spPr>
-          <a:xfrm>
-            <a:off x="978408" y="4736592"/>
-            <a:ext cx="4626864" cy="457200"/>
+          <p:cNvPr id="9" name="Text 7"/>
+          <p:cNvSpPr/>
+          <p:nvPr/>
+        </p:nvSpPr>
+        <p:spPr>
+          <a:xfrm>
+            <a:off x="978408" y="2944368"/>
+            <a:ext cx="2615184" cy="420624"/>
           </a:xfrm>
           <a:prstGeom prst="rect">
             <a:avLst/>
@@ -7280,7 +5660,7 @@
                 <a:ea typeface="Courier New" pitchFamily="34" charset="-122"/>
                 <a:cs typeface="Courier New" pitchFamily="34" charset="-120"/>
               </a:rPr>
-              <a:t>npm run salud</a:t>
+              <a:t>npm run prueba</a:t>
             </a:r>
             <a:endParaRPr lang="en-US" sz="1150" dirty="0"/>
           </a:p>
@@ -7288,14 +5668,599 @@
       </p:sp>
       <p:sp>
         <p:nvSpPr>
+          <p:cNvPr id="10" name="Text 8"/>
+          <p:cNvSpPr/>
+          <p:nvPr/>
+        </p:nvSpPr>
+        <p:spPr>
+          <a:xfrm>
+            <a:off x="3977640" y="2980944"/>
+            <a:ext cx="2651760" cy="502920"/>
+          </a:xfrm>
+          <a:prstGeom prst="rect">
+            <a:avLst/>
+          </a:prstGeom>
+          <a:noFill/>
+          <a:ln/>
+        </p:spPr>
+        <p:txBody>
+          <a:bodyPr wrap="square" lIns="0" tIns="0" rIns="0" bIns="0" rtlCol="0" anchor="t"/>
+          <a:lstStyle/>
+          <a:p>
+            <a:pPr indent="0" marL="0">
+              <a:lnSpc>
+                <a:spcPct val="100000"/>
+              </a:lnSpc>
+              <a:buNone/>
+            </a:pPr>
+            <a:r>
+              <a:rPr lang="en-US" sz="1000" dirty="0">
+                <a:solidFill>
+                  <a:srgbClr val="5A6478"/>
+                </a:solidFill>
+                <a:latin typeface="Calibri" pitchFamily="34" charset="0"/>
+                <a:ea typeface="Calibri" pitchFamily="34" charset="-122"/>
+                <a:cs typeface="Calibri" pitchFamily="34" charset="-120"/>
+              </a:rPr>
+              <a:t>Banco completo, 68 comprobaciones (minutos)</a:t>
+            </a:r>
+            <a:endParaRPr lang="en-US" sz="1000" dirty="0"/>
+          </a:p>
+        </p:txBody>
+      </p:sp>
+      <p:sp>
+        <p:nvSpPr>
+          <p:cNvPr id="11" name="Shape 9"/>
+          <p:cNvSpPr/>
+          <p:nvPr/>
+        </p:nvSpPr>
+        <p:spPr>
+          <a:xfrm>
+            <a:off x="777240" y="3694176"/>
+            <a:ext cx="3017520" cy="420624"/>
+          </a:xfrm>
+          <a:prstGeom prst="roundRect">
+            <a:avLst>
+              <a:gd name="adj" fmla="val 10870"/>
+            </a:avLst>
+          </a:prstGeom>
+          <a:solidFill>
+            <a:srgbClr val="1B2230"/>
+          </a:solidFill>
+          <a:ln/>
+        </p:spPr>
+      </p:sp>
+      <p:sp>
+        <p:nvSpPr>
+          <p:cNvPr id="12" name="Text 10"/>
+          <p:cNvSpPr/>
+          <p:nvPr/>
+        </p:nvSpPr>
+        <p:spPr>
+          <a:xfrm>
+            <a:off x="978408" y="3694176"/>
+            <a:ext cx="2615184" cy="420624"/>
+          </a:xfrm>
+          <a:prstGeom prst="rect">
+            <a:avLst/>
+          </a:prstGeom>
+          <a:noFill/>
+          <a:ln/>
+        </p:spPr>
+        <p:txBody>
+          <a:bodyPr wrap="square" lIns="0" tIns="0" rIns="0" bIns="0" rtlCol="0" anchor="ctr"/>
+          <a:lstStyle/>
+          <a:p>
+            <a:pPr indent="0" marL="0">
+              <a:buNone/>
+            </a:pPr>
+            <a:r>
+              <a:rPr lang="en-US" sz="1150" b="1" dirty="0">
+                <a:solidFill>
+                  <a:srgbClr val="C9A574"/>
+                </a:solidFill>
+                <a:latin typeface="Courier New" pitchFamily="34" charset="0"/>
+                <a:ea typeface="Courier New" pitchFamily="34" charset="-122"/>
+                <a:cs typeface="Courier New" pitchFamily="34" charset="-120"/>
+              </a:rPr>
+              <a:t>npm run auditoria</a:t>
+            </a:r>
+            <a:endParaRPr lang="en-US" sz="1150" dirty="0"/>
+          </a:p>
+        </p:txBody>
+      </p:sp>
+      <p:sp>
+        <p:nvSpPr>
+          <p:cNvPr id="13" name="Text 11"/>
+          <p:cNvSpPr/>
+          <p:nvPr/>
+        </p:nvSpPr>
+        <p:spPr>
+          <a:xfrm>
+            <a:off x="3977640" y="3730752"/>
+            <a:ext cx="2651760" cy="502920"/>
+          </a:xfrm>
+          <a:prstGeom prst="rect">
+            <a:avLst/>
+          </a:prstGeom>
+          <a:noFill/>
+          <a:ln/>
+        </p:spPr>
+        <p:txBody>
+          <a:bodyPr wrap="square" lIns="0" tIns="0" rIns="0" bIns="0" rtlCol="0" anchor="t"/>
+          <a:lstStyle/>
+          <a:p>
+            <a:pPr indent="0" marL="0">
+              <a:lnSpc>
+                <a:spcPct val="100000"/>
+              </a:lnSpc>
+              <a:buNone/>
+            </a:pPr>
+            <a:r>
+              <a:rPr lang="en-US" sz="1000" dirty="0">
+                <a:solidFill>
+                  <a:srgbClr val="5A6478"/>
+                </a:solidFill>
+                <a:latin typeface="Calibri" pitchFamily="34" charset="0"/>
+                <a:ea typeface="Calibri" pitchFamily="34" charset="-122"/>
+                <a:cs typeface="Calibri" pitchFamily="34" charset="-120"/>
+              </a:rPr>
+              <a:t>Verifica que los datos del código sigan siendo ciertos</a:t>
+            </a:r>
+            <a:endParaRPr lang="en-US" sz="1000" dirty="0"/>
+          </a:p>
+        </p:txBody>
+      </p:sp>
+      <p:sp>
+        <p:nvSpPr>
+          <p:cNvPr id="14" name="Shape 12"/>
+          <p:cNvSpPr/>
+          <p:nvPr/>
+        </p:nvSpPr>
+        <p:spPr>
+          <a:xfrm>
+            <a:off x="777240" y="4443984"/>
+            <a:ext cx="3017520" cy="420624"/>
+          </a:xfrm>
+          <a:prstGeom prst="roundRect">
+            <a:avLst>
+              <a:gd name="adj" fmla="val 10870"/>
+            </a:avLst>
+          </a:prstGeom>
+          <a:solidFill>
+            <a:srgbClr val="1B2230"/>
+          </a:solidFill>
+          <a:ln/>
+        </p:spPr>
+      </p:sp>
+      <p:sp>
+        <p:nvSpPr>
+          <p:cNvPr id="15" name="Text 13"/>
+          <p:cNvSpPr/>
+          <p:nvPr/>
+        </p:nvSpPr>
+        <p:spPr>
+          <a:xfrm>
+            <a:off x="978408" y="4443984"/>
+            <a:ext cx="2615184" cy="420624"/>
+          </a:xfrm>
+          <a:prstGeom prst="rect">
+            <a:avLst/>
+          </a:prstGeom>
+          <a:noFill/>
+          <a:ln/>
+        </p:spPr>
+        <p:txBody>
+          <a:bodyPr wrap="square" lIns="0" tIns="0" rIns="0" bIns="0" rtlCol="0" anchor="ctr"/>
+          <a:lstStyle/>
+          <a:p>
+            <a:pPr indent="0" marL="0">
+              <a:buNone/>
+            </a:pPr>
+            <a:r>
+              <a:rPr lang="en-US" sz="1150" b="1" dirty="0">
+                <a:solidFill>
+                  <a:srgbClr val="C9A574"/>
+                </a:solidFill>
+                <a:latin typeface="Courier New" pitchFamily="34" charset="0"/>
+                <a:ea typeface="Courier New" pitchFamily="34" charset="-122"/>
+                <a:cs typeface="Courier New" pitchFamily="34" charset="-120"/>
+              </a:rPr>
+              <a:t>npm run precargar</a:t>
+            </a:r>
+            <a:endParaRPr lang="en-US" sz="1150" dirty="0"/>
+          </a:p>
+        </p:txBody>
+      </p:sp>
+      <p:sp>
+        <p:nvSpPr>
+          <p:cNvPr id="16" name="Text 14"/>
+          <p:cNvSpPr/>
+          <p:nvPr/>
+        </p:nvSpPr>
+        <p:spPr>
+          <a:xfrm>
+            <a:off x="3977640" y="4480560"/>
+            <a:ext cx="2651760" cy="502920"/>
+          </a:xfrm>
+          <a:prstGeom prst="rect">
+            <a:avLst/>
+          </a:prstGeom>
+          <a:noFill/>
+          <a:ln/>
+        </p:spPr>
+        <p:txBody>
+          <a:bodyPr wrap="square" lIns="0" tIns="0" rIns="0" bIns="0" rtlCol="0" anchor="t"/>
+          <a:lstStyle/>
+          <a:p>
+            <a:pPr indent="0" marL="0">
+              <a:lnSpc>
+                <a:spcPct val="100000"/>
+              </a:lnSpc>
+              <a:buNone/>
+            </a:pPr>
+            <a:r>
+              <a:rPr lang="en-US" sz="1000" dirty="0">
+                <a:solidFill>
+                  <a:srgbClr val="5A6478"/>
+                </a:solidFill>
+                <a:latin typeface="Calibri" pitchFamily="34" charset="0"/>
+                <a:ea typeface="Calibri" pitchFamily="34" charset="-122"/>
+                <a:cs typeface="Calibri" pitchFamily="34" charset="-120"/>
+              </a:rPr>
+              <a:t>Reintenta la precarga de códigos y leyes</a:t>
+            </a:r>
+            <a:endParaRPr lang="en-US" sz="1000" dirty="0"/>
+          </a:p>
+        </p:txBody>
+      </p:sp>
+      <p:sp>
+        <p:nvSpPr>
+          <p:cNvPr id="17" name="Text 15"/>
+          <p:cNvSpPr/>
+          <p:nvPr/>
+        </p:nvSpPr>
+        <p:spPr>
+          <a:xfrm>
+            <a:off x="777240" y="5321808"/>
+            <a:ext cx="5486400" cy="365760"/>
+          </a:xfrm>
+          <a:prstGeom prst="rect">
+            <a:avLst/>
+          </a:prstGeom>
+          <a:noFill/>
+          <a:ln/>
+        </p:spPr>
+        <p:txBody>
+          <a:bodyPr wrap="square" lIns="0" tIns="0" rIns="0" bIns="0" rtlCol="0" anchor="t"/>
+          <a:lstStyle/>
+          <a:p>
+            <a:pPr indent="0" marL="0">
+              <a:buNone/>
+            </a:pPr>
+            <a:r>
+              <a:rPr lang="en-US" sz="1100" i="1" dirty="0">
+                <a:solidFill>
+                  <a:srgbClr val="5A6478"/>
+                </a:solidFill>
+                <a:latin typeface="Calibri" pitchFamily="34" charset="0"/>
+                <a:ea typeface="Calibri" pitchFamily="34" charset="-122"/>
+                <a:cs typeface="Calibri" pitchFamily="34" charset="-120"/>
+              </a:rPr>
+              <a:t>Para actualizar, se vuelve a pegar el mismo comando de instalación.</a:t>
+            </a:r>
+            <a:endParaRPr lang="en-US" sz="1100" dirty="0"/>
+          </a:p>
+        </p:txBody>
+      </p:sp>
+      <p:sp>
+        <p:nvSpPr>
+          <p:cNvPr id="18" name="Shape 16"/>
+          <p:cNvSpPr/>
+          <p:nvPr/>
+        </p:nvSpPr>
+        <p:spPr>
+          <a:xfrm>
+            <a:off x="6675120" y="1810512"/>
+            <a:ext cx="4736592" cy="1920240"/>
+          </a:xfrm>
+          <a:prstGeom prst="roundRect">
+            <a:avLst>
+              <a:gd name="adj" fmla="val 2857"/>
+            </a:avLst>
+          </a:prstGeom>
+          <a:solidFill>
+            <a:srgbClr val="1B2230"/>
+          </a:solidFill>
+          <a:ln/>
+        </p:spPr>
+      </p:sp>
+      <p:sp>
+        <p:nvSpPr>
+          <p:cNvPr id="19" name="Text 17"/>
+          <p:cNvSpPr/>
+          <p:nvPr/>
+        </p:nvSpPr>
+        <p:spPr>
+          <a:xfrm>
+            <a:off x="6995160" y="2048256"/>
+            <a:ext cx="4114800" cy="274320"/>
+          </a:xfrm>
+          <a:prstGeom prst="rect">
+            <a:avLst/>
+          </a:prstGeom>
+          <a:noFill/>
+          <a:ln/>
+        </p:spPr>
+        <p:txBody>
+          <a:bodyPr wrap="square" lIns="0" tIns="0" rIns="0" bIns="0" rtlCol="0" anchor="t"/>
+          <a:lstStyle/>
+          <a:p>
+            <a:pPr indent="0" marL="0">
+              <a:buNone/>
+            </a:pPr>
+            <a:r>
+              <a:rPr lang="en-US" sz="1100" spc="120" kern="0" dirty="0">
+                <a:solidFill>
+                  <a:srgbClr val="C9A574"/>
+                </a:solidFill>
+                <a:latin typeface="Calibri" pitchFamily="34" charset="0"/>
+                <a:ea typeface="Calibri" pitchFamily="34" charset="-122"/>
+                <a:cs typeface="Calibri" pitchFamily="34" charset="-120"/>
+              </a:rPr>
+              <a:t>Por qué existe la auditoría</a:t>
+            </a:r>
+            <a:endParaRPr lang="en-US" sz="1100" dirty="0"/>
+          </a:p>
+        </p:txBody>
+      </p:sp>
+      <p:sp>
+        <p:nvSpPr>
+          <p:cNvPr id="20" name="Text 18"/>
+          <p:cNvSpPr/>
+          <p:nvPr/>
+        </p:nvSpPr>
+        <p:spPr>
+          <a:xfrm>
+            <a:off x="6995160" y="2377440"/>
+            <a:ext cx="4114800" cy="914400"/>
+          </a:xfrm>
+          <a:prstGeom prst="rect">
+            <a:avLst/>
+          </a:prstGeom>
+          <a:noFill/>
+          <a:ln/>
+        </p:spPr>
+        <p:txBody>
+          <a:bodyPr wrap="square" lIns="0" tIns="0" rIns="0" bIns="0" rtlCol="0" anchor="t"/>
+          <a:lstStyle/>
+          <a:p>
+            <a:pPr indent="0" marL="0">
+              <a:lnSpc>
+                <a:spcPct val="115000"/>
+              </a:lnSpc>
+              <a:buNone/>
+            </a:pPr>
+            <a:r>
+              <a:rPr lang="en-US" sz="1100" dirty="0">
+                <a:solidFill>
+                  <a:srgbClr val="FFFFFF"/>
+                </a:solidFill>
+                <a:latin typeface="Calibri" pitchFamily="34" charset="0"/>
+                <a:ea typeface="Calibri" pitchFamily="34" charset="-122"/>
+                <a:cs typeface="Calibri" pitchFamily="34" charset="-120"/>
+              </a:rPr>
+              <a:t>Comprueba contra las fuentes reales que cada identificador de norma apunte a la norma que dice, que los códigos de corte sean los correctos y que cada revista sea la declarada.</a:t>
+            </a:r>
+            <a:endParaRPr lang="en-US" sz="1100" dirty="0"/>
+          </a:p>
+        </p:txBody>
+      </p:sp>
+      <p:sp>
+        <p:nvSpPr>
+          <p:cNvPr id="21" name="Text 19"/>
+          <p:cNvSpPr/>
+          <p:nvPr/>
+        </p:nvSpPr>
+        <p:spPr>
+          <a:xfrm>
+            <a:off x="6995160" y="3255264"/>
+            <a:ext cx="4114800" cy="365760"/>
+          </a:xfrm>
+          <a:prstGeom prst="rect">
+            <a:avLst/>
+          </a:prstGeom>
+          <a:noFill/>
+          <a:ln/>
+        </p:spPr>
+        <p:txBody>
+          <a:bodyPr wrap="square" lIns="0" tIns="0" rIns="0" bIns="0" rtlCol="0" anchor="t"/>
+          <a:lstStyle/>
+          <a:p>
+            <a:pPr indent="0" marL="0">
+              <a:buNone/>
+            </a:pPr>
+            <a:r>
+              <a:rPr lang="en-US" sz="1050" i="1" dirty="0">
+                <a:solidFill>
+                  <a:srgbClr val="C9A574"/>
+                </a:solidFill>
+                <a:latin typeface="Calibri" pitchFamily="34" charset="0"/>
+                <a:ea typeface="Calibri" pitchFamily="34" charset="-122"/>
+                <a:cs typeface="Calibri" pitchFamily="34" charset="-120"/>
+              </a:rPr>
+              <a:t>Es la comprobación que importa cuando se trabaja con citas.</a:t>
+            </a:r>
+            <a:endParaRPr lang="en-US" sz="1050" dirty="0"/>
+          </a:p>
+        </p:txBody>
+      </p:sp>
+      <p:sp>
+        <p:nvSpPr>
+          <p:cNvPr id="22" name="Text 20"/>
+          <p:cNvSpPr/>
+          <p:nvPr/>
+        </p:nvSpPr>
+        <p:spPr>
+          <a:xfrm>
+            <a:off x="6675120" y="3950208"/>
+            <a:ext cx="4572000" cy="274320"/>
+          </a:xfrm>
+          <a:prstGeom prst="rect">
+            <a:avLst/>
+          </a:prstGeom>
+          <a:noFill/>
+          <a:ln/>
+        </p:spPr>
+        <p:txBody>
+          <a:bodyPr wrap="square" lIns="0" tIns="0" rIns="0" bIns="0" rtlCol="0" anchor="t"/>
+          <a:lstStyle/>
+          <a:p>
+            <a:pPr indent="0" marL="0">
+              <a:buNone/>
+            </a:pPr>
+            <a:r>
+              <a:rPr lang="en-US" sz="1250" b="1" dirty="0">
+                <a:solidFill>
+                  <a:srgbClr val="1B2230"/>
+                </a:solidFill>
+                <a:latin typeface="Calibri" pitchFamily="34" charset="0"/>
+                <a:ea typeface="Calibri" pitchFamily="34" charset="-122"/>
+                <a:cs typeface="Calibri" pitchFamily="34" charset="-120"/>
+              </a:rPr>
+              <a:t>Desinstalar</a:t>
+            </a:r>
+            <a:endParaRPr lang="en-US" sz="1250" dirty="0"/>
+          </a:p>
+        </p:txBody>
+      </p:sp>
+      <p:sp>
+        <p:nvSpPr>
+          <p:cNvPr id="23" name="Text 21"/>
+          <p:cNvSpPr/>
+          <p:nvPr/>
+        </p:nvSpPr>
+        <p:spPr>
+          <a:xfrm>
+            <a:off x="6675120" y="4297680"/>
+            <a:ext cx="4736592" cy="365760"/>
+          </a:xfrm>
+          <a:prstGeom prst="rect">
+            <a:avLst/>
+          </a:prstGeom>
+          <a:noFill/>
+          <a:ln/>
+        </p:spPr>
+        <p:txBody>
+          <a:bodyPr wrap="square" lIns="0" tIns="0" rIns="0" bIns="0" rtlCol="0" anchor="t"/>
+          <a:lstStyle/>
+          <a:p>
+            <a:pPr indent="0" marL="0">
+              <a:buNone/>
+            </a:pPr>
+            <a:r>
+              <a:rPr lang="en-US" sz="1050" dirty="0">
+                <a:solidFill>
+                  <a:srgbClr val="5A6478"/>
+                </a:solidFill>
+                <a:latin typeface="Calibri" pitchFamily="34" charset="0"/>
+                <a:ea typeface="Calibri" pitchFamily="34" charset="-122"/>
+                <a:cs typeface="Calibri" pitchFamily="34" charset="-120"/>
+              </a:rPr>
+              <a:t>1.  Borrar la entrada "responsa" de la configuración de Claude Desktop</a:t>
+            </a:r>
+            <a:endParaRPr lang="en-US" sz="1050" dirty="0"/>
+          </a:p>
+        </p:txBody>
+      </p:sp>
+      <p:sp>
+        <p:nvSpPr>
+          <p:cNvPr id="24" name="Text 22"/>
+          <p:cNvSpPr/>
+          <p:nvPr/>
+        </p:nvSpPr>
+        <p:spPr>
+          <a:xfrm>
+            <a:off x="6675120" y="4681728"/>
+            <a:ext cx="4736592" cy="365760"/>
+          </a:xfrm>
+          <a:prstGeom prst="rect">
+            <a:avLst/>
+          </a:prstGeom>
+          <a:noFill/>
+          <a:ln/>
+        </p:spPr>
+        <p:txBody>
+          <a:bodyPr wrap="square" lIns="0" tIns="0" rIns="0" bIns="0" rtlCol="0" anchor="t"/>
+          <a:lstStyle/>
+          <a:p>
+            <a:pPr indent="0" marL="0">
+              <a:buNone/>
+            </a:pPr>
+            <a:r>
+              <a:rPr lang="en-US" sz="1050" dirty="0">
+                <a:solidFill>
+                  <a:srgbClr val="5A6478"/>
+                </a:solidFill>
+                <a:latin typeface="Calibri" pitchFamily="34" charset="0"/>
+                <a:ea typeface="Calibri" pitchFamily="34" charset="-122"/>
+                <a:cs typeface="Calibri" pitchFamily="34" charset="-120"/>
+              </a:rPr>
+              <a:t>2.  Borrar la carpeta ~/.claude/skills/responsa</a:t>
+            </a:r>
+            <a:endParaRPr lang="en-US" sz="1050" dirty="0"/>
+          </a:p>
+        </p:txBody>
+      </p:sp>
+      <p:sp>
+        <p:nvSpPr>
+          <p:cNvPr id="25" name="Text 23"/>
+          <p:cNvSpPr/>
+          <p:nvPr/>
+        </p:nvSpPr>
+        <p:spPr>
+          <a:xfrm>
+            <a:off x="6675120" y="5065776"/>
+            <a:ext cx="4736592" cy="365760"/>
+          </a:xfrm>
+          <a:prstGeom prst="rect">
+            <a:avLst/>
+          </a:prstGeom>
+          <a:noFill/>
+          <a:ln/>
+        </p:spPr>
+        <p:txBody>
+          <a:bodyPr wrap="square" lIns="0" tIns="0" rIns="0" bIns="0" rtlCol="0" anchor="t"/>
+          <a:lstStyle/>
+          <a:p>
+            <a:pPr indent="0" marL="0">
+              <a:buNone/>
+            </a:pPr>
+            <a:r>
+              <a:rPr lang="en-US" sz="1050" dirty="0">
+                <a:solidFill>
+                  <a:srgbClr val="5A6478"/>
+                </a:solidFill>
+                <a:latin typeface="Calibri" pitchFamily="34" charset="0"/>
+                <a:ea typeface="Calibri" pitchFamily="34" charset="-122"/>
+                <a:cs typeface="Calibri" pitchFamily="34" charset="-120"/>
+              </a:rPr>
+              <a:t>3.  Borrar la carpeta ~/.responsa (los datos guardados)</a:t>
+            </a:r>
+            <a:endParaRPr lang="en-US" sz="1050" dirty="0"/>
+          </a:p>
+        </p:txBody>
+      </p:sp>
+      <p:sp>
+        <p:nvSpPr>
           <p:cNvPr id="26" name="Text 24"/>
           <p:cNvSpPr/>
           <p:nvPr/>
         </p:nvSpPr>
         <p:spPr>
           <a:xfrm>
-            <a:off x="777240" y="5303520"/>
-            <a:ext cx="5029200" cy="457200"/>
+            <a:off x="6675120" y="5449824"/>
+            <a:ext cx="4736592" cy="365760"/>
           </a:xfrm>
           <a:prstGeom prst="rect">
             <a:avLst/>
@@ -7311,7 +6276,7 @@
               <a:buNone/>
             </a:pPr>
             <a:r>
-              <a:rPr lang="en-US" sz="1000" i="1" dirty="0">
+              <a:rPr lang="en-US" sz="1050" dirty="0">
                 <a:solidFill>
                   <a:srgbClr val="5A6478"/>
                 </a:solidFill>
@@ -7319,9 +6284,9 @@
                 <a:ea typeface="Calibri" pitchFamily="34" charset="-122"/>
                 <a:cs typeface="Calibri" pitchFamily="34" charset="-120"/>
               </a:rPr>
-              <a:t>Consulta las diez fuentes con preguntas de respuesta conocida y dice cuál responde y cuál no.</a:t>
-            </a:r>
-            <a:endParaRPr lang="en-US" sz="1000" dirty="0"/>
+              <a:t>4.  Borrar la carpeta Responsa</a:t>
+            </a:r>
+            <a:endParaRPr lang="en-US" sz="1050" dirty="0"/>
           </a:p>
         </p:txBody>
       </p:sp>
@@ -7336,1878 +6301,6 @@
 <file path=ppt/slides/slide15.xml><?xml version="1.0" encoding="utf-8"?>
 <p:sld xmlns:a="http://schemas.openxmlformats.org/drawingml/2006/main" xmlns:r="http://schemas.openxmlformats.org/officeDocument/2006/relationships" xmlns:p="http://schemas.openxmlformats.org/presentationml/2006/main">
   <p:cSld name="Slide 15">
-    <p:bg>
-      <p:bgPr>
-        <a:solidFill>
-          <a:srgbClr val="F4F1EA"/>
-        </a:solidFill>
-      </p:bgPr>
-    </p:bg>
-    <p:spTree>
-      <p:nvGrpSpPr>
-        <p:cNvPr id="1" name=""/>
-        <p:cNvGrpSpPr/>
-        <p:nvPr/>
-      </p:nvGrpSpPr>
-      <p:grpSpPr>
-        <a:xfrm>
-          <a:off x="0" y="0"/>
-          <a:ext cx="0" cy="0"/>
-          <a:chOff x="0" y="0"/>
-          <a:chExt cx="0" cy="0"/>
-        </a:xfrm>
-      </p:grpSpPr>
-      <p:sp>
-        <p:nvSpPr>
-          <p:cNvPr id="2" name="Text 0"/>
-          <p:cNvSpPr/>
-          <p:nvPr/>
-        </p:nvSpPr>
-        <p:spPr>
-          <a:xfrm>
-            <a:off x="777240" y="566928"/>
-            <a:ext cx="10634472" cy="566928"/>
-          </a:xfrm>
-          <a:prstGeom prst="rect">
-            <a:avLst/>
-          </a:prstGeom>
-          <a:noFill/>
-          <a:ln/>
-        </p:spPr>
-        <p:txBody>
-          <a:bodyPr wrap="square" lIns="0" tIns="0" rIns="0" bIns="0" rtlCol="0" anchor="ctr"/>
-          <a:lstStyle/>
-          <a:p>
-            <a:pPr indent="0" marL="0">
-              <a:buNone/>
-            </a:pPr>
-            <a:r>
-              <a:rPr lang="en-US" sz="3200" b="1" dirty="0">
-                <a:solidFill>
-                  <a:srgbClr val="1B2230"/>
-                </a:solidFill>
-                <a:latin typeface="Cambria" pitchFamily="34" charset="0"/>
-                <a:ea typeface="Cambria" pitchFamily="34" charset="-122"/>
-                <a:cs typeface="Cambria" pitchFamily="34" charset="-120"/>
-              </a:rPr>
-              <a:t>Problemas frecuentes</a:t>
-            </a:r>
-            <a:endParaRPr lang="en-US" sz="3200" dirty="0"/>
-          </a:p>
-        </p:txBody>
-      </p:sp>
-      <p:sp>
-        <p:nvSpPr>
-          <p:cNvPr id="3" name="Text 1"/>
-          <p:cNvSpPr/>
-          <p:nvPr/>
-        </p:nvSpPr>
-        <p:spPr>
-          <a:xfrm>
-            <a:off x="777240" y="1152144"/>
-            <a:ext cx="9537192" cy="384048"/>
-          </a:xfrm>
-          <a:prstGeom prst="rect">
-            <a:avLst/>
-          </a:prstGeom>
-          <a:noFill/>
-          <a:ln/>
-        </p:spPr>
-        <p:txBody>
-          <a:bodyPr wrap="square" lIns="0" tIns="0" rIns="0" bIns="0" rtlCol="0" anchor="ctr"/>
-          <a:lstStyle/>
-          <a:p>
-            <a:pPr indent="0" marL="0">
-              <a:buNone/>
-            </a:pPr>
-            <a:r>
-              <a:rPr lang="en-US" sz="1350" i="1" dirty="0">
-                <a:solidFill>
-                  <a:srgbClr val="5A6478"/>
-                </a:solidFill>
-                <a:latin typeface="Calibri" pitchFamily="34" charset="0"/>
-                <a:ea typeface="Calibri" pitchFamily="34" charset="-122"/>
-                <a:cs typeface="Calibri" pitchFamily="34" charset="-120"/>
-              </a:rPr>
-              <a:t>Los cinco que aparecen de verdad, y qué hacer con cada uno</a:t>
-            </a:r>
-            <a:endParaRPr lang="en-US" sz="1350" dirty="0"/>
-          </a:p>
-        </p:txBody>
-      </p:sp>
-      <p:sp>
-        <p:nvSpPr>
-          <p:cNvPr id="4" name="Shape 2"/>
-          <p:cNvSpPr/>
-          <p:nvPr/>
-        </p:nvSpPr>
-        <p:spPr>
-          <a:xfrm>
-            <a:off x="777240" y="1865376"/>
-            <a:ext cx="310896" cy="310896"/>
-          </a:xfrm>
-          <a:prstGeom prst="ellipse">
-            <a:avLst/>
-          </a:prstGeom>
-          <a:solidFill>
-            <a:srgbClr val="A87C4F"/>
-          </a:solidFill>
-          <a:ln/>
-        </p:spPr>
-      </p:sp>
-      <p:sp>
-        <p:nvSpPr>
-          <p:cNvPr id="5" name="Text 3"/>
-          <p:cNvSpPr/>
-          <p:nvPr/>
-        </p:nvSpPr>
-        <p:spPr>
-          <a:xfrm>
-            <a:off x="777240" y="1865376"/>
-            <a:ext cx="310896" cy="310896"/>
-          </a:xfrm>
-          <a:prstGeom prst="rect">
-            <a:avLst/>
-          </a:prstGeom>
-          <a:noFill/>
-          <a:ln/>
-        </p:spPr>
-        <p:txBody>
-          <a:bodyPr wrap="square" lIns="0" tIns="0" rIns="0" bIns="0" rtlCol="0" anchor="ctr"/>
-          <a:lstStyle/>
-          <a:p>
-            <a:pPr algn="ctr" indent="0" marL="0">
-              <a:buNone/>
-            </a:pPr>
-            <a:r>
-              <a:rPr lang="en-US" sz="1200" b="1" dirty="0">
-                <a:solidFill>
-                  <a:srgbClr val="FFFFFF"/>
-                </a:solidFill>
-                <a:latin typeface="Calibri" pitchFamily="34" charset="0"/>
-                <a:ea typeface="Calibri" pitchFamily="34" charset="-122"/>
-                <a:cs typeface="Calibri" pitchFamily="34" charset="-120"/>
-              </a:rPr>
-              <a:t>1</a:t>
-            </a:r>
-            <a:endParaRPr lang="en-US" sz="1200" dirty="0"/>
-          </a:p>
-        </p:txBody>
-      </p:sp>
-      <p:sp>
-        <p:nvSpPr>
-          <p:cNvPr id="6" name="Text 4"/>
-          <p:cNvSpPr/>
-          <p:nvPr/>
-        </p:nvSpPr>
-        <p:spPr>
-          <a:xfrm>
-            <a:off x="1234440" y="1828800"/>
-            <a:ext cx="3657600" cy="274320"/>
-          </a:xfrm>
-          <a:prstGeom prst="rect">
-            <a:avLst/>
-          </a:prstGeom>
-          <a:noFill/>
-          <a:ln/>
-        </p:spPr>
-        <p:txBody>
-          <a:bodyPr wrap="square" lIns="0" tIns="0" rIns="0" bIns="0" rtlCol="0" anchor="t"/>
-          <a:lstStyle/>
-          <a:p>
-            <a:pPr indent="0" marL="0">
-              <a:buNone/>
-            </a:pPr>
-            <a:r>
-              <a:rPr lang="en-US" sz="1200" b="1" dirty="0">
-                <a:solidFill>
-                  <a:srgbClr val="1B2230"/>
-                </a:solidFill>
-                <a:latin typeface="Calibri" pitchFamily="34" charset="0"/>
-                <a:ea typeface="Calibri" pitchFamily="34" charset="-122"/>
-                <a:cs typeface="Calibri" pitchFamily="34" charset="-120"/>
-              </a:rPr>
-              <a:t>Claude responde sin citar fuentes</a:t>
-            </a:r>
-            <a:endParaRPr lang="en-US" sz="1200" dirty="0"/>
-          </a:p>
-        </p:txBody>
-      </p:sp>
-      <p:sp>
-        <p:nvSpPr>
-          <p:cNvPr id="7" name="Text 5"/>
-          <p:cNvSpPr/>
-          <p:nvPr/>
-        </p:nvSpPr>
-        <p:spPr>
-          <a:xfrm>
-            <a:off x="5074920" y="1810512"/>
-            <a:ext cx="6309360" cy="713232"/>
-          </a:xfrm>
-          <a:prstGeom prst="rect">
-            <a:avLst/>
-          </a:prstGeom>
-          <a:noFill/>
-          <a:ln/>
-        </p:spPr>
-        <p:txBody>
-          <a:bodyPr wrap="square" lIns="0" tIns="0" rIns="0" bIns="0" rtlCol="0" anchor="t"/>
-          <a:lstStyle/>
-          <a:p>
-            <a:pPr indent="0" marL="0">
-              <a:lnSpc>
-                <a:spcPct val="105000"/>
-              </a:lnSpc>
-              <a:buNone/>
-            </a:pPr>
-            <a:r>
-              <a:rPr lang="en-US" sz="1050" dirty="0">
-                <a:solidFill>
-                  <a:srgbClr val="5A6478"/>
-                </a:solidFill>
-                <a:latin typeface="Calibri" pitchFamily="34" charset="0"/>
-                <a:ea typeface="Calibri" pitchFamily="34" charset="-122"/>
-                <a:cs typeface="Calibri" pitchFamily="34" charset="-120"/>
-              </a:rPr>
-              <a:t>Casi siempre es que no se reinició Claude por completo. En Windows hay que salir desde el ícono junto al reloj; en macOS con Command + Q. Si ya lo hiciste, vuelve a ejecutar el instalador.</a:t>
-            </a:r>
-            <a:endParaRPr lang="en-US" sz="1050" dirty="0"/>
-          </a:p>
-        </p:txBody>
-      </p:sp>
-      <p:sp>
-        <p:nvSpPr>
-          <p:cNvPr id="8" name="Shape 6"/>
-          <p:cNvSpPr/>
-          <p:nvPr/>
-        </p:nvSpPr>
-        <p:spPr>
-          <a:xfrm>
-            <a:off x="777240" y="2706624"/>
-            <a:ext cx="310896" cy="310896"/>
-          </a:xfrm>
-          <a:prstGeom prst="ellipse">
-            <a:avLst/>
-          </a:prstGeom>
-          <a:solidFill>
-            <a:srgbClr val="A87C4F"/>
-          </a:solidFill>
-          <a:ln/>
-        </p:spPr>
-      </p:sp>
-      <p:sp>
-        <p:nvSpPr>
-          <p:cNvPr id="9" name="Text 7"/>
-          <p:cNvSpPr/>
-          <p:nvPr/>
-        </p:nvSpPr>
-        <p:spPr>
-          <a:xfrm>
-            <a:off x="777240" y="2706624"/>
-            <a:ext cx="310896" cy="310896"/>
-          </a:xfrm>
-          <a:prstGeom prst="rect">
-            <a:avLst/>
-          </a:prstGeom>
-          <a:noFill/>
-          <a:ln/>
-        </p:spPr>
-        <p:txBody>
-          <a:bodyPr wrap="square" lIns="0" tIns="0" rIns="0" bIns="0" rtlCol="0" anchor="ctr"/>
-          <a:lstStyle/>
-          <a:p>
-            <a:pPr algn="ctr" indent="0" marL="0">
-              <a:buNone/>
-            </a:pPr>
-            <a:r>
-              <a:rPr lang="en-US" sz="1200" b="1" dirty="0">
-                <a:solidFill>
-                  <a:srgbClr val="FFFFFF"/>
-                </a:solidFill>
-                <a:latin typeface="Calibri" pitchFamily="34" charset="0"/>
-                <a:ea typeface="Calibri" pitchFamily="34" charset="-122"/>
-                <a:cs typeface="Calibri" pitchFamily="34" charset="-120"/>
-              </a:rPr>
-              <a:t>2</a:t>
-            </a:r>
-            <a:endParaRPr lang="en-US" sz="1200" dirty="0"/>
-          </a:p>
-        </p:txBody>
-      </p:sp>
-      <p:sp>
-        <p:nvSpPr>
-          <p:cNvPr id="10" name="Text 8"/>
-          <p:cNvSpPr/>
-          <p:nvPr/>
-        </p:nvSpPr>
-        <p:spPr>
-          <a:xfrm>
-            <a:off x="1234440" y="2670048"/>
-            <a:ext cx="3657600" cy="274320"/>
-          </a:xfrm>
-          <a:prstGeom prst="rect">
-            <a:avLst/>
-          </a:prstGeom>
-          <a:noFill/>
-          <a:ln/>
-        </p:spPr>
-        <p:txBody>
-          <a:bodyPr wrap="square" lIns="0" tIns="0" rIns="0" bIns="0" rtlCol="0" anchor="t"/>
-          <a:lstStyle/>
-          <a:p>
-            <a:pPr indent="0" marL="0">
-              <a:buNone/>
-            </a:pPr>
-            <a:r>
-              <a:rPr lang="en-US" sz="1200" b="1" dirty="0">
-                <a:solidFill>
-                  <a:srgbClr val="1B2230"/>
-                </a:solidFill>
-                <a:latin typeface="Calibri" pitchFamily="34" charset="0"/>
-                <a:ea typeface="Calibri" pitchFamily="34" charset="-122"/>
-                <a:cs typeface="Calibri" pitchFamily="34" charset="-120"/>
-              </a:rPr>
-              <a:t>«node no se reconoce como un comando»</a:t>
-            </a:r>
-            <a:endParaRPr lang="en-US" sz="1200" dirty="0"/>
-          </a:p>
-        </p:txBody>
-      </p:sp>
-      <p:sp>
-        <p:nvSpPr>
-          <p:cNvPr id="11" name="Text 9"/>
-          <p:cNvSpPr/>
-          <p:nvPr/>
-        </p:nvSpPr>
-        <p:spPr>
-          <a:xfrm>
-            <a:off x="5074920" y="2651760"/>
-            <a:ext cx="6309360" cy="713232"/>
-          </a:xfrm>
-          <a:prstGeom prst="rect">
-            <a:avLst/>
-          </a:prstGeom>
-          <a:noFill/>
-          <a:ln/>
-        </p:spPr>
-        <p:txBody>
-          <a:bodyPr wrap="square" lIns="0" tIns="0" rIns="0" bIns="0" rtlCol="0" anchor="t"/>
-          <a:lstStyle/>
-          <a:p>
-            <a:pPr indent="0" marL="0">
-              <a:lnSpc>
-                <a:spcPct val="105000"/>
-              </a:lnSpc>
-              <a:buNone/>
-            </a:pPr>
-            <a:r>
-              <a:rPr lang="en-US" sz="1050" dirty="0">
-                <a:solidFill>
-                  <a:srgbClr val="5A6478"/>
-                </a:solidFill>
-                <a:latin typeface="Calibri" pitchFamily="34" charset="0"/>
-                <a:ea typeface="Calibri" pitchFamily="34" charset="-122"/>
-                <a:cs typeface="Calibri" pitchFamily="34" charset="-120"/>
-              </a:rPr>
-              <a:t>Node.js no quedó instalado, o la terminal se abrió antes de instalarlo. Ciérrala, ábrela de nuevo y prueba node --version.</a:t>
-            </a:r>
-            <a:endParaRPr lang="en-US" sz="1050" dirty="0"/>
-          </a:p>
-        </p:txBody>
-      </p:sp>
-      <p:sp>
-        <p:nvSpPr>
-          <p:cNvPr id="12" name="Shape 10"/>
-          <p:cNvSpPr/>
-          <p:nvPr/>
-        </p:nvSpPr>
-        <p:spPr>
-          <a:xfrm>
-            <a:off x="777240" y="3547872"/>
-            <a:ext cx="310896" cy="310896"/>
-          </a:xfrm>
-          <a:prstGeom prst="ellipse">
-            <a:avLst/>
-          </a:prstGeom>
-          <a:solidFill>
-            <a:srgbClr val="A87C4F"/>
-          </a:solidFill>
-          <a:ln/>
-        </p:spPr>
-      </p:sp>
-      <p:sp>
-        <p:nvSpPr>
-          <p:cNvPr id="13" name="Text 11"/>
-          <p:cNvSpPr/>
-          <p:nvPr/>
-        </p:nvSpPr>
-        <p:spPr>
-          <a:xfrm>
-            <a:off x="777240" y="3547872"/>
-            <a:ext cx="310896" cy="310896"/>
-          </a:xfrm>
-          <a:prstGeom prst="rect">
-            <a:avLst/>
-          </a:prstGeom>
-          <a:noFill/>
-          <a:ln/>
-        </p:spPr>
-        <p:txBody>
-          <a:bodyPr wrap="square" lIns="0" tIns="0" rIns="0" bIns="0" rtlCol="0" anchor="ctr"/>
-          <a:lstStyle/>
-          <a:p>
-            <a:pPr algn="ctr" indent="0" marL="0">
-              <a:buNone/>
-            </a:pPr>
-            <a:r>
-              <a:rPr lang="en-US" sz="1200" b="1" dirty="0">
-                <a:solidFill>
-                  <a:srgbClr val="FFFFFF"/>
-                </a:solidFill>
-                <a:latin typeface="Calibri" pitchFamily="34" charset="0"/>
-                <a:ea typeface="Calibri" pitchFamily="34" charset="-122"/>
-                <a:cs typeface="Calibri" pitchFamily="34" charset="-120"/>
-              </a:rPr>
-              <a:t>3</a:t>
-            </a:r>
-            <a:endParaRPr lang="en-US" sz="1200" dirty="0"/>
-          </a:p>
-        </p:txBody>
-      </p:sp>
-      <p:sp>
-        <p:nvSpPr>
-          <p:cNvPr id="14" name="Text 12"/>
-          <p:cNvSpPr/>
-          <p:nvPr/>
-        </p:nvSpPr>
-        <p:spPr>
-          <a:xfrm>
-            <a:off x="1234440" y="3511296"/>
-            <a:ext cx="3657600" cy="274320"/>
-          </a:xfrm>
-          <a:prstGeom prst="rect">
-            <a:avLst/>
-          </a:prstGeom>
-          <a:noFill/>
-          <a:ln/>
-        </p:spPr>
-        <p:txBody>
-          <a:bodyPr wrap="square" lIns="0" tIns="0" rIns="0" bIns="0" rtlCol="0" anchor="t"/>
-          <a:lstStyle/>
-          <a:p>
-            <a:pPr indent="0" marL="0">
-              <a:buNone/>
-            </a:pPr>
-            <a:r>
-              <a:rPr lang="en-US" sz="1200" b="1" dirty="0">
-                <a:solidFill>
-                  <a:srgbClr val="1B2230"/>
-                </a:solidFill>
-                <a:latin typeface="Calibri" pitchFamily="34" charset="0"/>
-                <a:ea typeface="Calibri" pitchFamily="34" charset="-122"/>
-                <a:cs typeface="Calibri" pitchFamily="34" charset="-120"/>
-              </a:rPr>
-              <a:t>«Ley Chile alcanzó su límite de servicio»</a:t>
-            </a:r>
-            <a:endParaRPr lang="en-US" sz="1200" dirty="0"/>
-          </a:p>
-        </p:txBody>
-      </p:sp>
-      <p:sp>
-        <p:nvSpPr>
-          <p:cNvPr id="15" name="Text 13"/>
-          <p:cNvSpPr/>
-          <p:nvPr/>
-        </p:nvSpPr>
-        <p:spPr>
-          <a:xfrm>
-            <a:off x="5074920" y="3493008"/>
-            <a:ext cx="6309360" cy="713232"/>
-          </a:xfrm>
-          <a:prstGeom prst="rect">
-            <a:avLst/>
-          </a:prstGeom>
-          <a:noFill/>
-          <a:ln/>
-        </p:spPr>
-        <p:txBody>
-          <a:bodyPr wrap="square" lIns="0" tIns="0" rIns="0" bIns="0" rtlCol="0" anchor="t"/>
-          <a:lstStyle/>
-          <a:p>
-            <a:pPr indent="0" marL="0">
-              <a:lnSpc>
-                <a:spcPct val="105000"/>
-              </a:lnSpc>
-              <a:buNone/>
-            </a:pPr>
-            <a:r>
-              <a:rPr lang="en-US" sz="1050" dirty="0">
-                <a:solidFill>
-                  <a:srgbClr val="5A6478"/>
-                </a:solidFill>
-                <a:latin typeface="Calibri" pitchFamily="34" charset="0"/>
-                <a:ea typeface="Calibri" pitchFamily="34" charset="-122"/>
-                <a:cs typeface="Calibri" pitchFamily="34" charset="-120"/>
-              </a:rPr>
-              <a:t>La Biblioteca del Congreso limita las descargas grandes. Espera un minuto o ejecuta npm run precargar, que retoma sólo lo que falta.</a:t>
-            </a:r>
-            <a:endParaRPr lang="en-US" sz="1050" dirty="0"/>
-          </a:p>
-        </p:txBody>
-      </p:sp>
-      <p:sp>
-        <p:nvSpPr>
-          <p:cNvPr id="16" name="Shape 14"/>
-          <p:cNvSpPr/>
-          <p:nvPr/>
-        </p:nvSpPr>
-        <p:spPr>
-          <a:xfrm>
-            <a:off x="777240" y="4389120"/>
-            <a:ext cx="310896" cy="310896"/>
-          </a:xfrm>
-          <a:prstGeom prst="ellipse">
-            <a:avLst/>
-          </a:prstGeom>
-          <a:solidFill>
-            <a:srgbClr val="A87C4F"/>
-          </a:solidFill>
-          <a:ln/>
-        </p:spPr>
-      </p:sp>
-      <p:sp>
-        <p:nvSpPr>
-          <p:cNvPr id="17" name="Text 15"/>
-          <p:cNvSpPr/>
-          <p:nvPr/>
-        </p:nvSpPr>
-        <p:spPr>
-          <a:xfrm>
-            <a:off x="777240" y="4389120"/>
-            <a:ext cx="310896" cy="310896"/>
-          </a:xfrm>
-          <a:prstGeom prst="rect">
-            <a:avLst/>
-          </a:prstGeom>
-          <a:noFill/>
-          <a:ln/>
-        </p:spPr>
-        <p:txBody>
-          <a:bodyPr wrap="square" lIns="0" tIns="0" rIns="0" bIns="0" rtlCol="0" anchor="ctr"/>
-          <a:lstStyle/>
-          <a:p>
-            <a:pPr algn="ctr" indent="0" marL="0">
-              <a:buNone/>
-            </a:pPr>
-            <a:r>
-              <a:rPr lang="en-US" sz="1200" b="1" dirty="0">
-                <a:solidFill>
-                  <a:srgbClr val="FFFFFF"/>
-                </a:solidFill>
-                <a:latin typeface="Calibri" pitchFamily="34" charset="0"/>
-                <a:ea typeface="Calibri" pitchFamily="34" charset="-122"/>
-                <a:cs typeface="Calibri" pitchFamily="34" charset="-120"/>
-              </a:rPr>
-              <a:t>4</a:t>
-            </a:r>
-            <a:endParaRPr lang="en-US" sz="1200" dirty="0"/>
-          </a:p>
-        </p:txBody>
-      </p:sp>
-      <p:sp>
-        <p:nvSpPr>
-          <p:cNvPr id="18" name="Text 16"/>
-          <p:cNvSpPr/>
-          <p:nvPr/>
-        </p:nvSpPr>
-        <p:spPr>
-          <a:xfrm>
-            <a:off x="1234440" y="4352544"/>
-            <a:ext cx="3657600" cy="274320"/>
-          </a:xfrm>
-          <a:prstGeom prst="rect">
-            <a:avLst/>
-          </a:prstGeom>
-          <a:noFill/>
-          <a:ln/>
-        </p:spPr>
-        <p:txBody>
-          <a:bodyPr wrap="square" lIns="0" tIns="0" rIns="0" bIns="0" rtlCol="0" anchor="t"/>
-          <a:lstStyle/>
-          <a:p>
-            <a:pPr indent="0" marL="0">
-              <a:buNone/>
-            </a:pPr>
-            <a:r>
-              <a:rPr lang="en-US" sz="1200" b="1" dirty="0">
-                <a:solidFill>
-                  <a:srgbClr val="1B2230"/>
-                </a:solidFill>
-                <a:latin typeface="Calibri" pitchFamily="34" charset="0"/>
-                <a:ea typeface="Calibri" pitchFamily="34" charset="-122"/>
-                <a:cs typeface="Calibri" pitchFamily="34" charset="-120"/>
-              </a:rPr>
-              <a:t>Una fuente aparece caída</a:t>
-            </a:r>
-            <a:endParaRPr lang="en-US" sz="1200" dirty="0"/>
-          </a:p>
-        </p:txBody>
-      </p:sp>
-      <p:sp>
-        <p:nvSpPr>
-          <p:cNvPr id="19" name="Text 17"/>
-          <p:cNvSpPr/>
-          <p:nvPr/>
-        </p:nvSpPr>
-        <p:spPr>
-          <a:xfrm>
-            <a:off x="5074920" y="4334256"/>
-            <a:ext cx="6309360" cy="713232"/>
-          </a:xfrm>
-          <a:prstGeom prst="rect">
-            <a:avLst/>
-          </a:prstGeom>
-          <a:noFill/>
-          <a:ln/>
-        </p:spPr>
-        <p:txBody>
-          <a:bodyPr wrap="square" lIns="0" tIns="0" rIns="0" bIns="0" rtlCol="0" anchor="t"/>
-          <a:lstStyle/>
-          <a:p>
-            <a:pPr indent="0" marL="0">
-              <a:lnSpc>
-                <a:spcPct val="105000"/>
-              </a:lnSpc>
-              <a:buNone/>
-            </a:pPr>
-            <a:r>
-              <a:rPr lang="en-US" sz="1050" dirty="0">
-                <a:solidFill>
-                  <a:srgbClr val="5A6478"/>
-                </a:solidFill>
-                <a:latin typeface="Calibri" pitchFamily="34" charset="0"/>
-                <a:ea typeface="Calibri" pitchFamily="34" charset="-122"/>
-                <a:cs typeface="Calibri" pitchFamily="34" charset="-120"/>
-              </a:rPr>
-              <a:t>Son sitios de organismos públicos y a veces se caen. No es la instalación: npm run salud dice cuál está fallando.</a:t>
-            </a:r>
-            <a:endParaRPr lang="en-US" sz="1050" dirty="0"/>
-          </a:p>
-        </p:txBody>
-      </p:sp>
-      <p:sp>
-        <p:nvSpPr>
-          <p:cNvPr id="20" name="Shape 18"/>
-          <p:cNvSpPr/>
-          <p:nvPr/>
-        </p:nvSpPr>
-        <p:spPr>
-          <a:xfrm>
-            <a:off x="777240" y="5230368"/>
-            <a:ext cx="310896" cy="310896"/>
-          </a:xfrm>
-          <a:prstGeom prst="ellipse">
-            <a:avLst/>
-          </a:prstGeom>
-          <a:solidFill>
-            <a:srgbClr val="A87C4F"/>
-          </a:solidFill>
-          <a:ln/>
-        </p:spPr>
-      </p:sp>
-      <p:sp>
-        <p:nvSpPr>
-          <p:cNvPr id="21" name="Text 19"/>
-          <p:cNvSpPr/>
-          <p:nvPr/>
-        </p:nvSpPr>
-        <p:spPr>
-          <a:xfrm>
-            <a:off x="777240" y="5230368"/>
-            <a:ext cx="310896" cy="310896"/>
-          </a:xfrm>
-          <a:prstGeom prst="rect">
-            <a:avLst/>
-          </a:prstGeom>
-          <a:noFill/>
-          <a:ln/>
-        </p:spPr>
-        <p:txBody>
-          <a:bodyPr wrap="square" lIns="0" tIns="0" rIns="0" bIns="0" rtlCol="0" anchor="ctr"/>
-          <a:lstStyle/>
-          <a:p>
-            <a:pPr algn="ctr" indent="0" marL="0">
-              <a:buNone/>
-            </a:pPr>
-            <a:r>
-              <a:rPr lang="en-US" sz="1200" b="1" dirty="0">
-                <a:solidFill>
-                  <a:srgbClr val="FFFFFF"/>
-                </a:solidFill>
-                <a:latin typeface="Calibri" pitchFamily="34" charset="0"/>
-                <a:ea typeface="Calibri" pitchFamily="34" charset="-122"/>
-                <a:cs typeface="Calibri" pitchFamily="34" charset="-120"/>
-              </a:rPr>
-              <a:t>5</a:t>
-            </a:r>
-            <a:endParaRPr lang="en-US" sz="1200" dirty="0"/>
-          </a:p>
-        </p:txBody>
-      </p:sp>
-      <p:sp>
-        <p:nvSpPr>
-          <p:cNvPr id="22" name="Text 20"/>
-          <p:cNvSpPr/>
-          <p:nvPr/>
-        </p:nvSpPr>
-        <p:spPr>
-          <a:xfrm>
-            <a:off x="1234440" y="5193792"/>
-            <a:ext cx="3657600" cy="274320"/>
-          </a:xfrm>
-          <a:prstGeom prst="rect">
-            <a:avLst/>
-          </a:prstGeom>
-          <a:noFill/>
-          <a:ln/>
-        </p:spPr>
-        <p:txBody>
-          <a:bodyPr wrap="square" lIns="0" tIns="0" rIns="0" bIns="0" rtlCol="0" anchor="t"/>
-          <a:lstStyle/>
-          <a:p>
-            <a:pPr indent="0" marL="0">
-              <a:buNone/>
-            </a:pPr>
-            <a:r>
-              <a:rPr lang="en-US" sz="1200" b="1" dirty="0">
-                <a:solidFill>
-                  <a:srgbClr val="1B2230"/>
-                </a:solidFill>
-                <a:latin typeface="Calibri" pitchFamily="34" charset="0"/>
-                <a:ea typeface="Calibri" pitchFamily="34" charset="-122"/>
-                <a:cs typeface="Calibri" pitchFamily="34" charset="-120"/>
-              </a:rPr>
-              <a:t>Cambiaste la carpeta de lugar</a:t>
-            </a:r>
-            <a:endParaRPr lang="en-US" sz="1200" dirty="0"/>
-          </a:p>
-        </p:txBody>
-      </p:sp>
-      <p:sp>
-        <p:nvSpPr>
-          <p:cNvPr id="23" name="Text 21"/>
-          <p:cNvSpPr/>
-          <p:nvPr/>
-        </p:nvSpPr>
-        <p:spPr>
-          <a:xfrm>
-            <a:off x="5074920" y="5175504"/>
-            <a:ext cx="6309360" cy="713232"/>
-          </a:xfrm>
-          <a:prstGeom prst="rect">
-            <a:avLst/>
-          </a:prstGeom>
-          <a:noFill/>
-          <a:ln/>
-        </p:spPr>
-        <p:txBody>
-          <a:bodyPr wrap="square" lIns="0" tIns="0" rIns="0" bIns="0" rtlCol="0" anchor="t"/>
-          <a:lstStyle/>
-          <a:p>
-            <a:pPr indent="0" marL="0">
-              <a:lnSpc>
-                <a:spcPct val="105000"/>
-              </a:lnSpc>
-              <a:buNone/>
-            </a:pPr>
-            <a:r>
-              <a:rPr lang="en-US" sz="1050" dirty="0">
-                <a:solidFill>
-                  <a:srgbClr val="5A6478"/>
-                </a:solidFill>
-                <a:latin typeface="Calibri" pitchFamily="34" charset="0"/>
-                <a:ea typeface="Calibri" pitchFamily="34" charset="-122"/>
-                <a:cs typeface="Calibri" pitchFamily="34" charset="-120"/>
-              </a:rPr>
-              <a:t>Claude sigue apuntando a la ruta antigua. Ejecuta node instalar.mjs desde la ubicación nueva.</a:t>
-            </a:r>
-            <a:endParaRPr lang="en-US" sz="1050" dirty="0"/>
-          </a:p>
-        </p:txBody>
-      </p:sp>
-      <p:sp>
-        <p:nvSpPr>
-          <p:cNvPr id="24" name="Shape 22"/>
-          <p:cNvSpPr/>
-          <p:nvPr/>
-        </p:nvSpPr>
-        <p:spPr>
-          <a:xfrm>
-            <a:off x="777240" y="5943600"/>
-            <a:ext cx="10634472" cy="566928"/>
-          </a:xfrm>
-          <a:prstGeom prst="roundRect">
-            <a:avLst>
-              <a:gd name="adj" fmla="val 8065"/>
-            </a:avLst>
-          </a:prstGeom>
-          <a:solidFill>
-            <a:srgbClr val="FDF7E8"/>
-          </a:solidFill>
-          <a:ln/>
-        </p:spPr>
-      </p:sp>
-      <p:sp>
-        <p:nvSpPr>
-          <p:cNvPr id="25" name="Text 23"/>
-          <p:cNvSpPr/>
-          <p:nvPr/>
-        </p:nvSpPr>
-        <p:spPr>
-          <a:xfrm>
-            <a:off x="1033272" y="5943600"/>
-            <a:ext cx="10149840" cy="566928"/>
-          </a:xfrm>
-          <a:prstGeom prst="rect">
-            <a:avLst/>
-          </a:prstGeom>
-          <a:noFill/>
-          <a:ln/>
-        </p:spPr>
-        <p:txBody>
-          <a:bodyPr wrap="square" lIns="0" tIns="0" rIns="0" bIns="0" rtlCol="0" anchor="ctr"/>
-          <a:lstStyle/>
-          <a:p>
-            <a:pPr indent="0" marL="0">
-              <a:buNone/>
-            </a:pPr>
-            <a:r>
-              <a:rPr lang="en-US" sz="1100" b="1" dirty="0">
-                <a:solidFill>
-                  <a:srgbClr val="6B2C33"/>
-                </a:solidFill>
-                <a:latin typeface="Calibri" pitchFamily="34" charset="0"/>
-                <a:ea typeface="Calibri" pitchFamily="34" charset="-122"/>
-                <a:cs typeface="Calibri" pitchFamily="34" charset="-120"/>
-              </a:rPr>
-              <a:t>Cuando una fuente no responde, Claude debe decirlo y no rellenar el hueco con conocimiento propio. Si alguna vez entrega citas sin haberlas consultado, no las des por buenas.</a:t>
-            </a:r>
-            <a:endParaRPr lang="en-US" sz="1100" dirty="0"/>
-          </a:p>
-        </p:txBody>
-      </p:sp>
-    </p:spTree>
-  </p:cSld>
-  <p:clrMapOvr>
-    <a:masterClrMapping/>
-  </p:clrMapOvr>
-</p:sld>
-</file>
-
-<file path=ppt/slides/slide16.xml><?xml version="1.0" encoding="utf-8"?>
-<p:sld xmlns:a="http://schemas.openxmlformats.org/drawingml/2006/main" xmlns:r="http://schemas.openxmlformats.org/officeDocument/2006/relationships" xmlns:p="http://schemas.openxmlformats.org/presentationml/2006/main">
-  <p:cSld name="Slide 16">
-    <p:bg>
-      <p:bgPr>
-        <a:solidFill>
-          <a:srgbClr val="F4F1EA"/>
-        </a:solidFill>
-      </p:bgPr>
-    </p:bg>
-    <p:spTree>
-      <p:nvGrpSpPr>
-        <p:cNvPr id="1" name=""/>
-        <p:cNvGrpSpPr/>
-        <p:nvPr/>
-      </p:nvGrpSpPr>
-      <p:grpSpPr>
-        <a:xfrm>
-          <a:off x="0" y="0"/>
-          <a:ext cx="0" cy="0"/>
-          <a:chOff x="0" y="0"/>
-          <a:chExt cx="0" cy="0"/>
-        </a:xfrm>
-      </p:grpSpPr>
-      <p:sp>
-        <p:nvSpPr>
-          <p:cNvPr id="2" name="Text 0"/>
-          <p:cNvSpPr/>
-          <p:nvPr/>
-        </p:nvSpPr>
-        <p:spPr>
-          <a:xfrm>
-            <a:off x="777240" y="566928"/>
-            <a:ext cx="10634472" cy="566928"/>
-          </a:xfrm>
-          <a:prstGeom prst="rect">
-            <a:avLst/>
-          </a:prstGeom>
-          <a:noFill/>
-          <a:ln/>
-        </p:spPr>
-        <p:txBody>
-          <a:bodyPr wrap="square" lIns="0" tIns="0" rIns="0" bIns="0" rtlCol="0" anchor="ctr"/>
-          <a:lstStyle/>
-          <a:p>
-            <a:pPr indent="0" marL="0">
-              <a:buNone/>
-            </a:pPr>
-            <a:r>
-              <a:rPr lang="en-US" sz="3200" b="1" dirty="0">
-                <a:solidFill>
-                  <a:srgbClr val="1B2230"/>
-                </a:solidFill>
-                <a:latin typeface="Cambria" pitchFamily="34" charset="0"/>
-                <a:ea typeface="Cambria" pitchFamily="34" charset="-122"/>
-                <a:cs typeface="Cambria" pitchFamily="34" charset="-120"/>
-              </a:rPr>
-              <a:t>Mantención</a:t>
-            </a:r>
-            <a:endParaRPr lang="en-US" sz="3200" dirty="0"/>
-          </a:p>
-        </p:txBody>
-      </p:sp>
-      <p:sp>
-        <p:nvSpPr>
-          <p:cNvPr id="3" name="Text 1"/>
-          <p:cNvSpPr/>
-          <p:nvPr/>
-        </p:nvSpPr>
-        <p:spPr>
-          <a:xfrm>
-            <a:off x="777240" y="1152144"/>
-            <a:ext cx="9537192" cy="384048"/>
-          </a:xfrm>
-          <a:prstGeom prst="rect">
-            <a:avLst/>
-          </a:prstGeom>
-          <a:noFill/>
-          <a:ln/>
-        </p:spPr>
-        <p:txBody>
-          <a:bodyPr wrap="square" lIns="0" tIns="0" rIns="0" bIns="0" rtlCol="0" anchor="ctr"/>
-          <a:lstStyle/>
-          <a:p>
-            <a:pPr indent="0" marL="0">
-              <a:buNone/>
-            </a:pPr>
-            <a:r>
-              <a:rPr lang="en-US" sz="1350" i="1" dirty="0">
-                <a:solidFill>
-                  <a:srgbClr val="5A6478"/>
-                </a:solidFill>
-                <a:latin typeface="Calibri" pitchFamily="34" charset="0"/>
-                <a:ea typeface="Calibri" pitchFamily="34" charset="-122"/>
-                <a:cs typeface="Calibri" pitchFamily="34" charset="-120"/>
-              </a:rPr>
-              <a:t>Cómo actualizar, comprobar que sigue en pie, y desinstalar</a:t>
-            </a:r>
-            <a:endParaRPr lang="en-US" sz="1350" dirty="0"/>
-          </a:p>
-        </p:txBody>
-      </p:sp>
-      <p:sp>
-        <p:nvSpPr>
-          <p:cNvPr id="4" name="Text 2"/>
-          <p:cNvSpPr/>
-          <p:nvPr/>
-        </p:nvSpPr>
-        <p:spPr>
-          <a:xfrm>
-            <a:off x="777240" y="1810512"/>
-            <a:ext cx="5486400" cy="274320"/>
-          </a:xfrm>
-          <a:prstGeom prst="rect">
-            <a:avLst/>
-          </a:prstGeom>
-          <a:noFill/>
-          <a:ln/>
-        </p:spPr>
-        <p:txBody>
-          <a:bodyPr wrap="square" lIns="0" tIns="0" rIns="0" bIns="0" rtlCol="0" anchor="t"/>
-          <a:lstStyle/>
-          <a:p>
-            <a:pPr indent="0" marL="0">
-              <a:buNone/>
-            </a:pPr>
-            <a:r>
-              <a:rPr lang="en-US" sz="1250" b="1" dirty="0">
-                <a:solidFill>
-                  <a:srgbClr val="1B2230"/>
-                </a:solidFill>
-                <a:latin typeface="Calibri" pitchFamily="34" charset="0"/>
-                <a:ea typeface="Calibri" pitchFamily="34" charset="-122"/>
-                <a:cs typeface="Calibri" pitchFamily="34" charset="-120"/>
-              </a:rPr>
-              <a:t>Comandos</a:t>
-            </a:r>
-            <a:endParaRPr lang="en-US" sz="1250" dirty="0"/>
-          </a:p>
-        </p:txBody>
-      </p:sp>
-      <p:sp>
-        <p:nvSpPr>
-          <p:cNvPr id="5" name="Shape 3"/>
-          <p:cNvSpPr/>
-          <p:nvPr/>
-        </p:nvSpPr>
-        <p:spPr>
-          <a:xfrm>
-            <a:off x="777240" y="2176272"/>
-            <a:ext cx="3017520" cy="402336"/>
-          </a:xfrm>
-          <a:prstGeom prst="roundRect">
-            <a:avLst>
-              <a:gd name="adj" fmla="val 11364"/>
-            </a:avLst>
-          </a:prstGeom>
-          <a:solidFill>
-            <a:srgbClr val="1B2230"/>
-          </a:solidFill>
-          <a:ln/>
-        </p:spPr>
-      </p:sp>
-      <p:sp>
-        <p:nvSpPr>
-          <p:cNvPr id="6" name="Text 4"/>
-          <p:cNvSpPr/>
-          <p:nvPr/>
-        </p:nvSpPr>
-        <p:spPr>
-          <a:xfrm>
-            <a:off x="978408" y="2176272"/>
-            <a:ext cx="2615184" cy="402336"/>
-          </a:xfrm>
-          <a:prstGeom prst="rect">
-            <a:avLst/>
-          </a:prstGeom>
-          <a:noFill/>
-          <a:ln/>
-        </p:spPr>
-        <p:txBody>
-          <a:bodyPr wrap="square" lIns="0" tIns="0" rIns="0" bIns="0" rtlCol="0" anchor="ctr"/>
-          <a:lstStyle/>
-          <a:p>
-            <a:pPr indent="0" marL="0">
-              <a:buNone/>
-            </a:pPr>
-            <a:r>
-              <a:rPr lang="en-US" sz="1150" b="1" dirty="0">
-                <a:solidFill>
-                  <a:srgbClr val="C9A574"/>
-                </a:solidFill>
-                <a:latin typeface="Courier New" pitchFamily="34" charset="0"/>
-                <a:ea typeface="Courier New" pitchFamily="34" charset="-122"/>
-                <a:cs typeface="Courier New" pitchFamily="34" charset="-120"/>
-              </a:rPr>
-              <a:t>node instalar.mjs</a:t>
-            </a:r>
-            <a:endParaRPr lang="en-US" sz="1150" dirty="0"/>
-          </a:p>
-        </p:txBody>
-      </p:sp>
-      <p:sp>
-        <p:nvSpPr>
-          <p:cNvPr id="7" name="Text 5"/>
-          <p:cNvSpPr/>
-          <p:nvPr/>
-        </p:nvSpPr>
-        <p:spPr>
-          <a:xfrm>
-            <a:off x="3977640" y="2212848"/>
-            <a:ext cx="2651760" cy="457200"/>
-          </a:xfrm>
-          <a:prstGeom prst="rect">
-            <a:avLst/>
-          </a:prstGeom>
-          <a:noFill/>
-          <a:ln/>
-        </p:spPr>
-        <p:txBody>
-          <a:bodyPr wrap="square" lIns="0" tIns="0" rIns="0" bIns="0" rtlCol="0" anchor="t"/>
-          <a:lstStyle/>
-          <a:p>
-            <a:pPr indent="0" marL="0">
-              <a:lnSpc>
-                <a:spcPct val="100000"/>
-              </a:lnSpc>
-              <a:buNone/>
-            </a:pPr>
-            <a:r>
-              <a:rPr lang="en-US" sz="1000" dirty="0">
-                <a:solidFill>
-                  <a:srgbClr val="5A6478"/>
-                </a:solidFill>
-                <a:latin typeface="Calibri" pitchFamily="34" charset="0"/>
-                <a:ea typeface="Calibri" pitchFamily="34" charset="-122"/>
-                <a:cs typeface="Calibri" pitchFamily="34" charset="-120"/>
-              </a:rPr>
-              <a:t>Instala todo. Se puede repetir sin riesgo</a:t>
-            </a:r>
-            <a:endParaRPr lang="en-US" sz="1000" dirty="0"/>
-          </a:p>
-        </p:txBody>
-      </p:sp>
-      <p:sp>
-        <p:nvSpPr>
-          <p:cNvPr id="8" name="Shape 6"/>
-          <p:cNvSpPr/>
-          <p:nvPr/>
-        </p:nvSpPr>
-        <p:spPr>
-          <a:xfrm>
-            <a:off x="777240" y="2889504"/>
-            <a:ext cx="3017520" cy="402336"/>
-          </a:xfrm>
-          <a:prstGeom prst="roundRect">
-            <a:avLst>
-              <a:gd name="adj" fmla="val 11364"/>
-            </a:avLst>
-          </a:prstGeom>
-          <a:solidFill>
-            <a:srgbClr val="1B2230"/>
-          </a:solidFill>
-          <a:ln/>
-        </p:spPr>
-      </p:sp>
-      <p:sp>
-        <p:nvSpPr>
-          <p:cNvPr id="9" name="Text 7"/>
-          <p:cNvSpPr/>
-          <p:nvPr/>
-        </p:nvSpPr>
-        <p:spPr>
-          <a:xfrm>
-            <a:off x="978408" y="2889504"/>
-            <a:ext cx="2615184" cy="402336"/>
-          </a:xfrm>
-          <a:prstGeom prst="rect">
-            <a:avLst/>
-          </a:prstGeom>
-          <a:noFill/>
-          <a:ln/>
-        </p:spPr>
-        <p:txBody>
-          <a:bodyPr wrap="square" lIns="0" tIns="0" rIns="0" bIns="0" rtlCol="0" anchor="ctr"/>
-          <a:lstStyle/>
-          <a:p>
-            <a:pPr indent="0" marL="0">
-              <a:buNone/>
-            </a:pPr>
-            <a:r>
-              <a:rPr lang="en-US" sz="1150" b="1" dirty="0">
-                <a:solidFill>
-                  <a:srgbClr val="C9A574"/>
-                </a:solidFill>
-                <a:latin typeface="Courier New" pitchFamily="34" charset="0"/>
-                <a:ea typeface="Courier New" pitchFamily="34" charset="-122"/>
-                <a:cs typeface="Courier New" pitchFamily="34" charset="-120"/>
-              </a:rPr>
-              <a:t>npm run salud</a:t>
-            </a:r>
-            <a:endParaRPr lang="en-US" sz="1150" dirty="0"/>
-          </a:p>
-        </p:txBody>
-      </p:sp>
-      <p:sp>
-        <p:nvSpPr>
-          <p:cNvPr id="10" name="Text 8"/>
-          <p:cNvSpPr/>
-          <p:nvPr/>
-        </p:nvSpPr>
-        <p:spPr>
-          <a:xfrm>
-            <a:off x="3977640" y="2926080"/>
-            <a:ext cx="2651760" cy="457200"/>
-          </a:xfrm>
-          <a:prstGeom prst="rect">
-            <a:avLst/>
-          </a:prstGeom>
-          <a:noFill/>
-          <a:ln/>
-        </p:spPr>
-        <p:txBody>
-          <a:bodyPr wrap="square" lIns="0" tIns="0" rIns="0" bIns="0" rtlCol="0" anchor="t"/>
-          <a:lstStyle/>
-          <a:p>
-            <a:pPr indent="0" marL="0">
-              <a:lnSpc>
-                <a:spcPct val="100000"/>
-              </a:lnSpc>
-              <a:buNone/>
-            </a:pPr>
-            <a:r>
-              <a:rPr lang="en-US" sz="1000" dirty="0">
-                <a:solidFill>
-                  <a:srgbClr val="5A6478"/>
-                </a:solidFill>
-                <a:latin typeface="Calibri" pitchFamily="34" charset="0"/>
-                <a:ea typeface="Calibri" pitchFamily="34" charset="-122"/>
-                <a:cs typeface="Calibri" pitchFamily="34" charset="-120"/>
-              </a:rPr>
-              <a:t>Comprueba que las diez fuentes respondan (segundos)</a:t>
-            </a:r>
-            <a:endParaRPr lang="en-US" sz="1000" dirty="0"/>
-          </a:p>
-        </p:txBody>
-      </p:sp>
-      <p:sp>
-        <p:nvSpPr>
-          <p:cNvPr id="11" name="Shape 9"/>
-          <p:cNvSpPr/>
-          <p:nvPr/>
-        </p:nvSpPr>
-        <p:spPr>
-          <a:xfrm>
-            <a:off x="777240" y="3602736"/>
-            <a:ext cx="3017520" cy="402336"/>
-          </a:xfrm>
-          <a:prstGeom prst="roundRect">
-            <a:avLst>
-              <a:gd name="adj" fmla="val 11364"/>
-            </a:avLst>
-          </a:prstGeom>
-          <a:solidFill>
-            <a:srgbClr val="1B2230"/>
-          </a:solidFill>
-          <a:ln/>
-        </p:spPr>
-      </p:sp>
-      <p:sp>
-        <p:nvSpPr>
-          <p:cNvPr id="12" name="Text 10"/>
-          <p:cNvSpPr/>
-          <p:nvPr/>
-        </p:nvSpPr>
-        <p:spPr>
-          <a:xfrm>
-            <a:off x="978408" y="3602736"/>
-            <a:ext cx="2615184" cy="402336"/>
-          </a:xfrm>
-          <a:prstGeom prst="rect">
-            <a:avLst/>
-          </a:prstGeom>
-          <a:noFill/>
-          <a:ln/>
-        </p:spPr>
-        <p:txBody>
-          <a:bodyPr wrap="square" lIns="0" tIns="0" rIns="0" bIns="0" rtlCol="0" anchor="ctr"/>
-          <a:lstStyle/>
-          <a:p>
-            <a:pPr indent="0" marL="0">
-              <a:buNone/>
-            </a:pPr>
-            <a:r>
-              <a:rPr lang="en-US" sz="1150" b="1" dirty="0">
-                <a:solidFill>
-                  <a:srgbClr val="C9A574"/>
-                </a:solidFill>
-                <a:latin typeface="Courier New" pitchFamily="34" charset="0"/>
-                <a:ea typeface="Courier New" pitchFamily="34" charset="-122"/>
-                <a:cs typeface="Courier New" pitchFamily="34" charset="-120"/>
-              </a:rPr>
-              <a:t>npm run prueba</a:t>
-            </a:r>
-            <a:endParaRPr lang="en-US" sz="1150" dirty="0"/>
-          </a:p>
-        </p:txBody>
-      </p:sp>
-      <p:sp>
-        <p:nvSpPr>
-          <p:cNvPr id="13" name="Text 11"/>
-          <p:cNvSpPr/>
-          <p:nvPr/>
-        </p:nvSpPr>
-        <p:spPr>
-          <a:xfrm>
-            <a:off x="3977640" y="3639312"/>
-            <a:ext cx="2651760" cy="457200"/>
-          </a:xfrm>
-          <a:prstGeom prst="rect">
-            <a:avLst/>
-          </a:prstGeom>
-          <a:noFill/>
-          <a:ln/>
-        </p:spPr>
-        <p:txBody>
-          <a:bodyPr wrap="square" lIns="0" tIns="0" rIns="0" bIns="0" rtlCol="0" anchor="t"/>
-          <a:lstStyle/>
-          <a:p>
-            <a:pPr indent="0" marL="0">
-              <a:lnSpc>
-                <a:spcPct val="100000"/>
-              </a:lnSpc>
-              <a:buNone/>
-            </a:pPr>
-            <a:r>
-              <a:rPr lang="en-US" sz="1000" dirty="0">
-                <a:solidFill>
-                  <a:srgbClr val="5A6478"/>
-                </a:solidFill>
-                <a:latin typeface="Calibri" pitchFamily="34" charset="0"/>
-                <a:ea typeface="Calibri" pitchFamily="34" charset="-122"/>
-                <a:cs typeface="Calibri" pitchFamily="34" charset="-120"/>
-              </a:rPr>
-              <a:t>Banco completo, 68 comprobaciones (minutos)</a:t>
-            </a:r>
-            <a:endParaRPr lang="en-US" sz="1000" dirty="0"/>
-          </a:p>
-        </p:txBody>
-      </p:sp>
-      <p:sp>
-        <p:nvSpPr>
-          <p:cNvPr id="14" name="Shape 12"/>
-          <p:cNvSpPr/>
-          <p:nvPr/>
-        </p:nvSpPr>
-        <p:spPr>
-          <a:xfrm>
-            <a:off x="777240" y="4315968"/>
-            <a:ext cx="3017520" cy="402336"/>
-          </a:xfrm>
-          <a:prstGeom prst="roundRect">
-            <a:avLst>
-              <a:gd name="adj" fmla="val 11364"/>
-            </a:avLst>
-          </a:prstGeom>
-          <a:solidFill>
-            <a:srgbClr val="1B2230"/>
-          </a:solidFill>
-          <a:ln/>
-        </p:spPr>
-      </p:sp>
-      <p:sp>
-        <p:nvSpPr>
-          <p:cNvPr id="15" name="Text 13"/>
-          <p:cNvSpPr/>
-          <p:nvPr/>
-        </p:nvSpPr>
-        <p:spPr>
-          <a:xfrm>
-            <a:off x="978408" y="4315968"/>
-            <a:ext cx="2615184" cy="402336"/>
-          </a:xfrm>
-          <a:prstGeom prst="rect">
-            <a:avLst/>
-          </a:prstGeom>
-          <a:noFill/>
-          <a:ln/>
-        </p:spPr>
-        <p:txBody>
-          <a:bodyPr wrap="square" lIns="0" tIns="0" rIns="0" bIns="0" rtlCol="0" anchor="ctr"/>
-          <a:lstStyle/>
-          <a:p>
-            <a:pPr indent="0" marL="0">
-              <a:buNone/>
-            </a:pPr>
-            <a:r>
-              <a:rPr lang="en-US" sz="1150" b="1" dirty="0">
-                <a:solidFill>
-                  <a:srgbClr val="C9A574"/>
-                </a:solidFill>
-                <a:latin typeface="Courier New" pitchFamily="34" charset="0"/>
-                <a:ea typeface="Courier New" pitchFamily="34" charset="-122"/>
-                <a:cs typeface="Courier New" pitchFamily="34" charset="-120"/>
-              </a:rPr>
-              <a:t>npm run auditoria</a:t>
-            </a:r>
-            <a:endParaRPr lang="en-US" sz="1150" dirty="0"/>
-          </a:p>
-        </p:txBody>
-      </p:sp>
-      <p:sp>
-        <p:nvSpPr>
-          <p:cNvPr id="16" name="Text 14"/>
-          <p:cNvSpPr/>
-          <p:nvPr/>
-        </p:nvSpPr>
-        <p:spPr>
-          <a:xfrm>
-            <a:off x="3977640" y="4352544"/>
-            <a:ext cx="2651760" cy="457200"/>
-          </a:xfrm>
-          <a:prstGeom prst="rect">
-            <a:avLst/>
-          </a:prstGeom>
-          <a:noFill/>
-          <a:ln/>
-        </p:spPr>
-        <p:txBody>
-          <a:bodyPr wrap="square" lIns="0" tIns="0" rIns="0" bIns="0" rtlCol="0" anchor="t"/>
-          <a:lstStyle/>
-          <a:p>
-            <a:pPr indent="0" marL="0">
-              <a:lnSpc>
-                <a:spcPct val="100000"/>
-              </a:lnSpc>
-              <a:buNone/>
-            </a:pPr>
-            <a:r>
-              <a:rPr lang="en-US" sz="1000" dirty="0">
-                <a:solidFill>
-                  <a:srgbClr val="5A6478"/>
-                </a:solidFill>
-                <a:latin typeface="Calibri" pitchFamily="34" charset="0"/>
-                <a:ea typeface="Calibri" pitchFamily="34" charset="-122"/>
-                <a:cs typeface="Calibri" pitchFamily="34" charset="-120"/>
-              </a:rPr>
-              <a:t>Verifica que los datos del código sigan siendo ciertos</a:t>
-            </a:r>
-            <a:endParaRPr lang="en-US" sz="1000" dirty="0"/>
-          </a:p>
-        </p:txBody>
-      </p:sp>
-      <p:sp>
-        <p:nvSpPr>
-          <p:cNvPr id="17" name="Shape 15"/>
-          <p:cNvSpPr/>
-          <p:nvPr/>
-        </p:nvSpPr>
-        <p:spPr>
-          <a:xfrm>
-            <a:off x="777240" y="5029200"/>
-            <a:ext cx="3017520" cy="402336"/>
-          </a:xfrm>
-          <a:prstGeom prst="roundRect">
-            <a:avLst>
-              <a:gd name="adj" fmla="val 11364"/>
-            </a:avLst>
-          </a:prstGeom>
-          <a:solidFill>
-            <a:srgbClr val="1B2230"/>
-          </a:solidFill>
-          <a:ln/>
-        </p:spPr>
-      </p:sp>
-      <p:sp>
-        <p:nvSpPr>
-          <p:cNvPr id="18" name="Text 16"/>
-          <p:cNvSpPr/>
-          <p:nvPr/>
-        </p:nvSpPr>
-        <p:spPr>
-          <a:xfrm>
-            <a:off x="978408" y="5029200"/>
-            <a:ext cx="2615184" cy="402336"/>
-          </a:xfrm>
-          <a:prstGeom prst="rect">
-            <a:avLst/>
-          </a:prstGeom>
-          <a:noFill/>
-          <a:ln/>
-        </p:spPr>
-        <p:txBody>
-          <a:bodyPr wrap="square" lIns="0" tIns="0" rIns="0" bIns="0" rtlCol="0" anchor="ctr"/>
-          <a:lstStyle/>
-          <a:p>
-            <a:pPr indent="0" marL="0">
-              <a:buNone/>
-            </a:pPr>
-            <a:r>
-              <a:rPr lang="en-US" sz="1150" b="1" dirty="0">
-                <a:solidFill>
-                  <a:srgbClr val="C9A574"/>
-                </a:solidFill>
-                <a:latin typeface="Courier New" pitchFamily="34" charset="0"/>
-                <a:ea typeface="Courier New" pitchFamily="34" charset="-122"/>
-                <a:cs typeface="Courier New" pitchFamily="34" charset="-120"/>
-              </a:rPr>
-              <a:t>npm run precargar</a:t>
-            </a:r>
-            <a:endParaRPr lang="en-US" sz="1150" dirty="0"/>
-          </a:p>
-        </p:txBody>
-      </p:sp>
-      <p:sp>
-        <p:nvSpPr>
-          <p:cNvPr id="19" name="Text 17"/>
-          <p:cNvSpPr/>
-          <p:nvPr/>
-        </p:nvSpPr>
-        <p:spPr>
-          <a:xfrm>
-            <a:off x="3977640" y="5065776"/>
-            <a:ext cx="2651760" cy="457200"/>
-          </a:xfrm>
-          <a:prstGeom prst="rect">
-            <a:avLst/>
-          </a:prstGeom>
-          <a:noFill/>
-          <a:ln/>
-        </p:spPr>
-        <p:txBody>
-          <a:bodyPr wrap="square" lIns="0" tIns="0" rIns="0" bIns="0" rtlCol="0" anchor="t"/>
-          <a:lstStyle/>
-          <a:p>
-            <a:pPr indent="0" marL="0">
-              <a:lnSpc>
-                <a:spcPct val="100000"/>
-              </a:lnSpc>
-              <a:buNone/>
-            </a:pPr>
-            <a:r>
-              <a:rPr lang="en-US" sz="1000" dirty="0">
-                <a:solidFill>
-                  <a:srgbClr val="5A6478"/>
-                </a:solidFill>
-                <a:latin typeface="Calibri" pitchFamily="34" charset="0"/>
-                <a:ea typeface="Calibri" pitchFamily="34" charset="-122"/>
-                <a:cs typeface="Calibri" pitchFamily="34" charset="-120"/>
-              </a:rPr>
-              <a:t>Reintenta la precarga de códigos y leyes</a:t>
-            </a:r>
-            <a:endParaRPr lang="en-US" sz="1000" dirty="0"/>
-          </a:p>
-        </p:txBody>
-      </p:sp>
-      <p:sp>
-        <p:nvSpPr>
-          <p:cNvPr id="20" name="Shape 18"/>
-          <p:cNvSpPr/>
-          <p:nvPr/>
-        </p:nvSpPr>
-        <p:spPr>
-          <a:xfrm>
-            <a:off x="6675120" y="1810512"/>
-            <a:ext cx="4736592" cy="1920240"/>
-          </a:xfrm>
-          <a:prstGeom prst="roundRect">
-            <a:avLst>
-              <a:gd name="adj" fmla="val 2857"/>
-            </a:avLst>
-          </a:prstGeom>
-          <a:solidFill>
-            <a:srgbClr val="1B2230"/>
-          </a:solidFill>
-          <a:ln/>
-        </p:spPr>
-      </p:sp>
-      <p:sp>
-        <p:nvSpPr>
-          <p:cNvPr id="21" name="Text 19"/>
-          <p:cNvSpPr/>
-          <p:nvPr/>
-        </p:nvSpPr>
-        <p:spPr>
-          <a:xfrm>
-            <a:off x="6995160" y="2048256"/>
-            <a:ext cx="4114800" cy="274320"/>
-          </a:xfrm>
-          <a:prstGeom prst="rect">
-            <a:avLst/>
-          </a:prstGeom>
-          <a:noFill/>
-          <a:ln/>
-        </p:spPr>
-        <p:txBody>
-          <a:bodyPr wrap="square" lIns="0" tIns="0" rIns="0" bIns="0" rtlCol="0" anchor="t"/>
-          <a:lstStyle/>
-          <a:p>
-            <a:pPr indent="0" marL="0">
-              <a:buNone/>
-            </a:pPr>
-            <a:r>
-              <a:rPr lang="en-US" sz="1100" spc="120" kern="0" dirty="0">
-                <a:solidFill>
-                  <a:srgbClr val="C9A574"/>
-                </a:solidFill>
-                <a:latin typeface="Calibri" pitchFamily="34" charset="0"/>
-                <a:ea typeface="Calibri" pitchFamily="34" charset="-122"/>
-                <a:cs typeface="Calibri" pitchFamily="34" charset="-120"/>
-              </a:rPr>
-              <a:t>Por qué existe la auditoría</a:t>
-            </a:r>
-            <a:endParaRPr lang="en-US" sz="1100" dirty="0"/>
-          </a:p>
-        </p:txBody>
-      </p:sp>
-      <p:sp>
-        <p:nvSpPr>
-          <p:cNvPr id="22" name="Text 20"/>
-          <p:cNvSpPr/>
-          <p:nvPr/>
-        </p:nvSpPr>
-        <p:spPr>
-          <a:xfrm>
-            <a:off x="6995160" y="2377440"/>
-            <a:ext cx="4114800" cy="914400"/>
-          </a:xfrm>
-          <a:prstGeom prst="rect">
-            <a:avLst/>
-          </a:prstGeom>
-          <a:noFill/>
-          <a:ln/>
-        </p:spPr>
-        <p:txBody>
-          <a:bodyPr wrap="square" lIns="0" tIns="0" rIns="0" bIns="0" rtlCol="0" anchor="t"/>
-          <a:lstStyle/>
-          <a:p>
-            <a:pPr indent="0" marL="0">
-              <a:lnSpc>
-                <a:spcPct val="115000"/>
-              </a:lnSpc>
-              <a:buNone/>
-            </a:pPr>
-            <a:r>
-              <a:rPr lang="en-US" sz="1100" dirty="0">
-                <a:solidFill>
-                  <a:srgbClr val="FFFFFF"/>
-                </a:solidFill>
-                <a:latin typeface="Calibri" pitchFamily="34" charset="0"/>
-                <a:ea typeface="Calibri" pitchFamily="34" charset="-122"/>
-                <a:cs typeface="Calibri" pitchFamily="34" charset="-120"/>
-              </a:rPr>
-              <a:t>Comprueba contra las fuentes reales que cada identificador de norma apunte a la norma que dice, que los códigos de corte sean los correctos y que cada revista sea la declarada.</a:t>
-            </a:r>
-            <a:endParaRPr lang="en-US" sz="1100" dirty="0"/>
-          </a:p>
-        </p:txBody>
-      </p:sp>
-      <p:sp>
-        <p:nvSpPr>
-          <p:cNvPr id="23" name="Text 21"/>
-          <p:cNvSpPr/>
-          <p:nvPr/>
-        </p:nvSpPr>
-        <p:spPr>
-          <a:xfrm>
-            <a:off x="6995160" y="3255264"/>
-            <a:ext cx="4114800" cy="365760"/>
-          </a:xfrm>
-          <a:prstGeom prst="rect">
-            <a:avLst/>
-          </a:prstGeom>
-          <a:noFill/>
-          <a:ln/>
-        </p:spPr>
-        <p:txBody>
-          <a:bodyPr wrap="square" lIns="0" tIns="0" rIns="0" bIns="0" rtlCol="0" anchor="t"/>
-          <a:lstStyle/>
-          <a:p>
-            <a:pPr indent="0" marL="0">
-              <a:buNone/>
-            </a:pPr>
-            <a:r>
-              <a:rPr lang="en-US" sz="1050" i="1" dirty="0">
-                <a:solidFill>
-                  <a:srgbClr val="C9A574"/>
-                </a:solidFill>
-                <a:latin typeface="Calibri" pitchFamily="34" charset="0"/>
-                <a:ea typeface="Calibri" pitchFamily="34" charset="-122"/>
-                <a:cs typeface="Calibri" pitchFamily="34" charset="-120"/>
-              </a:rPr>
-              <a:t>Es la comprobación que importa cuando se trabaja con citas.</a:t>
-            </a:r>
-            <a:endParaRPr lang="en-US" sz="1050" dirty="0"/>
-          </a:p>
-        </p:txBody>
-      </p:sp>
-      <p:sp>
-        <p:nvSpPr>
-          <p:cNvPr id="24" name="Text 22"/>
-          <p:cNvSpPr/>
-          <p:nvPr/>
-        </p:nvSpPr>
-        <p:spPr>
-          <a:xfrm>
-            <a:off x="6675120" y="3950208"/>
-            <a:ext cx="4572000" cy="274320"/>
-          </a:xfrm>
-          <a:prstGeom prst="rect">
-            <a:avLst/>
-          </a:prstGeom>
-          <a:noFill/>
-          <a:ln/>
-        </p:spPr>
-        <p:txBody>
-          <a:bodyPr wrap="square" lIns="0" tIns="0" rIns="0" bIns="0" rtlCol="0" anchor="t"/>
-          <a:lstStyle/>
-          <a:p>
-            <a:pPr indent="0" marL="0">
-              <a:buNone/>
-            </a:pPr>
-            <a:r>
-              <a:rPr lang="en-US" sz="1250" b="1" dirty="0">
-                <a:solidFill>
-                  <a:srgbClr val="1B2230"/>
-                </a:solidFill>
-                <a:latin typeface="Calibri" pitchFamily="34" charset="0"/>
-                <a:ea typeface="Calibri" pitchFamily="34" charset="-122"/>
-                <a:cs typeface="Calibri" pitchFamily="34" charset="-120"/>
-              </a:rPr>
-              <a:t>Desinstalar</a:t>
-            </a:r>
-            <a:endParaRPr lang="en-US" sz="1250" dirty="0"/>
-          </a:p>
-        </p:txBody>
-      </p:sp>
-      <p:sp>
-        <p:nvSpPr>
-          <p:cNvPr id="25" name="Text 23"/>
-          <p:cNvSpPr/>
-          <p:nvPr/>
-        </p:nvSpPr>
-        <p:spPr>
-          <a:xfrm>
-            <a:off x="6675120" y="4297680"/>
-            <a:ext cx="4736592" cy="365760"/>
-          </a:xfrm>
-          <a:prstGeom prst="rect">
-            <a:avLst/>
-          </a:prstGeom>
-          <a:noFill/>
-          <a:ln/>
-        </p:spPr>
-        <p:txBody>
-          <a:bodyPr wrap="square" lIns="0" tIns="0" rIns="0" bIns="0" rtlCol="0" anchor="t"/>
-          <a:lstStyle/>
-          <a:p>
-            <a:pPr indent="0" marL="0">
-              <a:buNone/>
-            </a:pPr>
-            <a:r>
-              <a:rPr lang="en-US" sz="1050" dirty="0">
-                <a:solidFill>
-                  <a:srgbClr val="5A6478"/>
-                </a:solidFill>
-                <a:latin typeface="Calibri" pitchFamily="34" charset="0"/>
-                <a:ea typeface="Calibri" pitchFamily="34" charset="-122"/>
-                <a:cs typeface="Calibri" pitchFamily="34" charset="-120"/>
-              </a:rPr>
-              <a:t>1.  Borrar la entrada "responsa" del archivo de configuración de Claude Desktop</a:t>
-            </a:r>
-            <a:endParaRPr lang="en-US" sz="1050" dirty="0"/>
-          </a:p>
-        </p:txBody>
-      </p:sp>
-      <p:sp>
-        <p:nvSpPr>
-          <p:cNvPr id="26" name="Text 24"/>
-          <p:cNvSpPr/>
-          <p:nvPr/>
-        </p:nvSpPr>
-        <p:spPr>
-          <a:xfrm>
-            <a:off x="6675120" y="4681728"/>
-            <a:ext cx="4736592" cy="365760"/>
-          </a:xfrm>
-          <a:prstGeom prst="rect">
-            <a:avLst/>
-          </a:prstGeom>
-          <a:noFill/>
-          <a:ln/>
-        </p:spPr>
-        <p:txBody>
-          <a:bodyPr wrap="square" lIns="0" tIns="0" rIns="0" bIns="0" rtlCol="0" anchor="t"/>
-          <a:lstStyle/>
-          <a:p>
-            <a:pPr indent="0" marL="0">
-              <a:buNone/>
-            </a:pPr>
-            <a:r>
-              <a:rPr lang="en-US" sz="1050" dirty="0">
-                <a:solidFill>
-                  <a:srgbClr val="5A6478"/>
-                </a:solidFill>
-                <a:latin typeface="Calibri" pitchFamily="34" charset="0"/>
-                <a:ea typeface="Calibri" pitchFamily="34" charset="-122"/>
-                <a:cs typeface="Calibri" pitchFamily="34" charset="-120"/>
-              </a:rPr>
-              <a:t>2.  Borrar la carpeta ~/.claude/skills/responsa</a:t>
-            </a:r>
-            <a:endParaRPr lang="en-US" sz="1050" dirty="0"/>
-          </a:p>
-        </p:txBody>
-      </p:sp>
-      <p:sp>
-        <p:nvSpPr>
-          <p:cNvPr id="27" name="Text 25"/>
-          <p:cNvSpPr/>
-          <p:nvPr/>
-        </p:nvSpPr>
-        <p:spPr>
-          <a:xfrm>
-            <a:off x="6675120" y="5065776"/>
-            <a:ext cx="4736592" cy="365760"/>
-          </a:xfrm>
-          <a:prstGeom prst="rect">
-            <a:avLst/>
-          </a:prstGeom>
-          <a:noFill/>
-          <a:ln/>
-        </p:spPr>
-        <p:txBody>
-          <a:bodyPr wrap="square" lIns="0" tIns="0" rIns="0" bIns="0" rtlCol="0" anchor="t"/>
-          <a:lstStyle/>
-          <a:p>
-            <a:pPr indent="0" marL="0">
-              <a:buNone/>
-            </a:pPr>
-            <a:r>
-              <a:rPr lang="en-US" sz="1050" dirty="0">
-                <a:solidFill>
-                  <a:srgbClr val="5A6478"/>
-                </a:solidFill>
-                <a:latin typeface="Calibri" pitchFamily="34" charset="0"/>
-                <a:ea typeface="Calibri" pitchFamily="34" charset="-122"/>
-                <a:cs typeface="Calibri" pitchFamily="34" charset="-120"/>
-              </a:rPr>
-              <a:t>3.  Borrar la carpeta ~/.responsa (los datos guardados)</a:t>
-            </a:r>
-            <a:endParaRPr lang="en-US" sz="1050" dirty="0"/>
-          </a:p>
-        </p:txBody>
-      </p:sp>
-      <p:sp>
-        <p:nvSpPr>
-          <p:cNvPr id="28" name="Text 26"/>
-          <p:cNvSpPr/>
-          <p:nvPr/>
-        </p:nvSpPr>
-        <p:spPr>
-          <a:xfrm>
-            <a:off x="6675120" y="5449824"/>
-            <a:ext cx="4736592" cy="365760"/>
-          </a:xfrm>
-          <a:prstGeom prst="rect">
-            <a:avLst/>
-          </a:prstGeom>
-          <a:noFill/>
-          <a:ln/>
-        </p:spPr>
-        <p:txBody>
-          <a:bodyPr wrap="square" lIns="0" tIns="0" rIns="0" bIns="0" rtlCol="0" anchor="t"/>
-          <a:lstStyle/>
-          <a:p>
-            <a:pPr indent="0" marL="0">
-              <a:buNone/>
-            </a:pPr>
-            <a:r>
-              <a:rPr lang="en-US" sz="1050" dirty="0">
-                <a:solidFill>
-                  <a:srgbClr val="5A6478"/>
-                </a:solidFill>
-                <a:latin typeface="Calibri" pitchFamily="34" charset="0"/>
-                <a:ea typeface="Calibri" pitchFamily="34" charset="-122"/>
-                <a:cs typeface="Calibri" pitchFamily="34" charset="-120"/>
-              </a:rPr>
-              <a:t>4.  Borrar la carpeta de Responsa</a:t>
-            </a:r>
-            <a:endParaRPr lang="en-US" sz="1050" dirty="0"/>
-          </a:p>
-        </p:txBody>
-      </p:sp>
-    </p:spTree>
-  </p:cSld>
-  <p:clrMapOvr>
-    <a:masterClrMapping/>
-  </p:clrMapOvr>
-</p:sld>
-</file>
-
-<file path=ppt/slides/slide17.xml><?xml version="1.0" encoding="utf-8"?>
-<p:sld xmlns:a="http://schemas.openxmlformats.org/drawingml/2006/main" xmlns:r="http://schemas.openxmlformats.org/officeDocument/2006/relationships" xmlns:p="http://schemas.openxmlformats.org/presentationml/2006/main">
-  <p:cSld name="Slide 17">
     <p:bg>
       <p:bgPr>
         <a:solidFill>

--- a/docs/Responsa.pptx
+++ b/docs/Responsa.pptx
@@ -2246,7 +2246,7 @@
         </p:nvSpPr>
         <p:spPr>
           <a:xfrm>
-            <a:off x="777240" y="5230368"/>
+            <a:off x="777240" y="5047488"/>
             <a:ext cx="2743200" cy="237744"/>
           </a:xfrm>
           <a:prstGeom prst="rect">
@@ -2285,7 +2285,7 @@
         </p:nvSpPr>
         <p:spPr>
           <a:xfrm>
-            <a:off x="777240" y="5477256"/>
+            <a:off x="777240" y="5294376"/>
             <a:ext cx="5486400" cy="384048"/>
           </a:xfrm>
           <a:prstGeom prst="rect">
@@ -2324,6 +2324,45 @@
         </p:nvSpPr>
         <p:spPr>
           <a:xfrm>
+            <a:off x="777240" y="5760720"/>
+            <a:ext cx="5486400" cy="310896"/>
+          </a:xfrm>
+          <a:prstGeom prst="rect">
+            <a:avLst/>
+          </a:prstGeom>
+          <a:noFill/>
+          <a:ln/>
+        </p:spPr>
+        <p:txBody>
+          <a:bodyPr wrap="square" lIns="0" tIns="0" rIns="0" bIns="0" rtlCol="0" anchor="t"/>
+          <a:lstStyle/>
+          <a:p>
+            <a:pPr indent="0" marL="0">
+              <a:buNone/>
+            </a:pPr>
+            <a:r>
+              <a:rPr lang="en-US" sz="1300" b="1" dirty="0">
+                <a:solidFill>
+                  <a:srgbClr val="C9A574"/>
+                </a:solidFill>
+                <a:latin typeface="Courier New" pitchFamily="34" charset="0"/>
+                <a:ea typeface="Courier New" pitchFamily="34" charset="-122"/>
+                <a:cs typeface="Courier New" pitchFamily="34" charset="-120"/>
+              </a:rPr>
+              <a:t>github.com/djlarrix/Responsa</a:t>
+            </a:r>
+            <a:endParaRPr lang="en-US" sz="1300" dirty="0"/>
+          </a:p>
+        </p:txBody>
+      </p:sp>
+      <p:sp>
+        <p:nvSpPr>
+          <p:cNvPr id="8" name="Text 6"/>
+          <p:cNvSpPr/>
+          <p:nvPr/>
+        </p:nvSpPr>
+        <p:spPr>
+          <a:xfrm>
             <a:off x="5669280" y="658368"/>
             <a:ext cx="5852160" cy="822960"/>
           </a:xfrm>
@@ -2357,7 +2396,7 @@
       </p:sp>
       <p:sp>
         <p:nvSpPr>
-          <p:cNvPr id="8" name="Shape 6"/>
+          <p:cNvPr id="9" name="Shape 7"/>
           <p:cNvSpPr/>
           <p:nvPr/>
         </p:nvSpPr>
@@ -2377,7 +2416,7 @@
       </p:sp>
       <p:sp>
         <p:nvSpPr>
-          <p:cNvPr id="9" name="Text 7"/>
+          <p:cNvPr id="10" name="Text 8"/>
           <p:cNvSpPr/>
           <p:nvPr/>
         </p:nvSpPr>
@@ -3212,7 +3251,7 @@
                 <a:ea typeface="Calibri" pitchFamily="34" charset="-122"/>
                 <a:cs typeface="Calibri" pitchFamily="34" charset="-120"/>
               </a:rPr>
-              <a:t>Abre la terminal, pega la línea que corresponde a tu sistema y pulsa Enter</a:t>
+              <a:t>Abre la terminal, pega la línea que corresponde a tu sistema y pulsa Enter. El texto de este PDF se puede copiar</a:t>
             </a:r>
             <a:endParaRPr lang="en-US" sz="1350" dirty="0"/>
           </a:p>
@@ -3937,7 +3976,7 @@
                 <a:ea typeface="Calibri" pitchFamily="34" charset="-122"/>
                 <a:cs typeface="Calibri" pitchFamily="34" charset="-120"/>
               </a:rPr>
-              <a:t>Se puede ejecutar las veces que haga falta: si ya está instalado, actualiza.</a:t>
+              <a:t>Se puede ejecutar las veces que haga falta: si ya está instalado, actualiza.   ·   Repositorio: github.com/djlarrix/Responsa</a:t>
             </a:r>
             <a:endParaRPr lang="en-US" sz="1050" dirty="0"/>
           </a:p>

--- a/docs/Responsa.pptx
+++ b/docs/Responsa.pptx
@@ -3251,7 +3251,7 @@
                 <a:ea typeface="Calibri" pitchFamily="34" charset="-122"/>
                 <a:cs typeface="Calibri" pitchFamily="34" charset="-120"/>
               </a:rPr>
-              <a:t>Abre la terminal, pega la línea que corresponde a tu sistema y pulsa Enter. El texto de este PDF se puede copiar</a:t>
+              <a:t>Antes de empezar, cierra Claude Desktop por completo. El texto de este PDF se puede copiar</a:t>
             </a:r>
             <a:endParaRPr lang="en-US" sz="1350" dirty="0"/>
           </a:p>
@@ -3265,7 +3265,68 @@
         </p:nvSpPr>
         <p:spPr>
           <a:xfrm>
-            <a:off x="777240" y="1828800"/>
+            <a:off x="777240" y="1664208"/>
+            <a:ext cx="10634472" cy="457200"/>
+          </a:xfrm>
+          <a:prstGeom prst="roundRect">
+            <a:avLst>
+              <a:gd name="adj" fmla="val 10000"/>
+            </a:avLst>
+          </a:prstGeom>
+          <a:solidFill>
+            <a:srgbClr val="FDF7E8"/>
+          </a:solidFill>
+          <a:ln/>
+        </p:spPr>
+      </p:sp>
+      <p:sp>
+        <p:nvSpPr>
+          <p:cNvPr id="5" name="Text 3"/>
+          <p:cNvSpPr/>
+          <p:nvPr/>
+        </p:nvSpPr>
+        <p:spPr>
+          <a:xfrm>
+            <a:off x="1033272" y="1664208"/>
+            <a:ext cx="10149840" cy="457200"/>
+          </a:xfrm>
+          <a:prstGeom prst="rect">
+            <a:avLst/>
+          </a:prstGeom>
+          <a:noFill/>
+          <a:ln/>
+        </p:spPr>
+        <p:txBody>
+          <a:bodyPr wrap="square" lIns="0" tIns="0" rIns="0" bIns="0" rtlCol="0" anchor="ctr"/>
+          <a:lstStyle/>
+          <a:p>
+            <a:pPr indent="0" marL="0">
+              <a:buNone/>
+            </a:pPr>
+            <a:r>
+              <a:rPr lang="en-US" sz="1100" b="1" dirty="0">
+                <a:solidFill>
+                  <a:srgbClr val="6B2C33"/>
+                </a:solidFill>
+                <a:latin typeface="Calibri" pitchFamily="34" charset="0"/>
+                <a:ea typeface="Calibri" pitchFamily="34" charset="-122"/>
+                <a:cs typeface="Calibri" pitchFamily="34" charset="-120"/>
+              </a:rPr>
+              <a:t>Claude Desktop tiene que estar CERRADO. Al cerrarse sobrescribe su configuración, así que si está abierto la instalación no queda.</a:t>
+            </a:r>
+            <a:endParaRPr lang="en-US" sz="1100" dirty="0"/>
+          </a:p>
+        </p:txBody>
+      </p:sp>
+      <p:sp>
+        <p:nvSpPr>
+          <p:cNvPr id="6" name="Shape 4"/>
+          <p:cNvSpPr/>
+          <p:nvPr/>
+        </p:nvSpPr>
+        <p:spPr>
+          <a:xfrm>
+            <a:off x="777240" y="2286000"/>
             <a:ext cx="1051560" cy="274320"/>
           </a:xfrm>
           <a:prstGeom prst="roundRect">
@@ -3281,13 +3342,13 @@
       </p:sp>
       <p:sp>
         <p:nvSpPr>
-          <p:cNvPr id="5" name="Text 3"/>
-          <p:cNvSpPr/>
-          <p:nvPr/>
-        </p:nvSpPr>
-        <p:spPr>
-          <a:xfrm>
-            <a:off x="777240" y="1828800"/>
+          <p:cNvPr id="7" name="Text 5"/>
+          <p:cNvSpPr/>
+          <p:nvPr/>
+        </p:nvSpPr>
+        <p:spPr>
+          <a:xfrm>
+            <a:off x="777240" y="2286000"/>
             <a:ext cx="1051560" cy="274320"/>
           </a:xfrm>
           <a:prstGeom prst="rect">
@@ -3320,13 +3381,13 @@
       </p:sp>
       <p:sp>
         <p:nvSpPr>
-          <p:cNvPr id="6" name="Text 4"/>
-          <p:cNvSpPr/>
-          <p:nvPr/>
-        </p:nvSpPr>
-        <p:spPr>
-          <a:xfrm>
-            <a:off x="1965960" y="1847088"/>
+          <p:cNvPr id="8" name="Text 6"/>
+          <p:cNvSpPr/>
+          <p:nvPr/>
+        </p:nvSpPr>
+        <p:spPr>
+          <a:xfrm>
+            <a:off x="1965960" y="2304288"/>
             <a:ext cx="4572000" cy="256032"/>
           </a:xfrm>
           <a:prstGeom prst="rect">
@@ -3359,18 +3420,18 @@
       </p:sp>
       <p:sp>
         <p:nvSpPr>
-          <p:cNvPr id="7" name="Shape 5"/>
-          <p:cNvSpPr/>
-          <p:nvPr/>
-        </p:nvSpPr>
-        <p:spPr>
-          <a:xfrm>
-            <a:off x="777240" y="2212848"/>
-            <a:ext cx="10634472" cy="603504"/>
+          <p:cNvPr id="9" name="Shape 7"/>
+          <p:cNvSpPr/>
+          <p:nvPr/>
+        </p:nvSpPr>
+        <p:spPr>
+          <a:xfrm>
+            <a:off x="777240" y="2670048"/>
+            <a:ext cx="10634472" cy="566928"/>
           </a:xfrm>
           <a:prstGeom prst="roundRect">
             <a:avLst>
-              <a:gd name="adj" fmla="val 7576"/>
+              <a:gd name="adj" fmla="val 8065"/>
             </a:avLst>
           </a:prstGeom>
           <a:solidFill>
@@ -3381,14 +3442,14 @@
       </p:sp>
       <p:sp>
         <p:nvSpPr>
-          <p:cNvPr id="8" name="Text 6"/>
-          <p:cNvSpPr/>
-          <p:nvPr/>
-        </p:nvSpPr>
-        <p:spPr>
-          <a:xfrm>
-            <a:off x="996696" y="2212848"/>
-            <a:ext cx="10195560" cy="603504"/>
+          <p:cNvPr id="10" name="Text 8"/>
+          <p:cNvSpPr/>
+          <p:nvPr/>
+        </p:nvSpPr>
+        <p:spPr>
+          <a:xfrm>
+            <a:off x="996696" y="2670048"/>
+            <a:ext cx="10195560" cy="566928"/>
           </a:xfrm>
           <a:prstGeom prst="rect">
             <a:avLst/>
@@ -3420,13 +3481,13 @@
       </p:sp>
       <p:sp>
         <p:nvSpPr>
-          <p:cNvPr id="9" name="Shape 7"/>
-          <p:cNvSpPr/>
-          <p:nvPr/>
-        </p:nvSpPr>
-        <p:spPr>
-          <a:xfrm>
-            <a:off x="777240" y="3054096"/>
+          <p:cNvPr id="11" name="Shape 9"/>
+          <p:cNvSpPr/>
+          <p:nvPr/>
+        </p:nvSpPr>
+        <p:spPr>
+          <a:xfrm>
+            <a:off x="777240" y="3474720"/>
             <a:ext cx="1051560" cy="274320"/>
           </a:xfrm>
           <a:prstGeom prst="roundRect">
@@ -3442,13 +3503,13 @@
       </p:sp>
       <p:sp>
         <p:nvSpPr>
-          <p:cNvPr id="10" name="Text 8"/>
-          <p:cNvSpPr/>
-          <p:nvPr/>
-        </p:nvSpPr>
-        <p:spPr>
-          <a:xfrm>
-            <a:off x="777240" y="3054096"/>
+          <p:cNvPr id="12" name="Text 10"/>
+          <p:cNvSpPr/>
+          <p:nvPr/>
+        </p:nvSpPr>
+        <p:spPr>
+          <a:xfrm>
+            <a:off x="777240" y="3474720"/>
             <a:ext cx="1051560" cy="274320"/>
           </a:xfrm>
           <a:prstGeom prst="rect">
@@ -3481,13 +3542,13 @@
       </p:sp>
       <p:sp>
         <p:nvSpPr>
-          <p:cNvPr id="11" name="Text 9"/>
-          <p:cNvSpPr/>
-          <p:nvPr/>
-        </p:nvSpPr>
-        <p:spPr>
-          <a:xfrm>
-            <a:off x="1965960" y="3072384"/>
+          <p:cNvPr id="13" name="Text 11"/>
+          <p:cNvSpPr/>
+          <p:nvPr/>
+        </p:nvSpPr>
+        <p:spPr>
+          <a:xfrm>
+            <a:off x="1965960" y="3493008"/>
             <a:ext cx="4572000" cy="256032"/>
           </a:xfrm>
           <a:prstGeom prst="rect">
@@ -3520,18 +3581,18 @@
       </p:sp>
       <p:sp>
         <p:nvSpPr>
-          <p:cNvPr id="12" name="Shape 10"/>
-          <p:cNvSpPr/>
-          <p:nvPr/>
-        </p:nvSpPr>
-        <p:spPr>
-          <a:xfrm>
-            <a:off x="777240" y="3438144"/>
-            <a:ext cx="10634472" cy="603504"/>
+          <p:cNvPr id="14" name="Shape 12"/>
+          <p:cNvSpPr/>
+          <p:nvPr/>
+        </p:nvSpPr>
+        <p:spPr>
+          <a:xfrm>
+            <a:off x="777240" y="3858768"/>
+            <a:ext cx="10634472" cy="566928"/>
           </a:xfrm>
           <a:prstGeom prst="roundRect">
             <a:avLst>
-              <a:gd name="adj" fmla="val 7576"/>
+              <a:gd name="adj" fmla="val 8065"/>
             </a:avLst>
           </a:prstGeom>
           <a:solidFill>
@@ -3542,14 +3603,14 @@
       </p:sp>
       <p:sp>
         <p:nvSpPr>
-          <p:cNvPr id="13" name="Text 11"/>
-          <p:cNvSpPr/>
-          <p:nvPr/>
-        </p:nvSpPr>
-        <p:spPr>
-          <a:xfrm>
-            <a:off x="996696" y="3438144"/>
-            <a:ext cx="10195560" cy="603504"/>
+          <p:cNvPr id="15" name="Text 13"/>
+          <p:cNvSpPr/>
+          <p:nvPr/>
+        </p:nvSpPr>
+        <p:spPr>
+          <a:xfrm>
+            <a:off x="996696" y="3858768"/>
+            <a:ext cx="10195560" cy="566928"/>
           </a:xfrm>
           <a:prstGeom prst="rect">
             <a:avLst/>
@@ -3581,18 +3642,18 @@
       </p:sp>
       <p:sp>
         <p:nvSpPr>
-          <p:cNvPr id="14" name="Shape 12"/>
-          <p:cNvSpPr/>
-          <p:nvPr/>
-        </p:nvSpPr>
-        <p:spPr>
-          <a:xfrm>
-            <a:off x="777240" y="4315968"/>
-            <a:ext cx="5120640" cy="1783080"/>
+          <p:cNvPr id="16" name="Shape 14"/>
+          <p:cNvSpPr/>
+          <p:nvPr/>
+        </p:nvSpPr>
+        <p:spPr>
+          <a:xfrm>
+            <a:off x="777240" y="4626864"/>
+            <a:ext cx="5120640" cy="1517904"/>
           </a:xfrm>
           <a:prstGeom prst="roundRect">
             <a:avLst>
-              <a:gd name="adj" fmla="val 3077"/>
+              <a:gd name="adj" fmla="val 3614"/>
             </a:avLst>
           </a:prstGeom>
           <a:solidFill>
@@ -3608,13 +3669,13 @@
       </p:sp>
       <p:sp>
         <p:nvSpPr>
-          <p:cNvPr id="15" name="Text 13"/>
-          <p:cNvSpPr/>
-          <p:nvPr/>
-        </p:nvSpPr>
-        <p:spPr>
-          <a:xfrm>
-            <a:off x="1069848" y="4517136"/>
+          <p:cNvPr id="17" name="Text 15"/>
+          <p:cNvSpPr/>
+          <p:nvPr/>
+        </p:nvSpPr>
+        <p:spPr>
+          <a:xfrm>
+            <a:off x="1069848" y="4791456"/>
             <a:ext cx="4480560" cy="256032"/>
           </a:xfrm>
           <a:prstGeom prst="rect">
@@ -3647,13 +3708,13 @@
       </p:sp>
       <p:sp>
         <p:nvSpPr>
-          <p:cNvPr id="16" name="Text 14"/>
-          <p:cNvSpPr/>
-          <p:nvPr/>
-        </p:nvSpPr>
-        <p:spPr>
-          <a:xfrm>
-            <a:off x="1069848" y="4846320"/>
+          <p:cNvPr id="18" name="Text 16"/>
+          <p:cNvSpPr/>
+          <p:nvPr/>
+        </p:nvSpPr>
+        <p:spPr>
+          <a:xfrm>
+            <a:off x="1069848" y="5102352"/>
             <a:ext cx="4572000" cy="274320"/>
           </a:xfrm>
           <a:prstGeom prst="rect">
@@ -3686,13 +3747,13 @@
       </p:sp>
       <p:sp>
         <p:nvSpPr>
-          <p:cNvPr id="17" name="Text 15"/>
-          <p:cNvSpPr/>
-          <p:nvPr/>
-        </p:nvSpPr>
-        <p:spPr>
-          <a:xfrm>
-            <a:off x="1069848" y="5148072"/>
+          <p:cNvPr id="19" name="Text 17"/>
+          <p:cNvSpPr/>
+          <p:nvPr/>
+        </p:nvSpPr>
+        <p:spPr>
+          <a:xfrm>
+            <a:off x="1069848" y="5376672"/>
             <a:ext cx="4572000" cy="274320"/>
           </a:xfrm>
           <a:prstGeom prst="rect">
@@ -3725,13 +3786,13 @@
       </p:sp>
       <p:sp>
         <p:nvSpPr>
-          <p:cNvPr id="18" name="Text 16"/>
-          <p:cNvSpPr/>
-          <p:nvPr/>
-        </p:nvSpPr>
-        <p:spPr>
-          <a:xfrm>
-            <a:off x="1069848" y="5449824"/>
+          <p:cNvPr id="20" name="Text 18"/>
+          <p:cNvSpPr/>
+          <p:nvPr/>
+        </p:nvSpPr>
+        <p:spPr>
+          <a:xfrm>
+            <a:off x="1069848" y="5650992"/>
             <a:ext cx="4572000" cy="274320"/>
           </a:xfrm>
           <a:prstGeom prst="rect">
@@ -3764,13 +3825,13 @@
       </p:sp>
       <p:sp>
         <p:nvSpPr>
-          <p:cNvPr id="19" name="Text 17"/>
-          <p:cNvSpPr/>
-          <p:nvPr/>
-        </p:nvSpPr>
-        <p:spPr>
-          <a:xfrm>
-            <a:off x="1069848" y="5751576"/>
+          <p:cNvPr id="21" name="Text 19"/>
+          <p:cNvSpPr/>
+          <p:nvPr/>
+        </p:nvSpPr>
+        <p:spPr>
+          <a:xfrm>
+            <a:off x="1069848" y="5925312"/>
             <a:ext cx="4572000" cy="274320"/>
           </a:xfrm>
           <a:prstGeom prst="rect">
@@ -3803,18 +3864,18 @@
       </p:sp>
       <p:sp>
         <p:nvSpPr>
-          <p:cNvPr id="20" name="Shape 18"/>
-          <p:cNvSpPr/>
-          <p:nvPr/>
-        </p:nvSpPr>
-        <p:spPr>
-          <a:xfrm>
-            <a:off x="6263640" y="4315968"/>
-            <a:ext cx="5148072" cy="1783080"/>
+          <p:cNvPr id="22" name="Shape 20"/>
+          <p:cNvSpPr/>
+          <p:nvPr/>
+        </p:nvSpPr>
+        <p:spPr>
+          <a:xfrm>
+            <a:off x="6263640" y="4626864"/>
+            <a:ext cx="5148072" cy="1517904"/>
           </a:xfrm>
           <a:prstGeom prst="roundRect">
             <a:avLst>
-              <a:gd name="adj" fmla="val 3077"/>
+              <a:gd name="adj" fmla="val 3614"/>
             </a:avLst>
           </a:prstGeom>
           <a:solidFill>
@@ -3825,13 +3886,13 @@
       </p:sp>
       <p:sp>
         <p:nvSpPr>
-          <p:cNvPr id="21" name="Text 19"/>
-          <p:cNvSpPr/>
-          <p:nvPr/>
-        </p:nvSpPr>
-        <p:spPr>
-          <a:xfrm>
-            <a:off x="6583680" y="4517136"/>
+          <p:cNvPr id="23" name="Text 21"/>
+          <p:cNvSpPr/>
+          <p:nvPr/>
+        </p:nvSpPr>
+        <p:spPr>
+          <a:xfrm>
+            <a:off x="6583680" y="4791456"/>
             <a:ext cx="4480560" cy="256032"/>
           </a:xfrm>
           <a:prstGeom prst="rect">
@@ -3864,13 +3925,13 @@
       </p:sp>
       <p:sp>
         <p:nvSpPr>
-          <p:cNvPr id="22" name="Text 20"/>
-          <p:cNvSpPr/>
-          <p:nvPr/>
-        </p:nvSpPr>
-        <p:spPr>
-          <a:xfrm>
-            <a:off x="6583680" y="4828032"/>
+          <p:cNvPr id="24" name="Text 22"/>
+          <p:cNvSpPr/>
+          <p:nvPr/>
+        </p:nvSpPr>
+        <p:spPr>
+          <a:xfrm>
+            <a:off x="6583680" y="5084064"/>
             <a:ext cx="4480560" cy="822960"/>
           </a:xfrm>
           <a:prstGeom prst="rect">
@@ -3906,13 +3967,13 @@
       </p:sp>
       <p:sp>
         <p:nvSpPr>
-          <p:cNvPr id="23" name="Text 21"/>
-          <p:cNvSpPr/>
-          <p:nvPr/>
-        </p:nvSpPr>
-        <p:spPr>
-          <a:xfrm>
-            <a:off x="6583680" y="5687568"/>
+          <p:cNvPr id="25" name="Text 23"/>
+          <p:cNvSpPr/>
+          <p:nvPr/>
+        </p:nvSpPr>
+        <p:spPr>
+          <a:xfrm>
+            <a:off x="6583680" y="5852160"/>
             <a:ext cx="4480560" cy="292608"/>
           </a:xfrm>
           <a:prstGeom prst="rect">
@@ -3945,13 +4006,13 @@
       </p:sp>
       <p:sp>
         <p:nvSpPr>
-          <p:cNvPr id="24" name="Text 22"/>
-          <p:cNvSpPr/>
-          <p:nvPr/>
-        </p:nvSpPr>
-        <p:spPr>
-          <a:xfrm>
-            <a:off x="777240" y="6236208"/>
+          <p:cNvPr id="26" name="Text 24"/>
+          <p:cNvSpPr/>
+          <p:nvPr/>
+        </p:nvSpPr>
+        <p:spPr>
+          <a:xfrm>
+            <a:off x="777240" y="6327648"/>
             <a:ext cx="10634472" cy="365760"/>
           </a:xfrm>
           <a:prstGeom prst="rect">

--- a/docs/Responsa.pptx
+++ b/docs/Responsa.pptx
@@ -6611,7 +6611,7 @@
                 <a:ea typeface="Cambria" pitchFamily="34" charset="-122"/>
                 <a:cs typeface="Cambria" pitchFamily="34" charset="-120"/>
               </a:rPr>
-              <a:t>20</a:t>
+              <a:t>21</a:t>
             </a:r>
             <a:endParaRPr lang="en-US" sz="5200" dirty="0"/>
           </a:p>
@@ -12568,7 +12568,7 @@
                 <a:ea typeface="Calibri" pitchFamily="34" charset="-122"/>
                 <a:cs typeface="Calibri" pitchFamily="34" charset="-120"/>
               </a:rPr>
-              <a:t>Entre las veinte herramientas disponibles, selecciona las que corresponden. Una consulta puede combinar varias: ubicar la norma, leer su texto, traer los fallos y sumar el criterio administrativo.</a:t>
+              <a:t>Entre las veintiuna herramientas disponibles, selecciona las que corresponden. Una consulta puede combinar varias: ubicar la norma, leer su texto, traer los fallos y sumar el criterio administrativo.</a:t>
             </a:r>
             <a:endParaRPr lang="en-US" sz="1050" dirty="0"/>
           </a:p>
@@ -13764,7 +13764,7 @@
         </p:nvSpPr>
         <p:spPr>
           <a:xfrm>
-            <a:off x="777240" y="1755648"/>
+            <a:off x="777240" y="1645920"/>
             <a:ext cx="6309360" cy="310896"/>
           </a:xfrm>
           <a:prstGeom prst="rect">
@@ -13803,7 +13803,7 @@
         </p:nvSpPr>
         <p:spPr>
           <a:xfrm>
-            <a:off x="7269480" y="1792224"/>
+            <a:off x="7269480" y="1682496"/>
             <a:ext cx="4114800" cy="274320"/>
           </a:xfrm>
           <a:prstGeom prst="rect">
@@ -13842,7 +13842,7 @@
         </p:nvSpPr>
         <p:spPr>
           <a:xfrm>
-            <a:off x="777240" y="2377440"/>
+            <a:off x="777240" y="2130552"/>
             <a:ext cx="6309360" cy="310896"/>
           </a:xfrm>
           <a:prstGeom prst="rect">
@@ -13881,7 +13881,7 @@
         </p:nvSpPr>
         <p:spPr>
           <a:xfrm>
-            <a:off x="7269480" y="2414016"/>
+            <a:off x="7269480" y="2167128"/>
             <a:ext cx="4114800" cy="274320"/>
           </a:xfrm>
           <a:prstGeom prst="rect">
@@ -13920,7 +13920,7 @@
         </p:nvSpPr>
         <p:spPr>
           <a:xfrm>
-            <a:off x="777240" y="2999232"/>
+            <a:off x="777240" y="2615184"/>
             <a:ext cx="6309360" cy="310896"/>
           </a:xfrm>
           <a:prstGeom prst="rect">
@@ -13959,7 +13959,7 @@
         </p:nvSpPr>
         <p:spPr>
           <a:xfrm>
-            <a:off x="7269480" y="3035808"/>
+            <a:off x="7269480" y="2651760"/>
             <a:ext cx="4114800" cy="274320"/>
           </a:xfrm>
           <a:prstGeom prst="rect">
@@ -13998,7 +13998,7 @@
         </p:nvSpPr>
         <p:spPr>
           <a:xfrm>
-            <a:off x="777240" y="3621024"/>
+            <a:off x="777240" y="3099816"/>
             <a:ext cx="6309360" cy="310896"/>
           </a:xfrm>
           <a:prstGeom prst="rect">
@@ -14037,7 +14037,7 @@
         </p:nvSpPr>
         <p:spPr>
           <a:xfrm>
-            <a:off x="7269480" y="3657600"/>
+            <a:off x="7269480" y="3136392"/>
             <a:ext cx="4114800" cy="274320"/>
           </a:xfrm>
           <a:prstGeom prst="rect">
@@ -14076,7 +14076,7 @@
         </p:nvSpPr>
         <p:spPr>
           <a:xfrm>
-            <a:off x="777240" y="4242816"/>
+            <a:off x="777240" y="3584448"/>
             <a:ext cx="6309360" cy="310896"/>
           </a:xfrm>
           <a:prstGeom prst="rect">
@@ -14115,7 +14115,7 @@
         </p:nvSpPr>
         <p:spPr>
           <a:xfrm>
-            <a:off x="7269480" y="4279392"/>
+            <a:off x="7269480" y="3621024"/>
             <a:ext cx="4114800" cy="274320"/>
           </a:xfrm>
           <a:prstGeom prst="rect">
@@ -14154,7 +14154,7 @@
         </p:nvSpPr>
         <p:spPr>
           <a:xfrm>
-            <a:off x="777240" y="4864608"/>
+            <a:off x="777240" y="4069080"/>
             <a:ext cx="6309360" cy="310896"/>
           </a:xfrm>
           <a:prstGeom prst="rect">
@@ -14193,7 +14193,7 @@
         </p:nvSpPr>
         <p:spPr>
           <a:xfrm>
-            <a:off x="7269480" y="4901184"/>
+            <a:off x="7269480" y="4105656"/>
             <a:ext cx="4114800" cy="274320"/>
           </a:xfrm>
           <a:prstGeom prst="rect">
@@ -14232,7 +14232,7 @@
         </p:nvSpPr>
         <p:spPr>
           <a:xfrm>
-            <a:off x="777240" y="5486400"/>
+            <a:off x="777240" y="4553712"/>
             <a:ext cx="6309360" cy="310896"/>
           </a:xfrm>
           <a:prstGeom prst="rect">
@@ -14271,7 +14271,7 @@
         </p:nvSpPr>
         <p:spPr>
           <a:xfrm>
-            <a:off x="7269480" y="5522976"/>
+            <a:off x="7269480" y="4590288"/>
             <a:ext cx="4114800" cy="274320"/>
           </a:xfrm>
           <a:prstGeom prst="rect">
@@ -14305,6 +14305,162 @@
       <p:sp>
         <p:nvSpPr>
           <p:cNvPr id="18" name="Text 16"/>
+          <p:cNvSpPr/>
+          <p:nvPr/>
+        </p:nvSpPr>
+        <p:spPr>
+          <a:xfrm>
+            <a:off x="777240" y="5038344"/>
+            <a:ext cx="6309360" cy="310896"/>
+          </a:xfrm>
+          <a:prstGeom prst="rect">
+            <a:avLst/>
+          </a:prstGeom>
+          <a:noFill/>
+          <a:ln/>
+        </p:spPr>
+        <p:txBody>
+          <a:bodyPr wrap="square" lIns="0" tIns="0" rIns="0" bIns="0" rtlCol="0" anchor="ctr"/>
+          <a:lstStyle/>
+          <a:p>
+            <a:pPr indent="0" marL="0">
+              <a:buNone/>
+            </a:pPr>
+            <a:r>
+              <a:rPr lang="en-US" sz="1450" dirty="0">
+                <a:solidFill>
+                  <a:srgbClr val="FFFFFF"/>
+                </a:solidFill>
+                <a:latin typeface="Cambria" pitchFamily="34" charset="0"/>
+                <a:ea typeface="Cambria" pitchFamily="34" charset="-122"/>
+                <a:cs typeface="Cambria" pitchFamily="34" charset="-120"/>
+              </a:rPr>
+              <a:t>«¿Qué tan posible es que prospere este despido?»</a:t>
+            </a:r>
+            <a:endParaRPr lang="en-US" sz="1450" dirty="0"/>
+          </a:p>
+        </p:txBody>
+      </p:sp>
+      <p:sp>
+        <p:nvSpPr>
+          <p:cNvPr id="19" name="Text 17"/>
+          <p:cNvSpPr/>
+          <p:nvPr/>
+        </p:nvSpPr>
+        <p:spPr>
+          <a:xfrm>
+            <a:off x="7269480" y="5074920"/>
+            <a:ext cx="4114800" cy="274320"/>
+          </a:xfrm>
+          <a:prstGeom prst="rect">
+            <a:avLst/>
+          </a:prstGeom>
+          <a:noFill/>
+          <a:ln/>
+        </p:spPr>
+        <p:txBody>
+          <a:bodyPr wrap="square" lIns="0" tIns="0" rIns="0" bIns="0" rtlCol="0" anchor="ctr"/>
+          <a:lstStyle/>
+          <a:p>
+            <a:pPr indent="0" marL="0">
+              <a:buNone/>
+            </a:pPr>
+            <a:r>
+              <a:rPr lang="en-US" sz="1050" dirty="0">
+                <a:solidFill>
+                  <a:srgbClr val="C9A574"/>
+                </a:solidFill>
+                <a:latin typeface="Calibri" pitchFamily="34" charset="0"/>
+                <a:ea typeface="Calibri" pitchFamily="34" charset="-122"/>
+                <a:cs typeface="Calibri" pitchFamily="34" charset="-120"/>
+              </a:rPr>
+              <a:t>Busca jurisprudencia aunque no se la nombren</a:t>
+            </a:r>
+            <a:endParaRPr lang="en-US" sz="1050" dirty="0"/>
+          </a:p>
+        </p:txBody>
+      </p:sp>
+      <p:sp>
+        <p:nvSpPr>
+          <p:cNvPr id="20" name="Text 18"/>
+          <p:cNvSpPr/>
+          <p:nvPr/>
+        </p:nvSpPr>
+        <p:spPr>
+          <a:xfrm>
+            <a:off x="777240" y="5522976"/>
+            <a:ext cx="6309360" cy="310896"/>
+          </a:xfrm>
+          <a:prstGeom prst="rect">
+            <a:avLst/>
+          </a:prstGeom>
+          <a:noFill/>
+          <a:ln/>
+        </p:spPr>
+        <p:txBody>
+          <a:bodyPr wrap="square" lIns="0" tIns="0" rIns="0" bIns="0" rtlCol="0" anchor="ctr"/>
+          <a:lstStyle/>
+          <a:p>
+            <a:pPr indent="0" marL="0">
+              <a:buNone/>
+            </a:pPr>
+            <a:r>
+              <a:rPr lang="en-US" sz="1450" dirty="0">
+                <a:solidFill>
+                  <a:srgbClr val="FFFFFF"/>
+                </a:solidFill>
+                <a:latin typeface="Cambria" pitchFamily="34" charset="0"/>
+                <a:ea typeface="Cambria" pitchFamily="34" charset="-122"/>
+                <a:cs typeface="Cambria" pitchFamily="34" charset="-120"/>
+              </a:rPr>
+              <a:t>«Déjame los documentos en una carpeta»</a:t>
+            </a:r>
+            <a:endParaRPr lang="en-US" sz="1450" dirty="0"/>
+          </a:p>
+        </p:txBody>
+      </p:sp>
+      <p:sp>
+        <p:nvSpPr>
+          <p:cNvPr id="21" name="Text 19"/>
+          <p:cNvSpPr/>
+          <p:nvPr/>
+        </p:nvSpPr>
+        <p:spPr>
+          <a:xfrm>
+            <a:off x="7269480" y="5559552"/>
+            <a:ext cx="4114800" cy="274320"/>
+          </a:xfrm>
+          <a:prstGeom prst="rect">
+            <a:avLst/>
+          </a:prstGeom>
+          <a:noFill/>
+          <a:ln/>
+        </p:spPr>
+        <p:txBody>
+          <a:bodyPr wrap="square" lIns="0" tIns="0" rIns="0" bIns="0" rtlCol="0" anchor="ctr"/>
+          <a:lstStyle/>
+          <a:p>
+            <a:pPr indent="0" marL="0">
+              <a:buNone/>
+            </a:pPr>
+            <a:r>
+              <a:rPr lang="en-US" sz="1050" dirty="0">
+                <a:solidFill>
+                  <a:srgbClr val="C9A574"/>
+                </a:solidFill>
+                <a:latin typeface="Calibri" pitchFamily="34" charset="0"/>
+                <a:ea typeface="Calibri" pitchFamily="34" charset="-122"/>
+                <a:cs typeface="Calibri" pitchFamily="34" charset="-120"/>
+              </a:rPr>
+              <a:t>PDF y Word de lo citado, en Descargas, con índice</a:t>
+            </a:r>
+            <a:endParaRPr lang="en-US" sz="1050" dirty="0"/>
+          </a:p>
+        </p:txBody>
+      </p:sp>
+      <p:sp>
+        <p:nvSpPr>
+          <p:cNvPr id="22" name="Text 20"/>
           <p:cNvSpPr/>
           <p:nvPr/>
         </p:nvSpPr>
